--- a/ICCPROFILE_0923.pptx
+++ b/ICCPROFILE_0923.pptx
@@ -5,7 +5,7 @@
     <p:sldMasterId id="2147483658" r:id="rId1"/>
   </p:sldMasterIdLst>
   <p:notesMasterIdLst>
-    <p:notesMasterId r:id="rId18"/>
+    <p:notesMasterId r:id="rId17"/>
   </p:notesMasterIdLst>
   <p:sldIdLst>
     <p:sldId id="277" r:id="rId2"/>
@@ -18,12 +18,11 @@
     <p:sldId id="2008" r:id="rId9"/>
     <p:sldId id="2013" r:id="rId10"/>
     <p:sldId id="2010" r:id="rId11"/>
-    <p:sldId id="2015" r:id="rId12"/>
-    <p:sldId id="2014" r:id="rId13"/>
-    <p:sldId id="286" r:id="rId14"/>
-    <p:sldId id="2002" r:id="rId15"/>
-    <p:sldId id="2005" r:id="rId16"/>
-    <p:sldId id="2006" r:id="rId17"/>
+    <p:sldId id="2014" r:id="rId12"/>
+    <p:sldId id="286" r:id="rId13"/>
+    <p:sldId id="2002" r:id="rId14"/>
+    <p:sldId id="2005" r:id="rId15"/>
+    <p:sldId id="2006" r:id="rId16"/>
   </p:sldIdLst>
   <p:sldSz cx="9906000" cy="6858000" type="A4"/>
   <p:notesSz cx="7315200" cy="9601200"/>
@@ -287,7 +286,6 @@
           <p14:sldIdLst>
             <p14:sldId id="2013"/>
             <p14:sldId id="2010"/>
-            <p14:sldId id="2015"/>
           </p14:sldIdLst>
         </p14:section>
         <p14:section name="未來方向" id="{5971402B-6926-431D-89B8-CB51A2DAAEFC}">
@@ -1919,305 +1917,6 @@
         <p:cNvPr id="1" name="">
           <a:extLst>
             <a:ext uri="{FF2B5EF4-FFF2-40B4-BE49-F238E27FC236}">
-              <a16:creationId xmlns:a16="http://schemas.microsoft.com/office/drawing/2014/main" id="{93F86EDD-7E59-3AB8-C679-CC30FFE7F48E}"/>
-            </a:ext>
-          </a:extLst>
-        </p:cNvPr>
-        <p:cNvGrpSpPr/>
-        <p:nvPr/>
-      </p:nvGrpSpPr>
-      <p:grpSpPr>
-        <a:xfrm>
-          <a:off x="0" y="0"/>
-          <a:ext cx="0" cy="0"/>
-          <a:chOff x="0" y="0"/>
-          <a:chExt cx="0" cy="0"/>
-        </a:xfrm>
-      </p:grpSpPr>
-      <p:sp>
-        <p:nvSpPr>
-          <p:cNvPr id="2" name="投影片影像版面配置區 1">
-            <a:extLst>
-              <a:ext uri="{FF2B5EF4-FFF2-40B4-BE49-F238E27FC236}">
-                <a16:creationId xmlns:a16="http://schemas.microsoft.com/office/drawing/2014/main" id="{9A434257-F0DE-AEE9-04C9-D329750FF22A}"/>
-              </a:ext>
-            </a:extLst>
-          </p:cNvPr>
-          <p:cNvSpPr>
-            <a:spLocks noGrp="1" noRot="1" noChangeAspect="1"/>
-          </p:cNvSpPr>
-          <p:nvPr>
-            <p:ph type="sldImg"/>
-          </p:nvPr>
-        </p:nvSpPr>
-        <p:spPr/>
-      </p:sp>
-      <p:sp>
-        <p:nvSpPr>
-          <p:cNvPr id="3" name="備忘稿版面配置區 2">
-            <a:extLst>
-              <a:ext uri="{FF2B5EF4-FFF2-40B4-BE49-F238E27FC236}">
-                <a16:creationId xmlns:a16="http://schemas.microsoft.com/office/drawing/2014/main" id="{F4FC723B-B57F-C33D-0C03-279471C75A88}"/>
-              </a:ext>
-            </a:extLst>
-          </p:cNvPr>
-          <p:cNvSpPr>
-            <a:spLocks noGrp="1"/>
-          </p:cNvSpPr>
-          <p:nvPr>
-            <p:ph type="body" idx="1"/>
-          </p:nvPr>
-        </p:nvSpPr>
-        <p:spPr/>
-        <p:txBody>
-          <a:bodyPr/>
-          <a:lstStyle/>
-          <a:p>
-            <a:pPr marL="171450" indent="-171450">
-              <a:buFont typeface="Arial" panose="020B0604020202020204" pitchFamily="34" charset="0"/>
-              <a:buChar char="•"/>
-            </a:pPr>
-            <a:r>
-              <a:rPr lang="en-US" altLang="zh-TW" dirty="0"/>
-              <a:t>Windows </a:t>
-            </a:r>
-            <a:r>
-              <a:rPr lang="zh-TW" altLang="en-US" dirty="0"/>
-              <a:t>目前存在兩條不同的顯示校正路徑：傳統的 </a:t>
-            </a:r>
-            <a:r>
-              <a:rPr lang="en-US" altLang="zh-TW" b="1" dirty="0"/>
-              <a:t>Gamma Ramp Pipeline</a:t>
-            </a:r>
-            <a:r>
-              <a:rPr lang="en-US" altLang="zh-TW" dirty="0"/>
-              <a:t> </a:t>
-            </a:r>
-            <a:r>
-              <a:rPr lang="zh-TW" altLang="en-US" dirty="0"/>
-              <a:t>與 </a:t>
-            </a:r>
-            <a:r>
-              <a:rPr lang="en-US" altLang="zh-TW" dirty="0"/>
-              <a:t>Windows 10 2004 </a:t>
-            </a:r>
-            <a:r>
-              <a:rPr lang="zh-TW" altLang="en-US" dirty="0"/>
-              <a:t>引入的 </a:t>
-            </a:r>
-            <a:r>
-              <a:rPr lang="en-US" altLang="zh-TW" b="1" dirty="0"/>
-              <a:t>GPU Color Transform </a:t>
-            </a:r>
-            <a:r>
-              <a:rPr lang="en-US" altLang="zh-TW" b="1" dirty="0" err="1"/>
-              <a:t>Pipelin</a:t>
-            </a:r>
-            <a:endParaRPr lang="en-US" altLang="zh-TW" b="1" dirty="0"/>
-          </a:p>
-          <a:p>
-            <a:pPr marL="171450" indent="-171450">
-              <a:buFont typeface="Arial" panose="020B0604020202020204" pitchFamily="34" charset="0"/>
-              <a:buChar char="•"/>
-            </a:pPr>
-            <a:r>
-              <a:rPr lang="en-US" altLang="zh-TW" dirty="0"/>
-              <a:t>VCGT/MS00 </a:t>
-            </a:r>
-            <a:r>
-              <a:rPr lang="zh-TW" altLang="en-US" dirty="0"/>
-              <a:t>是傳統 </a:t>
-            </a:r>
-            <a:r>
-              <a:rPr lang="en-US" altLang="zh-TW" dirty="0"/>
-              <a:t>Gamma Ramp Pipeline </a:t>
-            </a:r>
-            <a:r>
-              <a:rPr lang="zh-TW" altLang="en-US" dirty="0"/>
-              <a:t>的校正資料，</a:t>
-            </a:r>
-            <a:r>
-              <a:rPr lang="en-US" altLang="zh-TW" dirty="0"/>
-              <a:t>Windows </a:t>
-            </a:r>
-            <a:r>
-              <a:rPr lang="zh-TW" altLang="en-US" dirty="0"/>
-              <a:t>載入後套用至 </a:t>
-            </a:r>
-            <a:r>
-              <a:rPr lang="en-US" altLang="zh-TW" dirty="0"/>
-              <a:t>Gamma Ramp</a:t>
-            </a:r>
-            <a:r>
-              <a:rPr lang="zh-TW" altLang="en-US" dirty="0"/>
-              <a:t>，對顯示進行 </a:t>
-            </a:r>
-            <a:r>
-              <a:rPr lang="en-US" altLang="zh-TW" dirty="0"/>
-              <a:t>RGB </a:t>
-            </a:r>
-            <a:r>
-              <a:rPr lang="zh-TW" altLang="en-US" dirty="0"/>
-              <a:t>通道的 </a:t>
-            </a:r>
-            <a:r>
-              <a:rPr lang="en-US" altLang="zh-TW" dirty="0"/>
-              <a:t>1D LUT </a:t>
-            </a:r>
-            <a:r>
-              <a:rPr lang="zh-TW" altLang="en-US" dirty="0"/>
-              <a:t>調整</a:t>
-            </a:r>
-            <a:endParaRPr lang="en-US" altLang="zh-TW" dirty="0"/>
-          </a:p>
-          <a:p>
-            <a:pPr marL="171450" indent="-171450">
-              <a:buFont typeface="Arial" panose="020B0604020202020204" pitchFamily="34" charset="0"/>
-              <a:buChar char="•"/>
-            </a:pPr>
-            <a:r>
-              <a:rPr lang="en-US" altLang="zh-TW" dirty="0"/>
-              <a:t>MHC2 </a:t>
-            </a:r>
-            <a:r>
-              <a:rPr lang="zh-TW" altLang="en-US" dirty="0"/>
-              <a:t>則提供兩類校正：首先將來源 </a:t>
-            </a:r>
-            <a:r>
-              <a:rPr lang="en-US" altLang="zh-TW" dirty="0"/>
-              <a:t>RGB </a:t>
-            </a:r>
-            <a:r>
-              <a:rPr lang="zh-TW" altLang="en-US" dirty="0"/>
-              <a:t>轉換至 </a:t>
-            </a:r>
-            <a:r>
-              <a:rPr lang="en-US" altLang="zh-TW" dirty="0"/>
-              <a:t>CIEXYZ</a:t>
-            </a:r>
-            <a:r>
-              <a:rPr lang="zh-TW" altLang="en-US" dirty="0"/>
-              <a:t>，在 </a:t>
-            </a:r>
-            <a:r>
-              <a:rPr lang="en-US" altLang="zh-TW" dirty="0"/>
-              <a:t>CIEXYZ </a:t>
-            </a:r>
-            <a:r>
-              <a:rPr lang="zh-TW" altLang="en-US" dirty="0"/>
-              <a:t>空間中使用 </a:t>
-            </a:r>
-            <a:r>
-              <a:rPr lang="en-US" altLang="zh-TW" dirty="0"/>
-              <a:t>3×3 adjustment </a:t>
-            </a:r>
-            <a:r>
-              <a:rPr lang="zh-TW" altLang="en-US" dirty="0"/>
-              <a:t>矩陣進行校正；接著在 </a:t>
-            </a:r>
-            <a:r>
-              <a:rPr lang="en-US" altLang="zh-TW" dirty="0"/>
-              <a:t>Target </a:t>
-            </a:r>
-            <a:r>
-              <a:rPr lang="en-US" altLang="zh-TW" dirty="0" err="1"/>
-              <a:t>ReGamma</a:t>
-            </a:r>
-            <a:r>
-              <a:rPr lang="en-US" altLang="zh-TW" dirty="0"/>
-              <a:t> </a:t>
-            </a:r>
-            <a:r>
-              <a:rPr lang="zh-TW" altLang="en-US" dirty="0"/>
-              <a:t>階段使用 </a:t>
-            </a:r>
-            <a:r>
-              <a:rPr lang="en-US" altLang="zh-TW" dirty="0"/>
-              <a:t>1D LUT </a:t>
-            </a:r>
-            <a:r>
-              <a:rPr lang="zh-TW" altLang="en-US" dirty="0"/>
-              <a:t>進行調整。</a:t>
-            </a:r>
-            <a:endParaRPr lang="en-US" altLang="zh-TW" dirty="0"/>
-          </a:p>
-        </p:txBody>
-      </p:sp>
-      <p:sp>
-        <p:nvSpPr>
-          <p:cNvPr id="4" name="投影片編號版面配置區 3">
-            <a:extLst>
-              <a:ext uri="{FF2B5EF4-FFF2-40B4-BE49-F238E27FC236}">
-                <a16:creationId xmlns:a16="http://schemas.microsoft.com/office/drawing/2014/main" id="{8AE0FC2C-7562-289F-30A1-6202FD9A3C36}"/>
-              </a:ext>
-            </a:extLst>
-          </p:cNvPr>
-          <p:cNvSpPr>
-            <a:spLocks noGrp="1"/>
-          </p:cNvSpPr>
-          <p:nvPr>
-            <p:ph type="sldNum" idx="12"/>
-          </p:nvPr>
-        </p:nvSpPr>
-        <p:spPr/>
-        <p:txBody>
-          <a:bodyPr/>
-          <a:lstStyle/>
-          <a:p>
-            <a:pPr marL="0" marR="0" lvl="0" indent="0" algn="r" rtl="0">
-              <a:spcBef>
-                <a:spcPts val="0"/>
-              </a:spcBef>
-              <a:spcAft>
-                <a:spcPts val="0"/>
-              </a:spcAft>
-              <a:buNone/>
-            </a:pPr>
-            <a:fld id="{00000000-1234-1234-1234-123412341234}" type="slidenum">
-              <a:rPr lang="en-US" sz="2000" b="0" i="0" u="none" strike="noStrike" cap="none" smtClean="0">
-                <a:solidFill>
-                  <a:schemeClr val="dk1"/>
-                </a:solidFill>
-                <a:latin typeface="Times New Roman"/>
-                <a:ea typeface="Times New Roman"/>
-                <a:cs typeface="Times New Roman"/>
-                <a:sym typeface="Times New Roman"/>
-              </a:rPr>
-              <a:t>11</a:t>
-            </a:fld>
-            <a:endParaRPr lang="en-US" sz="2000" b="0" i="0" u="none" strike="noStrike" cap="none" dirty="0">
-              <a:solidFill>
-                <a:schemeClr val="dk1"/>
-              </a:solidFill>
-              <a:latin typeface="Times New Roman"/>
-              <a:ea typeface="Times New Roman"/>
-              <a:cs typeface="Times New Roman"/>
-              <a:sym typeface="Times New Roman"/>
-            </a:endParaRPr>
-          </a:p>
-        </p:txBody>
-      </p:sp>
-    </p:spTree>
-    <p:extLst>
-      <p:ext uri="{BB962C8B-B14F-4D97-AF65-F5344CB8AC3E}">
-        <p14:creationId xmlns:p14="http://schemas.microsoft.com/office/powerpoint/2010/main" val="3853299142"/>
-      </p:ext>
-    </p:extLst>
-  </p:cSld>
-  <p:clrMapOvr>
-    <a:masterClrMapping/>
-  </p:clrMapOvr>
-</p:notes>
-</file>
-
-<file path=ppt/notesSlides/notesSlide12.xml><?xml version="1.0" encoding="utf-8"?>
-<p:notes xmlns:a="http://schemas.openxmlformats.org/drawingml/2006/main" xmlns:r="http://schemas.openxmlformats.org/officeDocument/2006/relationships" xmlns:p="http://schemas.openxmlformats.org/presentationml/2006/main">
-  <p:cSld>
-    <p:spTree>
-      <p:nvGrpSpPr>
-        <p:cNvPr id="1" name="">
-          <a:extLst>
-            <a:ext uri="{FF2B5EF4-FFF2-40B4-BE49-F238E27FC236}">
               <a16:creationId xmlns:a16="http://schemas.microsoft.com/office/drawing/2014/main" id="{BEAAB6D5-993E-26F5-9C44-C5D525DA7DDC}"/>
             </a:ext>
           </a:extLst>
@@ -2335,7 +2034,7 @@
                 <a:cs typeface="Times New Roman"/>
                 <a:sym typeface="Times New Roman"/>
               </a:rPr>
-              <a:t>12</a:t>
+              <a:t>11</a:t>
             </a:fld>
             <a:endParaRPr lang="en-US" sz="2000" b="0" i="0" u="none" strike="noStrike" cap="none" dirty="0">
               <a:solidFill>
@@ -2362,7 +2061,7 @@
 </p:notes>
 </file>
 
-<file path=ppt/notesSlides/notesSlide13.xml><?xml version="1.0" encoding="utf-8"?>
+<file path=ppt/notesSlides/notesSlide12.xml><?xml version="1.0" encoding="utf-8"?>
 <p:notes xmlns:a="http://schemas.openxmlformats.org/drawingml/2006/main" xmlns:r="http://schemas.openxmlformats.org/officeDocument/2006/relationships" xmlns:p="http://schemas.openxmlformats.org/presentationml/2006/main">
   <p:cSld>
     <p:spTree>
@@ -2430,7 +2129,7 @@
           <a:p>
             <a:fld id="{F5753A29-9D77-4C26-8BEC-432FE5D4B0A4}" type="slidenum">
               <a:rPr lang="en-US" altLang="zh-TW" smtClean="0"/>
-              <a:t>13</a:t>
+              <a:t>12</a:t>
             </a:fld>
             <a:endParaRPr lang="en-US" altLang="zh-TW" dirty="0"/>
           </a:p>
@@ -2444,7 +2143,7 @@
 </p:notes>
 </file>
 
-<file path=ppt/notesSlides/notesSlide14.xml><?xml version="1.0" encoding="utf-8"?>
+<file path=ppt/notesSlides/notesSlide13.xml><?xml version="1.0" encoding="utf-8"?>
 <p:notes xmlns:a="http://schemas.openxmlformats.org/drawingml/2006/main" xmlns:r="http://schemas.openxmlformats.org/officeDocument/2006/relationships" xmlns:p="http://schemas.openxmlformats.org/presentationml/2006/main">
   <p:cSld>
     <p:spTree>
@@ -2655,7 +2354,7 @@
                 <a:cs typeface="Times New Roman"/>
                 <a:sym typeface="Times New Roman"/>
               </a:rPr>
-              <a:t>14</a:t>
+              <a:t>13</a:t>
             </a:fld>
             <a:endParaRPr lang="en-US" sz="2000" b="0" i="0" u="none" strike="noStrike" cap="none" dirty="0">
               <a:solidFill>
@@ -2682,7 +2381,7 @@
 </p:notes>
 </file>
 
-<file path=ppt/notesSlides/notesSlide15.xml><?xml version="1.0" encoding="utf-8"?>
+<file path=ppt/notesSlides/notesSlide14.xml><?xml version="1.0" encoding="utf-8"?>
 <p:notes xmlns:a="http://schemas.openxmlformats.org/drawingml/2006/main" xmlns:r="http://schemas.openxmlformats.org/officeDocument/2006/relationships" xmlns:p="http://schemas.openxmlformats.org/presentationml/2006/main">
   <p:cSld>
     <p:spTree>
@@ -2828,7 +2527,7 @@
                 <a:cs typeface="Times New Roman"/>
                 <a:sym typeface="Times New Roman"/>
               </a:rPr>
-              <a:t>15</a:t>
+              <a:t>14</a:t>
             </a:fld>
             <a:endParaRPr lang="en-US" sz="2000" b="0" i="0" u="none" strike="noStrike" cap="none" dirty="0">
               <a:solidFill>
@@ -2855,7 +2554,7 @@
 </p:notes>
 </file>
 
-<file path=ppt/notesSlides/notesSlide16.xml><?xml version="1.0" encoding="utf-8"?>
+<file path=ppt/notesSlides/notesSlide15.xml><?xml version="1.0" encoding="utf-8"?>
 <p:notes xmlns:a="http://schemas.openxmlformats.org/drawingml/2006/main" xmlns:r="http://schemas.openxmlformats.org/officeDocument/2006/relationships" xmlns:p="http://schemas.openxmlformats.org/presentationml/2006/main">
   <p:cSld>
     <p:spTree>
@@ -2969,7 +2668,7 @@
                 <a:cs typeface="Times New Roman"/>
                 <a:sym typeface="Times New Roman"/>
               </a:rPr>
-              <a:t>16</a:t>
+              <a:t>15</a:t>
             </a:fld>
             <a:endParaRPr lang="en-US" sz="2000" b="0" i="0" u="none" strike="noStrike" cap="none" dirty="0">
               <a:solidFill>
@@ -10049,19 +9748,16 @@
             </a:endParaRPr>
           </a:p>
           <a:p>
-            <a:pPr>
+            <a:pPr lvl="1">
               <a:lnSpc>
                 <a:spcPct val="150000"/>
               </a:lnSpc>
             </a:pPr>
-            <a:r>
-              <a:rPr lang="en-US" altLang="zh-TW" sz="2000" dirty="0">
-                <a:latin typeface="Times New Roman" panose="02020603050405020304" pitchFamily="18" charset="0"/>
-                <a:ea typeface="標楷體" panose="03000509000000000000" pitchFamily="65" charset="-120"/>
-                <a:cs typeface="Times New Roman" panose="02020603050405020304" pitchFamily="18" charset="0"/>
-              </a:rPr>
-              <a:t>MS00</a:t>
-            </a:r>
+            <a:endParaRPr lang="en-US" altLang="zh-TW" sz="1600" dirty="0">
+              <a:latin typeface="Times New Roman" panose="02020603050405020304" pitchFamily="18" charset="0"/>
+              <a:ea typeface="標楷體" panose="03000509000000000000" pitchFamily="65" charset="-120"/>
+              <a:cs typeface="Times New Roman" panose="02020603050405020304" pitchFamily="18" charset="0"/>
+            </a:endParaRPr>
           </a:p>
           <a:p>
             <a:pPr lvl="1">
@@ -10069,54 +9765,18 @@
                 <a:spcPct val="150000"/>
               </a:lnSpc>
             </a:pPr>
-            <a:r>
-              <a:rPr lang="zh-TW" altLang="zh-TW" sz="1600" dirty="0">
-                <a:latin typeface="Times New Roman" panose="02020603050405020304" pitchFamily="18" charset="0"/>
-                <a:ea typeface="標楷體" panose="03000509000000000000" pitchFamily="65" charset="-120"/>
-                <a:cs typeface="Times New Roman" panose="02020603050405020304" pitchFamily="18" charset="0"/>
-              </a:rPr>
-              <a:t>Microsoft 使用的private ICC tag，</a:t>
-            </a:r>
-            <a:r>
-              <a:rPr lang="zh-TW" altLang="en-US" sz="1600" dirty="0">
-                <a:latin typeface="Times New Roman" panose="02020603050405020304" pitchFamily="18" charset="0"/>
-                <a:ea typeface="標楷體" panose="03000509000000000000" pitchFamily="65" charset="-120"/>
-                <a:cs typeface="Times New Roman" panose="02020603050405020304" pitchFamily="18" charset="0"/>
-              </a:rPr>
-              <a:t>儲存 </a:t>
-            </a:r>
-            <a:r>
-              <a:rPr lang="en-US" altLang="zh-TW" sz="1600" dirty="0">
-                <a:latin typeface="Times New Roman" panose="02020603050405020304" pitchFamily="18" charset="0"/>
-                <a:ea typeface="標楷體" panose="03000509000000000000" pitchFamily="65" charset="-120"/>
-                <a:cs typeface="Times New Roman" panose="02020603050405020304" pitchFamily="18" charset="0"/>
-              </a:rPr>
-              <a:t>Windows </a:t>
-            </a:r>
-            <a:r>
-              <a:rPr lang="zh-TW" altLang="en-US" sz="1600" dirty="0">
-                <a:latin typeface="Times New Roman" panose="02020603050405020304" pitchFamily="18" charset="0"/>
-                <a:ea typeface="標楷體" panose="03000509000000000000" pitchFamily="65" charset="-120"/>
-                <a:cs typeface="Times New Roman" panose="02020603050405020304" pitchFamily="18" charset="0"/>
-              </a:rPr>
-              <a:t>顯示校正所使用的 </a:t>
-            </a:r>
-            <a:r>
-              <a:rPr lang="en-US" altLang="zh-TW" sz="1600" dirty="0">
-                <a:latin typeface="Times New Roman" panose="02020603050405020304" pitchFamily="18" charset="0"/>
-                <a:ea typeface="標楷體" panose="03000509000000000000" pitchFamily="65" charset="-120"/>
-                <a:cs typeface="Times New Roman" panose="02020603050405020304" pitchFamily="18" charset="0"/>
-              </a:rPr>
-              <a:t>Gamma Ramp </a:t>
-            </a:r>
-            <a:r>
-              <a:rPr lang="zh-TW" altLang="en-US" sz="1600" dirty="0">
-                <a:latin typeface="Times New Roman" panose="02020603050405020304" pitchFamily="18" charset="0"/>
-                <a:ea typeface="標楷體" panose="03000509000000000000" pitchFamily="65" charset="-120"/>
-                <a:cs typeface="Times New Roman" panose="02020603050405020304" pitchFamily="18" charset="0"/>
-              </a:rPr>
-              <a:t>資料</a:t>
-            </a:r>
+            <a:endParaRPr lang="en-US" altLang="zh-TW" sz="1600" dirty="0">
+              <a:latin typeface="Times New Roman" panose="02020603050405020304" pitchFamily="18" charset="0"/>
+              <a:ea typeface="標楷體" panose="03000509000000000000" pitchFamily="65" charset="-120"/>
+              <a:cs typeface="Times New Roman" panose="02020603050405020304" pitchFamily="18" charset="0"/>
+            </a:endParaRPr>
+          </a:p>
+          <a:p>
+            <a:pPr lvl="1">
+              <a:lnSpc>
+                <a:spcPct val="150000"/>
+              </a:lnSpc>
+            </a:pPr>
             <a:endParaRPr lang="en-US" altLang="zh-TW" sz="1600" dirty="0">
               <a:latin typeface="Times New Roman" panose="02020603050405020304" pitchFamily="18" charset="0"/>
               <a:ea typeface="標楷體" panose="03000509000000000000" pitchFamily="65" charset="-120"/>
@@ -10130,36 +9790,12 @@
               </a:lnSpc>
             </a:pPr>
             <a:r>
-              <a:rPr lang="zh-TW" altLang="zh-TW" sz="2000" dirty="0">
-                <a:latin typeface="Times New Roman" panose="02020603050405020304" pitchFamily="18" charset="0"/>
-                <a:ea typeface="標楷體" panose="03000509000000000000" pitchFamily="65" charset="-120"/>
-                <a:cs typeface="Times New Roman" panose="02020603050405020304" pitchFamily="18" charset="0"/>
-              </a:rPr>
-              <a:t>MHC2</a:t>
-            </a:r>
-            <a:r>
               <a:rPr lang="en-US" altLang="zh-TW" sz="2000" dirty="0">
                 <a:latin typeface="Times New Roman" panose="02020603050405020304" pitchFamily="18" charset="0"/>
                 <a:ea typeface="標楷體" panose="03000509000000000000" pitchFamily="65" charset="-120"/>
                 <a:cs typeface="Times New Roman" panose="02020603050405020304" pitchFamily="18" charset="0"/>
               </a:rPr>
-              <a:t>(</a:t>
-            </a:r>
-            <a:r>
-              <a:rPr lang="zh-TW" altLang="zh-TW" sz="2000" dirty="0">
-                <a:latin typeface="Times New Roman" panose="02020603050405020304" pitchFamily="18" charset="0"/>
-                <a:ea typeface="標楷體" panose="03000509000000000000" pitchFamily="65" charset="-120"/>
-                <a:cs typeface="Times New Roman" panose="02020603050405020304" pitchFamily="18" charset="0"/>
-              </a:rPr>
-              <a:t>Microsoft Hardware Calibration 2</a:t>
-            </a:r>
-            <a:r>
-              <a:rPr lang="en-US" altLang="zh-TW" sz="2000" dirty="0">
-                <a:latin typeface="Times New Roman" panose="02020603050405020304" pitchFamily="18" charset="0"/>
-                <a:ea typeface="標楷體" panose="03000509000000000000" pitchFamily="65" charset="-120"/>
-                <a:cs typeface="Times New Roman" panose="02020603050405020304" pitchFamily="18" charset="0"/>
-              </a:rPr>
-              <a:t>)</a:t>
+              <a:t>MS00 / MHC2</a:t>
             </a:r>
           </a:p>
           <a:p>
@@ -10174,27 +9810,15 @@
                 <a:ea typeface="標楷體" panose="03000509000000000000" pitchFamily="65" charset="-120"/>
                 <a:cs typeface="Times New Roman" panose="02020603050405020304" pitchFamily="18" charset="0"/>
               </a:rPr>
-              <a:t>Microsoft用來存放新的 GPU display color transform pipeline 所需要的校正資料</a:t>
-            </a:r>
-            <a:endParaRPr lang="en-US" altLang="zh-TW" sz="1600" dirty="0">
-              <a:latin typeface="Times New Roman" panose="02020603050405020304" pitchFamily="18" charset="0"/>
-              <a:ea typeface="標楷體" panose="03000509000000000000" pitchFamily="65" charset="-120"/>
-              <a:cs typeface="Times New Roman" panose="02020603050405020304" pitchFamily="18" charset="0"/>
-            </a:endParaRPr>
-          </a:p>
-          <a:p>
-            <a:pPr lvl="1">
-              <a:lnSpc>
-                <a:spcPct val="150000"/>
-              </a:lnSpc>
-            </a:pPr>
-            <a:r>
-              <a:rPr lang="zh-TW" altLang="zh-TW" sz="1600" dirty="0">
-                <a:latin typeface="Times New Roman" panose="02020603050405020304" pitchFamily="18" charset="0"/>
-                <a:ea typeface="標楷體" panose="03000509000000000000" pitchFamily="65" charset="-120"/>
-                <a:cs typeface="Times New Roman" panose="02020603050405020304" pitchFamily="18" charset="0"/>
-              </a:rPr>
-              <a:t>MHC2 的 </a:t>
+              <a:t>Microsoft 使用的private ICC tag，</a:t>
+            </a:r>
+            <a:r>
+              <a:rPr lang="zh-TW" altLang="en-US" sz="1600" dirty="0">
+                <a:latin typeface="Times New Roman" panose="02020603050405020304" pitchFamily="18" charset="0"/>
+                <a:ea typeface="標楷體" panose="03000509000000000000" pitchFamily="65" charset="-120"/>
+                <a:cs typeface="Times New Roman" panose="02020603050405020304" pitchFamily="18" charset="0"/>
+              </a:rPr>
+              <a:t>儲存 </a:t>
             </a:r>
             <a:r>
               <a:rPr lang="en-US" altLang="zh-TW" sz="1600" dirty="0">
@@ -10202,7 +9826,7 @@
                 <a:ea typeface="標楷體" panose="03000509000000000000" pitchFamily="65" charset="-120"/>
                 <a:cs typeface="Times New Roman" panose="02020603050405020304" pitchFamily="18" charset="0"/>
               </a:rPr>
-              <a:t>3</a:t>
+              <a:t>Windows </a:t>
             </a:r>
             <a:r>
               <a:rPr lang="zh-TW" altLang="en-US" sz="1600" dirty="0">
@@ -10210,7 +9834,7 @@
                 <a:ea typeface="標楷體" panose="03000509000000000000" pitchFamily="65" charset="-120"/>
                 <a:cs typeface="Times New Roman" panose="02020603050405020304" pitchFamily="18" charset="0"/>
               </a:rPr>
-              <a:t>*</a:t>
+              <a:t>顯示校正所使用的 </a:t>
             </a:r>
             <a:r>
               <a:rPr lang="en-US" altLang="zh-TW" sz="1600" dirty="0">
@@ -10218,7 +9842,7 @@
                 <a:ea typeface="標楷體" panose="03000509000000000000" pitchFamily="65" charset="-120"/>
                 <a:cs typeface="Times New Roman" panose="02020603050405020304" pitchFamily="18" charset="0"/>
               </a:rPr>
-              <a:t>3</a:t>
+              <a:t>Gamma Ramp </a:t>
             </a:r>
             <a:r>
               <a:rPr lang="zh-TW" altLang="en-US" sz="1600" dirty="0">
@@ -10226,15 +9850,7 @@
                 <a:ea typeface="標楷體" panose="03000509000000000000" pitchFamily="65" charset="-120"/>
                 <a:cs typeface="Times New Roman" panose="02020603050405020304" pitchFamily="18" charset="0"/>
               </a:rPr>
-              <a:t> </a:t>
-            </a:r>
-            <a:r>
-              <a:rPr lang="zh-TW" altLang="zh-TW" sz="1600" dirty="0">
-                <a:latin typeface="Times New Roman" panose="02020603050405020304" pitchFamily="18" charset="0"/>
-                <a:ea typeface="標楷體" panose="03000509000000000000" pitchFamily="65" charset="-120"/>
-                <a:cs typeface="Times New Roman" panose="02020603050405020304" pitchFamily="18" charset="0"/>
-              </a:rPr>
-              <a:t>matrix 是用來做色彩空間中的調整</a:t>
+              <a:t>資料</a:t>
             </a:r>
             <a:endParaRPr lang="en-US" altLang="zh-TW" sz="1600" dirty="0">
               <a:latin typeface="Times New Roman" panose="02020603050405020304" pitchFamily="18" charset="0"/>
@@ -10259,7 +9875,7 @@
         <p:spPr>
           <a:xfrm>
             <a:off x="1734818" y="6361271"/>
-            <a:ext cx="7809232" cy="523220"/>
+            <a:ext cx="7809232" cy="461665"/>
           </a:xfrm>
           <a:prstGeom prst="rect">
             <a:avLst/>
@@ -10273,7 +9889,7 @@
           <a:lstStyle/>
           <a:p>
             <a:r>
-              <a:rPr lang="zh-TW" altLang="zh-TW" dirty="0">
+              <a:rPr lang="zh-TW" altLang="zh-TW" sz="1200" dirty="0">
                 <a:latin typeface="Times New Roman" panose="02020603050405020304" pitchFamily="18" charset="0"/>
                 <a:ea typeface="標楷體" panose="03000509000000000000" pitchFamily="65" charset="-120"/>
                 <a:cs typeface="Times New Roman" panose="02020603050405020304" pitchFamily="18" charset="0"/>
@@ -10281,15 +9897,15 @@
               <a:t>[</a:t>
             </a:r>
             <a:r>
-              <a:rPr lang="en-US" altLang="zh-TW" dirty="0">
-                <a:latin typeface="Times New Roman" panose="02020603050405020304" pitchFamily="18" charset="0"/>
-                <a:ea typeface="標楷體" panose="03000509000000000000" pitchFamily="65" charset="-120"/>
-                <a:cs typeface="Times New Roman" panose="02020603050405020304" pitchFamily="18" charset="0"/>
-              </a:rPr>
-              <a:t>2</a:t>
-            </a:r>
-            <a:r>
-              <a:rPr lang="zh-TW" altLang="zh-TW" dirty="0">
+              <a:rPr lang="en-US" altLang="zh-TW" sz="1200" dirty="0">
+                <a:latin typeface="Times New Roman" panose="02020603050405020304" pitchFamily="18" charset="0"/>
+                <a:ea typeface="標楷體" panose="03000509000000000000" pitchFamily="65" charset="-120"/>
+                <a:cs typeface="Times New Roman" panose="02020603050405020304" pitchFamily="18" charset="0"/>
+              </a:rPr>
+              <a:t>3</a:t>
+            </a:r>
+            <a:r>
+              <a:rPr lang="zh-TW" altLang="zh-TW" sz="1200" dirty="0">
                 <a:latin typeface="Times New Roman" panose="02020603050405020304" pitchFamily="18" charset="0"/>
                 <a:ea typeface="標楷體" panose="03000509000000000000" pitchFamily="65" charset="-120"/>
                 <a:cs typeface="Times New Roman" panose="02020603050405020304" pitchFamily="18" charset="0"/>
@@ -10297,7 +9913,7 @@
               <a:t>] Microsoft, “Windows hardware display color calibration pipeline,” </a:t>
             </a:r>
             <a:r>
-              <a:rPr lang="zh-TW" altLang="zh-TW" i="1" dirty="0">
+              <a:rPr lang="zh-TW" altLang="zh-TW" sz="1200" i="1" dirty="0">
                 <a:latin typeface="Times New Roman" panose="02020603050405020304" pitchFamily="18" charset="0"/>
                 <a:ea typeface="標楷體" panose="03000509000000000000" pitchFamily="65" charset="-120"/>
                 <a:cs typeface="Times New Roman" panose="02020603050405020304" pitchFamily="18" charset="0"/>
@@ -10305,7 +9921,7 @@
               <a:t>Microsoft Learn</a:t>
             </a:r>
             <a:r>
-              <a:rPr lang="zh-TW" altLang="zh-TW" dirty="0">
+              <a:rPr lang="zh-TW" altLang="zh-TW" sz="1200" dirty="0">
                 <a:latin typeface="Times New Roman" panose="02020603050405020304" pitchFamily="18" charset="0"/>
                 <a:ea typeface="標楷體" panose="03000509000000000000" pitchFamily="65" charset="-120"/>
                 <a:cs typeface="Times New Roman" panose="02020603050405020304" pitchFamily="18" charset="0"/>
@@ -10313,7 +9929,7 @@
               <a:t>, Aug. 28, 2024. [Online]. Available: </a:t>
             </a:r>
             <a:r>
-              <a:rPr lang="zh-TW" altLang="zh-TW" dirty="0">
+              <a:rPr lang="zh-TW" altLang="zh-TW" sz="1200" dirty="0">
                 <a:latin typeface="Times New Roman" panose="02020603050405020304" pitchFamily="18" charset="0"/>
                 <a:ea typeface="標楷體" panose="03000509000000000000" pitchFamily="65" charset="-120"/>
                 <a:cs typeface="Times New Roman" panose="02020603050405020304" pitchFamily="18" charset="0"/>
@@ -10322,14 +9938,14 @@
               <a:t>https://learn.microsoft.com/en-us/windows/win32/wcs/display-calibration-mhc</a:t>
             </a:r>
             <a:r>
-              <a:rPr lang="zh-TW" altLang="zh-TW" dirty="0">
+              <a:rPr lang="zh-TW" altLang="zh-TW" sz="1200" dirty="0">
                 <a:latin typeface="Times New Roman" panose="02020603050405020304" pitchFamily="18" charset="0"/>
                 <a:ea typeface="標楷體" panose="03000509000000000000" pitchFamily="65" charset="-120"/>
                 <a:cs typeface="Times New Roman" panose="02020603050405020304" pitchFamily="18" charset="0"/>
               </a:rPr>
               <a:t>. </a:t>
             </a:r>
-            <a:endParaRPr lang="zh-TW" altLang="en-US" dirty="0">
+            <a:endParaRPr lang="zh-TW" altLang="en-US" sz="1200" dirty="0">
               <a:latin typeface="Times New Roman" panose="02020603050405020304" pitchFamily="18" charset="0"/>
               <a:ea typeface="標楷體" panose="03000509000000000000" pitchFamily="65" charset="-120"/>
               <a:cs typeface="Times New Roman" panose="02020603050405020304" pitchFamily="18" charset="0"/>
@@ -10337,6 +9953,488 @@
           </a:p>
         </p:txBody>
       </p:sp>
+      <p:grpSp>
+        <p:nvGrpSpPr>
+          <p:cNvPr id="2" name="群組 1">
+            <a:extLst>
+              <a:ext uri="{FF2B5EF4-FFF2-40B4-BE49-F238E27FC236}">
+                <a16:creationId xmlns:a16="http://schemas.microsoft.com/office/drawing/2014/main" id="{CBE629BB-FCD4-6D57-6E16-842F0D9A490C}"/>
+              </a:ext>
+            </a:extLst>
+          </p:cNvPr>
+          <p:cNvGrpSpPr/>
+          <p:nvPr/>
+        </p:nvGrpSpPr>
+        <p:grpSpPr>
+          <a:xfrm>
+            <a:off x="794636" y="3227670"/>
+            <a:ext cx="8567076" cy="906808"/>
+            <a:chOff x="812552" y="1766263"/>
+            <a:chExt cx="8567076" cy="906808"/>
+          </a:xfrm>
+        </p:grpSpPr>
+        <p:sp>
+          <p:nvSpPr>
+            <p:cNvPr id="3" name="矩形 2">
+              <a:extLst>
+                <a:ext uri="{FF2B5EF4-FFF2-40B4-BE49-F238E27FC236}">
+                  <a16:creationId xmlns:a16="http://schemas.microsoft.com/office/drawing/2014/main" id="{BE4674CE-908A-A27A-1191-F85802A1820F}"/>
+                </a:ext>
+              </a:extLst>
+            </p:cNvPr>
+            <p:cNvSpPr/>
+            <p:nvPr/>
+          </p:nvSpPr>
+          <p:spPr>
+            <a:xfrm>
+              <a:off x="812552" y="1766263"/>
+              <a:ext cx="1723436" cy="906808"/>
+            </a:xfrm>
+            <a:prstGeom prst="rect">
+              <a:avLst/>
+            </a:prstGeom>
+            <a:solidFill>
+              <a:schemeClr val="bg1"/>
+            </a:solidFill>
+            <a:ln>
+              <a:solidFill>
+                <a:schemeClr val="tx1"/>
+              </a:solidFill>
+            </a:ln>
+          </p:spPr>
+          <p:style>
+            <a:lnRef idx="2">
+              <a:schemeClr val="accent1">
+                <a:shade val="15000"/>
+              </a:schemeClr>
+            </a:lnRef>
+            <a:fillRef idx="1">
+              <a:schemeClr val="accent1"/>
+            </a:fillRef>
+            <a:effectRef idx="0">
+              <a:schemeClr val="accent1"/>
+            </a:effectRef>
+            <a:fontRef idx="minor">
+              <a:schemeClr val="lt1"/>
+            </a:fontRef>
+          </p:style>
+          <p:txBody>
+            <a:bodyPr rtlCol="0" anchor="ctr"/>
+            <a:lstStyle/>
+            <a:p>
+              <a:pPr algn="ctr"/>
+              <a:r>
+                <a:rPr lang="en-US" altLang="zh-TW" sz="1600" b="0" cap="none" spc="0" dirty="0">
+                  <a:ln w="0"/>
+                  <a:solidFill>
+                    <a:schemeClr val="tx1"/>
+                  </a:solidFill>
+                  <a:effectLst>
+                    <a:outerShdw blurRad="38100" dist="19050" dir="2700000" algn="tl" rotWithShape="0">
+                      <a:schemeClr val="dk1">
+                        <a:alpha val="40000"/>
+                      </a:schemeClr>
+                    </a:outerShdw>
+                  </a:effectLst>
+                  <a:latin typeface="Times New Roman" panose="02020603050405020304" pitchFamily="18" charset="0"/>
+                  <a:ea typeface="標楷體" panose="03000509000000000000" pitchFamily="65" charset="-120"/>
+                  <a:cs typeface="Times New Roman" panose="02020603050405020304" pitchFamily="18" charset="0"/>
+                </a:rPr>
+                <a:t>VCGT</a:t>
+              </a:r>
+              <a:endParaRPr lang="zh-TW" altLang="en-US" sz="1600" b="0" cap="none" spc="0" dirty="0">
+                <a:ln w="0"/>
+                <a:solidFill>
+                  <a:schemeClr val="tx1"/>
+                </a:solidFill>
+                <a:effectLst>
+                  <a:outerShdw blurRad="38100" dist="19050" dir="2700000" algn="tl" rotWithShape="0">
+                    <a:schemeClr val="dk1">
+                      <a:alpha val="40000"/>
+                    </a:schemeClr>
+                  </a:outerShdw>
+                </a:effectLst>
+                <a:latin typeface="Times New Roman" panose="02020603050405020304" pitchFamily="18" charset="0"/>
+                <a:ea typeface="標楷體" panose="03000509000000000000" pitchFamily="65" charset="-120"/>
+                <a:cs typeface="Times New Roman" panose="02020603050405020304" pitchFamily="18" charset="0"/>
+              </a:endParaRPr>
+            </a:p>
+          </p:txBody>
+        </p:sp>
+        <p:sp>
+          <p:nvSpPr>
+            <p:cNvPr id="4" name="矩形 3">
+              <a:extLst>
+                <a:ext uri="{FF2B5EF4-FFF2-40B4-BE49-F238E27FC236}">
+                  <a16:creationId xmlns:a16="http://schemas.microsoft.com/office/drawing/2014/main" id="{7B79B8B2-24C1-7821-00C2-7247BC446D33}"/>
+                </a:ext>
+              </a:extLst>
+            </p:cNvPr>
+            <p:cNvSpPr/>
+            <p:nvPr/>
+          </p:nvSpPr>
+          <p:spPr>
+            <a:xfrm>
+              <a:off x="3026966" y="1766263"/>
+              <a:ext cx="1723436" cy="906808"/>
+            </a:xfrm>
+            <a:prstGeom prst="rect">
+              <a:avLst/>
+            </a:prstGeom>
+            <a:solidFill>
+              <a:schemeClr val="bg1"/>
+            </a:solidFill>
+            <a:ln>
+              <a:solidFill>
+                <a:schemeClr val="tx1"/>
+              </a:solidFill>
+            </a:ln>
+          </p:spPr>
+          <p:style>
+            <a:lnRef idx="2">
+              <a:schemeClr val="accent1">
+                <a:shade val="15000"/>
+              </a:schemeClr>
+            </a:lnRef>
+            <a:fillRef idx="1">
+              <a:schemeClr val="accent1"/>
+            </a:fillRef>
+            <a:effectRef idx="0">
+              <a:schemeClr val="accent1"/>
+            </a:effectRef>
+            <a:fontRef idx="minor">
+              <a:schemeClr val="lt1"/>
+            </a:fontRef>
+          </p:style>
+          <p:txBody>
+            <a:bodyPr rtlCol="0" anchor="ctr"/>
+            <a:lstStyle/>
+            <a:p>
+              <a:pPr algn="ctr"/>
+              <a:r>
+                <a:rPr lang="zh-TW" altLang="zh-TW" sz="1600" dirty="0">
+                  <a:solidFill>
+                    <a:schemeClr val="tx1"/>
+                  </a:solidFill>
+                  <a:latin typeface="Times New Roman" panose="02020603050405020304" pitchFamily="18" charset="0"/>
+                  <a:ea typeface="標楷體" panose="03000509000000000000" pitchFamily="65" charset="-120"/>
+                  <a:cs typeface="Times New Roman" panose="02020603050405020304" pitchFamily="18" charset="0"/>
+                </a:rPr>
+                <a:t>Display Calibration Loader</a:t>
+              </a:r>
+              <a:endParaRPr lang="zh-TW" altLang="en-US" sz="1600" dirty="0">
+                <a:solidFill>
+                  <a:schemeClr val="tx1"/>
+                </a:solidFill>
+                <a:latin typeface="Times New Roman" panose="02020603050405020304" pitchFamily="18" charset="0"/>
+                <a:ea typeface="標楷體" panose="03000509000000000000" pitchFamily="65" charset="-120"/>
+                <a:cs typeface="Times New Roman" panose="02020603050405020304" pitchFamily="18" charset="0"/>
+              </a:endParaRPr>
+            </a:p>
+          </p:txBody>
+        </p:sp>
+        <p:sp>
+          <p:nvSpPr>
+            <p:cNvPr id="6" name="矩形 5">
+              <a:extLst>
+                <a:ext uri="{FF2B5EF4-FFF2-40B4-BE49-F238E27FC236}">
+                  <a16:creationId xmlns:a16="http://schemas.microsoft.com/office/drawing/2014/main" id="{F6A5DF9E-07F0-35C8-2A0C-380AC25ADCF4}"/>
+                </a:ext>
+              </a:extLst>
+            </p:cNvPr>
+            <p:cNvSpPr/>
+            <p:nvPr/>
+          </p:nvSpPr>
+          <p:spPr>
+            <a:xfrm>
+              <a:off x="5329964" y="1766263"/>
+              <a:ext cx="1723436" cy="906808"/>
+            </a:xfrm>
+            <a:prstGeom prst="rect">
+              <a:avLst/>
+            </a:prstGeom>
+            <a:solidFill>
+              <a:schemeClr val="bg1"/>
+            </a:solidFill>
+            <a:ln>
+              <a:solidFill>
+                <a:schemeClr val="tx1"/>
+              </a:solidFill>
+            </a:ln>
+          </p:spPr>
+          <p:style>
+            <a:lnRef idx="2">
+              <a:schemeClr val="accent1">
+                <a:shade val="15000"/>
+              </a:schemeClr>
+            </a:lnRef>
+            <a:fillRef idx="1">
+              <a:schemeClr val="accent1"/>
+            </a:fillRef>
+            <a:effectRef idx="0">
+              <a:schemeClr val="accent1"/>
+            </a:effectRef>
+            <a:fontRef idx="minor">
+              <a:schemeClr val="lt1"/>
+            </a:fontRef>
+          </p:style>
+          <p:txBody>
+            <a:bodyPr rtlCol="0" anchor="ctr"/>
+            <a:lstStyle/>
+            <a:p>
+              <a:pPr algn="ctr"/>
+              <a:r>
+                <a:rPr lang="zh-TW" altLang="zh-TW" sz="1600" dirty="0">
+                  <a:solidFill>
+                    <a:schemeClr val="tx1"/>
+                  </a:solidFill>
+                  <a:latin typeface="Times New Roman" panose="02020603050405020304" pitchFamily="18" charset="0"/>
+                  <a:ea typeface="標楷體" panose="03000509000000000000" pitchFamily="65" charset="-120"/>
+                  <a:cs typeface="Times New Roman" panose="02020603050405020304" pitchFamily="18" charset="0"/>
+                </a:rPr>
+                <a:t>Gamma Ramp</a:t>
+              </a:r>
+              <a:endParaRPr lang="zh-TW" altLang="en-US" sz="1600" dirty="0">
+                <a:solidFill>
+                  <a:schemeClr val="tx1"/>
+                </a:solidFill>
+                <a:latin typeface="Times New Roman" panose="02020603050405020304" pitchFamily="18" charset="0"/>
+                <a:ea typeface="標楷體" panose="03000509000000000000" pitchFamily="65" charset="-120"/>
+                <a:cs typeface="Times New Roman" panose="02020603050405020304" pitchFamily="18" charset="0"/>
+              </a:endParaRPr>
+            </a:p>
+          </p:txBody>
+        </p:sp>
+        <p:sp>
+          <p:nvSpPr>
+            <p:cNvPr id="7" name="矩形 6">
+              <a:extLst>
+                <a:ext uri="{FF2B5EF4-FFF2-40B4-BE49-F238E27FC236}">
+                  <a16:creationId xmlns:a16="http://schemas.microsoft.com/office/drawing/2014/main" id="{C10CBAF7-08D8-D205-EB14-FFB6EB019E80}"/>
+                </a:ext>
+              </a:extLst>
+            </p:cNvPr>
+            <p:cNvSpPr/>
+            <p:nvPr/>
+          </p:nvSpPr>
+          <p:spPr>
+            <a:xfrm>
+              <a:off x="7656192" y="1766263"/>
+              <a:ext cx="1723436" cy="906808"/>
+            </a:xfrm>
+            <a:prstGeom prst="rect">
+              <a:avLst/>
+            </a:prstGeom>
+            <a:solidFill>
+              <a:schemeClr val="bg1"/>
+            </a:solidFill>
+            <a:ln>
+              <a:solidFill>
+                <a:schemeClr val="tx1"/>
+              </a:solidFill>
+            </a:ln>
+          </p:spPr>
+          <p:style>
+            <a:lnRef idx="2">
+              <a:schemeClr val="accent1">
+                <a:shade val="15000"/>
+              </a:schemeClr>
+            </a:lnRef>
+            <a:fillRef idx="1">
+              <a:schemeClr val="accent1"/>
+            </a:fillRef>
+            <a:effectRef idx="0">
+              <a:schemeClr val="accent1"/>
+            </a:effectRef>
+            <a:fontRef idx="minor">
+              <a:schemeClr val="lt1"/>
+            </a:fontRef>
+          </p:style>
+          <p:txBody>
+            <a:bodyPr rtlCol="0" anchor="ctr"/>
+            <a:lstStyle/>
+            <a:p>
+              <a:pPr algn="ctr"/>
+              <a:r>
+                <a:rPr lang="zh-TW" altLang="zh-TW" sz="1600" dirty="0">
+                  <a:solidFill>
+                    <a:schemeClr val="tx1"/>
+                  </a:solidFill>
+                  <a:latin typeface="Times New Roman" panose="02020603050405020304" pitchFamily="18" charset="0"/>
+                  <a:ea typeface="標楷體" panose="03000509000000000000" pitchFamily="65" charset="-120"/>
+                  <a:cs typeface="Times New Roman" panose="02020603050405020304" pitchFamily="18" charset="0"/>
+                </a:rPr>
+                <a:t>Displa</a:t>
+              </a:r>
+              <a:r>
+                <a:rPr lang="en-US" altLang="zh-TW" sz="1600" dirty="0">
+                  <a:solidFill>
+                    <a:schemeClr val="tx1"/>
+                  </a:solidFill>
+                  <a:latin typeface="Times New Roman" panose="02020603050405020304" pitchFamily="18" charset="0"/>
+                  <a:ea typeface="標楷體" panose="03000509000000000000" pitchFamily="65" charset="-120"/>
+                  <a:cs typeface="Times New Roman" panose="02020603050405020304" pitchFamily="18" charset="0"/>
+                </a:rPr>
+                <a:t>y</a:t>
+              </a:r>
+              <a:endParaRPr lang="zh-TW" altLang="en-US" sz="1600" dirty="0">
+                <a:solidFill>
+                  <a:schemeClr val="tx1"/>
+                </a:solidFill>
+                <a:latin typeface="Times New Roman" panose="02020603050405020304" pitchFamily="18" charset="0"/>
+                <a:ea typeface="標楷體" panose="03000509000000000000" pitchFamily="65" charset="-120"/>
+                <a:cs typeface="Times New Roman" panose="02020603050405020304" pitchFamily="18" charset="0"/>
+              </a:endParaRPr>
+            </a:p>
+          </p:txBody>
+        </p:sp>
+        <p:cxnSp>
+          <p:nvCxnSpPr>
+            <p:cNvPr id="9" name="直線單箭頭接點 8">
+              <a:extLst>
+                <a:ext uri="{FF2B5EF4-FFF2-40B4-BE49-F238E27FC236}">
+                  <a16:creationId xmlns:a16="http://schemas.microsoft.com/office/drawing/2014/main" id="{9C846300-679D-F3FB-700C-5C6E297463B8}"/>
+                </a:ext>
+              </a:extLst>
+            </p:cNvPr>
+            <p:cNvCxnSpPr>
+              <a:stCxn id="3" idx="3"/>
+              <a:endCxn id="4" idx="1"/>
+            </p:cNvCxnSpPr>
+            <p:nvPr/>
+          </p:nvCxnSpPr>
+          <p:spPr>
+            <a:xfrm>
+              <a:off x="2535988" y="2219667"/>
+              <a:ext cx="490978" cy="0"/>
+            </a:xfrm>
+            <a:prstGeom prst="straightConnector1">
+              <a:avLst/>
+            </a:prstGeom>
+            <a:ln w="19050" cap="flat" cmpd="sng" algn="ctr">
+              <a:solidFill>
+                <a:schemeClr val="dk1"/>
+              </a:solidFill>
+              <a:prstDash val="solid"/>
+              <a:round/>
+              <a:headEnd type="none" w="med" len="med"/>
+              <a:tailEnd type="arrow" w="med" len="med"/>
+            </a:ln>
+          </p:spPr>
+          <p:style>
+            <a:lnRef idx="0">
+              <a:scrgbClr r="0" g="0" b="0"/>
+            </a:lnRef>
+            <a:fillRef idx="0">
+              <a:scrgbClr r="0" g="0" b="0"/>
+            </a:fillRef>
+            <a:effectRef idx="0">
+              <a:scrgbClr r="0" g="0" b="0"/>
+            </a:effectRef>
+            <a:fontRef idx="minor">
+              <a:schemeClr val="tx1"/>
+            </a:fontRef>
+          </p:style>
+        </p:cxnSp>
+        <p:cxnSp>
+          <p:nvCxnSpPr>
+            <p:cNvPr id="10" name="直線單箭頭接點 9">
+              <a:extLst>
+                <a:ext uri="{FF2B5EF4-FFF2-40B4-BE49-F238E27FC236}">
+                  <a16:creationId xmlns:a16="http://schemas.microsoft.com/office/drawing/2014/main" id="{8BA2B716-E7CB-879D-CB4E-107EA3BBFB26}"/>
+                </a:ext>
+              </a:extLst>
+            </p:cNvPr>
+            <p:cNvCxnSpPr>
+              <a:cxnSpLocks/>
+              <a:stCxn id="4" idx="3"/>
+              <a:endCxn id="6" idx="1"/>
+            </p:cNvCxnSpPr>
+            <p:nvPr/>
+          </p:nvCxnSpPr>
+          <p:spPr>
+            <a:xfrm>
+              <a:off x="4750401" y="2219667"/>
+              <a:ext cx="579563" cy="0"/>
+            </a:xfrm>
+            <a:prstGeom prst="straightConnector1">
+              <a:avLst/>
+            </a:prstGeom>
+            <a:ln w="19050" cap="flat" cmpd="sng" algn="ctr">
+              <a:solidFill>
+                <a:schemeClr val="dk1"/>
+              </a:solidFill>
+              <a:prstDash val="solid"/>
+              <a:round/>
+              <a:headEnd type="none" w="med" len="med"/>
+              <a:tailEnd type="arrow" w="med" len="med"/>
+            </a:ln>
+          </p:spPr>
+          <p:style>
+            <a:lnRef idx="0">
+              <a:scrgbClr r="0" g="0" b="0"/>
+            </a:lnRef>
+            <a:fillRef idx="0">
+              <a:scrgbClr r="0" g="0" b="0"/>
+            </a:fillRef>
+            <a:effectRef idx="0">
+              <a:scrgbClr r="0" g="0" b="0"/>
+            </a:effectRef>
+            <a:fontRef idx="minor">
+              <a:schemeClr val="tx1"/>
+            </a:fontRef>
+          </p:style>
+        </p:cxnSp>
+        <p:cxnSp>
+          <p:nvCxnSpPr>
+            <p:cNvPr id="11" name="直線單箭頭接點 10">
+              <a:extLst>
+                <a:ext uri="{FF2B5EF4-FFF2-40B4-BE49-F238E27FC236}">
+                  <a16:creationId xmlns:a16="http://schemas.microsoft.com/office/drawing/2014/main" id="{51E0C1C6-107D-2431-F5FE-37635E29DC01}"/>
+                </a:ext>
+              </a:extLst>
+            </p:cNvPr>
+            <p:cNvCxnSpPr>
+              <a:cxnSpLocks/>
+              <a:stCxn id="6" idx="3"/>
+              <a:endCxn id="7" idx="1"/>
+            </p:cNvCxnSpPr>
+            <p:nvPr/>
+          </p:nvCxnSpPr>
+          <p:spPr>
+            <a:xfrm>
+              <a:off x="7053400" y="2219667"/>
+              <a:ext cx="602792" cy="0"/>
+            </a:xfrm>
+            <a:prstGeom prst="straightConnector1">
+              <a:avLst/>
+            </a:prstGeom>
+            <a:ln w="19050" cap="flat" cmpd="sng" algn="ctr">
+              <a:solidFill>
+                <a:schemeClr val="dk1"/>
+              </a:solidFill>
+              <a:prstDash val="solid"/>
+              <a:round/>
+              <a:headEnd type="none" w="med" len="med"/>
+              <a:tailEnd type="arrow" w="med" len="med"/>
+            </a:ln>
+          </p:spPr>
+          <p:style>
+            <a:lnRef idx="0">
+              <a:scrgbClr r="0" g="0" b="0"/>
+            </a:lnRef>
+            <a:fillRef idx="0">
+              <a:scrgbClr r="0" g="0" b="0"/>
+            </a:fillRef>
+            <a:effectRef idx="0">
+              <a:scrgbClr r="0" g="0" b="0"/>
+            </a:effectRef>
+            <a:fontRef idx="minor">
+              <a:schemeClr val="tx1"/>
+            </a:fontRef>
+          </p:style>
+        </p:cxnSp>
+      </p:grpSp>
     </p:spTree>
     <p:extLst>
       <p:ext uri="{BB962C8B-B14F-4D97-AF65-F5344CB8AC3E}">
@@ -10351,1197 +10449,6 @@
 </file>
 
 <file path=ppt/slides/slide11.xml><?xml version="1.0" encoding="utf-8"?>
-<p:sld xmlns:a="http://schemas.openxmlformats.org/drawingml/2006/main" xmlns:r="http://schemas.openxmlformats.org/officeDocument/2006/relationships" xmlns:p="http://schemas.openxmlformats.org/presentationml/2006/main">
-  <p:cSld>
-    <p:spTree>
-      <p:nvGrpSpPr>
-        <p:cNvPr id="1" name="">
-          <a:extLst>
-            <a:ext uri="{FF2B5EF4-FFF2-40B4-BE49-F238E27FC236}">
-              <a16:creationId xmlns:a16="http://schemas.microsoft.com/office/drawing/2014/main" id="{DA799D7F-E903-4B27-15E3-697CE8ADC96F}"/>
-            </a:ext>
-          </a:extLst>
-        </p:cNvPr>
-        <p:cNvGrpSpPr/>
-        <p:nvPr/>
-      </p:nvGrpSpPr>
-      <p:grpSpPr>
-        <a:xfrm>
-          <a:off x="0" y="0"/>
-          <a:ext cx="0" cy="0"/>
-          <a:chOff x="0" y="0"/>
-          <a:chExt cx="0" cy="0"/>
-        </a:xfrm>
-      </p:grpSpPr>
-      <p:sp>
-        <p:nvSpPr>
-          <p:cNvPr id="3" name="文字版面配置區 6">
-            <a:extLst>
-              <a:ext uri="{FF2B5EF4-FFF2-40B4-BE49-F238E27FC236}">
-                <a16:creationId xmlns:a16="http://schemas.microsoft.com/office/drawing/2014/main" id="{161D35D4-6F09-EBFD-1918-7D9D97D108CE}"/>
-              </a:ext>
-            </a:extLst>
-          </p:cNvPr>
-          <p:cNvSpPr txBox="1"/>
-          <p:nvPr/>
-        </p:nvSpPr>
-        <p:spPr>
-          <a:xfrm>
-            <a:off x="609602" y="1223724"/>
-            <a:ext cx="8686796" cy="4700685"/>
-          </a:xfrm>
-          <a:prstGeom prst="rect">
-            <a:avLst/>
-          </a:prstGeom>
-          <a:noFill/>
-          <a:ln>
-            <a:noFill/>
-          </a:ln>
-        </p:spPr>
-        <p:txBody>
-          <a:bodyPr spcFirstLastPara="1" wrap="square" lIns="91425" tIns="45700" rIns="91425" bIns="45700" anchor="t" anchorCtr="0">
-            <a:noAutofit/>
-          </a:bodyPr>
-          <a:lstStyle>
-            <a:defPPr marR="0" lvl="0" algn="l" rtl="0">
-              <a:lnSpc>
-                <a:spcPct val="100000"/>
-              </a:lnSpc>
-              <a:spcBef>
-                <a:spcPts val="0"/>
-              </a:spcBef>
-              <a:spcAft>
-                <a:spcPts val="0"/>
-              </a:spcAft>
-            </a:defPPr>
-            <a:lvl1pPr marL="457200" marR="0" lvl="0" indent="-406400" algn="l" rtl="0">
-              <a:lnSpc>
-                <a:spcPct val="100000"/>
-              </a:lnSpc>
-              <a:spcBef>
-                <a:spcPts val="560"/>
-              </a:spcBef>
-              <a:spcAft>
-                <a:spcPts val="0"/>
-              </a:spcAft>
-              <a:buClr>
-                <a:schemeClr val="accent2"/>
-              </a:buClr>
-              <a:buSzPts val="2800"/>
-              <a:buFont typeface="Noto Sans Symbols"/>
-              <a:buChar char="❖"/>
-              <a:defRPr sz="2800" b="0" i="0" u="none" strike="noStrike" cap="none">
-                <a:solidFill>
-                  <a:schemeClr val="dk1"/>
-                </a:solidFill>
-                <a:latin typeface="Times New Roman"/>
-                <a:ea typeface="Times New Roman"/>
-                <a:cs typeface="Times New Roman"/>
-                <a:sym typeface="Times New Roman"/>
-              </a:defRPr>
-            </a:lvl1pPr>
-            <a:lvl2pPr marL="914400" marR="0" lvl="1" indent="-381000" algn="l" rtl="0">
-              <a:lnSpc>
-                <a:spcPct val="100000"/>
-              </a:lnSpc>
-              <a:spcBef>
-                <a:spcPts val="480"/>
-              </a:spcBef>
-              <a:spcAft>
-                <a:spcPts val="0"/>
-              </a:spcAft>
-              <a:buClr>
-                <a:srgbClr val="FF5050"/>
-              </a:buClr>
-              <a:buSzPts val="2400"/>
-              <a:buFont typeface="Noto Sans Symbols"/>
-              <a:buChar char="▪"/>
-              <a:defRPr sz="2400" b="0" i="0" u="none" strike="noStrike" cap="none">
-                <a:solidFill>
-                  <a:schemeClr val="dk1"/>
-                </a:solidFill>
-                <a:latin typeface="Times New Roman"/>
-                <a:ea typeface="Times New Roman"/>
-                <a:cs typeface="Times New Roman"/>
-                <a:sym typeface="Times New Roman"/>
-              </a:defRPr>
-            </a:lvl2pPr>
-            <a:lvl3pPr marL="1371600" marR="0" lvl="2" indent="-355600" algn="l" rtl="0">
-              <a:lnSpc>
-                <a:spcPct val="100000"/>
-              </a:lnSpc>
-              <a:spcBef>
-                <a:spcPts val="400"/>
-              </a:spcBef>
-              <a:spcAft>
-                <a:spcPts val="0"/>
-              </a:spcAft>
-              <a:buClr>
-                <a:srgbClr val="6699FF"/>
-              </a:buClr>
-              <a:buSzPts val="2000"/>
-              <a:buFont typeface="Times New Roman"/>
-              <a:buChar char="•"/>
-              <a:defRPr sz="2000" b="0" i="0" u="none" strike="noStrike" cap="none">
-                <a:solidFill>
-                  <a:schemeClr val="dk1"/>
-                </a:solidFill>
-                <a:latin typeface="Times New Roman"/>
-                <a:ea typeface="Times New Roman"/>
-                <a:cs typeface="Times New Roman"/>
-                <a:sym typeface="Times New Roman"/>
-              </a:defRPr>
-            </a:lvl3pPr>
-            <a:lvl4pPr marL="1828800" marR="0" lvl="3" indent="-355600" algn="l" rtl="0">
-              <a:lnSpc>
-                <a:spcPct val="100000"/>
-              </a:lnSpc>
-              <a:spcBef>
-                <a:spcPts val="400"/>
-              </a:spcBef>
-              <a:spcAft>
-                <a:spcPts val="0"/>
-              </a:spcAft>
-              <a:buClr>
-                <a:srgbClr val="FF5050"/>
-              </a:buClr>
-              <a:buSzPts val="2000"/>
-              <a:buFont typeface="Times New Roman"/>
-              <a:buChar char="o"/>
-              <a:defRPr sz="2000" b="0" i="0" u="none" strike="noStrike" cap="none">
-                <a:solidFill>
-                  <a:schemeClr val="dk1"/>
-                </a:solidFill>
-                <a:latin typeface="Times New Roman"/>
-                <a:ea typeface="Times New Roman"/>
-                <a:cs typeface="Times New Roman"/>
-                <a:sym typeface="Times New Roman"/>
-              </a:defRPr>
-            </a:lvl4pPr>
-            <a:lvl5pPr marL="2286000" marR="0" lvl="4" indent="-355600" algn="l" rtl="0">
-              <a:lnSpc>
-                <a:spcPct val="100000"/>
-              </a:lnSpc>
-              <a:spcBef>
-                <a:spcPts val="400"/>
-              </a:spcBef>
-              <a:spcAft>
-                <a:spcPts val="0"/>
-              </a:spcAft>
-              <a:buClr>
-                <a:srgbClr val="FF5050"/>
-              </a:buClr>
-              <a:buSzPts val="2000"/>
-              <a:buFont typeface="Times New Roman"/>
-              <a:buChar char="o"/>
-              <a:defRPr sz="2000" b="0" i="0" u="none" strike="noStrike" cap="none">
-                <a:solidFill>
-                  <a:schemeClr val="dk1"/>
-                </a:solidFill>
-                <a:latin typeface="Times New Roman"/>
-                <a:ea typeface="Times New Roman"/>
-                <a:cs typeface="Times New Roman"/>
-                <a:sym typeface="Times New Roman"/>
-              </a:defRPr>
-            </a:lvl5pPr>
-            <a:lvl6pPr marL="2743200" marR="0" lvl="5" indent="-355600" algn="l" rtl="0">
-              <a:lnSpc>
-                <a:spcPct val="100000"/>
-              </a:lnSpc>
-              <a:spcBef>
-                <a:spcPts val="400"/>
-              </a:spcBef>
-              <a:spcAft>
-                <a:spcPts val="0"/>
-              </a:spcAft>
-              <a:buClr>
-                <a:srgbClr val="FF5050"/>
-              </a:buClr>
-              <a:buSzPts val="2000"/>
-              <a:buFont typeface="Times New Roman"/>
-              <a:buChar char="o"/>
-              <a:defRPr sz="2000" b="0" i="0" u="none" strike="noStrike" cap="none">
-                <a:solidFill>
-                  <a:schemeClr val="dk1"/>
-                </a:solidFill>
-                <a:latin typeface="Times New Roman"/>
-                <a:ea typeface="Times New Roman"/>
-                <a:cs typeface="Times New Roman"/>
-                <a:sym typeface="Times New Roman"/>
-              </a:defRPr>
-            </a:lvl6pPr>
-            <a:lvl7pPr marL="3200400" marR="0" lvl="6" indent="-355600" algn="l" rtl="0">
-              <a:lnSpc>
-                <a:spcPct val="100000"/>
-              </a:lnSpc>
-              <a:spcBef>
-                <a:spcPts val="400"/>
-              </a:spcBef>
-              <a:spcAft>
-                <a:spcPts val="0"/>
-              </a:spcAft>
-              <a:buClr>
-                <a:srgbClr val="FF5050"/>
-              </a:buClr>
-              <a:buSzPts val="2000"/>
-              <a:buFont typeface="Times New Roman"/>
-              <a:buChar char="o"/>
-              <a:defRPr sz="2000" b="0" i="0" u="none" strike="noStrike" cap="none">
-                <a:solidFill>
-                  <a:schemeClr val="dk1"/>
-                </a:solidFill>
-                <a:latin typeface="Times New Roman"/>
-                <a:ea typeface="Times New Roman"/>
-                <a:cs typeface="Times New Roman"/>
-                <a:sym typeface="Times New Roman"/>
-              </a:defRPr>
-            </a:lvl7pPr>
-            <a:lvl8pPr marL="3657600" marR="0" lvl="7" indent="-355600" algn="l" rtl="0">
-              <a:lnSpc>
-                <a:spcPct val="100000"/>
-              </a:lnSpc>
-              <a:spcBef>
-                <a:spcPts val="400"/>
-              </a:spcBef>
-              <a:spcAft>
-                <a:spcPts val="0"/>
-              </a:spcAft>
-              <a:buClr>
-                <a:srgbClr val="FF5050"/>
-              </a:buClr>
-              <a:buSzPts val="2000"/>
-              <a:buFont typeface="Times New Roman"/>
-              <a:buChar char="o"/>
-              <a:defRPr sz="2000" b="0" i="0" u="none" strike="noStrike" cap="none">
-                <a:solidFill>
-                  <a:schemeClr val="dk1"/>
-                </a:solidFill>
-                <a:latin typeface="Times New Roman"/>
-                <a:ea typeface="Times New Roman"/>
-                <a:cs typeface="Times New Roman"/>
-                <a:sym typeface="Times New Roman"/>
-              </a:defRPr>
-            </a:lvl8pPr>
-            <a:lvl9pPr marL="4114800" marR="0" lvl="8" indent="-355600" algn="l" rtl="0">
-              <a:lnSpc>
-                <a:spcPct val="100000"/>
-              </a:lnSpc>
-              <a:spcBef>
-                <a:spcPts val="400"/>
-              </a:spcBef>
-              <a:spcAft>
-                <a:spcPts val="0"/>
-              </a:spcAft>
-              <a:buClr>
-                <a:srgbClr val="FF5050"/>
-              </a:buClr>
-              <a:buSzPts val="2000"/>
-              <a:buFont typeface="Times New Roman"/>
-              <a:buChar char="o"/>
-              <a:defRPr sz="2000" b="0" i="0" u="none" strike="noStrike" cap="none">
-                <a:solidFill>
-                  <a:schemeClr val="dk1"/>
-                </a:solidFill>
-                <a:latin typeface="Times New Roman"/>
-                <a:ea typeface="Times New Roman"/>
-                <a:cs typeface="Times New Roman"/>
-                <a:sym typeface="Times New Roman"/>
-              </a:defRPr>
-            </a:lvl9pPr>
-          </a:lstStyle>
-          <a:p>
-            <a:pPr marL="457200" lvl="1" indent="-406400">
-              <a:spcBef>
-                <a:spcPts val="560"/>
-              </a:spcBef>
-              <a:buClr>
-                <a:schemeClr val="accent2"/>
-              </a:buClr>
-              <a:buSzPts val="2800"/>
-              <a:buFont typeface="Noto Sans Symbols"/>
-              <a:buChar char="❖"/>
-            </a:pPr>
-            <a:r>
-              <a:rPr lang="en-US" altLang="zh-TW" sz="2000" dirty="0">
-                <a:latin typeface="Times New Roman" panose="02020603050405020304" pitchFamily="18" charset="0"/>
-                <a:ea typeface="標楷體" panose="03000509000000000000" pitchFamily="65" charset="-120"/>
-                <a:cs typeface="Times New Roman" panose="02020603050405020304" pitchFamily="18" charset="0"/>
-              </a:rPr>
-              <a:t>VCGT/MS00</a:t>
-            </a:r>
-            <a:r>
-              <a:rPr lang="zh-TW" altLang="en-US" sz="2000" dirty="0">
-                <a:latin typeface="Times New Roman" panose="02020603050405020304" pitchFamily="18" charset="0"/>
-                <a:ea typeface="標楷體" panose="03000509000000000000" pitchFamily="65" charset="-120"/>
-                <a:cs typeface="Times New Roman" panose="02020603050405020304" pitchFamily="18" charset="0"/>
-              </a:rPr>
-              <a:t>流程圖</a:t>
-            </a:r>
-            <a:endParaRPr lang="en-US" altLang="zh-TW" sz="2000" dirty="0">
-              <a:latin typeface="Times New Roman" panose="02020603050405020304" pitchFamily="18" charset="0"/>
-              <a:ea typeface="標楷體" panose="03000509000000000000" pitchFamily="65" charset="-120"/>
-              <a:cs typeface="Times New Roman" panose="02020603050405020304" pitchFamily="18" charset="0"/>
-            </a:endParaRPr>
-          </a:p>
-          <a:p>
-            <a:pPr marL="457200" lvl="1" indent="-406400">
-              <a:spcBef>
-                <a:spcPts val="560"/>
-              </a:spcBef>
-              <a:buClr>
-                <a:schemeClr val="accent2"/>
-              </a:buClr>
-              <a:buSzPts val="2800"/>
-              <a:buFont typeface="Noto Sans Symbols"/>
-              <a:buChar char="❖"/>
-            </a:pPr>
-            <a:endParaRPr lang="en-US" altLang="zh-TW" sz="2000" dirty="0">
-              <a:latin typeface="Times New Roman" panose="02020603050405020304" pitchFamily="18" charset="0"/>
-              <a:ea typeface="標楷體" panose="03000509000000000000" pitchFamily="65" charset="-120"/>
-              <a:cs typeface="Times New Roman" panose="02020603050405020304" pitchFamily="18" charset="0"/>
-            </a:endParaRPr>
-          </a:p>
-          <a:p>
-            <a:pPr marL="457200" lvl="1" indent="-406400">
-              <a:spcBef>
-                <a:spcPts val="560"/>
-              </a:spcBef>
-              <a:buClr>
-                <a:schemeClr val="accent2"/>
-              </a:buClr>
-              <a:buSzPts val="2800"/>
-              <a:buFont typeface="Noto Sans Symbols"/>
-              <a:buChar char="❖"/>
-            </a:pPr>
-            <a:endParaRPr lang="en-US" altLang="zh-TW" sz="2000" dirty="0">
-              <a:latin typeface="Times New Roman" panose="02020603050405020304" pitchFamily="18" charset="0"/>
-              <a:ea typeface="標楷體" panose="03000509000000000000" pitchFamily="65" charset="-120"/>
-              <a:cs typeface="Times New Roman" panose="02020603050405020304" pitchFamily="18" charset="0"/>
-            </a:endParaRPr>
-          </a:p>
-          <a:p>
-            <a:pPr marL="50800" lvl="1" indent="0">
-              <a:spcBef>
-                <a:spcPts val="560"/>
-              </a:spcBef>
-              <a:buClr>
-                <a:schemeClr val="accent2"/>
-              </a:buClr>
-              <a:buSzPts val="2800"/>
-              <a:buNone/>
-            </a:pPr>
-            <a:endParaRPr lang="en-US" altLang="zh-TW" sz="2000" dirty="0">
-              <a:solidFill>
-                <a:schemeClr val="tx1"/>
-              </a:solidFill>
-              <a:latin typeface="Times New Roman" panose="02020603050405020304" pitchFamily="18" charset="0"/>
-              <a:ea typeface="標楷體" panose="03000509000000000000" pitchFamily="65" charset="-120"/>
-              <a:cs typeface="Times New Roman" panose="02020603050405020304" pitchFamily="18" charset="0"/>
-            </a:endParaRPr>
-          </a:p>
-          <a:p>
-            <a:pPr marL="457200" lvl="1" indent="-406400">
-              <a:spcBef>
-                <a:spcPts val="560"/>
-              </a:spcBef>
-              <a:buClr>
-                <a:schemeClr val="accent2"/>
-              </a:buClr>
-              <a:buSzPts val="2800"/>
-              <a:buFont typeface="Noto Sans Symbols"/>
-              <a:buChar char="❖"/>
-            </a:pPr>
-            <a:r>
-              <a:rPr lang="en-US" altLang="zh-TW" sz="2000" dirty="0">
-                <a:solidFill>
-                  <a:schemeClr val="tx1"/>
-                </a:solidFill>
-                <a:latin typeface="Times New Roman" panose="02020603050405020304" pitchFamily="18" charset="0"/>
-                <a:ea typeface="標楷體" panose="03000509000000000000" pitchFamily="65" charset="-120"/>
-                <a:cs typeface="Times New Roman" panose="02020603050405020304" pitchFamily="18" charset="0"/>
-              </a:rPr>
-              <a:t>MHC2</a:t>
-            </a:r>
-            <a:r>
-              <a:rPr lang="zh-TW" altLang="en-US" sz="2000" dirty="0">
-                <a:latin typeface="Times New Roman" panose="02020603050405020304" pitchFamily="18" charset="0"/>
-                <a:ea typeface="標楷體" panose="03000509000000000000" pitchFamily="65" charset="-120"/>
-                <a:cs typeface="Times New Roman" panose="02020603050405020304" pitchFamily="18" charset="0"/>
-              </a:rPr>
-              <a:t>流程圖</a:t>
-            </a:r>
-            <a:endParaRPr lang="en-US" altLang="zh-TW" sz="2000" dirty="0">
-              <a:latin typeface="Times New Roman" panose="02020603050405020304" pitchFamily="18" charset="0"/>
-              <a:ea typeface="標楷體" panose="03000509000000000000" pitchFamily="65" charset="-120"/>
-              <a:cs typeface="Times New Roman" panose="02020603050405020304" pitchFamily="18" charset="0"/>
-            </a:endParaRPr>
-          </a:p>
-          <a:p>
-            <a:pPr marL="457200" lvl="1" indent="-406400">
-              <a:spcBef>
-                <a:spcPts val="560"/>
-              </a:spcBef>
-              <a:buClr>
-                <a:schemeClr val="accent2"/>
-              </a:buClr>
-              <a:buSzPts val="2800"/>
-              <a:buFont typeface="Noto Sans Symbols"/>
-              <a:buChar char="❖"/>
-            </a:pPr>
-            <a:endParaRPr lang="en-US" altLang="zh-TW" sz="2000" dirty="0">
-              <a:solidFill>
-                <a:schemeClr val="tx1"/>
-              </a:solidFill>
-              <a:latin typeface="Times New Roman" panose="02020603050405020304" pitchFamily="18" charset="0"/>
-              <a:ea typeface="標楷體" panose="03000509000000000000" pitchFamily="65" charset="-120"/>
-              <a:cs typeface="Times New Roman" panose="02020603050405020304" pitchFamily="18" charset="0"/>
-            </a:endParaRPr>
-          </a:p>
-        </p:txBody>
-      </p:sp>
-      <p:sp>
-        <p:nvSpPr>
-          <p:cNvPr id="10" name="標題 1">
-            <a:extLst>
-              <a:ext uri="{FF2B5EF4-FFF2-40B4-BE49-F238E27FC236}">
-                <a16:creationId xmlns:a16="http://schemas.microsoft.com/office/drawing/2014/main" id="{19BC2AD8-2B49-2773-92DC-5F6F876713E0}"/>
-              </a:ext>
-            </a:extLst>
-          </p:cNvPr>
-          <p:cNvSpPr>
-            <a:spLocks noGrp="1"/>
-          </p:cNvSpPr>
-          <p:nvPr>
-            <p:ph type="title"/>
-          </p:nvPr>
-        </p:nvSpPr>
-        <p:spPr>
-          <a:xfrm>
-            <a:off x="609602" y="609600"/>
-            <a:ext cx="8077200" cy="533400"/>
-          </a:xfrm>
-          <a:ln>
-            <a:noFill/>
-          </a:ln>
-        </p:spPr>
-        <p:txBody>
-          <a:bodyPr/>
-          <a:lstStyle/>
-          <a:p>
-            <a:r>
-              <a:rPr lang="zh-TW" altLang="en-US" dirty="0">
-                <a:latin typeface="Times New Roman" panose="02020603050405020304" pitchFamily="18" charset="0"/>
-                <a:ea typeface="標楷體" panose="03000509000000000000" pitchFamily="65" charset="-120"/>
-                <a:cs typeface="Times New Roman" panose="02020603050405020304" pitchFamily="18" charset="0"/>
-              </a:rPr>
-              <a:t>本次進度</a:t>
-            </a:r>
-            <a:r>
-              <a:rPr lang="en-US" altLang="zh-TW" dirty="0">
-                <a:latin typeface="Times New Roman" panose="02020603050405020304" pitchFamily="18" charset="0"/>
-                <a:ea typeface="標楷體" panose="03000509000000000000" pitchFamily="65" charset="-120"/>
-                <a:cs typeface="Times New Roman" panose="02020603050405020304" pitchFamily="18" charset="0"/>
-              </a:rPr>
-              <a:t>:  ICC</a:t>
-            </a:r>
-            <a:r>
-              <a:rPr lang="zh-TW" altLang="en-US" dirty="0">
-                <a:latin typeface="Times New Roman" panose="02020603050405020304" pitchFamily="18" charset="0"/>
-                <a:ea typeface="標楷體" panose="03000509000000000000" pitchFamily="65" charset="-120"/>
-                <a:cs typeface="Times New Roman" panose="02020603050405020304" pitchFamily="18" charset="0"/>
-              </a:rPr>
-              <a:t> </a:t>
-            </a:r>
-            <a:r>
-              <a:rPr lang="en-US" altLang="zh-TW" dirty="0">
-                <a:latin typeface="Times New Roman" panose="02020603050405020304" pitchFamily="18" charset="0"/>
-                <a:ea typeface="標楷體" panose="03000509000000000000" pitchFamily="65" charset="-120"/>
-                <a:cs typeface="Times New Roman" panose="02020603050405020304" pitchFamily="18" charset="0"/>
-              </a:rPr>
-              <a:t>Profile - </a:t>
-            </a:r>
-            <a:r>
-              <a:rPr lang="zh-TW" altLang="zh-TW" dirty="0">
-                <a:latin typeface="Times New Roman" panose="02020603050405020304" pitchFamily="18" charset="0"/>
-                <a:ea typeface="標楷體" panose="03000509000000000000" pitchFamily="65" charset="-120"/>
-                <a:cs typeface="Times New Roman" panose="02020603050405020304" pitchFamily="18" charset="0"/>
-              </a:rPr>
-              <a:t>校正資料</a:t>
-            </a:r>
-            <a:endParaRPr lang="zh-TW" altLang="en-US" dirty="0">
-              <a:latin typeface="Times New Roman" panose="02020603050405020304" pitchFamily="18" charset="0"/>
-              <a:ea typeface="標楷體" panose="03000509000000000000" pitchFamily="65" charset="-120"/>
-              <a:cs typeface="Times New Roman" panose="02020603050405020304" pitchFamily="18" charset="0"/>
-            </a:endParaRPr>
-          </a:p>
-        </p:txBody>
-      </p:sp>
-      <p:sp>
-        <p:nvSpPr>
-          <p:cNvPr id="4" name="文字方塊 3">
-            <a:extLst>
-              <a:ext uri="{FF2B5EF4-FFF2-40B4-BE49-F238E27FC236}">
-                <a16:creationId xmlns:a16="http://schemas.microsoft.com/office/drawing/2014/main" id="{31FAD839-1E58-2001-020F-CFFD68E35C3C}"/>
-              </a:ext>
-            </a:extLst>
-          </p:cNvPr>
-          <p:cNvSpPr txBox="1"/>
-          <p:nvPr/>
-        </p:nvSpPr>
-        <p:spPr>
-          <a:xfrm>
-            <a:off x="1734818" y="6361271"/>
-            <a:ext cx="7744462" cy="523220"/>
-          </a:xfrm>
-          <a:prstGeom prst="rect">
-            <a:avLst/>
-          </a:prstGeom>
-          <a:noFill/>
-        </p:spPr>
-        <p:txBody>
-          <a:bodyPr wrap="square">
-            <a:spAutoFit/>
-          </a:bodyPr>
-          <a:lstStyle/>
-          <a:p>
-            <a:r>
-              <a:rPr lang="zh-TW" altLang="zh-TW" dirty="0">
-                <a:latin typeface="Times New Roman" panose="02020603050405020304" pitchFamily="18" charset="0"/>
-                <a:ea typeface="標楷體" panose="03000509000000000000" pitchFamily="65" charset="-120"/>
-                <a:cs typeface="Times New Roman" panose="02020603050405020304" pitchFamily="18" charset="0"/>
-              </a:rPr>
-              <a:t>[</a:t>
-            </a:r>
-            <a:r>
-              <a:rPr lang="en-US" altLang="zh-TW" dirty="0">
-                <a:latin typeface="Times New Roman" panose="02020603050405020304" pitchFamily="18" charset="0"/>
-                <a:ea typeface="標楷體" panose="03000509000000000000" pitchFamily="65" charset="-120"/>
-                <a:cs typeface="Times New Roman" panose="02020603050405020304" pitchFamily="18" charset="0"/>
-              </a:rPr>
-              <a:t>2</a:t>
-            </a:r>
-            <a:r>
-              <a:rPr lang="zh-TW" altLang="zh-TW" dirty="0">
-                <a:latin typeface="Times New Roman" panose="02020603050405020304" pitchFamily="18" charset="0"/>
-                <a:ea typeface="標楷體" panose="03000509000000000000" pitchFamily="65" charset="-120"/>
-                <a:cs typeface="Times New Roman" panose="02020603050405020304" pitchFamily="18" charset="0"/>
-              </a:rPr>
-              <a:t>] Microsoft, “Windows hardware display color calibration pipeline,” </a:t>
-            </a:r>
-            <a:r>
-              <a:rPr lang="zh-TW" altLang="zh-TW" i="1" dirty="0">
-                <a:latin typeface="Times New Roman" panose="02020603050405020304" pitchFamily="18" charset="0"/>
-                <a:ea typeface="標楷體" panose="03000509000000000000" pitchFamily="65" charset="-120"/>
-                <a:cs typeface="Times New Roman" panose="02020603050405020304" pitchFamily="18" charset="0"/>
-              </a:rPr>
-              <a:t>Microsoft Learn</a:t>
-            </a:r>
-            <a:r>
-              <a:rPr lang="zh-TW" altLang="zh-TW" dirty="0">
-                <a:latin typeface="Times New Roman" panose="02020603050405020304" pitchFamily="18" charset="0"/>
-                <a:ea typeface="標楷體" panose="03000509000000000000" pitchFamily="65" charset="-120"/>
-                <a:cs typeface="Times New Roman" panose="02020603050405020304" pitchFamily="18" charset="0"/>
-              </a:rPr>
-              <a:t>, Aug. 28, 2024. [Online]. Available: </a:t>
-            </a:r>
-            <a:r>
-              <a:rPr lang="zh-TW" altLang="zh-TW" dirty="0">
-                <a:latin typeface="Times New Roman" panose="02020603050405020304" pitchFamily="18" charset="0"/>
-                <a:ea typeface="標楷體" panose="03000509000000000000" pitchFamily="65" charset="-120"/>
-                <a:cs typeface="Times New Roman" panose="02020603050405020304" pitchFamily="18" charset="0"/>
-                <a:hlinkClick r:id="rId3"/>
-              </a:rPr>
-              <a:t>https://learn.microsoft.com/en-us/windows/win32/wcs/display-calibration-mhc</a:t>
-            </a:r>
-            <a:r>
-              <a:rPr lang="zh-TW" altLang="zh-TW" dirty="0">
-                <a:latin typeface="Times New Roman" panose="02020603050405020304" pitchFamily="18" charset="0"/>
-                <a:ea typeface="標楷體" panose="03000509000000000000" pitchFamily="65" charset="-120"/>
-                <a:cs typeface="Times New Roman" panose="02020603050405020304" pitchFamily="18" charset="0"/>
-              </a:rPr>
-              <a:t>. </a:t>
-            </a:r>
-            <a:endParaRPr lang="zh-TW" altLang="en-US" dirty="0">
-              <a:latin typeface="Times New Roman" panose="02020603050405020304" pitchFamily="18" charset="0"/>
-              <a:ea typeface="標楷體" panose="03000509000000000000" pitchFamily="65" charset="-120"/>
-              <a:cs typeface="Times New Roman" panose="02020603050405020304" pitchFamily="18" charset="0"/>
-            </a:endParaRPr>
-          </a:p>
-        </p:txBody>
-      </p:sp>
-      <p:pic>
-        <p:nvPicPr>
-          <p:cNvPr id="30" name="圖片 29">
-            <a:extLst>
-              <a:ext uri="{FF2B5EF4-FFF2-40B4-BE49-F238E27FC236}">
-                <a16:creationId xmlns:a16="http://schemas.microsoft.com/office/drawing/2014/main" id="{A6AB86EA-2ADD-01A2-6126-4C71201A6777}"/>
-              </a:ext>
-            </a:extLst>
-          </p:cNvPr>
-          <p:cNvPicPr>
-            <a:picLocks noChangeAspect="1"/>
-          </p:cNvPicPr>
-          <p:nvPr/>
-        </p:nvPicPr>
-        <p:blipFill>
-          <a:blip r:embed="rId4"/>
-          <a:stretch>
-            <a:fillRect/>
-          </a:stretch>
-        </p:blipFill>
-        <p:spPr>
-          <a:xfrm>
-            <a:off x="812553" y="3324539"/>
-            <a:ext cx="8567075" cy="1192632"/>
-          </a:xfrm>
-          <a:prstGeom prst="rect">
-            <a:avLst/>
-          </a:prstGeom>
-        </p:spPr>
-      </p:pic>
-      <p:pic>
-        <p:nvPicPr>
-          <p:cNvPr id="33" name="圖片 32">
-            <a:extLst>
-              <a:ext uri="{FF2B5EF4-FFF2-40B4-BE49-F238E27FC236}">
-                <a16:creationId xmlns:a16="http://schemas.microsoft.com/office/drawing/2014/main" id="{39AD4A49-7455-859B-60E7-1808BA856F7A}"/>
-              </a:ext>
-            </a:extLst>
-          </p:cNvPr>
-          <p:cNvPicPr>
-            <a:picLocks noChangeAspect="1"/>
-          </p:cNvPicPr>
-          <p:nvPr/>
-        </p:nvPicPr>
-        <p:blipFill>
-          <a:blip r:embed="rId5"/>
-          <a:stretch>
-            <a:fillRect/>
-          </a:stretch>
-        </p:blipFill>
-        <p:spPr>
-          <a:xfrm>
-            <a:off x="812552" y="4709634"/>
-            <a:ext cx="8567075" cy="1304329"/>
-          </a:xfrm>
-          <a:prstGeom prst="rect">
-            <a:avLst/>
-          </a:prstGeom>
-        </p:spPr>
-      </p:pic>
-      <p:sp>
-        <p:nvSpPr>
-          <p:cNvPr id="6" name="矩形 5">
-            <a:extLst>
-              <a:ext uri="{FF2B5EF4-FFF2-40B4-BE49-F238E27FC236}">
-                <a16:creationId xmlns:a16="http://schemas.microsoft.com/office/drawing/2014/main" id="{4642A86A-FC43-2EAF-96D1-1331549B29AC}"/>
-              </a:ext>
-            </a:extLst>
-          </p:cNvPr>
-          <p:cNvSpPr/>
-          <p:nvPr/>
-        </p:nvSpPr>
-        <p:spPr>
-          <a:xfrm>
-            <a:off x="812552" y="1766263"/>
-            <a:ext cx="1723436" cy="906808"/>
-          </a:xfrm>
-          <a:prstGeom prst="rect">
-            <a:avLst/>
-          </a:prstGeom>
-          <a:solidFill>
-            <a:schemeClr val="bg1"/>
-          </a:solidFill>
-          <a:ln>
-            <a:solidFill>
-              <a:schemeClr val="tx1"/>
-            </a:solidFill>
-          </a:ln>
-        </p:spPr>
-        <p:style>
-          <a:lnRef idx="2">
-            <a:schemeClr val="accent1">
-              <a:shade val="15000"/>
-            </a:schemeClr>
-          </a:lnRef>
-          <a:fillRef idx="1">
-            <a:schemeClr val="accent1"/>
-          </a:fillRef>
-          <a:effectRef idx="0">
-            <a:schemeClr val="accent1"/>
-          </a:effectRef>
-          <a:fontRef idx="minor">
-            <a:schemeClr val="lt1"/>
-          </a:fontRef>
-        </p:style>
-        <p:txBody>
-          <a:bodyPr rtlCol="0" anchor="ctr"/>
-          <a:lstStyle/>
-          <a:p>
-            <a:pPr algn="ctr"/>
-            <a:r>
-              <a:rPr lang="en-US" altLang="zh-TW" sz="1600" b="0" cap="none" spc="0" dirty="0">
-                <a:ln w="0"/>
-                <a:solidFill>
-                  <a:schemeClr val="tx1"/>
-                </a:solidFill>
-                <a:effectLst>
-                  <a:outerShdw blurRad="38100" dist="19050" dir="2700000" algn="tl" rotWithShape="0">
-                    <a:schemeClr val="dk1">
-                      <a:alpha val="40000"/>
-                    </a:schemeClr>
-                  </a:outerShdw>
-                </a:effectLst>
-                <a:latin typeface="Times New Roman" panose="02020603050405020304" pitchFamily="18" charset="0"/>
-                <a:ea typeface="標楷體" panose="03000509000000000000" pitchFamily="65" charset="-120"/>
-                <a:cs typeface="Times New Roman" panose="02020603050405020304" pitchFamily="18" charset="0"/>
-              </a:rPr>
-              <a:t>VCGT</a:t>
-            </a:r>
-            <a:r>
-              <a:rPr lang="zh-TW" altLang="en-US" sz="1600" b="0" cap="none" spc="0" dirty="0">
-                <a:ln w="0"/>
-                <a:solidFill>
-                  <a:schemeClr val="tx1"/>
-                </a:solidFill>
-                <a:effectLst>
-                  <a:outerShdw blurRad="38100" dist="19050" dir="2700000" algn="tl" rotWithShape="0">
-                    <a:schemeClr val="dk1">
-                      <a:alpha val="40000"/>
-                    </a:schemeClr>
-                  </a:outerShdw>
-                </a:effectLst>
-                <a:latin typeface="Times New Roman" panose="02020603050405020304" pitchFamily="18" charset="0"/>
-                <a:ea typeface="標楷體" panose="03000509000000000000" pitchFamily="65" charset="-120"/>
-                <a:cs typeface="Times New Roman" panose="02020603050405020304" pitchFamily="18" charset="0"/>
-              </a:rPr>
-              <a:t> </a:t>
-            </a:r>
-            <a:r>
-              <a:rPr lang="en-US" altLang="zh-TW" sz="1600" b="0" cap="none" spc="0" dirty="0">
-                <a:ln w="0"/>
-                <a:solidFill>
-                  <a:schemeClr val="tx1"/>
-                </a:solidFill>
-                <a:effectLst>
-                  <a:outerShdw blurRad="38100" dist="19050" dir="2700000" algn="tl" rotWithShape="0">
-                    <a:schemeClr val="dk1">
-                      <a:alpha val="40000"/>
-                    </a:schemeClr>
-                  </a:outerShdw>
-                </a:effectLst>
-                <a:latin typeface="Times New Roman" panose="02020603050405020304" pitchFamily="18" charset="0"/>
-                <a:ea typeface="標楷體" panose="03000509000000000000" pitchFamily="65" charset="-120"/>
-                <a:cs typeface="Times New Roman" panose="02020603050405020304" pitchFamily="18" charset="0"/>
-              </a:rPr>
-              <a:t>or MS00</a:t>
-            </a:r>
-            <a:endParaRPr lang="zh-TW" altLang="en-US" sz="1600" b="0" cap="none" spc="0" dirty="0">
-              <a:ln w="0"/>
-              <a:solidFill>
-                <a:schemeClr val="tx1"/>
-              </a:solidFill>
-              <a:effectLst>
-                <a:outerShdw blurRad="38100" dist="19050" dir="2700000" algn="tl" rotWithShape="0">
-                  <a:schemeClr val="dk1">
-                    <a:alpha val="40000"/>
-                  </a:schemeClr>
-                </a:outerShdw>
-              </a:effectLst>
-              <a:latin typeface="Times New Roman" panose="02020603050405020304" pitchFamily="18" charset="0"/>
-              <a:ea typeface="標楷體" panose="03000509000000000000" pitchFamily="65" charset="-120"/>
-              <a:cs typeface="Times New Roman" panose="02020603050405020304" pitchFamily="18" charset="0"/>
-            </a:endParaRPr>
-          </a:p>
-        </p:txBody>
-      </p:sp>
-      <p:sp>
-        <p:nvSpPr>
-          <p:cNvPr id="7" name="矩形 6">
-            <a:extLst>
-              <a:ext uri="{FF2B5EF4-FFF2-40B4-BE49-F238E27FC236}">
-                <a16:creationId xmlns:a16="http://schemas.microsoft.com/office/drawing/2014/main" id="{56536FC2-9F3A-F481-C2A6-72416A5FA411}"/>
-              </a:ext>
-            </a:extLst>
-          </p:cNvPr>
-          <p:cNvSpPr/>
-          <p:nvPr/>
-        </p:nvSpPr>
-        <p:spPr>
-          <a:xfrm>
-            <a:off x="3026966" y="1766263"/>
-            <a:ext cx="1723436" cy="906808"/>
-          </a:xfrm>
-          <a:prstGeom prst="rect">
-            <a:avLst/>
-          </a:prstGeom>
-          <a:solidFill>
-            <a:schemeClr val="bg1"/>
-          </a:solidFill>
-          <a:ln>
-            <a:solidFill>
-              <a:schemeClr val="tx1"/>
-            </a:solidFill>
-          </a:ln>
-        </p:spPr>
-        <p:style>
-          <a:lnRef idx="2">
-            <a:schemeClr val="accent1">
-              <a:shade val="15000"/>
-            </a:schemeClr>
-          </a:lnRef>
-          <a:fillRef idx="1">
-            <a:schemeClr val="accent1"/>
-          </a:fillRef>
-          <a:effectRef idx="0">
-            <a:schemeClr val="accent1"/>
-          </a:effectRef>
-          <a:fontRef idx="minor">
-            <a:schemeClr val="lt1"/>
-          </a:fontRef>
-        </p:style>
-        <p:txBody>
-          <a:bodyPr rtlCol="0" anchor="ctr"/>
-          <a:lstStyle/>
-          <a:p>
-            <a:pPr algn="ctr"/>
-            <a:r>
-              <a:rPr lang="zh-TW" altLang="zh-TW" sz="1600" dirty="0">
-                <a:solidFill>
-                  <a:schemeClr val="tx1"/>
-                </a:solidFill>
-                <a:latin typeface="Times New Roman" panose="02020603050405020304" pitchFamily="18" charset="0"/>
-                <a:ea typeface="標楷體" panose="03000509000000000000" pitchFamily="65" charset="-120"/>
-                <a:cs typeface="Times New Roman" panose="02020603050405020304" pitchFamily="18" charset="0"/>
-              </a:rPr>
-              <a:t>Windows Display Calibration Loader</a:t>
-            </a:r>
-            <a:endParaRPr lang="zh-TW" altLang="en-US" sz="1600" dirty="0">
-              <a:solidFill>
-                <a:schemeClr val="tx1"/>
-              </a:solidFill>
-              <a:latin typeface="Times New Roman" panose="02020603050405020304" pitchFamily="18" charset="0"/>
-              <a:ea typeface="標楷體" panose="03000509000000000000" pitchFamily="65" charset="-120"/>
-              <a:cs typeface="Times New Roman" panose="02020603050405020304" pitchFamily="18" charset="0"/>
-            </a:endParaRPr>
-          </a:p>
-        </p:txBody>
-      </p:sp>
-      <p:sp>
-        <p:nvSpPr>
-          <p:cNvPr id="8" name="矩形 7">
-            <a:extLst>
-              <a:ext uri="{FF2B5EF4-FFF2-40B4-BE49-F238E27FC236}">
-                <a16:creationId xmlns:a16="http://schemas.microsoft.com/office/drawing/2014/main" id="{40DCE551-06B4-E071-C23C-EDE269E74CEA}"/>
-              </a:ext>
-            </a:extLst>
-          </p:cNvPr>
-          <p:cNvSpPr/>
-          <p:nvPr/>
-        </p:nvSpPr>
-        <p:spPr>
-          <a:xfrm>
-            <a:off x="5329964" y="1766263"/>
-            <a:ext cx="1723436" cy="906808"/>
-          </a:xfrm>
-          <a:prstGeom prst="rect">
-            <a:avLst/>
-          </a:prstGeom>
-          <a:solidFill>
-            <a:schemeClr val="bg1"/>
-          </a:solidFill>
-          <a:ln>
-            <a:solidFill>
-              <a:schemeClr val="tx1"/>
-            </a:solidFill>
-          </a:ln>
-        </p:spPr>
-        <p:style>
-          <a:lnRef idx="2">
-            <a:schemeClr val="accent1">
-              <a:shade val="15000"/>
-            </a:schemeClr>
-          </a:lnRef>
-          <a:fillRef idx="1">
-            <a:schemeClr val="accent1"/>
-          </a:fillRef>
-          <a:effectRef idx="0">
-            <a:schemeClr val="accent1"/>
-          </a:effectRef>
-          <a:fontRef idx="minor">
-            <a:schemeClr val="lt1"/>
-          </a:fontRef>
-        </p:style>
-        <p:txBody>
-          <a:bodyPr rtlCol="0" anchor="ctr"/>
-          <a:lstStyle/>
-          <a:p>
-            <a:pPr algn="ctr"/>
-            <a:r>
-              <a:rPr lang="zh-TW" altLang="zh-TW" sz="1600" dirty="0">
-                <a:solidFill>
-                  <a:schemeClr val="tx1"/>
-                </a:solidFill>
-                <a:latin typeface="Times New Roman" panose="02020603050405020304" pitchFamily="18" charset="0"/>
-                <a:ea typeface="標楷體" panose="03000509000000000000" pitchFamily="65" charset="-120"/>
-                <a:cs typeface="Times New Roman" panose="02020603050405020304" pitchFamily="18" charset="0"/>
-              </a:rPr>
-              <a:t>Gamma Ramp</a:t>
-            </a:r>
-            <a:endParaRPr lang="zh-TW" altLang="en-US" sz="1600" dirty="0">
-              <a:solidFill>
-                <a:schemeClr val="tx1"/>
-              </a:solidFill>
-              <a:latin typeface="Times New Roman" panose="02020603050405020304" pitchFamily="18" charset="0"/>
-              <a:ea typeface="標楷體" panose="03000509000000000000" pitchFamily="65" charset="-120"/>
-              <a:cs typeface="Times New Roman" panose="02020603050405020304" pitchFamily="18" charset="0"/>
-            </a:endParaRPr>
-          </a:p>
-        </p:txBody>
-      </p:sp>
-      <p:sp>
-        <p:nvSpPr>
-          <p:cNvPr id="9" name="矩形 8">
-            <a:extLst>
-              <a:ext uri="{FF2B5EF4-FFF2-40B4-BE49-F238E27FC236}">
-                <a16:creationId xmlns:a16="http://schemas.microsoft.com/office/drawing/2014/main" id="{B5D1CBB8-5BA9-F291-BAC3-50A74FEE2ED2}"/>
-              </a:ext>
-            </a:extLst>
-          </p:cNvPr>
-          <p:cNvSpPr/>
-          <p:nvPr/>
-        </p:nvSpPr>
-        <p:spPr>
-          <a:xfrm>
-            <a:off x="7656192" y="1766263"/>
-            <a:ext cx="1723436" cy="906808"/>
-          </a:xfrm>
-          <a:prstGeom prst="rect">
-            <a:avLst/>
-          </a:prstGeom>
-          <a:solidFill>
-            <a:schemeClr val="bg1"/>
-          </a:solidFill>
-          <a:ln>
-            <a:solidFill>
-              <a:schemeClr val="tx1"/>
-            </a:solidFill>
-          </a:ln>
-        </p:spPr>
-        <p:style>
-          <a:lnRef idx="2">
-            <a:schemeClr val="accent1">
-              <a:shade val="15000"/>
-            </a:schemeClr>
-          </a:lnRef>
-          <a:fillRef idx="1">
-            <a:schemeClr val="accent1"/>
-          </a:fillRef>
-          <a:effectRef idx="0">
-            <a:schemeClr val="accent1"/>
-          </a:effectRef>
-          <a:fontRef idx="minor">
-            <a:schemeClr val="lt1"/>
-          </a:fontRef>
-        </p:style>
-        <p:txBody>
-          <a:bodyPr rtlCol="0" anchor="ctr"/>
-          <a:lstStyle/>
-          <a:p>
-            <a:pPr algn="ctr"/>
-            <a:r>
-              <a:rPr lang="zh-TW" altLang="zh-TW" sz="1600" dirty="0">
-                <a:solidFill>
-                  <a:schemeClr val="tx1"/>
-                </a:solidFill>
-                <a:latin typeface="Times New Roman" panose="02020603050405020304" pitchFamily="18" charset="0"/>
-                <a:ea typeface="標楷體" panose="03000509000000000000" pitchFamily="65" charset="-120"/>
-                <a:cs typeface="Times New Roman" panose="02020603050405020304" pitchFamily="18" charset="0"/>
-              </a:rPr>
-              <a:t>Displa</a:t>
-            </a:r>
-            <a:r>
-              <a:rPr lang="en-US" altLang="zh-TW" sz="1600" dirty="0">
-                <a:solidFill>
-                  <a:schemeClr val="tx1"/>
-                </a:solidFill>
-                <a:latin typeface="Times New Roman" panose="02020603050405020304" pitchFamily="18" charset="0"/>
-                <a:ea typeface="標楷體" panose="03000509000000000000" pitchFamily="65" charset="-120"/>
-                <a:cs typeface="Times New Roman" panose="02020603050405020304" pitchFamily="18" charset="0"/>
-              </a:rPr>
-              <a:t>y</a:t>
-            </a:r>
-            <a:endParaRPr lang="zh-TW" altLang="en-US" sz="1600" dirty="0">
-              <a:solidFill>
-                <a:schemeClr val="tx1"/>
-              </a:solidFill>
-              <a:latin typeface="Times New Roman" panose="02020603050405020304" pitchFamily="18" charset="0"/>
-              <a:ea typeface="標楷體" panose="03000509000000000000" pitchFamily="65" charset="-120"/>
-              <a:cs typeface="Times New Roman" panose="02020603050405020304" pitchFamily="18" charset="0"/>
-            </a:endParaRPr>
-          </a:p>
-        </p:txBody>
-      </p:sp>
-      <p:cxnSp>
-        <p:nvCxnSpPr>
-          <p:cNvPr id="12" name="直線單箭頭接點 11">
-            <a:extLst>
-              <a:ext uri="{FF2B5EF4-FFF2-40B4-BE49-F238E27FC236}">
-                <a16:creationId xmlns:a16="http://schemas.microsoft.com/office/drawing/2014/main" id="{9969ED2C-45EF-25F3-1394-5600F62400AE}"/>
-              </a:ext>
-            </a:extLst>
-          </p:cNvPr>
-          <p:cNvCxnSpPr>
-            <a:stCxn id="6" idx="3"/>
-            <a:endCxn id="7" idx="1"/>
-          </p:cNvCxnSpPr>
-          <p:nvPr/>
-        </p:nvCxnSpPr>
-        <p:spPr>
-          <a:xfrm>
-            <a:off x="2535988" y="2219667"/>
-            <a:ext cx="490978" cy="0"/>
-          </a:xfrm>
-          <a:prstGeom prst="straightConnector1">
-            <a:avLst/>
-          </a:prstGeom>
-          <a:ln w="19050" cap="flat" cmpd="sng" algn="ctr">
-            <a:solidFill>
-              <a:schemeClr val="dk1"/>
-            </a:solidFill>
-            <a:prstDash val="solid"/>
-            <a:round/>
-            <a:headEnd type="none" w="med" len="med"/>
-            <a:tailEnd type="arrow" w="med" len="med"/>
-          </a:ln>
-        </p:spPr>
-        <p:style>
-          <a:lnRef idx="0">
-            <a:scrgbClr r="0" g="0" b="0"/>
-          </a:lnRef>
-          <a:fillRef idx="0">
-            <a:scrgbClr r="0" g="0" b="0"/>
-          </a:fillRef>
-          <a:effectRef idx="0">
-            <a:scrgbClr r="0" g="0" b="0"/>
-          </a:effectRef>
-          <a:fontRef idx="minor">
-            <a:schemeClr val="tx1"/>
-          </a:fontRef>
-        </p:style>
-      </p:cxnSp>
-      <p:cxnSp>
-        <p:nvCxnSpPr>
-          <p:cNvPr id="13" name="直線單箭頭接點 12">
-            <a:extLst>
-              <a:ext uri="{FF2B5EF4-FFF2-40B4-BE49-F238E27FC236}">
-                <a16:creationId xmlns:a16="http://schemas.microsoft.com/office/drawing/2014/main" id="{1AC56062-280E-C720-F432-3A262E194D70}"/>
-              </a:ext>
-            </a:extLst>
-          </p:cNvPr>
-          <p:cNvCxnSpPr>
-            <a:cxnSpLocks/>
-            <a:stCxn id="7" idx="3"/>
-            <a:endCxn id="8" idx="1"/>
-          </p:cNvCxnSpPr>
-          <p:nvPr/>
-        </p:nvCxnSpPr>
-        <p:spPr>
-          <a:xfrm>
-            <a:off x="4750401" y="2219667"/>
-            <a:ext cx="579563" cy="0"/>
-          </a:xfrm>
-          <a:prstGeom prst="straightConnector1">
-            <a:avLst/>
-          </a:prstGeom>
-          <a:ln w="19050" cap="flat" cmpd="sng" algn="ctr">
-            <a:solidFill>
-              <a:schemeClr val="dk1"/>
-            </a:solidFill>
-            <a:prstDash val="solid"/>
-            <a:round/>
-            <a:headEnd type="none" w="med" len="med"/>
-            <a:tailEnd type="arrow" w="med" len="med"/>
-          </a:ln>
-        </p:spPr>
-        <p:style>
-          <a:lnRef idx="0">
-            <a:scrgbClr r="0" g="0" b="0"/>
-          </a:lnRef>
-          <a:fillRef idx="0">
-            <a:scrgbClr r="0" g="0" b="0"/>
-          </a:fillRef>
-          <a:effectRef idx="0">
-            <a:scrgbClr r="0" g="0" b="0"/>
-          </a:effectRef>
-          <a:fontRef idx="minor">
-            <a:schemeClr val="tx1"/>
-          </a:fontRef>
-        </p:style>
-      </p:cxnSp>
-      <p:cxnSp>
-        <p:nvCxnSpPr>
-          <p:cNvPr id="15" name="直線單箭頭接點 14">
-            <a:extLst>
-              <a:ext uri="{FF2B5EF4-FFF2-40B4-BE49-F238E27FC236}">
-                <a16:creationId xmlns:a16="http://schemas.microsoft.com/office/drawing/2014/main" id="{7F27D7D5-15AF-E272-3A29-2FA9F78EE03D}"/>
-              </a:ext>
-            </a:extLst>
-          </p:cNvPr>
-          <p:cNvCxnSpPr>
-            <a:cxnSpLocks/>
-            <a:stCxn id="8" idx="3"/>
-            <a:endCxn id="9" idx="1"/>
-          </p:cNvCxnSpPr>
-          <p:nvPr/>
-        </p:nvCxnSpPr>
-        <p:spPr>
-          <a:xfrm>
-            <a:off x="7053400" y="2219667"/>
-            <a:ext cx="602792" cy="0"/>
-          </a:xfrm>
-          <a:prstGeom prst="straightConnector1">
-            <a:avLst/>
-          </a:prstGeom>
-          <a:ln w="19050" cap="flat" cmpd="sng" algn="ctr">
-            <a:solidFill>
-              <a:schemeClr val="dk1"/>
-            </a:solidFill>
-            <a:prstDash val="solid"/>
-            <a:round/>
-            <a:headEnd type="none" w="med" len="med"/>
-            <a:tailEnd type="arrow" w="med" len="med"/>
-          </a:ln>
-        </p:spPr>
-        <p:style>
-          <a:lnRef idx="0">
-            <a:scrgbClr r="0" g="0" b="0"/>
-          </a:lnRef>
-          <a:fillRef idx="0">
-            <a:scrgbClr r="0" g="0" b="0"/>
-          </a:fillRef>
-          <a:effectRef idx="0">
-            <a:scrgbClr r="0" g="0" b="0"/>
-          </a:effectRef>
-          <a:fontRef idx="minor">
-            <a:schemeClr val="tx1"/>
-          </a:fontRef>
-        </p:style>
-      </p:cxnSp>
-    </p:spTree>
-    <p:extLst>
-      <p:ext uri="{BB962C8B-B14F-4D97-AF65-F5344CB8AC3E}">
-        <p14:creationId xmlns:p14="http://schemas.microsoft.com/office/powerpoint/2010/main" val="483395619"/>
-      </p:ext>
-    </p:extLst>
-  </p:cSld>
-  <p:clrMapOvr>
-    <a:masterClrMapping/>
-  </p:clrMapOvr>
-</p:sld>
-</file>
-
-<file path=ppt/slides/slide12.xml><?xml version="1.0" encoding="utf-8"?>
 <p:sld xmlns:a="http://schemas.openxmlformats.org/drawingml/2006/main" xmlns:r="http://schemas.openxmlformats.org/officeDocument/2006/relationships" xmlns:p="http://schemas.openxmlformats.org/presentationml/2006/main">
   <p:cSld>
     <p:spTree>
@@ -12156,16 +11063,13 @@
                 <a:ea typeface="標楷體" panose="03000509000000000000" pitchFamily="65" charset="-120"/>
                 <a:cs typeface="Times New Roman" panose="02020603050405020304" pitchFamily="18" charset="0"/>
               </a:rPr>
-              <a:t>使用的 </a:t>
-            </a:r>
-            <a:r>
-              <a:rPr lang="en-US" altLang="zh-TW" sz="1600" dirty="0">
-                <a:latin typeface="Times New Roman" panose="02020603050405020304" pitchFamily="18" charset="0"/>
-                <a:ea typeface="標楷體" panose="03000509000000000000" pitchFamily="65" charset="-120"/>
-                <a:cs typeface="Times New Roman" panose="02020603050405020304" pitchFamily="18" charset="0"/>
-              </a:rPr>
-              <a:t>calibration LUT</a:t>
-            </a:r>
+              <a:t>並使用</a:t>
+            </a:r>
+            <a:endParaRPr lang="en-US" altLang="zh-TW" sz="1600" dirty="0">
+              <a:latin typeface="Times New Roman" panose="02020603050405020304" pitchFamily="18" charset="0"/>
+              <a:ea typeface="標楷體" panose="03000509000000000000" pitchFamily="65" charset="-120"/>
+              <a:cs typeface="Times New Roman" panose="02020603050405020304" pitchFamily="18" charset="0"/>
+            </a:endParaRPr>
           </a:p>
           <a:p>
             <a:pPr lvl="1">
@@ -12299,7 +11203,7 @@
         <p:spPr>
           <a:xfrm>
             <a:off x="1734818" y="6361271"/>
-            <a:ext cx="7561580" cy="523220"/>
+            <a:ext cx="7980682" cy="461665"/>
           </a:xfrm>
           <a:prstGeom prst="rect">
             <a:avLst/>
@@ -12313,7 +11217,7 @@
           <a:lstStyle/>
           <a:p>
             <a:r>
-              <a:rPr lang="zh-TW" altLang="zh-TW" dirty="0">
+              <a:rPr lang="zh-TW" altLang="zh-TW" sz="1200" dirty="0">
                 <a:latin typeface="Times New Roman" panose="02020603050405020304" pitchFamily="18" charset="0"/>
                 <a:ea typeface="標楷體" panose="03000509000000000000" pitchFamily="65" charset="-120"/>
                 <a:cs typeface="Times New Roman" panose="02020603050405020304" pitchFamily="18" charset="0"/>
@@ -12321,15 +11225,15 @@
               <a:t>[</a:t>
             </a:r>
             <a:r>
-              <a:rPr lang="en-US" altLang="zh-TW" dirty="0">
-                <a:latin typeface="Times New Roman" panose="02020603050405020304" pitchFamily="18" charset="0"/>
-                <a:ea typeface="標楷體" panose="03000509000000000000" pitchFamily="65" charset="-120"/>
-                <a:cs typeface="Times New Roman" panose="02020603050405020304" pitchFamily="18" charset="0"/>
-              </a:rPr>
-              <a:t>3</a:t>
-            </a:r>
-            <a:r>
-              <a:rPr lang="zh-TW" altLang="zh-TW" dirty="0">
+              <a:rPr lang="en-US" altLang="zh-TW" sz="1200" dirty="0">
+                <a:latin typeface="Times New Roman" panose="02020603050405020304" pitchFamily="18" charset="0"/>
+                <a:ea typeface="標楷體" panose="03000509000000000000" pitchFamily="65" charset="-120"/>
+                <a:cs typeface="Times New Roman" panose="02020603050405020304" pitchFamily="18" charset="0"/>
+              </a:rPr>
+              <a:t>4</a:t>
+            </a:r>
+            <a:r>
+              <a:rPr lang="zh-TW" altLang="zh-TW" sz="1200" dirty="0">
                 <a:latin typeface="Times New Roman" panose="02020603050405020304" pitchFamily="18" charset="0"/>
                 <a:ea typeface="標楷體" panose="03000509000000000000" pitchFamily="65" charset="-120"/>
                 <a:cs typeface="Times New Roman" panose="02020603050405020304" pitchFamily="18" charset="0"/>
@@ -12337,7 +11241,7 @@
               <a:t>] E. Ö. Yılmaz, “DisplayCAL Python 3 Project,” </a:t>
             </a:r>
             <a:r>
-              <a:rPr lang="zh-TW" altLang="zh-TW" i="1" dirty="0">
+              <a:rPr lang="zh-TW" altLang="zh-TW" sz="1200" i="1" dirty="0">
                 <a:latin typeface="Times New Roman" panose="02020603050405020304" pitchFamily="18" charset="0"/>
                 <a:ea typeface="標楷體" panose="03000509000000000000" pitchFamily="65" charset="-120"/>
                 <a:cs typeface="Times New Roman" panose="02020603050405020304" pitchFamily="18" charset="0"/>
@@ -12345,7 +11249,7 @@
               <a:t>GitHub</a:t>
             </a:r>
             <a:r>
-              <a:rPr lang="zh-TW" altLang="zh-TW" dirty="0">
+              <a:rPr lang="zh-TW" altLang="zh-TW" sz="1200" dirty="0">
                 <a:latin typeface="Times New Roman" panose="02020603050405020304" pitchFamily="18" charset="0"/>
                 <a:ea typeface="標楷體" panose="03000509000000000000" pitchFamily="65" charset="-120"/>
                 <a:cs typeface="Times New Roman" panose="02020603050405020304" pitchFamily="18" charset="0"/>
@@ -12353,7 +11257,7 @@
               <a:t>, 2026. [Online]. Available: </a:t>
             </a:r>
             <a:r>
-              <a:rPr lang="zh-TW" altLang="zh-TW" dirty="0">
+              <a:rPr lang="zh-TW" altLang="zh-TW" sz="1200" dirty="0">
                 <a:latin typeface="Times New Roman" panose="02020603050405020304" pitchFamily="18" charset="0"/>
                 <a:ea typeface="標楷體" panose="03000509000000000000" pitchFamily="65" charset="-120"/>
                 <a:cs typeface="Times New Roman" panose="02020603050405020304" pitchFamily="18" charset="0"/>
@@ -12361,7 +11265,7 @@
               </a:rPr>
               <a:t>https://github.com/eoyilmaz/displaycal-py3</a:t>
             </a:r>
-            <a:endParaRPr lang="zh-TW" altLang="en-US" dirty="0">
+            <a:endParaRPr lang="zh-TW" altLang="en-US" sz="1200" dirty="0">
               <a:latin typeface="Times New Roman" panose="02020603050405020304" pitchFamily="18" charset="0"/>
               <a:ea typeface="標楷體" panose="03000509000000000000" pitchFamily="65" charset="-120"/>
               <a:cs typeface="Times New Roman" panose="02020603050405020304" pitchFamily="18" charset="0"/>
@@ -12477,7 +11381,7 @@
 </p:sld>
 </file>
 
-<file path=ppt/slides/slide13.xml><?xml version="1.0" encoding="utf-8"?>
+<file path=ppt/slides/slide12.xml><?xml version="1.0" encoding="utf-8"?>
 <p:sld xmlns:a="http://schemas.openxmlformats.org/drawingml/2006/main" xmlns:r="http://schemas.openxmlformats.org/officeDocument/2006/relationships" xmlns:p="http://schemas.openxmlformats.org/presentationml/2006/main">
   <p:cSld>
     <p:spTree>
@@ -12594,7 +11498,7 @@
 </p:sld>
 </file>
 
-<file path=ppt/slides/slide14.xml><?xml version="1.0" encoding="utf-8"?>
+<file path=ppt/slides/slide13.xml><?xml version="1.0" encoding="utf-8"?>
 <p:sld xmlns:a="http://schemas.openxmlformats.org/drawingml/2006/main" xmlns:r="http://schemas.openxmlformats.org/officeDocument/2006/relationships" xmlns:p="http://schemas.openxmlformats.org/presentationml/2006/main" show="0">
   <p:cSld>
     <p:spTree>
@@ -14950,7 +13854,7 @@
 </p:sld>
 </file>
 
-<file path=ppt/slides/slide15.xml><?xml version="1.0" encoding="utf-8"?>
+<file path=ppt/slides/slide14.xml><?xml version="1.0" encoding="utf-8"?>
 <p:sld xmlns:a="http://schemas.openxmlformats.org/drawingml/2006/main" xmlns:r="http://schemas.openxmlformats.org/officeDocument/2006/relationships" xmlns:p="http://schemas.openxmlformats.org/presentationml/2006/main" show="0">
   <p:cSld>
     <p:spTree>
@@ -15980,7 +14884,7 @@
 </p:sld>
 </file>
 
-<file path=ppt/slides/slide16.xml><?xml version="1.0" encoding="utf-8"?>
+<file path=ppt/slides/slide15.xml><?xml version="1.0" encoding="utf-8"?>
 <p:sld xmlns:a="http://schemas.openxmlformats.org/drawingml/2006/main" xmlns:r="http://schemas.openxmlformats.org/officeDocument/2006/relationships" xmlns:p="http://schemas.openxmlformats.org/presentationml/2006/main" show="0">
   <p:cSld>
     <p:spTree>
@@ -16504,7 +15408,7 @@
         </p:nvSpPr>
         <p:spPr>
           <a:xfrm>
-            <a:off x="609602" y="1007523"/>
+            <a:off x="609602" y="991195"/>
             <a:ext cx="8402051" cy="4700685"/>
           </a:xfrm>
           <a:prstGeom prst="rect">
@@ -16927,14 +15831,6 @@
               </a:rPr>
               <a:t>硬體校正結果進行比較</a:t>
             </a:r>
-            <a:r>
-              <a:rPr lang="zh-TW" altLang="zh-TW" sz="1600" dirty="0">
-                <a:latin typeface="Times New Roman" panose="02020603050405020304" pitchFamily="18" charset="0"/>
-                <a:ea typeface="標楷體" panose="03000509000000000000" pitchFamily="65" charset="-120"/>
-                <a:cs typeface="Times New Roman" panose="02020603050405020304" pitchFamily="18" charset="0"/>
-              </a:rPr>
-              <a:t>。</a:t>
-            </a:r>
             <a:endParaRPr lang="en-US" altLang="zh-TW" sz="1600" dirty="0">
               <a:latin typeface="Times New Roman" panose="02020603050405020304" pitchFamily="18" charset="0"/>
               <a:ea typeface="標楷體" panose="03000509000000000000" pitchFamily="65" charset="-120"/>
@@ -16969,14 +15865,6 @@
                 <a:cs typeface="Times New Roman" panose="02020603050405020304" pitchFamily="18" charset="0"/>
               </a:rPr>
               <a:t>是建立開放、廠商中立、跨平台的色彩管理系統架構與元件標準，是提供跨平台的 Device Profile 格式，使不同裝置之間的色彩資料可以進行轉換</a:t>
-            </a:r>
-            <a:r>
-              <a:rPr lang="zh-TW" altLang="en-US" sz="1600" dirty="0">
-                <a:latin typeface="Times New Roman" panose="02020603050405020304" pitchFamily="18" charset="0"/>
-                <a:ea typeface="標楷體" panose="03000509000000000000" pitchFamily="65" charset="-120"/>
-                <a:cs typeface="Times New Roman" panose="02020603050405020304" pitchFamily="18" charset="0"/>
-              </a:rPr>
-              <a:t>。</a:t>
             </a:r>
             <a:r>
               <a:rPr lang="en-US" altLang="zh-TW" sz="1600" baseline="-25000" dirty="0">
@@ -17643,64 +16531,6 @@
       </p:grpSpPr>
       <p:sp>
         <p:nvSpPr>
-          <p:cNvPr id="4" name="文字方塊 3">
-            <a:extLst>
-              <a:ext uri="{FF2B5EF4-FFF2-40B4-BE49-F238E27FC236}">
-                <a16:creationId xmlns:a16="http://schemas.microsoft.com/office/drawing/2014/main" id="{2E62D90A-238F-15C1-A17C-8D898584815F}"/>
-              </a:ext>
-            </a:extLst>
-          </p:cNvPr>
-          <p:cNvSpPr txBox="1"/>
-          <p:nvPr/>
-        </p:nvSpPr>
-        <p:spPr>
-          <a:xfrm>
-            <a:off x="520699" y="1369489"/>
-            <a:ext cx="7669813" cy="440633"/>
-          </a:xfrm>
-          <a:prstGeom prst="rect">
-            <a:avLst/>
-          </a:prstGeom>
-          <a:noFill/>
-        </p:spPr>
-        <p:txBody>
-          <a:bodyPr wrap="square">
-            <a:spAutoFit/>
-          </a:bodyPr>
-          <a:lstStyle/>
-          <a:p>
-            <a:pPr marL="457200" lvl="1" indent="-406400">
-              <a:lnSpc>
-                <a:spcPts val="3000"/>
-              </a:lnSpc>
-              <a:spcBef>
-                <a:spcPts val="560"/>
-              </a:spcBef>
-              <a:buClr>
-                <a:schemeClr val="accent2"/>
-              </a:buClr>
-              <a:buSzPts val="2800"/>
-              <a:buFont typeface="Noto Sans Symbols"/>
-              <a:buChar char="❖"/>
-            </a:pPr>
-            <a:r>
-              <a:rPr lang="zh-TW" altLang="en-US" sz="2000" dirty="0">
-                <a:latin typeface="Times New Roman" panose="02020603050405020304" pitchFamily="18" charset="0"/>
-                <a:ea typeface="標楷體" panose="03000509000000000000" pitchFamily="65" charset="-120"/>
-                <a:cs typeface="Times New Roman" panose="02020603050405020304" pitchFamily="18" charset="0"/>
-              </a:rPr>
-              <a:t>簡易的轉換流程</a:t>
-            </a:r>
-            <a:endParaRPr lang="en-US" altLang="zh-TW" sz="2000" dirty="0">
-              <a:latin typeface="Times New Roman" panose="02020603050405020304" pitchFamily="18" charset="0"/>
-              <a:ea typeface="標楷體" panose="03000509000000000000" pitchFamily="65" charset="-120"/>
-              <a:cs typeface="Times New Roman" panose="02020603050405020304" pitchFamily="18" charset="0"/>
-            </a:endParaRPr>
-          </a:p>
-        </p:txBody>
-      </p:sp>
-      <p:sp>
-        <p:nvSpPr>
           <p:cNvPr id="8" name="標題 1">
             <a:extLst>
               <a:ext uri="{FF2B5EF4-FFF2-40B4-BE49-F238E27FC236}">
@@ -17795,7 +16625,7 @@
         </p:nvSpPr>
         <p:spPr>
           <a:xfrm>
-            <a:off x="818867" y="2156346"/>
+            <a:off x="827031" y="2001225"/>
             <a:ext cx="2162272" cy="1132764"/>
           </a:xfrm>
           <a:prstGeom prst="rect">
@@ -17869,7 +16699,7 @@
         </p:nvSpPr>
         <p:spPr>
           <a:xfrm>
-            <a:off x="4246730" y="2156346"/>
+            <a:off x="4254894" y="2001225"/>
             <a:ext cx="2162272" cy="1132764"/>
           </a:xfrm>
           <a:prstGeom prst="rect">
@@ -17925,7 +16755,29 @@
                 <a:ea typeface="標楷體" panose="03000509000000000000" pitchFamily="65" charset="-120"/>
                 <a:cs typeface="Times New Roman" panose="02020603050405020304" pitchFamily="18" charset="0"/>
               </a:rPr>
-              <a:t>A Device Profile</a:t>
+              <a:t>A </a:t>
+            </a:r>
+            <a:r>
+              <a:rPr lang="en-US" altLang="zh-TW" sz="2000" dirty="0">
+                <a:solidFill>
+                  <a:schemeClr val="tx1"/>
+                </a:solidFill>
+                <a:latin typeface="Times New Roman" panose="02020603050405020304" pitchFamily="18" charset="0"/>
+                <a:ea typeface="標楷體" panose="03000509000000000000" pitchFamily="65" charset="-120"/>
+                <a:cs typeface="Times New Roman" panose="02020603050405020304" pitchFamily="18" charset="0"/>
+              </a:rPr>
+              <a:t>ICC</a:t>
+            </a:r>
+            <a:r>
+              <a:rPr lang="zh-TW" altLang="zh-TW" sz="2000" dirty="0">
+                <a:solidFill>
+                  <a:schemeClr val="tx1"/>
+                </a:solidFill>
+                <a:latin typeface="Times New Roman" panose="02020603050405020304" pitchFamily="18" charset="0"/>
+                <a:ea typeface="標楷體" panose="03000509000000000000" pitchFamily="65" charset="-120"/>
+                <a:cs typeface="Times New Roman" panose="02020603050405020304" pitchFamily="18" charset="0"/>
+              </a:rPr>
+              <a:t> Profile</a:t>
             </a:r>
             <a:endParaRPr lang="zh-TW" altLang="en-US" sz="2000" dirty="0">
               <a:solidFill>
@@ -17952,7 +16804,7 @@
         </p:nvSpPr>
         <p:spPr>
           <a:xfrm>
-            <a:off x="818867" y="4481497"/>
+            <a:off x="827031" y="4326376"/>
             <a:ext cx="2162272" cy="1132764"/>
           </a:xfrm>
           <a:prstGeom prst="rect">
@@ -18016,7 +16868,7 @@
         </p:nvSpPr>
         <p:spPr>
           <a:xfrm>
-            <a:off x="4246730" y="4481497"/>
+            <a:off x="4254894" y="4326376"/>
             <a:ext cx="2162272" cy="1132764"/>
           </a:xfrm>
           <a:prstGeom prst="rect">
@@ -18072,7 +16924,29 @@
                 <a:ea typeface="標楷體" panose="03000509000000000000" pitchFamily="65" charset="-120"/>
                 <a:cs typeface="Times New Roman" panose="02020603050405020304" pitchFamily="18" charset="0"/>
               </a:rPr>
-              <a:t>B Device Profile</a:t>
+              <a:t>B </a:t>
+            </a:r>
+            <a:r>
+              <a:rPr lang="en-US" altLang="zh-TW" sz="2000" dirty="0">
+                <a:solidFill>
+                  <a:schemeClr val="tx1"/>
+                </a:solidFill>
+                <a:latin typeface="Times New Roman" panose="02020603050405020304" pitchFamily="18" charset="0"/>
+                <a:ea typeface="標楷體" panose="03000509000000000000" pitchFamily="65" charset="-120"/>
+                <a:cs typeface="Times New Roman" panose="02020603050405020304" pitchFamily="18" charset="0"/>
+              </a:rPr>
+              <a:t>ICC</a:t>
+            </a:r>
+            <a:r>
+              <a:rPr lang="zh-TW" altLang="zh-TW" sz="2000" dirty="0">
+                <a:solidFill>
+                  <a:schemeClr val="tx1"/>
+                </a:solidFill>
+                <a:latin typeface="Times New Roman" panose="02020603050405020304" pitchFamily="18" charset="0"/>
+                <a:ea typeface="標楷體" panose="03000509000000000000" pitchFamily="65" charset="-120"/>
+                <a:cs typeface="Times New Roman" panose="02020603050405020304" pitchFamily="18" charset="0"/>
+              </a:rPr>
+              <a:t> Profile</a:t>
             </a:r>
             <a:endParaRPr lang="zh-TW" altLang="en-US" sz="2000" dirty="0">
               <a:solidFill>
@@ -18099,7 +16973,7 @@
         </p:nvSpPr>
         <p:spPr>
           <a:xfrm>
-            <a:off x="7251512" y="3352145"/>
+            <a:off x="7259676" y="3197024"/>
             <a:ext cx="2162272" cy="1132764"/>
           </a:xfrm>
           <a:prstGeom prst="rect">
@@ -18241,7 +17115,7 @@
         </p:nvCxnSpPr>
         <p:spPr>
           <a:xfrm>
-            <a:off x="2981139" y="2722728"/>
+            <a:off x="2989303" y="2567607"/>
             <a:ext cx="1265591" cy="0"/>
           </a:xfrm>
           <a:prstGeom prst="straightConnector1">
@@ -18290,7 +17164,7 @@
         </p:nvCxnSpPr>
         <p:spPr>
           <a:xfrm flipH="1">
-            <a:off x="2981139" y="5047879"/>
+            <a:off x="2989303" y="4892758"/>
             <a:ext cx="1265591" cy="0"/>
           </a:xfrm>
           <a:prstGeom prst="straightConnector1">
@@ -18338,7 +17212,7 @@
         </p:nvCxnSpPr>
         <p:spPr>
           <a:xfrm>
-            <a:off x="6409002" y="2722728"/>
+            <a:off x="6417166" y="2567607"/>
             <a:ext cx="1923646" cy="629417"/>
           </a:xfrm>
           <a:prstGeom prst="bentConnector2">
@@ -18383,7 +17257,7 @@
         </p:nvCxnSpPr>
         <p:spPr>
           <a:xfrm rot="5400000">
-            <a:off x="7089340" y="3804571"/>
+            <a:off x="7097504" y="3649450"/>
             <a:ext cx="562970" cy="1923646"/>
           </a:xfrm>
           <a:prstGeom prst="bentConnector2">
@@ -18797,7 +17671,7 @@
         </p:nvSpPr>
         <p:spPr>
           <a:xfrm>
-            <a:off x="1152647" y="6396335"/>
+            <a:off x="1569026" y="6367421"/>
             <a:ext cx="8489064" cy="461665"/>
           </a:xfrm>
           <a:prstGeom prst="rect">
@@ -18825,7 +17699,7 @@
                 <a:ea typeface="標楷體" panose="03000509000000000000" pitchFamily="65" charset="-120"/>
                 <a:cs typeface="Times New Roman" panose="02020603050405020304" pitchFamily="18" charset="0"/>
               </a:rPr>
-              <a:t>1</a:t>
+              <a:t>2</a:t>
             </a:r>
             <a:r>
               <a:rPr lang="zh-TW" altLang="zh-TW" sz="1200" dirty="0">
@@ -18861,62 +17735,6 @@
               <a:t>https://archive.color.org/specifications/ICC.1-2022-05.pdf</a:t>
             </a:r>
             <a:endParaRPr lang="zh-TW" altLang="en-US" sz="1200" dirty="0">
-              <a:latin typeface="Times New Roman" panose="02020603050405020304" pitchFamily="18" charset="0"/>
-              <a:ea typeface="標楷體" panose="03000509000000000000" pitchFamily="65" charset="-120"/>
-              <a:cs typeface="Times New Roman" panose="02020603050405020304" pitchFamily="18" charset="0"/>
-            </a:endParaRPr>
-          </a:p>
-        </p:txBody>
-      </p:sp>
-      <p:sp>
-        <p:nvSpPr>
-          <p:cNvPr id="4" name="矩形 3">
-            <a:extLst>
-              <a:ext uri="{FF2B5EF4-FFF2-40B4-BE49-F238E27FC236}">
-                <a16:creationId xmlns:a16="http://schemas.microsoft.com/office/drawing/2014/main" id="{567028A9-4CB7-C301-D86A-34E0D8BC2C6A}"/>
-              </a:ext>
-            </a:extLst>
-          </p:cNvPr>
-          <p:cNvSpPr/>
-          <p:nvPr/>
-        </p:nvSpPr>
-        <p:spPr>
-          <a:xfrm>
-            <a:off x="979714" y="3135085"/>
-            <a:ext cx="677636" cy="163286"/>
-          </a:xfrm>
-          <a:prstGeom prst="rect">
-            <a:avLst/>
-          </a:prstGeom>
-          <a:noFill/>
-          <a:ln>
-            <a:solidFill>
-              <a:srgbClr val="FF0000"/>
-            </a:solidFill>
-          </a:ln>
-        </p:spPr>
-        <p:style>
-          <a:lnRef idx="2">
-            <a:schemeClr val="accent3">
-              <a:shade val="15000"/>
-            </a:schemeClr>
-          </a:lnRef>
-          <a:fillRef idx="1">
-            <a:schemeClr val="accent3"/>
-          </a:fillRef>
-          <a:effectRef idx="0">
-            <a:schemeClr val="accent3"/>
-          </a:effectRef>
-          <a:fontRef idx="minor">
-            <a:schemeClr val="lt1"/>
-          </a:fontRef>
-        </p:style>
-        <p:txBody>
-          <a:bodyPr rtlCol="0" anchor="ctr"/>
-          <a:lstStyle/>
-          <a:p>
-            <a:pPr algn="ctr"/>
-            <a:endParaRPr lang="zh-TW" altLang="en-US">
               <a:latin typeface="Times New Roman" panose="02020603050405020304" pitchFamily="18" charset="0"/>
               <a:ea typeface="標楷體" panose="03000509000000000000" pitchFamily="65" charset="-120"/>
               <a:cs typeface="Times New Roman" panose="02020603050405020304" pitchFamily="18" charset="0"/>
@@ -19538,7 +18356,51 @@
                 <a:ea typeface="標楷體" panose="03000509000000000000" pitchFamily="65" charset="-120"/>
                 <a:cs typeface="Times New Roman" panose="02020603050405020304" pitchFamily="18" charset="0"/>
               </a:rPr>
-              <a:t>XYZ 的 Y（luminance）關係相符的 linear RGB 表示。</a:t>
+              <a:t>XYZ 的 Y</a:t>
+            </a:r>
+            <a:r>
+              <a:rPr lang="en-US" altLang="zh-TW" sz="1600" dirty="0">
+                <a:solidFill>
+                  <a:schemeClr val="tx1"/>
+                </a:solidFill>
+                <a:latin typeface="Times New Roman" panose="02020603050405020304" pitchFamily="18" charset="0"/>
+                <a:ea typeface="標楷體" panose="03000509000000000000" pitchFamily="65" charset="-120"/>
+                <a:cs typeface="Times New Roman" panose="02020603050405020304" pitchFamily="18" charset="0"/>
+              </a:rPr>
+              <a:t>(</a:t>
+            </a:r>
+            <a:r>
+              <a:rPr lang="zh-TW" altLang="zh-TW" sz="1600" dirty="0">
+                <a:solidFill>
+                  <a:schemeClr val="tx1"/>
+                </a:solidFill>
+                <a:latin typeface="Times New Roman" panose="02020603050405020304" pitchFamily="18" charset="0"/>
+                <a:ea typeface="標楷體" panose="03000509000000000000" pitchFamily="65" charset="-120"/>
+                <a:cs typeface="Times New Roman" panose="02020603050405020304" pitchFamily="18" charset="0"/>
+              </a:rPr>
+              <a:t>luminance</a:t>
+            </a:r>
+            <a:r>
+              <a:rPr lang="en-US" altLang="zh-TW" sz="1600" dirty="0">
+                <a:solidFill>
+                  <a:schemeClr val="tx1"/>
+                </a:solidFill>
+                <a:latin typeface="Times New Roman" panose="02020603050405020304" pitchFamily="18" charset="0"/>
+                <a:ea typeface="標楷體" panose="03000509000000000000" pitchFamily="65" charset="-120"/>
+                <a:cs typeface="Times New Roman" panose="02020603050405020304" pitchFamily="18" charset="0"/>
+              </a:rPr>
+              <a:t>)</a:t>
+            </a:r>
+            <a:r>
+              <a:rPr lang="zh-TW" altLang="zh-TW" sz="1600" dirty="0">
+                <a:solidFill>
+                  <a:schemeClr val="tx1"/>
+                </a:solidFill>
+                <a:latin typeface="Times New Roman" panose="02020603050405020304" pitchFamily="18" charset="0"/>
+                <a:ea typeface="標楷體" panose="03000509000000000000" pitchFamily="65" charset="-120"/>
+                <a:cs typeface="Times New Roman" panose="02020603050405020304" pitchFamily="18" charset="0"/>
+              </a:rPr>
+              <a:t>關係相符的 linear RGB </a:t>
             </a:r>
             <a:endParaRPr lang="en-US" altLang="zh-TW" sz="1600" dirty="0">
               <a:solidFill>
@@ -20770,6 +19632,235 @@
             </a:lvl9pPr>
           </a:lstStyle>
           <a:p>
+            <a:r>
+              <a:rPr lang="en-US" altLang="zh-TW" sz="2000" dirty="0">
+                <a:latin typeface="Times New Roman" panose="02020603050405020304" pitchFamily="18" charset="0"/>
+                <a:ea typeface="標楷體" panose="03000509000000000000" pitchFamily="65" charset="-120"/>
+                <a:cs typeface="Times New Roman" panose="02020603050405020304" pitchFamily="18" charset="0"/>
+              </a:rPr>
+              <a:t>d</a:t>
+            </a:r>
+            <a:r>
+              <a:rPr lang="zh-TW" altLang="zh-TW" sz="2000" dirty="0">
+                <a:latin typeface="Times New Roman" panose="02020603050405020304" pitchFamily="18" charset="0"/>
+                <a:ea typeface="標楷體" panose="03000509000000000000" pitchFamily="65" charset="-120"/>
+                <a:cs typeface="Times New Roman" panose="02020603050405020304" pitchFamily="18" charset="0"/>
+              </a:rPr>
+              <a:t>esc</a:t>
+            </a:r>
+            <a:r>
+              <a:rPr lang="zh-TW" altLang="en-US" sz="2000" dirty="0">
+                <a:latin typeface="Times New Roman" panose="02020603050405020304" pitchFamily="18" charset="0"/>
+                <a:ea typeface="標楷體" panose="03000509000000000000" pitchFamily="65" charset="-120"/>
+                <a:cs typeface="Times New Roman" panose="02020603050405020304" pitchFamily="18" charset="0"/>
+              </a:rPr>
+              <a:t> </a:t>
+            </a:r>
+            <a:r>
+              <a:rPr lang="en-US" altLang="zh-TW" sz="2000" dirty="0">
+                <a:latin typeface="Times New Roman" panose="02020603050405020304" pitchFamily="18" charset="0"/>
+                <a:ea typeface="標楷體" panose="03000509000000000000" pitchFamily="65" charset="-120"/>
+                <a:cs typeface="Times New Roman" panose="02020603050405020304" pitchFamily="18" charset="0"/>
+              </a:rPr>
+              <a:t>(</a:t>
+            </a:r>
+            <a:r>
+              <a:rPr lang="zh-TW" altLang="zh-TW" sz="2000" dirty="0">
+                <a:latin typeface="Times New Roman" panose="02020603050405020304" pitchFamily="18" charset="0"/>
+                <a:ea typeface="標楷體" panose="03000509000000000000" pitchFamily="65" charset="-120"/>
+                <a:cs typeface="Times New Roman" panose="02020603050405020304" pitchFamily="18" charset="0"/>
+              </a:rPr>
+              <a:t>Profile Description</a:t>
+            </a:r>
+            <a:r>
+              <a:rPr lang="en-US" altLang="zh-TW" sz="2000" dirty="0">
+                <a:latin typeface="Times New Roman" panose="02020603050405020304" pitchFamily="18" charset="0"/>
+                <a:ea typeface="標楷體" panose="03000509000000000000" pitchFamily="65" charset="-120"/>
+                <a:cs typeface="Times New Roman" panose="02020603050405020304" pitchFamily="18" charset="0"/>
+              </a:rPr>
+              <a:t>)</a:t>
+            </a:r>
+          </a:p>
+          <a:p>
+            <a:pPr lvl="1">
+              <a:lnSpc>
+                <a:spcPct val="150000"/>
+              </a:lnSpc>
+            </a:pPr>
+            <a:r>
+              <a:rPr lang="zh-TW" altLang="zh-TW" sz="1600" dirty="0">
+                <a:latin typeface="Times New Roman" panose="02020603050405020304" pitchFamily="18" charset="0"/>
+                <a:ea typeface="標楷體" panose="03000509000000000000" pitchFamily="65" charset="-120"/>
+                <a:cs typeface="Times New Roman" panose="02020603050405020304" pitchFamily="18" charset="0"/>
+              </a:rPr>
+              <a:t>描述這個 ICC Profile 的名稱或識別資訊</a:t>
+            </a:r>
+            <a:endParaRPr lang="en-US" altLang="zh-TW" sz="1600" dirty="0">
+              <a:latin typeface="Times New Roman" panose="02020603050405020304" pitchFamily="18" charset="0"/>
+              <a:ea typeface="標楷體" panose="03000509000000000000" pitchFamily="65" charset="-120"/>
+              <a:cs typeface="Times New Roman" panose="02020603050405020304" pitchFamily="18" charset="0"/>
+            </a:endParaRPr>
+          </a:p>
+          <a:p>
+            <a:r>
+              <a:rPr lang="en-US" altLang="zh-TW" sz="2000" dirty="0">
+                <a:latin typeface="Times New Roman" panose="02020603050405020304" pitchFamily="18" charset="0"/>
+                <a:ea typeface="標楷體" panose="03000509000000000000" pitchFamily="65" charset="-120"/>
+                <a:cs typeface="Times New Roman" panose="02020603050405020304" pitchFamily="18" charset="0"/>
+              </a:rPr>
+              <a:t>c</a:t>
+            </a:r>
+            <a:r>
+              <a:rPr lang="zh-TW" altLang="zh-TW" sz="2000" dirty="0">
+                <a:latin typeface="Times New Roman" panose="02020603050405020304" pitchFamily="18" charset="0"/>
+                <a:ea typeface="標楷體" panose="03000509000000000000" pitchFamily="65" charset="-120"/>
+                <a:cs typeface="Times New Roman" panose="02020603050405020304" pitchFamily="18" charset="0"/>
+              </a:rPr>
+              <a:t>prt</a:t>
+            </a:r>
+            <a:r>
+              <a:rPr lang="zh-TW" altLang="en-US" sz="2000" dirty="0">
+                <a:latin typeface="Times New Roman" panose="02020603050405020304" pitchFamily="18" charset="0"/>
+                <a:ea typeface="標楷體" panose="03000509000000000000" pitchFamily="65" charset="-120"/>
+                <a:cs typeface="Times New Roman" panose="02020603050405020304" pitchFamily="18" charset="0"/>
+              </a:rPr>
+              <a:t> </a:t>
+            </a:r>
+            <a:r>
+              <a:rPr lang="en-US" altLang="zh-TW" sz="2000" dirty="0">
+                <a:latin typeface="Times New Roman" panose="02020603050405020304" pitchFamily="18" charset="0"/>
+                <a:ea typeface="標楷體" panose="03000509000000000000" pitchFamily="65" charset="-120"/>
+                <a:cs typeface="Times New Roman" panose="02020603050405020304" pitchFamily="18" charset="0"/>
+              </a:rPr>
+              <a:t>(</a:t>
+            </a:r>
+            <a:r>
+              <a:rPr lang="zh-TW" altLang="zh-TW" sz="2000" dirty="0">
+                <a:latin typeface="Times New Roman" panose="02020603050405020304" pitchFamily="18" charset="0"/>
+                <a:ea typeface="標楷體" panose="03000509000000000000" pitchFamily="65" charset="-120"/>
+                <a:cs typeface="Times New Roman" panose="02020603050405020304" pitchFamily="18" charset="0"/>
+              </a:rPr>
+              <a:t>Copyright</a:t>
+            </a:r>
+            <a:r>
+              <a:rPr lang="en-US" altLang="zh-TW" sz="2000" dirty="0">
+                <a:latin typeface="Times New Roman" panose="02020603050405020304" pitchFamily="18" charset="0"/>
+                <a:ea typeface="標楷體" panose="03000509000000000000" pitchFamily="65" charset="-120"/>
+                <a:cs typeface="Times New Roman" panose="02020603050405020304" pitchFamily="18" charset="0"/>
+              </a:rPr>
+              <a:t>)</a:t>
+            </a:r>
+          </a:p>
+          <a:p>
+            <a:pPr lvl="1">
+              <a:lnSpc>
+                <a:spcPct val="150000"/>
+              </a:lnSpc>
+            </a:pPr>
+            <a:r>
+              <a:rPr lang="zh-TW" altLang="zh-TW" sz="1600" dirty="0">
+                <a:latin typeface="Times New Roman" panose="02020603050405020304" pitchFamily="18" charset="0"/>
+                <a:ea typeface="標楷體" panose="03000509000000000000" pitchFamily="65" charset="-120"/>
+                <a:cs typeface="Times New Roman" panose="02020603050405020304" pitchFamily="18" charset="0"/>
+              </a:rPr>
+              <a:t>記錄這個 ICC Profile 的版權資訊</a:t>
+            </a:r>
+            <a:endParaRPr lang="zh-TW" altLang="en-US" sz="1600" dirty="0">
+              <a:solidFill>
+                <a:schemeClr val="tx1"/>
+              </a:solidFill>
+              <a:latin typeface="Times New Roman" panose="02020603050405020304" pitchFamily="18" charset="0"/>
+              <a:ea typeface="標楷體" panose="03000509000000000000" pitchFamily="65" charset="-120"/>
+              <a:cs typeface="Times New Roman" panose="02020603050405020304" pitchFamily="18" charset="0"/>
+            </a:endParaRPr>
+          </a:p>
+          <a:p>
+            <a:pPr>
+              <a:lnSpc>
+                <a:spcPct val="150000"/>
+              </a:lnSpc>
+            </a:pPr>
+            <a:r>
+              <a:rPr lang="en-US" altLang="zh-TW" sz="2000" dirty="0" err="1">
+                <a:latin typeface="Times New Roman" panose="02020603050405020304" pitchFamily="18" charset="0"/>
+                <a:ea typeface="標楷體" panose="03000509000000000000" pitchFamily="65" charset="-120"/>
+                <a:cs typeface="Times New Roman" panose="02020603050405020304" pitchFamily="18" charset="0"/>
+              </a:rPr>
+              <a:t>wtpt</a:t>
+            </a:r>
+            <a:r>
+              <a:rPr lang="zh-TW" altLang="en-US" sz="2000" dirty="0">
+                <a:latin typeface="Times New Roman" panose="02020603050405020304" pitchFamily="18" charset="0"/>
+                <a:ea typeface="標楷體" panose="03000509000000000000" pitchFamily="65" charset="-120"/>
+                <a:cs typeface="Times New Roman" panose="02020603050405020304" pitchFamily="18" charset="0"/>
+              </a:rPr>
+              <a:t> </a:t>
+            </a:r>
+            <a:r>
+              <a:rPr lang="en-US" altLang="zh-TW" sz="2000" dirty="0">
+                <a:latin typeface="Times New Roman" panose="02020603050405020304" pitchFamily="18" charset="0"/>
+                <a:ea typeface="標楷體" panose="03000509000000000000" pitchFamily="65" charset="-120"/>
+                <a:cs typeface="Times New Roman" panose="02020603050405020304" pitchFamily="18" charset="0"/>
+              </a:rPr>
+              <a:t>(</a:t>
+            </a:r>
+            <a:r>
+              <a:rPr lang="en-US" altLang="zh-TW" sz="2000" dirty="0">
+                <a:solidFill>
+                  <a:schemeClr val="tx1"/>
+                </a:solidFill>
+                <a:latin typeface="Times New Roman" panose="02020603050405020304" pitchFamily="18" charset="0"/>
+                <a:ea typeface="標楷體" panose="03000509000000000000" pitchFamily="65" charset="-120"/>
+                <a:cs typeface="Times New Roman" panose="02020603050405020304" pitchFamily="18" charset="0"/>
+              </a:rPr>
+              <a:t>M</a:t>
+            </a:r>
+            <a:r>
+              <a:rPr lang="zh-TW" altLang="zh-TW" sz="2000" dirty="0">
+                <a:latin typeface="Times New Roman" panose="02020603050405020304" pitchFamily="18" charset="0"/>
+                <a:ea typeface="標楷體" panose="03000509000000000000" pitchFamily="65" charset="-120"/>
+                <a:cs typeface="Times New Roman" panose="02020603050405020304" pitchFamily="18" charset="0"/>
+              </a:rPr>
+              <a:t>edia WhitePoint</a:t>
+            </a:r>
+            <a:r>
+              <a:rPr lang="en-US" altLang="zh-TW" sz="2000" dirty="0">
+                <a:latin typeface="Times New Roman" panose="02020603050405020304" pitchFamily="18" charset="0"/>
+                <a:ea typeface="標楷體" panose="03000509000000000000" pitchFamily="65" charset="-120"/>
+                <a:cs typeface="Times New Roman" panose="02020603050405020304" pitchFamily="18" charset="0"/>
+              </a:rPr>
+              <a:t>)</a:t>
+            </a:r>
+          </a:p>
+          <a:p>
+            <a:pPr lvl="1">
+              <a:lnSpc>
+                <a:spcPct val="150000"/>
+              </a:lnSpc>
+            </a:pPr>
+            <a:r>
+              <a:rPr lang="zh-TW" altLang="zh-TW" sz="1600" dirty="0">
+                <a:latin typeface="Times New Roman" panose="02020603050405020304" pitchFamily="18" charset="0"/>
+                <a:ea typeface="標楷體" panose="03000509000000000000" pitchFamily="65" charset="-120"/>
+                <a:cs typeface="Times New Roman" panose="02020603050405020304" pitchFamily="18" charset="0"/>
+              </a:rPr>
+              <a:t>描述該 Profile 所代表媒體白點的 XYZ 色度</a:t>
+            </a:r>
+            <a:r>
+              <a:rPr lang="zh-TW" altLang="en-US" sz="1600" dirty="0">
+                <a:latin typeface="Times New Roman" panose="02020603050405020304" pitchFamily="18" charset="0"/>
+                <a:ea typeface="標楷體" panose="03000509000000000000" pitchFamily="65" charset="-120"/>
+                <a:cs typeface="Times New Roman" panose="02020603050405020304" pitchFamily="18" charset="0"/>
+              </a:rPr>
+              <a:t>資訊</a:t>
+            </a:r>
+            <a:endParaRPr lang="en-US" altLang="zh-TW" sz="2000" dirty="0">
+              <a:latin typeface="Times New Roman" panose="02020603050405020304" pitchFamily="18" charset="0"/>
+              <a:ea typeface="標楷體" panose="03000509000000000000" pitchFamily="65" charset="-120"/>
+              <a:cs typeface="Times New Roman" panose="02020603050405020304" pitchFamily="18" charset="0"/>
+            </a:endParaRPr>
+          </a:p>
+          <a:p>
             <a:pPr marL="457200" lvl="1" indent="-406400">
               <a:lnSpc>
                 <a:spcPct val="150000"/>
@@ -20881,238 +19972,9 @@
                 <a:ea typeface="標楷體" panose="03000509000000000000" pitchFamily="65" charset="-120"/>
                 <a:cs typeface="Times New Roman" panose="02020603050405020304" pitchFamily="18" charset="0"/>
               </a:rPr>
-              <a:t>表示。</a:t>
+              <a:t>表示</a:t>
             </a:r>
             <a:endParaRPr lang="en-US" altLang="zh-TW" sz="1600" dirty="0">
-              <a:latin typeface="Times New Roman" panose="02020603050405020304" pitchFamily="18" charset="0"/>
-              <a:ea typeface="標楷體" panose="03000509000000000000" pitchFamily="65" charset="-120"/>
-              <a:cs typeface="Times New Roman" panose="02020603050405020304" pitchFamily="18" charset="0"/>
-            </a:endParaRPr>
-          </a:p>
-          <a:p>
-            <a:pPr>
-              <a:lnSpc>
-                <a:spcPct val="150000"/>
-              </a:lnSpc>
-            </a:pPr>
-            <a:r>
-              <a:rPr lang="en-US" altLang="zh-TW" sz="2000" dirty="0" err="1">
-                <a:latin typeface="Times New Roman" panose="02020603050405020304" pitchFamily="18" charset="0"/>
-                <a:ea typeface="標楷體" panose="03000509000000000000" pitchFamily="65" charset="-120"/>
-                <a:cs typeface="Times New Roman" panose="02020603050405020304" pitchFamily="18" charset="0"/>
-              </a:rPr>
-              <a:t>wtpt</a:t>
-            </a:r>
-            <a:r>
-              <a:rPr lang="zh-TW" altLang="en-US" sz="2000" dirty="0">
-                <a:latin typeface="Times New Roman" panose="02020603050405020304" pitchFamily="18" charset="0"/>
-                <a:ea typeface="標楷體" panose="03000509000000000000" pitchFamily="65" charset="-120"/>
-                <a:cs typeface="Times New Roman" panose="02020603050405020304" pitchFamily="18" charset="0"/>
-              </a:rPr>
-              <a:t> </a:t>
-            </a:r>
-            <a:r>
-              <a:rPr lang="en-US" altLang="zh-TW" sz="2000" dirty="0">
-                <a:latin typeface="Times New Roman" panose="02020603050405020304" pitchFamily="18" charset="0"/>
-                <a:ea typeface="標楷體" panose="03000509000000000000" pitchFamily="65" charset="-120"/>
-                <a:cs typeface="Times New Roman" panose="02020603050405020304" pitchFamily="18" charset="0"/>
-              </a:rPr>
-              <a:t>(</a:t>
-            </a:r>
-            <a:r>
-              <a:rPr lang="en-US" altLang="zh-TW" sz="2000" dirty="0">
-                <a:solidFill>
-                  <a:schemeClr val="tx1"/>
-                </a:solidFill>
-                <a:latin typeface="Times New Roman" panose="02020603050405020304" pitchFamily="18" charset="0"/>
-                <a:ea typeface="標楷體" panose="03000509000000000000" pitchFamily="65" charset="-120"/>
-                <a:cs typeface="Times New Roman" panose="02020603050405020304" pitchFamily="18" charset="0"/>
-              </a:rPr>
-              <a:t>M</a:t>
-            </a:r>
-            <a:r>
-              <a:rPr lang="zh-TW" altLang="zh-TW" sz="2000" dirty="0">
-                <a:latin typeface="Times New Roman" panose="02020603050405020304" pitchFamily="18" charset="0"/>
-                <a:ea typeface="標楷體" panose="03000509000000000000" pitchFamily="65" charset="-120"/>
-                <a:cs typeface="Times New Roman" panose="02020603050405020304" pitchFamily="18" charset="0"/>
-              </a:rPr>
-              <a:t>edia WhitePoint</a:t>
-            </a:r>
-            <a:r>
-              <a:rPr lang="en-US" altLang="zh-TW" sz="2000" dirty="0">
-                <a:latin typeface="Times New Roman" panose="02020603050405020304" pitchFamily="18" charset="0"/>
-                <a:ea typeface="標楷體" panose="03000509000000000000" pitchFamily="65" charset="-120"/>
-                <a:cs typeface="Times New Roman" panose="02020603050405020304" pitchFamily="18" charset="0"/>
-              </a:rPr>
-              <a:t>)</a:t>
-            </a:r>
-          </a:p>
-          <a:p>
-            <a:pPr lvl="1">
-              <a:lnSpc>
-                <a:spcPct val="150000"/>
-              </a:lnSpc>
-            </a:pPr>
-            <a:r>
-              <a:rPr lang="zh-TW" altLang="zh-TW" sz="1600" dirty="0">
-                <a:latin typeface="Times New Roman" panose="02020603050405020304" pitchFamily="18" charset="0"/>
-                <a:ea typeface="標楷體" panose="03000509000000000000" pitchFamily="65" charset="-120"/>
-                <a:cs typeface="Times New Roman" panose="02020603050405020304" pitchFamily="18" charset="0"/>
-              </a:rPr>
-              <a:t>描述該 Profile 所代表媒體白點的 XYZ 色度</a:t>
-            </a:r>
-            <a:r>
-              <a:rPr lang="zh-TW" altLang="en-US" sz="1600" dirty="0">
-                <a:latin typeface="Times New Roman" panose="02020603050405020304" pitchFamily="18" charset="0"/>
-                <a:ea typeface="標楷體" panose="03000509000000000000" pitchFamily="65" charset="-120"/>
-                <a:cs typeface="Times New Roman" panose="02020603050405020304" pitchFamily="18" charset="0"/>
-              </a:rPr>
-              <a:t>資訊</a:t>
-            </a:r>
-            <a:endParaRPr lang="en-US" altLang="zh-TW" sz="2000" dirty="0">
-              <a:latin typeface="Times New Roman" panose="02020603050405020304" pitchFamily="18" charset="0"/>
-              <a:ea typeface="標楷體" panose="03000509000000000000" pitchFamily="65" charset="-120"/>
-              <a:cs typeface="Times New Roman" panose="02020603050405020304" pitchFamily="18" charset="0"/>
-            </a:endParaRPr>
-          </a:p>
-          <a:p>
-            <a:r>
-              <a:rPr lang="en-US" altLang="zh-TW" sz="2000" dirty="0">
-                <a:latin typeface="Times New Roman" panose="02020603050405020304" pitchFamily="18" charset="0"/>
-                <a:ea typeface="標楷體" panose="03000509000000000000" pitchFamily="65" charset="-120"/>
-                <a:cs typeface="Times New Roman" panose="02020603050405020304" pitchFamily="18" charset="0"/>
-              </a:rPr>
-              <a:t>d</a:t>
-            </a:r>
-            <a:r>
-              <a:rPr lang="zh-TW" altLang="zh-TW" sz="2000" dirty="0">
-                <a:latin typeface="Times New Roman" panose="02020603050405020304" pitchFamily="18" charset="0"/>
-                <a:ea typeface="標楷體" panose="03000509000000000000" pitchFamily="65" charset="-120"/>
-                <a:cs typeface="Times New Roman" panose="02020603050405020304" pitchFamily="18" charset="0"/>
-              </a:rPr>
-              <a:t>esc</a:t>
-            </a:r>
-            <a:r>
-              <a:rPr lang="zh-TW" altLang="en-US" sz="2000" dirty="0">
-                <a:latin typeface="Times New Roman" panose="02020603050405020304" pitchFamily="18" charset="0"/>
-                <a:ea typeface="標楷體" panose="03000509000000000000" pitchFamily="65" charset="-120"/>
-                <a:cs typeface="Times New Roman" panose="02020603050405020304" pitchFamily="18" charset="0"/>
-              </a:rPr>
-              <a:t> </a:t>
-            </a:r>
-            <a:r>
-              <a:rPr lang="en-US" altLang="zh-TW" sz="2000" dirty="0">
-                <a:latin typeface="Times New Roman" panose="02020603050405020304" pitchFamily="18" charset="0"/>
-                <a:ea typeface="標楷體" panose="03000509000000000000" pitchFamily="65" charset="-120"/>
-                <a:cs typeface="Times New Roman" panose="02020603050405020304" pitchFamily="18" charset="0"/>
-              </a:rPr>
-              <a:t>(</a:t>
-            </a:r>
-            <a:r>
-              <a:rPr lang="zh-TW" altLang="zh-TW" sz="2000" dirty="0">
-                <a:latin typeface="Times New Roman" panose="02020603050405020304" pitchFamily="18" charset="0"/>
-                <a:ea typeface="標楷體" panose="03000509000000000000" pitchFamily="65" charset="-120"/>
-                <a:cs typeface="Times New Roman" panose="02020603050405020304" pitchFamily="18" charset="0"/>
-              </a:rPr>
-              <a:t>Profile Description</a:t>
-            </a:r>
-            <a:r>
-              <a:rPr lang="en-US" altLang="zh-TW" sz="2000" dirty="0">
-                <a:latin typeface="Times New Roman" panose="02020603050405020304" pitchFamily="18" charset="0"/>
-                <a:ea typeface="標楷體" panose="03000509000000000000" pitchFamily="65" charset="-120"/>
-                <a:cs typeface="Times New Roman" panose="02020603050405020304" pitchFamily="18" charset="0"/>
-              </a:rPr>
-              <a:t>)</a:t>
-            </a:r>
-          </a:p>
-          <a:p>
-            <a:pPr lvl="1">
-              <a:lnSpc>
-                <a:spcPct val="150000"/>
-              </a:lnSpc>
-            </a:pPr>
-            <a:r>
-              <a:rPr lang="zh-TW" altLang="zh-TW" sz="1600" dirty="0">
-                <a:latin typeface="Times New Roman" panose="02020603050405020304" pitchFamily="18" charset="0"/>
-                <a:ea typeface="標楷體" panose="03000509000000000000" pitchFamily="65" charset="-120"/>
-                <a:cs typeface="Times New Roman" panose="02020603050405020304" pitchFamily="18" charset="0"/>
-              </a:rPr>
-              <a:t>描述這個 ICC Profile 的名稱或識別資訊</a:t>
-            </a:r>
-            <a:endParaRPr lang="en-US" altLang="zh-TW" sz="1600" dirty="0">
-              <a:latin typeface="Times New Roman" panose="02020603050405020304" pitchFamily="18" charset="0"/>
-              <a:ea typeface="標楷體" panose="03000509000000000000" pitchFamily="65" charset="-120"/>
-              <a:cs typeface="Times New Roman" panose="02020603050405020304" pitchFamily="18" charset="0"/>
-            </a:endParaRPr>
-          </a:p>
-          <a:p>
-            <a:r>
-              <a:rPr lang="en-US" altLang="zh-TW" sz="2000" dirty="0">
-                <a:latin typeface="Times New Roman" panose="02020603050405020304" pitchFamily="18" charset="0"/>
-                <a:ea typeface="標楷體" panose="03000509000000000000" pitchFamily="65" charset="-120"/>
-                <a:cs typeface="Times New Roman" panose="02020603050405020304" pitchFamily="18" charset="0"/>
-              </a:rPr>
-              <a:t>c</a:t>
-            </a:r>
-            <a:r>
-              <a:rPr lang="zh-TW" altLang="zh-TW" sz="2000" dirty="0">
-                <a:latin typeface="Times New Roman" panose="02020603050405020304" pitchFamily="18" charset="0"/>
-                <a:ea typeface="標楷體" panose="03000509000000000000" pitchFamily="65" charset="-120"/>
-                <a:cs typeface="Times New Roman" panose="02020603050405020304" pitchFamily="18" charset="0"/>
-              </a:rPr>
-              <a:t>prt</a:t>
-            </a:r>
-            <a:r>
-              <a:rPr lang="zh-TW" altLang="en-US" sz="2000" dirty="0">
-                <a:latin typeface="Times New Roman" panose="02020603050405020304" pitchFamily="18" charset="0"/>
-                <a:ea typeface="標楷體" panose="03000509000000000000" pitchFamily="65" charset="-120"/>
-                <a:cs typeface="Times New Roman" panose="02020603050405020304" pitchFamily="18" charset="0"/>
-              </a:rPr>
-              <a:t> </a:t>
-            </a:r>
-            <a:r>
-              <a:rPr lang="en-US" altLang="zh-TW" sz="2000" dirty="0">
-                <a:latin typeface="Times New Roman" panose="02020603050405020304" pitchFamily="18" charset="0"/>
-                <a:ea typeface="標楷體" panose="03000509000000000000" pitchFamily="65" charset="-120"/>
-                <a:cs typeface="Times New Roman" panose="02020603050405020304" pitchFamily="18" charset="0"/>
-              </a:rPr>
-              <a:t>(</a:t>
-            </a:r>
-            <a:r>
-              <a:rPr lang="zh-TW" altLang="zh-TW" sz="2000" dirty="0">
-                <a:latin typeface="Times New Roman" panose="02020603050405020304" pitchFamily="18" charset="0"/>
-                <a:ea typeface="標楷體" panose="03000509000000000000" pitchFamily="65" charset="-120"/>
-                <a:cs typeface="Times New Roman" panose="02020603050405020304" pitchFamily="18" charset="0"/>
-              </a:rPr>
-              <a:t>Copyright</a:t>
-            </a:r>
-            <a:r>
-              <a:rPr lang="en-US" altLang="zh-TW" sz="2000" dirty="0">
-                <a:latin typeface="Times New Roman" panose="02020603050405020304" pitchFamily="18" charset="0"/>
-                <a:ea typeface="標楷體" panose="03000509000000000000" pitchFamily="65" charset="-120"/>
-                <a:cs typeface="Times New Roman" panose="02020603050405020304" pitchFamily="18" charset="0"/>
-              </a:rPr>
-              <a:t>)</a:t>
-            </a:r>
-          </a:p>
-          <a:p>
-            <a:pPr lvl="1">
-              <a:lnSpc>
-                <a:spcPct val="150000"/>
-              </a:lnSpc>
-            </a:pPr>
-            <a:r>
-              <a:rPr lang="zh-TW" altLang="zh-TW" sz="1600" dirty="0">
-                <a:latin typeface="Times New Roman" panose="02020603050405020304" pitchFamily="18" charset="0"/>
-                <a:ea typeface="標楷體" panose="03000509000000000000" pitchFamily="65" charset="-120"/>
-                <a:cs typeface="Times New Roman" panose="02020603050405020304" pitchFamily="18" charset="0"/>
-              </a:rPr>
-              <a:t>記錄這個 ICC Profile 的版權資訊</a:t>
-            </a:r>
-            <a:endParaRPr lang="zh-TW" altLang="en-US" sz="1600" dirty="0">
-              <a:solidFill>
-                <a:schemeClr val="tx1"/>
-              </a:solidFill>
               <a:latin typeface="Times New Roman" panose="02020603050405020304" pitchFamily="18" charset="0"/>
               <a:ea typeface="標楷體" panose="03000509000000000000" pitchFamily="65" charset="-120"/>
               <a:cs typeface="Times New Roman" panose="02020603050405020304" pitchFamily="18" charset="0"/>

--- a/ICCPROFILE_0923.pptx
+++ b/ICCPROFILE_0923.pptx
@@ -5,7 +5,7 @@
     <p:sldMasterId id="2147483658" r:id="rId1"/>
   </p:sldMasterIdLst>
   <p:notesMasterIdLst>
-    <p:notesMasterId r:id="rId17"/>
+    <p:notesMasterId r:id="rId18"/>
   </p:notesMasterIdLst>
   <p:sldIdLst>
     <p:sldId id="277" r:id="rId2"/>
@@ -18,11 +18,12 @@
     <p:sldId id="2002" r:id="rId9"/>
     <p:sldId id="2005" r:id="rId10"/>
     <p:sldId id="2006" r:id="rId11"/>
-    <p:sldId id="2008" r:id="rId12"/>
-    <p:sldId id="2013" r:id="rId13"/>
-    <p:sldId id="2010" r:id="rId14"/>
-    <p:sldId id="2014" r:id="rId15"/>
-    <p:sldId id="286" r:id="rId16"/>
+    <p:sldId id="2015" r:id="rId12"/>
+    <p:sldId id="2008" r:id="rId13"/>
+    <p:sldId id="2013" r:id="rId14"/>
+    <p:sldId id="2010" r:id="rId15"/>
+    <p:sldId id="2014" r:id="rId16"/>
+    <p:sldId id="286" r:id="rId17"/>
   </p:sldIdLst>
   <p:sldSz cx="9906000" cy="6858000" type="A4"/>
   <p:notesSz cx="7315200" cy="9601200"/>
@@ -282,6 +283,7 @@
             <p14:sldId id="2002"/>
             <p14:sldId id="2005"/>
             <p14:sldId id="2006"/>
+            <p14:sldId id="2015"/>
             <p14:sldId id="2008"/>
           </p14:sldIdLst>
         </p14:section>
@@ -1697,9 +1699,18 @@
           <a:bodyPr/>
           <a:lstStyle/>
           <a:p>
+            <a:pPr marL="0" indent="0"/>
             <a:r>
               <a:rPr lang="zh-TW" altLang="en-US" dirty="0"/>
-              <a:t>最終結果得到縮放比例與</a:t>
+              <a:t>最終結果</a:t>
+            </a:r>
+            <a:r>
+              <a:rPr lang="en-US" altLang="zh-TW" dirty="0"/>
+              <a:t>0</a:t>
+            </a:r>
+            <a:r>
+              <a:rPr lang="zh-TW" altLang="en-US" dirty="0"/>
+              <a:t>得到縮放比例與</a:t>
             </a:r>
             <a:r>
               <a:rPr lang="en-US" altLang="zh-TW" dirty="0"/>
@@ -1883,7 +1894,7 @@
                 <a:cs typeface="Times New Roman"/>
                 <a:sym typeface="Times New Roman"/>
               </a:rPr>
-              <a:t>11</a:t>
+              <a:t>12</a:t>
             </a:fld>
             <a:endParaRPr lang="en-US" sz="2000" b="0" i="0" u="none" strike="noStrike" cap="none" dirty="0">
               <a:solidFill>
@@ -2017,7 +2028,7 @@
                 <a:cs typeface="Times New Roman"/>
                 <a:sym typeface="Times New Roman"/>
               </a:rPr>
-              <a:t>12</a:t>
+              <a:t>13</a:t>
             </a:fld>
             <a:endParaRPr lang="en-US" sz="2000" b="0" i="0" u="none" strike="noStrike" cap="none" dirty="0">
               <a:solidFill>
@@ -2291,7 +2302,7 @@
                 <a:cs typeface="Times New Roman"/>
                 <a:sym typeface="Times New Roman"/>
               </a:rPr>
-              <a:t>13</a:t>
+              <a:t>14</a:t>
             </a:fld>
             <a:endParaRPr lang="en-US" sz="2000" b="0" i="0" u="none" strike="noStrike" cap="none" dirty="0">
               <a:solidFill>
@@ -2443,7 +2454,7 @@
                 <a:cs typeface="Times New Roman"/>
                 <a:sym typeface="Times New Roman"/>
               </a:rPr>
-              <a:t>14</a:t>
+              <a:t>15</a:t>
             </a:fld>
             <a:endParaRPr lang="en-US" sz="2000" b="0" i="0" u="none" strike="noStrike" cap="none" dirty="0">
               <a:solidFill>
@@ -2538,7 +2549,7 @@
           <a:p>
             <a:fld id="{F5753A29-9D77-4C26-8BEC-432FE5D4B0A4}" type="slidenum">
               <a:rPr lang="en-US" altLang="zh-TW" smtClean="0"/>
-              <a:t>15</a:t>
+              <a:t>16</a:t>
             </a:fld>
             <a:endParaRPr lang="en-US" altLang="zh-TW" dirty="0"/>
           </a:p>
@@ -3814,8 +3825,8 @@
         </p:nvSpPr>
         <p:spPr/>
       </p:sp>
-      <mc:AlternateContent xmlns:mc="http://schemas.openxmlformats.org/markup-compatibility/2006" xmlns:a14="http://schemas.microsoft.com/office/drawing/2010/main">
-        <mc:Choice Requires="a14">
+      <mc:AlternateContent xmlns:mc="http://schemas.openxmlformats.org/markup-compatibility/2006">
+        <mc:Choice xmlns:a14="http://schemas.microsoft.com/office/drawing/2010/main" Requires="a14">
           <p:sp>
             <p:nvSpPr>
               <p:cNvPr id="3" name="備忘稿版面配置區 2">
@@ -3837,6 +3848,7 @@
               <a:bodyPr/>
               <a:lstStyle/>
               <a:p>
+                <a:pPr marL="0" indent="0"/>
                 <a:r>
                   <a:rPr lang="zh-TW" altLang="zh-TW" dirty="0"/>
                   <a:t>此 </a:t>
@@ -3877,11 +3889,51 @@
                   <a:rPr lang="zh-TW" altLang="en-US" dirty="0"/>
                   <a:t>亮度</a:t>
                 </a:r>
+                <a:endParaRPr lang="en-US" altLang="zh-TW" dirty="0"/>
+              </a:p>
+              <a:p>
+                <a:pPr marL="0" indent="0"/>
+                <a:r>
+                  <a:rPr lang="zh-TW" altLang="en-US" dirty="0"/>
+                  <a:t>白點在</a:t>
+                </a:r>
+                <a:r>
+                  <a:rPr lang="en-US" altLang="zh-TW" dirty="0"/>
+                  <a:t>ICC Profile v4</a:t>
+                </a:r>
+                <a:r>
+                  <a:rPr lang="zh-TW" altLang="en-US" dirty="0"/>
+                  <a:t>中視使用</a:t>
+                </a:r>
+                <a:r>
+                  <a:rPr lang="en-US" altLang="zh-TW" dirty="0"/>
+                  <a:t>D50</a:t>
+                </a:r>
+                <a:r>
+                  <a:rPr lang="zh-TW" altLang="en-US" dirty="0"/>
+                  <a:t>作為標準，白點要多少取決於你要求的標準，像是要</a:t>
+                </a:r>
+                <a:r>
+                  <a:rPr lang="en-US" altLang="zh-TW" dirty="0"/>
+                  <a:t>6500K+sRGB</a:t>
+                </a:r>
+                <a:r>
+                  <a:rPr lang="zh-TW" altLang="en-US" dirty="0"/>
+                  <a:t>標準那就會是</a:t>
+                </a:r>
+                <a:r>
+                  <a:rPr lang="en-US" altLang="zh-TW" dirty="0"/>
+                  <a:t>D65</a:t>
+                </a:r>
+              </a:p>
+              <a:p>
+                <a:pPr marL="0" indent="0"/>
+                <a:endParaRPr lang="zh-TW" altLang="en-US" dirty="0"/>
               </a:p>
             </p:txBody>
           </p:sp>
         </mc:Choice>
-        <mc:Fallback xmlns="">
+        <mc:Fallback>
           <p:sp>
             <p:nvSpPr>
               <p:cNvPr id="3" name="備忘稿版面配置區 2">
@@ -3903,6 +3955,7 @@
               <a:bodyPr/>
               <a:lstStyle/>
               <a:p>
+                <a:pPr marL="0" indent="0"/>
                 <a:r>
                   <a:rPr lang="zh-TW" altLang="zh-TW" dirty="0"/>
                   <a:t>此 </a:t>
@@ -3912,7 +3965,7 @@
                     <a:solidFill>
                       <a:schemeClr val="dk1"/>
                     </a:solidFill>
-                    <a:latin typeface="Times New Roman"/>
+                    <a:latin typeface="Cambria Math" panose="02040503050406030204" pitchFamily="18" charset="0"/>
                     <a:ea typeface="Times New Roman"/>
                     <a:cs typeface="Times New Roman"/>
                     <a:sym typeface="Times New Roman"/>
@@ -3924,7 +3977,7 @@
                     <a:solidFill>
                       <a:schemeClr val="dk1"/>
                     </a:solidFill>
-                    <a:latin typeface="Times New Roman"/>
+                    <a:latin typeface="Cambria Math" panose="02040503050406030204" pitchFamily="18" charset="0"/>
                     <a:ea typeface="Times New Roman"/>
                     <a:cs typeface="Times New Roman"/>
                     <a:sym typeface="Times New Roman"/>
@@ -3939,6 +3992,46 @@
                   <a:rPr lang="zh-TW" altLang="en-US" dirty="0"/>
                   <a:t>亮度</a:t>
                 </a:r>
+                <a:endParaRPr lang="en-US" altLang="zh-TW" dirty="0"/>
+              </a:p>
+              <a:p>
+                <a:pPr marL="0" indent="0"/>
+                <a:r>
+                  <a:rPr lang="zh-TW" altLang="en-US" dirty="0"/>
+                  <a:t>白點在</a:t>
+                </a:r>
+                <a:r>
+                  <a:rPr lang="en-US" altLang="zh-TW" dirty="0"/>
+                  <a:t>ICC Profile v4</a:t>
+                </a:r>
+                <a:r>
+                  <a:rPr lang="zh-TW" altLang="en-US" dirty="0"/>
+                  <a:t>中視使用</a:t>
+                </a:r>
+                <a:r>
+                  <a:rPr lang="en-US" altLang="zh-TW" dirty="0"/>
+                  <a:t>D50</a:t>
+                </a:r>
+                <a:r>
+                  <a:rPr lang="zh-TW" altLang="en-US" dirty="0"/>
+                  <a:t>作為標準，白點要多少取決於你要求的標準，像是要</a:t>
+                </a:r>
+                <a:r>
+                  <a:rPr lang="en-US" altLang="zh-TW" dirty="0"/>
+                  <a:t>6500K+sRGB</a:t>
+                </a:r>
+                <a:r>
+                  <a:rPr lang="zh-TW" altLang="en-US" dirty="0"/>
+                  <a:t>標準那就會是</a:t>
+                </a:r>
+                <a:r>
+                  <a:rPr lang="en-US" altLang="zh-TW" dirty="0"/>
+                  <a:t>D65</a:t>
+                </a:r>
+              </a:p>
+              <a:p>
+                <a:pPr marL="0" indent="0"/>
+                <a:endParaRPr lang="zh-TW" altLang="en-US" dirty="0"/>
               </a:p>
             </p:txBody>
           </p:sp>
@@ -4073,6 +4166,7 @@
           <a:bodyPr/>
           <a:lstStyle/>
           <a:p>
+            <a:pPr marL="0" indent="0"/>
             <a:r>
               <a:rPr lang="zh-TW" altLang="en-US" dirty="0"/>
               <a:t>接著我們將</a:t>
@@ -9267,7 +9361,7 @@
         </p:blipFill>
         <p:spPr>
           <a:xfrm>
-            <a:off x="3943770" y="2002315"/>
+            <a:off x="1291771" y="2853149"/>
             <a:ext cx="2018460" cy="1901107"/>
           </a:xfrm>
           <a:prstGeom prst="rect">
@@ -9297,7 +9391,7 @@
         </p:blipFill>
         <p:spPr>
           <a:xfrm>
-            <a:off x="2834217" y="4093208"/>
+            <a:off x="3880984" y="2226214"/>
             <a:ext cx="4406427" cy="1480108"/>
           </a:xfrm>
           <a:prstGeom prst="rect">
@@ -9615,6 +9709,36 @@
           </a:p>
         </p:txBody>
       </p:sp>
+      <p:pic>
+        <p:nvPicPr>
+          <p:cNvPr id="13" name="圖片 12">
+            <a:extLst>
+              <a:ext uri="{FF2B5EF4-FFF2-40B4-BE49-F238E27FC236}">
+                <a16:creationId xmlns:a16="http://schemas.microsoft.com/office/drawing/2014/main" id="{BD19C367-BE8F-B4C7-634F-0FC177DCF5AF}"/>
+              </a:ext>
+            </a:extLst>
+          </p:cNvPr>
+          <p:cNvPicPr>
+            <a:picLocks noChangeAspect="1"/>
+          </p:cNvPicPr>
+          <p:nvPr/>
+        </p:nvPicPr>
+        <p:blipFill>
+          <a:blip r:embed="rId5"/>
+          <a:stretch>
+            <a:fillRect/>
+          </a:stretch>
+        </p:blipFill>
+        <p:spPr>
+          <a:xfrm>
+            <a:off x="3950299" y="4084053"/>
+            <a:ext cx="4267796" cy="771633"/>
+          </a:xfrm>
+          <a:prstGeom prst="rect">
+            <a:avLst/>
+          </a:prstGeom>
+        </p:spPr>
+      </p:pic>
     </p:spTree>
     <p:extLst>
       <p:ext uri="{BB962C8B-B14F-4D97-AF65-F5344CB8AC3E}">
@@ -9629,6 +9753,723 @@
 </file>
 
 <file path=ppt/slides/slide11.xml><?xml version="1.0" encoding="utf-8"?>
+<p:sld xmlns:a="http://schemas.openxmlformats.org/drawingml/2006/main" xmlns:r="http://schemas.openxmlformats.org/officeDocument/2006/relationships" xmlns:p="http://schemas.openxmlformats.org/presentationml/2006/main">
+  <p:cSld>
+    <p:spTree>
+      <p:nvGrpSpPr>
+        <p:cNvPr id="1" name=""/>
+        <p:cNvGrpSpPr/>
+        <p:nvPr/>
+      </p:nvGrpSpPr>
+      <p:grpSpPr>
+        <a:xfrm>
+          <a:off x="0" y="0"/>
+          <a:ext cx="0" cy="0"/>
+          <a:chOff x="0" y="0"/>
+          <a:chExt cx="0" cy="0"/>
+        </a:xfrm>
+      </p:grpSpPr>
+      <p:sp>
+        <p:nvSpPr>
+          <p:cNvPr id="5" name="標題 1">
+            <a:extLst>
+              <a:ext uri="{FF2B5EF4-FFF2-40B4-BE49-F238E27FC236}">
+                <a16:creationId xmlns:a16="http://schemas.microsoft.com/office/drawing/2014/main" id="{E90C9C8B-5EB4-1217-C440-D175A3726885}"/>
+              </a:ext>
+            </a:extLst>
+          </p:cNvPr>
+          <p:cNvSpPr>
+            <a:spLocks noGrp="1"/>
+          </p:cNvSpPr>
+          <p:nvPr>
+            <p:ph type="title"/>
+          </p:nvPr>
+        </p:nvSpPr>
+        <p:spPr>
+          <a:xfrm>
+            <a:off x="609602" y="609600"/>
+            <a:ext cx="8077200" cy="533400"/>
+          </a:xfrm>
+        </p:spPr>
+        <p:txBody>
+          <a:bodyPr/>
+          <a:lstStyle/>
+          <a:p>
+            <a:r>
+              <a:rPr lang="zh-TW" altLang="en-US" dirty="0">
+                <a:latin typeface="Times New Roman" panose="02020603050405020304" pitchFamily="18" charset="0"/>
+                <a:ea typeface="標楷體" panose="03000509000000000000" pitchFamily="65" charset="-120"/>
+                <a:cs typeface="Times New Roman" panose="02020603050405020304" pitchFamily="18" charset="0"/>
+              </a:rPr>
+              <a:t>本次進度</a:t>
+            </a:r>
+            <a:r>
+              <a:rPr lang="en-US" altLang="zh-TW" dirty="0">
+                <a:latin typeface="Times New Roman" panose="02020603050405020304" pitchFamily="18" charset="0"/>
+                <a:ea typeface="標楷體" panose="03000509000000000000" pitchFamily="65" charset="-120"/>
+                <a:cs typeface="Times New Roman" panose="02020603050405020304" pitchFamily="18" charset="0"/>
+              </a:rPr>
+              <a:t>:</a:t>
+            </a:r>
+            <a:r>
+              <a:rPr lang="zh-TW" altLang="zh-TW" dirty="0">
+                <a:latin typeface="Times New Roman" panose="02020603050405020304" pitchFamily="18" charset="0"/>
+                <a:ea typeface="標楷體" panose="03000509000000000000" pitchFamily="65" charset="-120"/>
+                <a:cs typeface="Times New Roman" panose="02020603050405020304" pitchFamily="18" charset="0"/>
+              </a:rPr>
+              <a:t> Display ICC Profile</a:t>
+            </a:r>
+            <a:r>
+              <a:rPr lang="zh-TW" altLang="en-US" dirty="0">
+                <a:latin typeface="Times New Roman" panose="02020603050405020304" pitchFamily="18" charset="0"/>
+                <a:ea typeface="標楷體" panose="03000509000000000000" pitchFamily="65" charset="-120"/>
+                <a:cs typeface="Times New Roman" panose="02020603050405020304" pitchFamily="18" charset="0"/>
+              </a:rPr>
+              <a:t> 結構</a:t>
+            </a:r>
+          </a:p>
+        </p:txBody>
+      </p:sp>
+      <p:sp>
+        <p:nvSpPr>
+          <p:cNvPr id="29" name="文字方塊 28">
+            <a:extLst>
+              <a:ext uri="{FF2B5EF4-FFF2-40B4-BE49-F238E27FC236}">
+                <a16:creationId xmlns:a16="http://schemas.microsoft.com/office/drawing/2014/main" id="{760342CA-0DBD-1A82-964B-91EFD4A59366}"/>
+              </a:ext>
+            </a:extLst>
+          </p:cNvPr>
+          <p:cNvSpPr txBox="1"/>
+          <p:nvPr/>
+        </p:nvSpPr>
+        <p:spPr>
+          <a:xfrm>
+            <a:off x="1642663" y="6396335"/>
+            <a:ext cx="7541682" cy="461665"/>
+          </a:xfrm>
+          <a:prstGeom prst="rect">
+            <a:avLst/>
+          </a:prstGeom>
+          <a:noFill/>
+        </p:spPr>
+        <p:txBody>
+          <a:bodyPr wrap="square">
+            <a:spAutoFit/>
+          </a:bodyPr>
+          <a:lstStyle/>
+          <a:p>
+            <a:r>
+              <a:rPr lang="en-US" altLang="zh-TW" sz="1200" b="1" dirty="0">
+                <a:latin typeface="Times New Roman" panose="02020603050405020304" pitchFamily="18" charset="0"/>
+                <a:ea typeface="標楷體" panose="03000509000000000000" pitchFamily="65" charset="-120"/>
+                <a:cs typeface="Times New Roman" panose="02020603050405020304" pitchFamily="18" charset="0"/>
+              </a:rPr>
+              <a:t>[]</a:t>
+            </a:r>
+            <a:r>
+              <a:rPr lang="en-US" altLang="zh-TW" sz="1200" dirty="0">
+                <a:latin typeface="Times New Roman" panose="02020603050405020304" pitchFamily="18" charset="0"/>
+                <a:ea typeface="標楷體" panose="03000509000000000000" pitchFamily="65" charset="-120"/>
+                <a:cs typeface="Times New Roman" panose="02020603050405020304" pitchFamily="18" charset="0"/>
+              </a:rPr>
+              <a:t> International Color Consortium, “ICC Technical Note 02-2003: </a:t>
+            </a:r>
+            <a:r>
+              <a:rPr lang="en-US" altLang="zh-TW" sz="1200" dirty="0" err="1">
+                <a:latin typeface="Times New Roman" panose="02020603050405020304" pitchFamily="18" charset="0"/>
+                <a:ea typeface="標楷體" panose="03000509000000000000" pitchFamily="65" charset="-120"/>
+                <a:cs typeface="Times New Roman" panose="02020603050405020304" pitchFamily="18" charset="0"/>
+              </a:rPr>
+              <a:t>Chadtag</a:t>
+            </a:r>
+            <a:r>
+              <a:rPr lang="en-US" altLang="zh-TW" sz="1200" dirty="0">
+                <a:latin typeface="Times New Roman" panose="02020603050405020304" pitchFamily="18" charset="0"/>
+                <a:ea typeface="標楷體" panose="03000509000000000000" pitchFamily="65" charset="-120"/>
+                <a:cs typeface="Times New Roman" panose="02020603050405020304" pitchFamily="18" charset="0"/>
+              </a:rPr>
+              <a:t> for conversion of D65 to D50 for use in profiles,” 2003. [Online]. Available: </a:t>
+            </a:r>
+            <a:r>
+              <a:rPr lang="en-US" altLang="zh-TW" sz="1200" dirty="0">
+                <a:latin typeface="Times New Roman" panose="02020603050405020304" pitchFamily="18" charset="0"/>
+                <a:ea typeface="標楷體" panose="03000509000000000000" pitchFamily="65" charset="-120"/>
+                <a:cs typeface="Times New Roman" panose="02020603050405020304" pitchFamily="18" charset="0"/>
+                <a:hlinkClick r:id="rId2"/>
+              </a:rPr>
+              <a:t>https://www.color.org/chadtag/</a:t>
+            </a:r>
+            <a:r>
+              <a:rPr lang="en-US" altLang="zh-TW" sz="1200" dirty="0">
+                <a:latin typeface="Times New Roman" panose="02020603050405020304" pitchFamily="18" charset="0"/>
+                <a:ea typeface="標楷體" panose="03000509000000000000" pitchFamily="65" charset="-120"/>
+                <a:cs typeface="Times New Roman" panose="02020603050405020304" pitchFamily="18" charset="0"/>
+              </a:rPr>
+              <a:t>. [Accessed: Sep. 24, 2026].</a:t>
+            </a:r>
+            <a:endParaRPr lang="zh-TW" altLang="en-US" sz="1200" dirty="0">
+              <a:latin typeface="Times New Roman" panose="02020603050405020304" pitchFamily="18" charset="0"/>
+              <a:ea typeface="標楷體" panose="03000509000000000000" pitchFamily="65" charset="-120"/>
+              <a:cs typeface="Times New Roman" panose="02020603050405020304" pitchFamily="18" charset="0"/>
+            </a:endParaRPr>
+          </a:p>
+        </p:txBody>
+      </p:sp>
+      <p:grpSp>
+        <p:nvGrpSpPr>
+          <p:cNvPr id="34" name="群組 33">
+            <a:extLst>
+              <a:ext uri="{FF2B5EF4-FFF2-40B4-BE49-F238E27FC236}">
+                <a16:creationId xmlns:a16="http://schemas.microsoft.com/office/drawing/2014/main" id="{559E75C4-3E10-1036-661A-A9CE73B5024F}"/>
+              </a:ext>
+            </a:extLst>
+          </p:cNvPr>
+          <p:cNvGrpSpPr/>
+          <p:nvPr/>
+        </p:nvGrpSpPr>
+        <p:grpSpPr>
+          <a:xfrm>
+            <a:off x="5212069" y="1265851"/>
+            <a:ext cx="4421307" cy="1281697"/>
+            <a:chOff x="5245935" y="1134042"/>
+            <a:chExt cx="4421307" cy="1281697"/>
+          </a:xfrm>
+        </p:grpSpPr>
+        <p:pic>
+          <p:nvPicPr>
+            <p:cNvPr id="28" name="圖片 27">
+              <a:extLst>
+                <a:ext uri="{FF2B5EF4-FFF2-40B4-BE49-F238E27FC236}">
+                  <a16:creationId xmlns:a16="http://schemas.microsoft.com/office/drawing/2014/main" id="{634B4B9F-1E2C-7276-D9F5-E79E878BC91B}"/>
+                </a:ext>
+              </a:extLst>
+            </p:cNvPr>
+            <p:cNvPicPr>
+              <a:picLocks noChangeAspect="1"/>
+            </p:cNvPicPr>
+            <p:nvPr/>
+          </p:nvPicPr>
+          <p:blipFill>
+            <a:blip r:embed="rId3"/>
+            <a:stretch>
+              <a:fillRect/>
+            </a:stretch>
+          </p:blipFill>
+          <p:spPr>
+            <a:xfrm>
+              <a:off x="5585827" y="1449088"/>
+              <a:ext cx="4081415" cy="966651"/>
+            </a:xfrm>
+            <a:prstGeom prst="rect">
+              <a:avLst/>
+            </a:prstGeom>
+          </p:spPr>
+        </p:pic>
+        <p:sp>
+          <p:nvSpPr>
+            <p:cNvPr id="30" name="矩形 29">
+              <a:extLst>
+                <a:ext uri="{FF2B5EF4-FFF2-40B4-BE49-F238E27FC236}">
+                  <a16:creationId xmlns:a16="http://schemas.microsoft.com/office/drawing/2014/main" id="{8AFDBE67-1AB0-0B47-9D0E-863589F97A7A}"/>
+                </a:ext>
+              </a:extLst>
+            </p:cNvPr>
+            <p:cNvSpPr/>
+            <p:nvPr/>
+          </p:nvSpPr>
+          <p:spPr>
+            <a:xfrm>
+              <a:off x="5274733" y="1134042"/>
+              <a:ext cx="4392509" cy="1226905"/>
+            </a:xfrm>
+            <a:prstGeom prst="rect">
+              <a:avLst/>
+            </a:prstGeom>
+            <a:noFill/>
+            <a:ln>
+              <a:solidFill>
+                <a:schemeClr val="tx1"/>
+              </a:solidFill>
+            </a:ln>
+          </p:spPr>
+          <p:style>
+            <a:lnRef idx="2">
+              <a:schemeClr val="accent1">
+                <a:shade val="15000"/>
+              </a:schemeClr>
+            </a:lnRef>
+            <a:fillRef idx="1">
+              <a:schemeClr val="accent1"/>
+            </a:fillRef>
+            <a:effectRef idx="0">
+              <a:schemeClr val="accent1"/>
+            </a:effectRef>
+            <a:fontRef idx="minor">
+              <a:schemeClr val="lt1"/>
+            </a:fontRef>
+          </p:style>
+          <p:txBody>
+            <a:bodyPr rtlCol="0" anchor="ctr"/>
+            <a:lstStyle/>
+            <a:p>
+              <a:pPr algn="ctr"/>
+              <a:endParaRPr lang="zh-TW" altLang="en-US"/>
+            </a:p>
+          </p:txBody>
+        </p:sp>
+        <p:sp>
+          <p:nvSpPr>
+            <p:cNvPr id="32" name="矩形 31">
+              <a:extLst>
+                <a:ext uri="{FF2B5EF4-FFF2-40B4-BE49-F238E27FC236}">
+                  <a16:creationId xmlns:a16="http://schemas.microsoft.com/office/drawing/2014/main" id="{FB12353F-A6C5-3C6E-5EFF-1AE079019357}"/>
+                </a:ext>
+              </a:extLst>
+            </p:cNvPr>
+            <p:cNvSpPr/>
+            <p:nvPr/>
+          </p:nvSpPr>
+          <p:spPr>
+            <a:xfrm>
+              <a:off x="5245935" y="1143000"/>
+              <a:ext cx="2383986" cy="338554"/>
+            </a:xfrm>
+            <a:prstGeom prst="rect">
+              <a:avLst/>
+            </a:prstGeom>
+            <a:noFill/>
+          </p:spPr>
+          <p:txBody>
+            <a:bodyPr wrap="none" lIns="91440" tIns="45720" rIns="91440" bIns="45720">
+              <a:spAutoFit/>
+            </a:bodyPr>
+            <a:lstStyle/>
+            <a:p>
+              <a:pPr algn="ctr"/>
+              <a:r>
+                <a:rPr lang="en-US" altLang="zh-TW" sz="1600" b="0" cap="none" spc="0" dirty="0">
+                  <a:ln w="0"/>
+                  <a:solidFill>
+                    <a:schemeClr val="tx1"/>
+                  </a:solidFill>
+                  <a:effectLst>
+                    <a:outerShdw blurRad="38100" dist="19050" dir="2700000" algn="tl" rotWithShape="0">
+                      <a:schemeClr val="dk1">
+                        <a:alpha val="40000"/>
+                      </a:schemeClr>
+                    </a:outerShdw>
+                  </a:effectLst>
+                </a:rPr>
+                <a:t>ICC</a:t>
+              </a:r>
+              <a:r>
+                <a:rPr lang="zh-TW" altLang="en-US" sz="1600" b="0" cap="none" spc="0" dirty="0">
+                  <a:ln w="0"/>
+                  <a:solidFill>
+                    <a:schemeClr val="tx1"/>
+                  </a:solidFill>
+                  <a:effectLst>
+                    <a:outerShdw blurRad="38100" dist="19050" dir="2700000" algn="tl" rotWithShape="0">
+                      <a:schemeClr val="dk1">
+                        <a:alpha val="40000"/>
+                      </a:schemeClr>
+                    </a:outerShdw>
+                  </a:effectLst>
+                </a:rPr>
+                <a:t>提供的固定轉換矩陣</a:t>
+              </a:r>
+            </a:p>
+          </p:txBody>
+        </p:sp>
+      </p:grpSp>
+      <p:sp>
+        <p:nvSpPr>
+          <p:cNvPr id="47" name="箭號: 向右 46">
+            <a:extLst>
+              <a:ext uri="{FF2B5EF4-FFF2-40B4-BE49-F238E27FC236}">
+                <a16:creationId xmlns:a16="http://schemas.microsoft.com/office/drawing/2014/main" id="{F6D006A1-E965-510F-8561-BA4CAB0357B9}"/>
+              </a:ext>
+            </a:extLst>
+          </p:cNvPr>
+          <p:cNvSpPr/>
+          <p:nvPr/>
+        </p:nvSpPr>
+        <p:spPr>
+          <a:xfrm>
+            <a:off x="2005436" y="3397003"/>
+            <a:ext cx="578850" cy="1808539"/>
+          </a:xfrm>
+          <a:prstGeom prst="rightArrow">
+            <a:avLst/>
+          </a:prstGeom>
+          <a:solidFill>
+            <a:schemeClr val="bg1"/>
+          </a:solidFill>
+          <a:ln>
+            <a:solidFill>
+              <a:schemeClr val="tx1"/>
+            </a:solidFill>
+          </a:ln>
+        </p:spPr>
+        <p:style>
+          <a:lnRef idx="2">
+            <a:schemeClr val="accent1">
+              <a:shade val="15000"/>
+            </a:schemeClr>
+          </a:lnRef>
+          <a:fillRef idx="1">
+            <a:schemeClr val="accent1"/>
+          </a:fillRef>
+          <a:effectRef idx="0">
+            <a:schemeClr val="accent1"/>
+          </a:effectRef>
+          <a:fontRef idx="minor">
+            <a:schemeClr val="lt1"/>
+          </a:fontRef>
+        </p:style>
+        <p:txBody>
+          <a:bodyPr rtlCol="0" anchor="ctr"/>
+          <a:lstStyle/>
+          <a:p>
+            <a:pPr algn="ctr"/>
+            <a:endParaRPr lang="zh-TW" altLang="en-US" dirty="0">
+              <a:solidFill>
+                <a:schemeClr val="tx1"/>
+              </a:solidFill>
+              <a:latin typeface="Times New Roman" panose="02020603050405020304" pitchFamily="18" charset="0"/>
+              <a:ea typeface="標楷體" panose="03000509000000000000" pitchFamily="65" charset="-120"/>
+              <a:cs typeface="Times New Roman" panose="02020603050405020304" pitchFamily="18" charset="0"/>
+            </a:endParaRPr>
+          </a:p>
+        </p:txBody>
+      </p:sp>
+      <p:sp>
+        <p:nvSpPr>
+          <p:cNvPr id="48" name="箭號: 向右 47">
+            <a:extLst>
+              <a:ext uri="{FF2B5EF4-FFF2-40B4-BE49-F238E27FC236}">
+                <a16:creationId xmlns:a16="http://schemas.microsoft.com/office/drawing/2014/main" id="{9C2E09C9-B2FB-4AC2-B678-D22FF41F87FB}"/>
+              </a:ext>
+            </a:extLst>
+          </p:cNvPr>
+          <p:cNvSpPr/>
+          <p:nvPr/>
+        </p:nvSpPr>
+        <p:spPr>
+          <a:xfrm>
+            <a:off x="5681375" y="3446390"/>
+            <a:ext cx="578850" cy="1808539"/>
+          </a:xfrm>
+          <a:prstGeom prst="rightArrow">
+            <a:avLst/>
+          </a:prstGeom>
+          <a:solidFill>
+            <a:schemeClr val="bg1"/>
+          </a:solidFill>
+          <a:ln>
+            <a:solidFill>
+              <a:schemeClr val="tx1"/>
+            </a:solidFill>
+          </a:ln>
+        </p:spPr>
+        <p:style>
+          <a:lnRef idx="2">
+            <a:schemeClr val="accent1">
+              <a:shade val="15000"/>
+            </a:schemeClr>
+          </a:lnRef>
+          <a:fillRef idx="1">
+            <a:schemeClr val="accent1"/>
+          </a:fillRef>
+          <a:effectRef idx="0">
+            <a:schemeClr val="accent1"/>
+          </a:effectRef>
+          <a:fontRef idx="minor">
+            <a:schemeClr val="lt1"/>
+          </a:fontRef>
+        </p:style>
+        <p:txBody>
+          <a:bodyPr rtlCol="0" anchor="ctr"/>
+          <a:lstStyle/>
+          <a:p>
+            <a:pPr algn="ctr"/>
+            <a:endParaRPr lang="zh-TW" altLang="en-US" dirty="0">
+              <a:solidFill>
+                <a:schemeClr val="tx1"/>
+              </a:solidFill>
+              <a:latin typeface="Times New Roman" panose="02020603050405020304" pitchFamily="18" charset="0"/>
+              <a:ea typeface="標楷體" panose="03000509000000000000" pitchFamily="65" charset="-120"/>
+              <a:cs typeface="Times New Roman" panose="02020603050405020304" pitchFamily="18" charset="0"/>
+            </a:endParaRPr>
+          </a:p>
+        </p:txBody>
+      </p:sp>
+      <p:pic>
+        <p:nvPicPr>
+          <p:cNvPr id="51" name="圖片 50">
+            <a:extLst>
+              <a:ext uri="{FF2B5EF4-FFF2-40B4-BE49-F238E27FC236}">
+                <a16:creationId xmlns:a16="http://schemas.microsoft.com/office/drawing/2014/main" id="{768BD875-7650-8E2E-BF05-D2A9055127DD}"/>
+              </a:ext>
+            </a:extLst>
+          </p:cNvPr>
+          <p:cNvPicPr>
+            <a:picLocks noChangeAspect="1"/>
+          </p:cNvPicPr>
+          <p:nvPr/>
+        </p:nvPicPr>
+        <p:blipFill>
+          <a:blip r:embed="rId4"/>
+          <a:stretch>
+            <a:fillRect/>
+          </a:stretch>
+        </p:blipFill>
+        <p:spPr>
+          <a:xfrm>
+            <a:off x="6672837" y="5614487"/>
+            <a:ext cx="2316828" cy="418891"/>
+          </a:xfrm>
+          <a:prstGeom prst="rect">
+            <a:avLst/>
+          </a:prstGeom>
+        </p:spPr>
+      </p:pic>
+      <p:pic>
+        <p:nvPicPr>
+          <p:cNvPr id="53" name="圖片 52">
+            <a:extLst>
+              <a:ext uri="{FF2B5EF4-FFF2-40B4-BE49-F238E27FC236}">
+                <a16:creationId xmlns:a16="http://schemas.microsoft.com/office/drawing/2014/main" id="{803B63B2-9F1A-7D9A-584F-93EE655F51BB}"/>
+              </a:ext>
+            </a:extLst>
+          </p:cNvPr>
+          <p:cNvPicPr>
+            <a:picLocks noChangeAspect="1"/>
+          </p:cNvPicPr>
+          <p:nvPr/>
+        </p:nvPicPr>
+        <p:blipFill>
+          <a:blip r:embed="rId5"/>
+          <a:stretch>
+            <a:fillRect/>
+          </a:stretch>
+        </p:blipFill>
+        <p:spPr>
+          <a:xfrm>
+            <a:off x="6260225" y="4913981"/>
+            <a:ext cx="3334676" cy="430100"/>
+          </a:xfrm>
+          <a:prstGeom prst="rect">
+            <a:avLst/>
+          </a:prstGeom>
+        </p:spPr>
+      </p:pic>
+      <p:pic>
+        <p:nvPicPr>
+          <p:cNvPr id="55" name="圖片 54">
+            <a:extLst>
+              <a:ext uri="{FF2B5EF4-FFF2-40B4-BE49-F238E27FC236}">
+                <a16:creationId xmlns:a16="http://schemas.microsoft.com/office/drawing/2014/main" id="{87D1C818-B490-2E90-9A46-3A24ACC931F9}"/>
+              </a:ext>
+            </a:extLst>
+          </p:cNvPr>
+          <p:cNvPicPr>
+            <a:picLocks noChangeAspect="1"/>
+          </p:cNvPicPr>
+          <p:nvPr/>
+        </p:nvPicPr>
+        <p:blipFill>
+          <a:blip r:embed="rId6"/>
+          <a:stretch>
+            <a:fillRect/>
+          </a:stretch>
+        </p:blipFill>
+        <p:spPr>
+          <a:xfrm>
+            <a:off x="6512363" y="3108962"/>
+            <a:ext cx="2830399" cy="1611065"/>
+          </a:xfrm>
+          <a:prstGeom prst="rect">
+            <a:avLst/>
+          </a:prstGeom>
+        </p:spPr>
+      </p:pic>
+      <p:grpSp>
+        <p:nvGrpSpPr>
+          <p:cNvPr id="60" name="群組 59">
+            <a:extLst>
+              <a:ext uri="{FF2B5EF4-FFF2-40B4-BE49-F238E27FC236}">
+                <a16:creationId xmlns:a16="http://schemas.microsoft.com/office/drawing/2014/main" id="{30231019-5D2A-FC74-902A-0DE0E738F875}"/>
+              </a:ext>
+            </a:extLst>
+          </p:cNvPr>
+          <p:cNvGrpSpPr/>
+          <p:nvPr/>
+        </p:nvGrpSpPr>
+        <p:grpSpPr>
+          <a:xfrm>
+            <a:off x="2815063" y="3879096"/>
+            <a:ext cx="2728476" cy="887672"/>
+            <a:chOff x="2766707" y="3109868"/>
+            <a:chExt cx="4429743" cy="1441156"/>
+          </a:xfrm>
+        </p:grpSpPr>
+        <p:pic>
+          <p:nvPicPr>
+            <p:cNvPr id="57" name="圖片 56">
+              <a:extLst>
+                <a:ext uri="{FF2B5EF4-FFF2-40B4-BE49-F238E27FC236}">
+                  <a16:creationId xmlns:a16="http://schemas.microsoft.com/office/drawing/2014/main" id="{BF72DFDE-46B5-B563-7643-AEC5DB0C4AE9}"/>
+                </a:ext>
+              </a:extLst>
+            </p:cNvPr>
+            <p:cNvPicPr>
+              <a:picLocks noChangeAspect="1"/>
+            </p:cNvPicPr>
+            <p:nvPr/>
+          </p:nvPicPr>
+          <p:blipFill>
+            <a:blip r:embed="rId7"/>
+            <a:stretch>
+              <a:fillRect/>
+            </a:stretch>
+          </p:blipFill>
+          <p:spPr>
+            <a:xfrm>
+              <a:off x="2766707" y="3109868"/>
+              <a:ext cx="4372585" cy="638264"/>
+            </a:xfrm>
+            <a:prstGeom prst="rect">
+              <a:avLst/>
+            </a:prstGeom>
+          </p:spPr>
+        </p:pic>
+        <p:pic>
+          <p:nvPicPr>
+            <p:cNvPr id="59" name="圖片 58">
+              <a:extLst>
+                <a:ext uri="{FF2B5EF4-FFF2-40B4-BE49-F238E27FC236}">
+                  <a16:creationId xmlns:a16="http://schemas.microsoft.com/office/drawing/2014/main" id="{45F464C7-0F63-A907-3149-D3E1C341BB34}"/>
+                </a:ext>
+              </a:extLst>
+            </p:cNvPr>
+            <p:cNvPicPr>
+              <a:picLocks noChangeAspect="1"/>
+            </p:cNvPicPr>
+            <p:nvPr/>
+          </p:nvPicPr>
+          <p:blipFill>
+            <a:blip r:embed="rId8"/>
+            <a:stretch>
+              <a:fillRect/>
+            </a:stretch>
+          </p:blipFill>
+          <p:spPr>
+            <a:xfrm>
+              <a:off x="2766707" y="3903234"/>
+              <a:ext cx="4429743" cy="647790"/>
+            </a:xfrm>
+            <a:prstGeom prst="rect">
+              <a:avLst/>
+            </a:prstGeom>
+          </p:spPr>
+        </p:pic>
+      </p:grpSp>
+      <p:grpSp>
+        <p:nvGrpSpPr>
+          <p:cNvPr id="65" name="群組 64">
+            <a:extLst>
+              <a:ext uri="{FF2B5EF4-FFF2-40B4-BE49-F238E27FC236}">
+                <a16:creationId xmlns:a16="http://schemas.microsoft.com/office/drawing/2014/main" id="{0019A0D0-D56F-9783-8FFE-E56546FBB97B}"/>
+              </a:ext>
+            </a:extLst>
+          </p:cNvPr>
+          <p:cNvGrpSpPr/>
+          <p:nvPr/>
+        </p:nvGrpSpPr>
+        <p:grpSpPr>
+          <a:xfrm>
+            <a:off x="334850" y="3272768"/>
+            <a:ext cx="1595795" cy="1856263"/>
+            <a:chOff x="3485002" y="2619262"/>
+            <a:chExt cx="2935052" cy="3414116"/>
+          </a:xfrm>
+        </p:grpSpPr>
+        <p:pic>
+          <p:nvPicPr>
+            <p:cNvPr id="62" name="圖片 61">
+              <a:extLst>
+                <a:ext uri="{FF2B5EF4-FFF2-40B4-BE49-F238E27FC236}">
+                  <a16:creationId xmlns:a16="http://schemas.microsoft.com/office/drawing/2014/main" id="{5DF01417-4A33-EFF6-37DE-839006B72D09}"/>
+                </a:ext>
+              </a:extLst>
+            </p:cNvPr>
+            <p:cNvPicPr>
+              <a:picLocks noChangeAspect="1"/>
+            </p:cNvPicPr>
+            <p:nvPr/>
+          </p:nvPicPr>
+          <p:blipFill>
+            <a:blip r:embed="rId9"/>
+            <a:stretch>
+              <a:fillRect/>
+            </a:stretch>
+          </p:blipFill>
+          <p:spPr>
+            <a:xfrm>
+              <a:off x="3485945" y="2619262"/>
+              <a:ext cx="2934109" cy="1619476"/>
+            </a:xfrm>
+            <a:prstGeom prst="rect">
+              <a:avLst/>
+            </a:prstGeom>
+          </p:spPr>
+        </p:pic>
+        <p:pic>
+          <p:nvPicPr>
+            <p:cNvPr id="64" name="圖片 63">
+              <a:extLst>
+                <a:ext uri="{FF2B5EF4-FFF2-40B4-BE49-F238E27FC236}">
+                  <a16:creationId xmlns:a16="http://schemas.microsoft.com/office/drawing/2014/main" id="{7929039C-2FA4-D0DA-3719-08555DD8302C}"/>
+                </a:ext>
+              </a:extLst>
+            </p:cNvPr>
+            <p:cNvPicPr>
+              <a:picLocks noChangeAspect="1"/>
+            </p:cNvPicPr>
+            <p:nvPr/>
+          </p:nvPicPr>
+          <p:blipFill>
+            <a:blip r:embed="rId10"/>
+            <a:stretch>
+              <a:fillRect/>
+            </a:stretch>
+          </p:blipFill>
+          <p:spPr>
+            <a:xfrm>
+              <a:off x="3485002" y="4480586"/>
+              <a:ext cx="2800741" cy="1552792"/>
+            </a:xfrm>
+            <a:prstGeom prst="rect">
+              <a:avLst/>
+            </a:prstGeom>
+          </p:spPr>
+        </p:pic>
+      </p:grpSp>
+    </p:spTree>
+    <p:extLst>
+      <p:ext uri="{BB962C8B-B14F-4D97-AF65-F5344CB8AC3E}">
+        <p14:creationId xmlns:p14="http://schemas.microsoft.com/office/powerpoint/2010/main" val="3633041212"/>
+      </p:ext>
+    </p:extLst>
+  </p:cSld>
+  <p:clrMapOvr>
+    <a:masterClrMapping/>
+  </p:clrMapOvr>
+</p:sld>
+</file>
+
+<file path=ppt/slides/slide12.xml><?xml version="1.0" encoding="utf-8"?>
 <p:sld xmlns:a="http://schemas.openxmlformats.org/drawingml/2006/main" xmlns:r="http://schemas.openxmlformats.org/officeDocument/2006/relationships" xmlns:p="http://schemas.openxmlformats.org/presentationml/2006/main">
   <p:cSld>
     <p:spTree>
@@ -10382,7 +11223,7 @@
 </p:sld>
 </file>
 
-<file path=ppt/slides/slide12.xml><?xml version="1.0" encoding="utf-8"?>
+<file path=ppt/slides/slide13.xml><?xml version="1.0" encoding="utf-8"?>
 <p:sld xmlns:a="http://schemas.openxmlformats.org/drawingml/2006/main" xmlns:r="http://schemas.openxmlformats.org/officeDocument/2006/relationships" xmlns:p="http://schemas.openxmlformats.org/presentationml/2006/main">
   <p:cSld>
     <p:spTree>
@@ -11633,7 +12474,7 @@
 </p:sld>
 </file>
 
-<file path=ppt/slides/slide13.xml><?xml version="1.0" encoding="utf-8"?>
+<file path=ppt/slides/slide14.xml><?xml version="1.0" encoding="utf-8"?>
 <p:sld xmlns:a="http://schemas.openxmlformats.org/drawingml/2006/main" xmlns:r="http://schemas.openxmlformats.org/officeDocument/2006/relationships" xmlns:p="http://schemas.openxmlformats.org/presentationml/2006/main">
   <p:cSld>
     <p:spTree>
@@ -12920,7 +13761,7 @@
 </p:sld>
 </file>
 
-<file path=ppt/slides/slide14.xml><?xml version="1.0" encoding="utf-8"?>
+<file path=ppt/slides/slide15.xml><?xml version="1.0" encoding="utf-8"?>
 <p:sld xmlns:a="http://schemas.openxmlformats.org/drawingml/2006/main" xmlns:r="http://schemas.openxmlformats.org/officeDocument/2006/relationships" xmlns:p="http://schemas.openxmlformats.org/presentationml/2006/main">
   <p:cSld>
     <p:spTree>
@@ -12995,7 +13836,7 @@
         <p:spPr>
           <a:xfrm>
             <a:off x="609602" y="1223724"/>
-            <a:ext cx="8686796" cy="4700685"/>
+            <a:ext cx="5539219" cy="4700685"/>
           </a:xfrm>
           <a:prstGeom prst="rect">
             <a:avLst/>
@@ -13424,6 +14265,130 @@
                 <a:cs typeface="Times New Roman" panose="02020603050405020304" pitchFamily="18" charset="0"/>
               </a:rPr>
               <a:t> 的各項數據</a:t>
+            </a:r>
+            <a:endParaRPr lang="en-US" altLang="zh-TW" sz="1600" dirty="0">
+              <a:latin typeface="Times New Roman" panose="02020603050405020304" pitchFamily="18" charset="0"/>
+              <a:ea typeface="標楷體" panose="03000509000000000000" pitchFamily="65" charset="-120"/>
+              <a:cs typeface="Times New Roman" panose="02020603050405020304" pitchFamily="18" charset="0"/>
+            </a:endParaRPr>
+          </a:p>
+          <a:p>
+            <a:pPr>
+              <a:lnSpc>
+                <a:spcPct val="150000"/>
+              </a:lnSpc>
+            </a:pPr>
+            <a:r>
+              <a:rPr lang="zh-TW" altLang="en-US" sz="2000" dirty="0">
+                <a:latin typeface="Times New Roman" panose="02020603050405020304" pitchFamily="18" charset="0"/>
+                <a:ea typeface="標楷體" panose="03000509000000000000" pitchFamily="65" charset="-120"/>
+                <a:cs typeface="Times New Roman" panose="02020603050405020304" pitchFamily="18" charset="0"/>
+              </a:rPr>
+              <a:t>研究方向</a:t>
+            </a:r>
+            <a:endParaRPr lang="en-US" altLang="zh-TW" sz="2000" dirty="0">
+              <a:latin typeface="Times New Roman" panose="02020603050405020304" pitchFamily="18" charset="0"/>
+              <a:ea typeface="標楷體" panose="03000509000000000000" pitchFamily="65" charset="-120"/>
+              <a:cs typeface="Times New Roman" panose="02020603050405020304" pitchFamily="18" charset="0"/>
+            </a:endParaRPr>
+          </a:p>
+          <a:p>
+            <a:pPr lvl="1">
+              <a:lnSpc>
+                <a:spcPct val="150000"/>
+              </a:lnSpc>
+            </a:pPr>
+            <a:r>
+              <a:rPr lang="zh-TW" altLang="en-US" sz="1600" dirty="0">
+                <a:latin typeface="Times New Roman" panose="02020603050405020304" pitchFamily="18" charset="0"/>
+                <a:ea typeface="標楷體" panose="03000509000000000000" pitchFamily="65" charset="-120"/>
+                <a:cs typeface="Times New Roman" panose="02020603050405020304" pitchFamily="18" charset="0"/>
+              </a:rPr>
+              <a:t>確認 </a:t>
+            </a:r>
+            <a:r>
+              <a:rPr lang="en-US" altLang="zh-TW" sz="1600" dirty="0" err="1">
+                <a:latin typeface="Times New Roman" panose="02020603050405020304" pitchFamily="18" charset="0"/>
+                <a:ea typeface="標楷體" panose="03000509000000000000" pitchFamily="65" charset="-120"/>
+                <a:cs typeface="Times New Roman" panose="02020603050405020304" pitchFamily="18" charset="0"/>
+              </a:rPr>
+              <a:t>DisplayCAL</a:t>
+            </a:r>
+            <a:r>
+              <a:rPr lang="zh-TW" altLang="en-US" sz="1600" dirty="0">
+                <a:latin typeface="Times New Roman" panose="02020603050405020304" pitchFamily="18" charset="0"/>
+                <a:ea typeface="標楷體" panose="03000509000000000000" pitchFamily="65" charset="-120"/>
+                <a:cs typeface="Times New Roman" panose="02020603050405020304" pitchFamily="18" charset="0"/>
+              </a:rPr>
+              <a:t> 的各項功能</a:t>
+            </a:r>
+            <a:endParaRPr lang="en-US" altLang="zh-TW" sz="1600" dirty="0">
+              <a:latin typeface="Times New Roman" panose="02020603050405020304" pitchFamily="18" charset="0"/>
+              <a:ea typeface="標楷體" panose="03000509000000000000" pitchFamily="65" charset="-120"/>
+              <a:cs typeface="Times New Roman" panose="02020603050405020304" pitchFamily="18" charset="0"/>
+            </a:endParaRPr>
+          </a:p>
+          <a:p>
+            <a:pPr lvl="1">
+              <a:lnSpc>
+                <a:spcPct val="150000"/>
+              </a:lnSpc>
+            </a:pPr>
+            <a:r>
+              <a:rPr lang="zh-TW" altLang="en-US" sz="1600" dirty="0">
+                <a:latin typeface="Times New Roman" panose="02020603050405020304" pitchFamily="18" charset="0"/>
+                <a:ea typeface="標楷體" panose="03000509000000000000" pitchFamily="65" charset="-120"/>
+                <a:cs typeface="Times New Roman" panose="02020603050405020304" pitchFamily="18" charset="0"/>
+              </a:rPr>
+              <a:t>驗證 </a:t>
+            </a:r>
+            <a:r>
+              <a:rPr lang="en-US" altLang="zh-TW" sz="1600" dirty="0" err="1">
+                <a:latin typeface="Times New Roman" panose="02020603050405020304" pitchFamily="18" charset="0"/>
+                <a:ea typeface="標楷體" panose="03000509000000000000" pitchFamily="65" charset="-120"/>
+                <a:cs typeface="Times New Roman" panose="02020603050405020304" pitchFamily="18" charset="0"/>
+              </a:rPr>
+              <a:t>DisplayCAL</a:t>
+            </a:r>
+            <a:r>
+              <a:rPr lang="zh-TW" altLang="en-US" sz="1600" dirty="0">
+                <a:latin typeface="Times New Roman" panose="02020603050405020304" pitchFamily="18" charset="0"/>
+                <a:ea typeface="標楷體" panose="03000509000000000000" pitchFamily="65" charset="-120"/>
+                <a:cs typeface="Times New Roman" panose="02020603050405020304" pitchFamily="18" charset="0"/>
+              </a:rPr>
+              <a:t> 生成的 </a:t>
+            </a:r>
+            <a:r>
+              <a:rPr lang="en-US" altLang="zh-TW" sz="1600" dirty="0">
+                <a:latin typeface="Times New Roman" panose="02020603050405020304" pitchFamily="18" charset="0"/>
+                <a:ea typeface="標楷體" panose="03000509000000000000" pitchFamily="65" charset="-120"/>
+                <a:cs typeface="Times New Roman" panose="02020603050405020304" pitchFamily="18" charset="0"/>
+              </a:rPr>
+              <a:t>ICC</a:t>
+            </a:r>
+            <a:r>
+              <a:rPr lang="zh-TW" altLang="en-US" sz="1600" dirty="0">
+                <a:latin typeface="Times New Roman" panose="02020603050405020304" pitchFamily="18" charset="0"/>
+                <a:ea typeface="標楷體" panose="03000509000000000000" pitchFamily="65" charset="-120"/>
+                <a:cs typeface="Times New Roman" panose="02020603050405020304" pitchFamily="18" charset="0"/>
+              </a:rPr>
+              <a:t> </a:t>
+            </a:r>
+            <a:r>
+              <a:rPr lang="en-US" altLang="zh-TW" sz="1600" dirty="0">
+                <a:latin typeface="Times New Roman" panose="02020603050405020304" pitchFamily="18" charset="0"/>
+                <a:ea typeface="標楷體" panose="03000509000000000000" pitchFamily="65" charset="-120"/>
+                <a:cs typeface="Times New Roman" panose="02020603050405020304" pitchFamily="18" charset="0"/>
+              </a:rPr>
+              <a:t>Profile </a:t>
+            </a:r>
+            <a:r>
+              <a:rPr lang="zh-TW" altLang="en-US" sz="1600" dirty="0">
+                <a:latin typeface="Times New Roman" panose="02020603050405020304" pitchFamily="18" charset="0"/>
+                <a:ea typeface="標楷體" panose="03000509000000000000" pitchFamily="65" charset="-120"/>
+                <a:cs typeface="Times New Roman" panose="02020603050405020304" pitchFamily="18" charset="0"/>
+              </a:rPr>
+              <a:t>的校正能力</a:t>
             </a:r>
             <a:endParaRPr lang="en-US" altLang="zh-TW" sz="1600" dirty="0">
               <a:latin typeface="Times New Roman" panose="02020603050405020304" pitchFamily="18" charset="0"/>
@@ -13556,8 +14521,8 @@
         </p:nvGrpSpPr>
         <p:grpSpPr>
           <a:xfrm>
-            <a:off x="5559879" y="1472017"/>
-            <a:ext cx="3191389" cy="3913966"/>
+            <a:off x="6048394" y="1579862"/>
+            <a:ext cx="2838341" cy="3480983"/>
             <a:chOff x="1734818" y="2990136"/>
             <a:chExt cx="2019300" cy="2476500"/>
           </a:xfrm>
@@ -13650,7 +14615,7 @@
 </p:sld>
 </file>
 
-<file path=ppt/slides/slide15.xml><?xml version="1.0" encoding="utf-8"?>
+<file path=ppt/slides/slide16.xml><?xml version="1.0" encoding="utf-8"?>
 <p:sld xmlns:a="http://schemas.openxmlformats.org/drawingml/2006/main" xmlns:r="http://schemas.openxmlformats.org/officeDocument/2006/relationships" xmlns:p="http://schemas.openxmlformats.org/presentationml/2006/main">
   <p:cSld>
     <p:spTree>
@@ -18383,10 +19348,10 @@
         </p:nvGrpSpPr>
         <p:grpSpPr>
           <a:xfrm>
-            <a:off x="1566646" y="4235611"/>
-            <a:ext cx="1481394" cy="1337705"/>
-            <a:chOff x="4548850" y="2882096"/>
-            <a:chExt cx="1481394" cy="1337705"/>
+            <a:off x="1125020" y="4235611"/>
+            <a:ext cx="2299027" cy="1337705"/>
+            <a:chOff x="4107224" y="2882096"/>
+            <a:chExt cx="2299027" cy="1337705"/>
           </a:xfrm>
         </p:grpSpPr>
         <p:grpSp>
@@ -18573,8 +19538,8 @@
           </p:nvSpPr>
           <p:spPr>
             <a:xfrm>
-              <a:off x="4548850" y="3635026"/>
-              <a:ext cx="1415772" cy="584775"/>
+              <a:off x="4107224" y="3635026"/>
+              <a:ext cx="2299027" cy="584775"/>
             </a:xfrm>
             <a:prstGeom prst="rect">
               <a:avLst/>
@@ -18631,6 +19596,38 @@
                   <a:cs typeface="Times New Roman" panose="02020603050405020304" pitchFamily="18" charset="0"/>
                 </a:rPr>
                 <a:t>D65</a:t>
+              </a:r>
+              <a:r>
+                <a:rPr lang="zh-TW" altLang="en-US" sz="1600" dirty="0">
+                  <a:latin typeface="Times New Roman" panose="02020603050405020304" pitchFamily="18" charset="0"/>
+                  <a:ea typeface="標楷體" panose="03000509000000000000" pitchFamily="65" charset="-120"/>
+                  <a:cs typeface="Times New Roman" panose="02020603050405020304" pitchFamily="18" charset="0"/>
+                </a:rPr>
+                <a:t> </a:t>
+              </a:r>
+              <a:r>
+                <a:rPr lang="en-US" altLang="zh-TW" sz="1600" dirty="0">
+                  <a:latin typeface="Times New Roman" panose="02020603050405020304" pitchFamily="18" charset="0"/>
+                  <a:ea typeface="標楷體" panose="03000509000000000000" pitchFamily="65" charset="-120"/>
+                  <a:cs typeface="Times New Roman" panose="02020603050405020304" pitchFamily="18" charset="0"/>
+                </a:rPr>
+                <a:t>(sRGB</a:t>
+              </a:r>
+              <a:r>
+                <a:rPr lang="zh-TW" altLang="en-US" sz="1600" dirty="0">
+                  <a:latin typeface="Times New Roman" panose="02020603050405020304" pitchFamily="18" charset="0"/>
+                  <a:ea typeface="標楷體" panose="03000509000000000000" pitchFamily="65" charset="-120"/>
+                  <a:cs typeface="Times New Roman" panose="02020603050405020304" pitchFamily="18" charset="0"/>
+                </a:rPr>
+                <a:t>標準</a:t>
+              </a:r>
+              <a:r>
+                <a:rPr lang="en-US" altLang="zh-TW" sz="1600" dirty="0">
+                  <a:latin typeface="Times New Roman" panose="02020603050405020304" pitchFamily="18" charset="0"/>
+                  <a:ea typeface="標楷體" panose="03000509000000000000" pitchFamily="65" charset="-120"/>
+                  <a:cs typeface="Times New Roman" panose="02020603050405020304" pitchFamily="18" charset="0"/>
+                </a:rPr>
+                <a:t>)</a:t>
               </a:r>
               <a:endParaRPr lang="zh-TW" altLang="en-US" sz="1600" b="0" cap="none" spc="0" dirty="0">
                 <a:ln w="0"/>

--- a/ICCPROFILE_0923.pptx
+++ b/ICCPROFILE_0923.pptx
@@ -21205,6 +21205,70 @@
           </p:spPr>
         </p:pic>
       </p:grpSp>
+      <p:sp>
+        <p:nvSpPr>
+          <p:cNvPr id="4" name="文字方塊 3">
+            <a:extLst>
+              <a:ext uri="{FF2B5EF4-FFF2-40B4-BE49-F238E27FC236}">
+                <a16:creationId xmlns:a16="http://schemas.microsoft.com/office/drawing/2014/main" id="{F1E5835A-681C-C8A0-38AA-CD00A25D4B7C}"/>
+              </a:ext>
+            </a:extLst>
+          </p:cNvPr>
+          <p:cNvSpPr txBox="1"/>
+          <p:nvPr/>
+        </p:nvSpPr>
+        <p:spPr>
+          <a:xfrm>
+            <a:off x="1718744" y="6416681"/>
+            <a:ext cx="8149167" cy="461665"/>
+          </a:xfrm>
+          <a:prstGeom prst="rect">
+            <a:avLst/>
+          </a:prstGeom>
+          <a:noFill/>
+        </p:spPr>
+        <p:txBody>
+          <a:bodyPr wrap="square">
+            <a:spAutoFit/>
+          </a:bodyPr>
+          <a:lstStyle/>
+          <a:p>
+            <a:r>
+              <a:rPr lang="en-US" altLang="zh-TW" sz="1200" dirty="0">
+                <a:latin typeface="Times New Roman" panose="02020603050405020304" pitchFamily="18" charset="0"/>
+                <a:cs typeface="Times New Roman" panose="02020603050405020304" pitchFamily="18" charset="0"/>
+              </a:rPr>
+              <a:t>[] M. Stokes, M. Anderson, S. Chandrasekar, and R. Motta, “A standard default color space for the Internet—sRGB,” </a:t>
+            </a:r>
+            <a:r>
+              <a:rPr lang="en-US" altLang="zh-TW" sz="1200" i="1" dirty="0">
+                <a:latin typeface="Times New Roman" panose="02020603050405020304" pitchFamily="18" charset="0"/>
+                <a:cs typeface="Times New Roman" panose="02020603050405020304" pitchFamily="18" charset="0"/>
+              </a:rPr>
+              <a:t>World Wide Web Consortium (W3C)</a:t>
+            </a:r>
+            <a:r>
+              <a:rPr lang="en-US" altLang="zh-TW" sz="1200" dirty="0">
+                <a:latin typeface="Times New Roman" panose="02020603050405020304" pitchFamily="18" charset="0"/>
+                <a:cs typeface="Times New Roman" panose="02020603050405020304" pitchFamily="18" charset="0"/>
+              </a:rPr>
+              <a:t>, ver. 1.10, Nov. 5, 1996. [Online]. Available: </a:t>
+            </a:r>
+            <a:r>
+              <a:rPr lang="en-US" altLang="zh-TW" sz="1200" dirty="0">
+                <a:latin typeface="Times New Roman" panose="02020603050405020304" pitchFamily="18" charset="0"/>
+                <a:cs typeface="Times New Roman" panose="02020603050405020304" pitchFamily="18" charset="0"/>
+                <a:hlinkClick r:id="rId11"/>
+              </a:rPr>
+              <a:t>https://www.w3.org/Graphics/Color/srgb.pdf</a:t>
+            </a:r>
+            <a:endParaRPr lang="zh-TW" altLang="en-US" sz="1200" dirty="0">
+              <a:latin typeface="Times New Roman" panose="02020603050405020304" pitchFamily="18" charset="0"/>
+              <a:cs typeface="Times New Roman" panose="02020603050405020304" pitchFamily="18" charset="0"/>
+            </a:endParaRPr>
+          </a:p>
+        </p:txBody>
+      </p:sp>
     </p:spTree>
     <p:extLst>
       <p:ext uri="{BB962C8B-B14F-4D97-AF65-F5344CB8AC3E}">

--- a/ICCPROFILE_0923.pptx
+++ b/ICCPROFILE_0923.pptx
@@ -3825,8 +3825,8 @@
         </p:nvSpPr>
         <p:spPr/>
       </p:sp>
-      <mc:AlternateContent xmlns:mc="http://schemas.openxmlformats.org/markup-compatibility/2006">
-        <mc:Choice xmlns:a14="http://schemas.microsoft.com/office/drawing/2010/main" Requires="a14">
+      <mc:AlternateContent xmlns:mc="http://schemas.openxmlformats.org/markup-compatibility/2006" xmlns:a14="http://schemas.microsoft.com/office/drawing/2010/main">
+        <mc:Choice Requires="a14">
           <p:sp>
             <p:nvSpPr>
               <p:cNvPr id="3" name="備忘稿版面配置區 2">
@@ -3933,7 +3933,7 @@
             </p:txBody>
           </p:sp>
         </mc:Choice>
-        <mc:Fallback>
+        <mc:Fallback xmlns="">
           <p:sp>
             <p:nvSpPr>
               <p:cNvPr id="3" name="備忘稿版面配置區 2">
@@ -9859,20 +9859,12 @@
           <a:lstStyle/>
           <a:p>
             <a:r>
-              <a:rPr lang="en-US" altLang="zh-TW" sz="1200" b="1" dirty="0">
-                <a:latin typeface="Times New Roman" panose="02020603050405020304" pitchFamily="18" charset="0"/>
-                <a:ea typeface="標楷體" panose="03000509000000000000" pitchFamily="65" charset="-120"/>
-                <a:cs typeface="Times New Roman" panose="02020603050405020304" pitchFamily="18" charset="0"/>
-              </a:rPr>
-              <a:t>[]</a:t>
-            </a:r>
-            <a:r>
               <a:rPr lang="en-US" altLang="zh-TW" sz="1200" dirty="0">
                 <a:latin typeface="Times New Roman" panose="02020603050405020304" pitchFamily="18" charset="0"/>
                 <a:ea typeface="標楷體" panose="03000509000000000000" pitchFamily="65" charset="-120"/>
                 <a:cs typeface="Times New Roman" panose="02020603050405020304" pitchFamily="18" charset="0"/>
               </a:rPr>
-              <a:t> International Color Consortium, “ICC Technical Note 02-2003: </a:t>
+              <a:t>[4] International Color Consortium, “ICC Technical Note 02-2003: </a:t>
             </a:r>
             <a:r>
               <a:rPr lang="en-US" altLang="zh-TW" sz="1200" dirty="0" err="1">
@@ -9895,9 +9887,30 @@
                 <a:latin typeface="Times New Roman" panose="02020603050405020304" pitchFamily="18" charset="0"/>
                 <a:ea typeface="標楷體" panose="03000509000000000000" pitchFamily="65" charset="-120"/>
                 <a:cs typeface="Times New Roman" panose="02020603050405020304" pitchFamily="18" charset="0"/>
-                <a:hlinkClick r:id="rId2"/>
-              </a:rPr>
-              <a:t>https://www.color.org/chadtag/</a:t>
+                <a:hlinkClick r:id="rId2">
+                  <a:extLst>
+                    <a:ext uri="{A12FA001-AC4F-418D-AE19-62706E023703}">
+                      <ahyp:hlinkClr xmlns:ahyp="http://schemas.microsoft.com/office/drawing/2018/hyperlinkcolor" val="tx"/>
+                    </a:ext>
+                  </a:extLst>
+                </a:hlinkClick>
+              </a:rPr>
+              <a:t>https://www.color.org/chadtag</a:t>
+            </a:r>
+            <a:r>
+              <a:rPr lang="en-US" altLang="zh-TW" sz="1200" dirty="0">
+                <a:latin typeface="Times New Roman" panose="02020603050405020304" pitchFamily="18" charset="0"/>
+                <a:ea typeface="標楷體" panose="03000509000000000000" pitchFamily="65" charset="-120"/>
+                <a:cs typeface="Times New Roman" panose="02020603050405020304" pitchFamily="18" charset="0"/>
+                <a:hlinkClick r:id="rId2">
+                  <a:extLst>
+                    <a:ext uri="{A12FA001-AC4F-418D-AE19-62706E023703}">
+                      <ahyp:hlinkClr xmlns:ahyp="http://schemas.microsoft.com/office/drawing/2018/hyperlinkcolor" val="tx"/>
+                    </a:ext>
+                  </a:extLst>
+                </a:hlinkClick>
+              </a:rPr>
+              <a:t>/</a:t>
             </a:r>
             <a:r>
               <a:rPr lang="en-US" altLang="zh-TW" sz="1200" dirty="0">
@@ -10013,7 +10026,11 @@
             <a:lstStyle/>
             <a:p>
               <a:pPr algn="ctr"/>
-              <a:endParaRPr lang="zh-TW" altLang="en-US"/>
+              <a:endParaRPr lang="zh-TW" altLang="en-US">
+                <a:latin typeface="Times New Roman" panose="02020603050405020304" pitchFamily="18" charset="0"/>
+                <a:ea typeface="標楷體" panose="03000509000000000000" pitchFamily="65" charset="-120"/>
+                <a:cs typeface="Times New Roman" panose="02020603050405020304" pitchFamily="18" charset="0"/>
+              </a:endParaRPr>
             </a:p>
           </p:txBody>
         </p:sp>
@@ -10047,34 +10064,26 @@
             <a:p>
               <a:pPr algn="ctr"/>
               <a:r>
-                <a:rPr lang="en-US" altLang="zh-TW" sz="1600" b="0" cap="none" spc="0" dirty="0">
+                <a:rPr lang="en-US" altLang="zh-TW" sz="1600" cap="none" spc="0" dirty="0">
                   <a:ln w="0"/>
                   <a:solidFill>
                     <a:schemeClr val="tx1"/>
                   </a:solidFill>
-                  <a:effectLst>
-                    <a:outerShdw blurRad="38100" dist="19050" dir="2700000" algn="tl" rotWithShape="0">
-                      <a:schemeClr val="dk1">
-                        <a:alpha val="40000"/>
-                      </a:schemeClr>
-                    </a:outerShdw>
-                  </a:effectLst>
+                  <a:latin typeface="Times New Roman" panose="02020603050405020304" pitchFamily="18" charset="0"/>
+                  <a:ea typeface="標楷體" panose="03000509000000000000" pitchFamily="65" charset="-120"/>
+                  <a:cs typeface="Times New Roman" panose="02020603050405020304" pitchFamily="18" charset="0"/>
                 </a:rPr>
                 <a:t>ICC</a:t>
               </a:r>
               <a:r>
-                <a:rPr lang="zh-TW" altLang="en-US" sz="1600" b="0" cap="none" spc="0" dirty="0">
+                <a:rPr lang="zh-TW" altLang="en-US" sz="1600" cap="none" spc="0" dirty="0">
                   <a:ln w="0"/>
                   <a:solidFill>
                     <a:schemeClr val="tx1"/>
                   </a:solidFill>
-                  <a:effectLst>
-                    <a:outerShdw blurRad="38100" dist="19050" dir="2700000" algn="tl" rotWithShape="0">
-                      <a:schemeClr val="dk1">
-                        <a:alpha val="40000"/>
-                      </a:schemeClr>
-                    </a:outerShdw>
-                  </a:effectLst>
+                  <a:latin typeface="Times New Roman" panose="02020603050405020304" pitchFamily="18" charset="0"/>
+                  <a:ea typeface="標楷體" panose="03000509000000000000" pitchFamily="65" charset="-120"/>
+                  <a:cs typeface="Times New Roman" panose="02020603050405020304" pitchFamily="18" charset="0"/>
                 </a:rPr>
                 <a:t>提供的固定轉換矩陣</a:t>
               </a:r>
@@ -10456,6 +10465,316 @@
           </p:spPr>
         </p:pic>
       </p:grpSp>
+      <p:sp>
+        <p:nvSpPr>
+          <p:cNvPr id="2" name="文字版面配置區 6">
+            <a:extLst>
+              <a:ext uri="{FF2B5EF4-FFF2-40B4-BE49-F238E27FC236}">
+                <a16:creationId xmlns:a16="http://schemas.microsoft.com/office/drawing/2014/main" id="{FB39A942-B013-D404-F12B-67C00F2970E9}"/>
+              </a:ext>
+            </a:extLst>
+          </p:cNvPr>
+          <p:cNvSpPr txBox="1"/>
+          <p:nvPr/>
+        </p:nvSpPr>
+        <p:spPr>
+          <a:xfrm>
+            <a:off x="497549" y="1284684"/>
+            <a:ext cx="8686796" cy="717631"/>
+          </a:xfrm>
+          <a:prstGeom prst="rect">
+            <a:avLst/>
+          </a:prstGeom>
+          <a:noFill/>
+          <a:ln>
+            <a:noFill/>
+          </a:ln>
+        </p:spPr>
+        <p:txBody>
+          <a:bodyPr spcFirstLastPara="1" wrap="square" lIns="91425" tIns="45700" rIns="91425" bIns="45700" anchor="t" anchorCtr="0">
+            <a:noAutofit/>
+          </a:bodyPr>
+          <a:lstStyle>
+            <a:defPPr marR="0" lvl="0" algn="l" rtl="0">
+              <a:lnSpc>
+                <a:spcPct val="100000"/>
+              </a:lnSpc>
+              <a:spcBef>
+                <a:spcPts val="0"/>
+              </a:spcBef>
+              <a:spcAft>
+                <a:spcPts val="0"/>
+              </a:spcAft>
+            </a:defPPr>
+            <a:lvl1pPr marL="457200" marR="0" lvl="0" indent="-406400" algn="l" rtl="0">
+              <a:lnSpc>
+                <a:spcPct val="100000"/>
+              </a:lnSpc>
+              <a:spcBef>
+                <a:spcPts val="560"/>
+              </a:spcBef>
+              <a:spcAft>
+                <a:spcPts val="0"/>
+              </a:spcAft>
+              <a:buClr>
+                <a:schemeClr val="accent2"/>
+              </a:buClr>
+              <a:buSzPts val="2800"/>
+              <a:buFont typeface="Noto Sans Symbols"/>
+              <a:buChar char="❖"/>
+              <a:defRPr sz="2800" b="0" i="0" u="none" strike="noStrike" cap="none">
+                <a:solidFill>
+                  <a:schemeClr val="dk1"/>
+                </a:solidFill>
+                <a:latin typeface="Times New Roman"/>
+                <a:ea typeface="Times New Roman"/>
+                <a:cs typeface="Times New Roman"/>
+                <a:sym typeface="Times New Roman"/>
+              </a:defRPr>
+            </a:lvl1pPr>
+            <a:lvl2pPr marL="914400" marR="0" lvl="1" indent="-381000" algn="l" rtl="0">
+              <a:lnSpc>
+                <a:spcPct val="100000"/>
+              </a:lnSpc>
+              <a:spcBef>
+                <a:spcPts val="480"/>
+              </a:spcBef>
+              <a:spcAft>
+                <a:spcPts val="0"/>
+              </a:spcAft>
+              <a:buClr>
+                <a:srgbClr val="FF5050"/>
+              </a:buClr>
+              <a:buSzPts val="2400"/>
+              <a:buFont typeface="Noto Sans Symbols"/>
+              <a:buChar char="▪"/>
+              <a:defRPr sz="2400" b="0" i="0" u="none" strike="noStrike" cap="none">
+                <a:solidFill>
+                  <a:schemeClr val="dk1"/>
+                </a:solidFill>
+                <a:latin typeface="Times New Roman"/>
+                <a:ea typeface="Times New Roman"/>
+                <a:cs typeface="Times New Roman"/>
+                <a:sym typeface="Times New Roman"/>
+              </a:defRPr>
+            </a:lvl2pPr>
+            <a:lvl3pPr marL="1371600" marR="0" lvl="2" indent="-355600" algn="l" rtl="0">
+              <a:lnSpc>
+                <a:spcPct val="100000"/>
+              </a:lnSpc>
+              <a:spcBef>
+                <a:spcPts val="400"/>
+              </a:spcBef>
+              <a:spcAft>
+                <a:spcPts val="0"/>
+              </a:spcAft>
+              <a:buClr>
+                <a:srgbClr val="6699FF"/>
+              </a:buClr>
+              <a:buSzPts val="2000"/>
+              <a:buFont typeface="Times New Roman"/>
+              <a:buChar char="•"/>
+              <a:defRPr sz="2000" b="0" i="0" u="none" strike="noStrike" cap="none">
+                <a:solidFill>
+                  <a:schemeClr val="dk1"/>
+                </a:solidFill>
+                <a:latin typeface="Times New Roman"/>
+                <a:ea typeface="Times New Roman"/>
+                <a:cs typeface="Times New Roman"/>
+                <a:sym typeface="Times New Roman"/>
+              </a:defRPr>
+            </a:lvl3pPr>
+            <a:lvl4pPr marL="1828800" marR="0" lvl="3" indent="-355600" algn="l" rtl="0">
+              <a:lnSpc>
+                <a:spcPct val="100000"/>
+              </a:lnSpc>
+              <a:spcBef>
+                <a:spcPts val="400"/>
+              </a:spcBef>
+              <a:spcAft>
+                <a:spcPts val="0"/>
+              </a:spcAft>
+              <a:buClr>
+                <a:srgbClr val="FF5050"/>
+              </a:buClr>
+              <a:buSzPts val="2000"/>
+              <a:buFont typeface="Times New Roman"/>
+              <a:buChar char="o"/>
+              <a:defRPr sz="2000" b="0" i="0" u="none" strike="noStrike" cap="none">
+                <a:solidFill>
+                  <a:schemeClr val="dk1"/>
+                </a:solidFill>
+                <a:latin typeface="Times New Roman"/>
+                <a:ea typeface="Times New Roman"/>
+                <a:cs typeface="Times New Roman"/>
+                <a:sym typeface="Times New Roman"/>
+              </a:defRPr>
+            </a:lvl4pPr>
+            <a:lvl5pPr marL="2286000" marR="0" lvl="4" indent="-355600" algn="l" rtl="0">
+              <a:lnSpc>
+                <a:spcPct val="100000"/>
+              </a:lnSpc>
+              <a:spcBef>
+                <a:spcPts val="400"/>
+              </a:spcBef>
+              <a:spcAft>
+                <a:spcPts val="0"/>
+              </a:spcAft>
+              <a:buClr>
+                <a:srgbClr val="FF5050"/>
+              </a:buClr>
+              <a:buSzPts val="2000"/>
+              <a:buFont typeface="Times New Roman"/>
+              <a:buChar char="o"/>
+              <a:defRPr sz="2000" b="0" i="0" u="none" strike="noStrike" cap="none">
+                <a:solidFill>
+                  <a:schemeClr val="dk1"/>
+                </a:solidFill>
+                <a:latin typeface="Times New Roman"/>
+                <a:ea typeface="Times New Roman"/>
+                <a:cs typeface="Times New Roman"/>
+                <a:sym typeface="Times New Roman"/>
+              </a:defRPr>
+            </a:lvl5pPr>
+            <a:lvl6pPr marL="2743200" marR="0" lvl="5" indent="-355600" algn="l" rtl="0">
+              <a:lnSpc>
+                <a:spcPct val="100000"/>
+              </a:lnSpc>
+              <a:spcBef>
+                <a:spcPts val="400"/>
+              </a:spcBef>
+              <a:spcAft>
+                <a:spcPts val="0"/>
+              </a:spcAft>
+              <a:buClr>
+                <a:srgbClr val="FF5050"/>
+              </a:buClr>
+              <a:buSzPts val="2000"/>
+              <a:buFont typeface="Times New Roman"/>
+              <a:buChar char="o"/>
+              <a:defRPr sz="2000" b="0" i="0" u="none" strike="noStrike" cap="none">
+                <a:solidFill>
+                  <a:schemeClr val="dk1"/>
+                </a:solidFill>
+                <a:latin typeface="Times New Roman"/>
+                <a:ea typeface="Times New Roman"/>
+                <a:cs typeface="Times New Roman"/>
+                <a:sym typeface="Times New Roman"/>
+              </a:defRPr>
+            </a:lvl6pPr>
+            <a:lvl7pPr marL="3200400" marR="0" lvl="6" indent="-355600" algn="l" rtl="0">
+              <a:lnSpc>
+                <a:spcPct val="100000"/>
+              </a:lnSpc>
+              <a:spcBef>
+                <a:spcPts val="400"/>
+              </a:spcBef>
+              <a:spcAft>
+                <a:spcPts val="0"/>
+              </a:spcAft>
+              <a:buClr>
+                <a:srgbClr val="FF5050"/>
+              </a:buClr>
+              <a:buSzPts val="2000"/>
+              <a:buFont typeface="Times New Roman"/>
+              <a:buChar char="o"/>
+              <a:defRPr sz="2000" b="0" i="0" u="none" strike="noStrike" cap="none">
+                <a:solidFill>
+                  <a:schemeClr val="dk1"/>
+                </a:solidFill>
+                <a:latin typeface="Times New Roman"/>
+                <a:ea typeface="Times New Roman"/>
+                <a:cs typeface="Times New Roman"/>
+                <a:sym typeface="Times New Roman"/>
+              </a:defRPr>
+            </a:lvl7pPr>
+            <a:lvl8pPr marL="3657600" marR="0" lvl="7" indent="-355600" algn="l" rtl="0">
+              <a:lnSpc>
+                <a:spcPct val="100000"/>
+              </a:lnSpc>
+              <a:spcBef>
+                <a:spcPts val="400"/>
+              </a:spcBef>
+              <a:spcAft>
+                <a:spcPts val="0"/>
+              </a:spcAft>
+              <a:buClr>
+                <a:srgbClr val="FF5050"/>
+              </a:buClr>
+              <a:buSzPts val="2000"/>
+              <a:buFont typeface="Times New Roman"/>
+              <a:buChar char="o"/>
+              <a:defRPr sz="2000" b="0" i="0" u="none" strike="noStrike" cap="none">
+                <a:solidFill>
+                  <a:schemeClr val="dk1"/>
+                </a:solidFill>
+                <a:latin typeface="Times New Roman"/>
+                <a:ea typeface="Times New Roman"/>
+                <a:cs typeface="Times New Roman"/>
+                <a:sym typeface="Times New Roman"/>
+              </a:defRPr>
+            </a:lvl8pPr>
+            <a:lvl9pPr marL="4114800" marR="0" lvl="8" indent="-355600" algn="l" rtl="0">
+              <a:lnSpc>
+                <a:spcPct val="100000"/>
+              </a:lnSpc>
+              <a:spcBef>
+                <a:spcPts val="400"/>
+              </a:spcBef>
+              <a:spcAft>
+                <a:spcPts val="0"/>
+              </a:spcAft>
+              <a:buClr>
+                <a:srgbClr val="FF5050"/>
+              </a:buClr>
+              <a:buSzPts val="2000"/>
+              <a:buFont typeface="Times New Roman"/>
+              <a:buChar char="o"/>
+              <a:defRPr sz="2000" b="0" i="0" u="none" strike="noStrike" cap="none">
+                <a:solidFill>
+                  <a:schemeClr val="dk1"/>
+                </a:solidFill>
+                <a:latin typeface="Times New Roman"/>
+                <a:ea typeface="Times New Roman"/>
+                <a:cs typeface="Times New Roman"/>
+                <a:sym typeface="Times New Roman"/>
+              </a:defRPr>
+            </a:lvl9pPr>
+          </a:lstStyle>
+          <a:p>
+            <a:pPr marL="457200" lvl="1" indent="-406400">
+              <a:spcBef>
+                <a:spcPts val="560"/>
+              </a:spcBef>
+              <a:buClr>
+                <a:schemeClr val="accent2"/>
+              </a:buClr>
+              <a:buSzPts val="2800"/>
+              <a:buFont typeface="Noto Sans Symbols"/>
+              <a:buChar char="❖"/>
+            </a:pPr>
+            <a:r>
+              <a:rPr lang="zh-TW" altLang="en-US" sz="2000" dirty="0">
+                <a:solidFill>
+                  <a:srgbClr val="333333"/>
+                </a:solidFill>
+                <a:latin typeface="Times New Roman" panose="02020603050405020304" pitchFamily="18" charset="0"/>
+                <a:ea typeface="標楷體" panose="03000509000000000000" pitchFamily="65" charset="-120"/>
+                <a:cs typeface="Times New Roman" panose="02020603050405020304" pitchFamily="18" charset="0"/>
+              </a:rPr>
+              <a:t>舉例：</a:t>
+            </a:r>
+            <a:endParaRPr lang="en-US" altLang="zh-TW" sz="2000" dirty="0">
+              <a:solidFill>
+                <a:srgbClr val="333333"/>
+              </a:solidFill>
+              <a:latin typeface="Times New Roman" panose="02020603050405020304" pitchFamily="18" charset="0"/>
+              <a:ea typeface="標楷體" panose="03000509000000000000" pitchFamily="65" charset="-120"/>
+              <a:cs typeface="Times New Roman" panose="02020603050405020304" pitchFamily="18" charset="0"/>
+            </a:endParaRPr>
+          </a:p>
+        </p:txBody>
+      </p:sp>
     </p:spTree>
     <p:extLst>
       <p:ext uri="{BB962C8B-B14F-4D97-AF65-F5344CB8AC3E}">
@@ -13215,7 +13534,7 @@
                 <a:ea typeface="標楷體" panose="03000509000000000000" pitchFamily="65" charset="-120"/>
                 <a:cs typeface="Times New Roman" panose="02020603050405020304" pitchFamily="18" charset="0"/>
               </a:rPr>
-              <a:t>3</a:t>
+              <a:t>5</a:t>
             </a:r>
             <a:r>
               <a:rPr lang="zh-TW" altLang="zh-TW" sz="1200" dirty="0">
@@ -13248,7 +13567,16 @@
                 <a:cs typeface="Times New Roman" panose="02020603050405020304" pitchFamily="18" charset="0"/>
                 <a:hlinkClick r:id="rId3"/>
               </a:rPr>
-              <a:t>https://learn.microsoft.com/en-us/windows/win32/wcs/display-calibration-mhc</a:t>
+              <a:t>https</a:t>
+            </a:r>
+            <a:r>
+              <a:rPr lang="zh-TW" altLang="zh-TW" sz="1200" dirty="0">
+                <a:latin typeface="Times New Roman" panose="02020603050405020304" pitchFamily="18" charset="0"/>
+                <a:ea typeface="標楷體" panose="03000509000000000000" pitchFamily="65" charset="-120"/>
+                <a:cs typeface="Times New Roman" panose="02020603050405020304" pitchFamily="18" charset="0"/>
+                <a:hlinkClick r:id="rId3"/>
+              </a:rPr>
+              <a:t>://learn.microsoft.com/en-us/windows/win32/wcs/display-calibration-mhc</a:t>
             </a:r>
             <a:r>
               <a:rPr lang="zh-TW" altLang="zh-TW" sz="1200" dirty="0">
@@ -14464,7 +14792,7 @@
                 <a:ea typeface="標楷體" panose="03000509000000000000" pitchFamily="65" charset="-120"/>
                 <a:cs typeface="Times New Roman" panose="02020603050405020304" pitchFamily="18" charset="0"/>
               </a:rPr>
-              <a:t>4</a:t>
+              <a:t>6</a:t>
             </a:r>
             <a:r>
               <a:rPr lang="zh-TW" altLang="zh-TW" sz="1200" dirty="0">
@@ -19320,7 +19648,7 @@
           <a:p>
             <a:pPr algn="ctr"/>
             <a:r>
-              <a:rPr lang="zh-TW" altLang="en-US" sz="1600" b="0" cap="none" spc="0" dirty="0">
+              <a:rPr lang="zh-TW" altLang="en-US" sz="1600" cap="none" spc="0" dirty="0">
                 <a:ln w="0"/>
                 <a:solidFill>
                   <a:schemeClr val="tx1"/>
@@ -19348,10 +19676,10 @@
         </p:nvGrpSpPr>
         <p:grpSpPr>
           <a:xfrm>
-            <a:off x="1125020" y="4235611"/>
-            <a:ext cx="2299027" cy="1337705"/>
-            <a:chOff x="4107224" y="2882096"/>
-            <a:chExt cx="2299027" cy="1337705"/>
+            <a:off x="943080" y="4235611"/>
+            <a:ext cx="2662908" cy="1091484"/>
+            <a:chOff x="3925284" y="2882096"/>
+            <a:chExt cx="2662908" cy="1091484"/>
           </a:xfrm>
         </p:grpSpPr>
         <p:grpSp>
@@ -19482,7 +19810,39 @@
                     <a:ea typeface="標楷體" panose="03000509000000000000" pitchFamily="65" charset="-120"/>
                     <a:cs typeface="Times New Roman" panose="02020603050405020304" pitchFamily="18" charset="0"/>
                   </a:rPr>
-                  <a:t>​=0.3127</a:t>
+                  <a:t>​</a:t>
+                </a:r>
+                <a:r>
+                  <a:rPr lang="en-US" altLang="zh-TW" dirty="0">
+                    <a:latin typeface="Times New Roman" panose="02020603050405020304" pitchFamily="18" charset="0"/>
+                    <a:ea typeface="標楷體" panose="03000509000000000000" pitchFamily="65" charset="-120"/>
+                    <a:cs typeface="Times New Roman" panose="02020603050405020304" pitchFamily="18" charset="0"/>
+                  </a:rPr>
+                  <a:t> </a:t>
+                </a:r>
+                <a:r>
+                  <a:rPr lang="zh-TW" altLang="zh-TW" dirty="0">
+                    <a:latin typeface="Times New Roman" panose="02020603050405020304" pitchFamily="18" charset="0"/>
+                    <a:ea typeface="標楷體" panose="03000509000000000000" pitchFamily="65" charset="-120"/>
+                    <a:cs typeface="Times New Roman" panose="02020603050405020304" pitchFamily="18" charset="0"/>
+                  </a:rPr>
+                  <a:t>=</a:t>
+                </a:r>
+                <a:r>
+                  <a:rPr lang="en-US" altLang="zh-TW" dirty="0">
+                    <a:latin typeface="Times New Roman" panose="02020603050405020304" pitchFamily="18" charset="0"/>
+                    <a:ea typeface="標楷體" panose="03000509000000000000" pitchFamily="65" charset="-120"/>
+                    <a:cs typeface="Times New Roman" panose="02020603050405020304" pitchFamily="18" charset="0"/>
+                  </a:rPr>
+                  <a:t> </a:t>
+                </a:r>
+                <a:r>
+                  <a:rPr lang="zh-TW" altLang="zh-TW" dirty="0">
+                    <a:latin typeface="Times New Roman" panose="02020603050405020304" pitchFamily="18" charset="0"/>
+                    <a:ea typeface="標楷體" panose="03000509000000000000" pitchFamily="65" charset="-120"/>
+                    <a:cs typeface="Times New Roman" panose="02020603050405020304" pitchFamily="18" charset="0"/>
+                  </a:rPr>
+                  <a:t>0.3127</a:t>
                 </a:r>
                 <a:endParaRPr lang="en-US" altLang="zh-TW" dirty="0">
                   <a:latin typeface="Times New Roman" panose="02020603050405020304" pitchFamily="18" charset="0"/>
@@ -19513,7 +19873,39 @@
                     <a:ea typeface="標楷體" panose="03000509000000000000" pitchFamily="65" charset="-120"/>
                     <a:cs typeface="Times New Roman" panose="02020603050405020304" pitchFamily="18" charset="0"/>
                   </a:rPr>
-                  <a:t>​=0.3290</a:t>
+                  <a:t>​</a:t>
+                </a:r>
+                <a:r>
+                  <a:rPr lang="en-US" altLang="zh-TW" dirty="0">
+                    <a:latin typeface="Times New Roman" panose="02020603050405020304" pitchFamily="18" charset="0"/>
+                    <a:ea typeface="標楷體" panose="03000509000000000000" pitchFamily="65" charset="-120"/>
+                    <a:cs typeface="Times New Roman" panose="02020603050405020304" pitchFamily="18" charset="0"/>
+                  </a:rPr>
+                  <a:t> </a:t>
+                </a:r>
+                <a:r>
+                  <a:rPr lang="zh-TW" altLang="zh-TW" dirty="0">
+                    <a:latin typeface="Times New Roman" panose="02020603050405020304" pitchFamily="18" charset="0"/>
+                    <a:ea typeface="標楷體" panose="03000509000000000000" pitchFamily="65" charset="-120"/>
+                    <a:cs typeface="Times New Roman" panose="02020603050405020304" pitchFamily="18" charset="0"/>
+                  </a:rPr>
+                  <a:t>=</a:t>
+                </a:r>
+                <a:r>
+                  <a:rPr lang="en-US" altLang="zh-TW" dirty="0">
+                    <a:latin typeface="Times New Roman" panose="02020603050405020304" pitchFamily="18" charset="0"/>
+                    <a:ea typeface="標楷體" panose="03000509000000000000" pitchFamily="65" charset="-120"/>
+                    <a:cs typeface="Times New Roman" panose="02020603050405020304" pitchFamily="18" charset="0"/>
+                  </a:rPr>
+                  <a:t> </a:t>
+                </a:r>
+                <a:r>
+                  <a:rPr lang="zh-TW" altLang="zh-TW" dirty="0">
+                    <a:latin typeface="Times New Roman" panose="02020603050405020304" pitchFamily="18" charset="0"/>
+                    <a:ea typeface="標楷體" panose="03000509000000000000" pitchFamily="65" charset="-120"/>
+                    <a:cs typeface="Times New Roman" panose="02020603050405020304" pitchFamily="18" charset="0"/>
+                  </a:rPr>
+                  <a:t>0.3290</a:t>
                 </a:r>
                 <a:endParaRPr lang="zh-TW" altLang="en-US" dirty="0">
                   <a:latin typeface="Times New Roman" panose="02020603050405020304" pitchFamily="18" charset="0"/>
@@ -19538,8 +19930,8 @@
           </p:nvSpPr>
           <p:spPr>
             <a:xfrm>
-              <a:off x="4107224" y="3635026"/>
-              <a:ext cx="2299027" cy="584775"/>
+              <a:off x="3925284" y="3635026"/>
+              <a:ext cx="2662908" cy="338554"/>
             </a:xfrm>
             <a:prstGeom prst="rect">
               <a:avLst/>
@@ -19563,22 +19955,10 @@
                   <a:ea typeface="標楷體" panose="03000509000000000000" pitchFamily="65" charset="-120"/>
                   <a:cs typeface="Times New Roman" panose="02020603050405020304" pitchFamily="18" charset="0"/>
                 </a:rPr>
-                <a:t>目標白點色彩</a:t>
+                <a:t>白點</a:t>
               </a:r>
-              <a:endParaRPr lang="en-US" altLang="zh-TW" sz="1600" dirty="0">
-                <a:ln w="0"/>
-                <a:solidFill>
-                  <a:schemeClr val="tx1"/>
-                </a:solidFill>
-                <a:latin typeface="Times New Roman" panose="02020603050405020304" pitchFamily="18" charset="0"/>
-                <a:ea typeface="標楷體" panose="03000509000000000000" pitchFamily="65" charset="-120"/>
-                <a:cs typeface="Times New Roman" panose="02020603050405020304" pitchFamily="18" charset="0"/>
-              </a:endParaRPr>
-            </a:p>
-            <a:p>
-              <a:pPr algn="ctr"/>
               <a:r>
-                <a:rPr lang="zh-TW" altLang="en-US" sz="1600" b="0" cap="none" spc="0" dirty="0">
+                <a:rPr lang="zh-TW" altLang="en-US" sz="1600" cap="none" spc="0" dirty="0">
                   <a:ln w="0"/>
                   <a:solidFill>
                     <a:schemeClr val="tx1"/>
@@ -19629,7 +20009,7 @@
                 </a:rPr>
                 <a:t>)</a:t>
               </a:r>
-              <a:endParaRPr lang="zh-TW" altLang="en-US" sz="1600" b="0" cap="none" spc="0" dirty="0">
+              <a:endParaRPr lang="zh-TW" altLang="en-US" sz="1600" cap="none" spc="0" dirty="0">
                 <a:ln w="0"/>
                 <a:solidFill>
                   <a:schemeClr val="tx1"/>
@@ -19656,7 +20036,7 @@
         </p:nvSpPr>
         <p:spPr>
           <a:xfrm>
-            <a:off x="4232736" y="3105182"/>
+            <a:off x="4112708" y="3700191"/>
             <a:ext cx="1070987" cy="1808539"/>
           </a:xfrm>
           <a:prstGeom prst="rightArrow">
@@ -19704,7 +20084,7 @@
               <a:t>設</a:t>
             </a:r>
             <a:r>
-              <a:rPr lang="en-US" altLang="zh-TW" dirty="0" err="1">
+              <a:rPr lang="en-US" altLang="zh-TW" dirty="0">
                 <a:solidFill>
                   <a:schemeClr val="tx1"/>
                 </a:solidFill>
@@ -19712,29 +20092,7 @@
                 <a:ea typeface="標楷體" panose="03000509000000000000" pitchFamily="65" charset="-120"/>
                 <a:cs typeface="Times New Roman" panose="02020603050405020304" pitchFamily="18" charset="0"/>
               </a:rPr>
-              <a:t>Y</a:t>
-            </a:r>
-            <a:r>
-              <a:rPr lang="en-US" altLang="zh-TW" baseline="-25000" dirty="0" err="1">
-                <a:solidFill>
-                  <a:schemeClr val="tx1"/>
-                </a:solidFill>
-                <a:latin typeface="Times New Roman" panose="02020603050405020304" pitchFamily="18" charset="0"/>
-                <a:ea typeface="標楷體" panose="03000509000000000000" pitchFamily="65" charset="-120"/>
-                <a:cs typeface="Times New Roman" panose="02020603050405020304" pitchFamily="18" charset="0"/>
-              </a:rPr>
-              <a:t>w</a:t>
-            </a:r>
-            <a:r>
-              <a:rPr lang="en-US" altLang="zh-TW" dirty="0">
-                <a:solidFill>
-                  <a:schemeClr val="tx1"/>
-                </a:solidFill>
-                <a:latin typeface="Times New Roman" panose="02020603050405020304" pitchFamily="18" charset="0"/>
-                <a:ea typeface="標楷體" panose="03000509000000000000" pitchFamily="65" charset="-120"/>
-                <a:cs typeface="Times New Roman" panose="02020603050405020304" pitchFamily="18" charset="0"/>
-              </a:rPr>
-              <a:t>=1</a:t>
+              <a:t>Y=1</a:t>
             </a:r>
             <a:endParaRPr lang="zh-TW" altLang="en-US" dirty="0">
               <a:solidFill>
@@ -19761,10 +20119,10 @@
         </p:nvGrpSpPr>
         <p:grpSpPr>
           <a:xfrm>
-            <a:off x="7304856" y="694648"/>
-            <a:ext cx="2222339" cy="2144316"/>
+            <a:off x="6905550" y="810904"/>
+            <a:ext cx="2191583" cy="2144316"/>
             <a:chOff x="5683170" y="1284685"/>
-            <a:chExt cx="2222339" cy="2144316"/>
+            <a:chExt cx="2191583" cy="2144316"/>
           </a:xfrm>
         </p:grpSpPr>
         <p:sp>
@@ -19782,7 +20140,7 @@
           <p:spPr>
             <a:xfrm>
               <a:off x="5683170" y="1284685"/>
-              <a:ext cx="2222339" cy="2144316"/>
+              <a:ext cx="2191583" cy="2144316"/>
             </a:xfrm>
             <a:prstGeom prst="rect">
               <a:avLst/>
@@ -19842,7 +20200,7 @@
               <p:spPr>
                 <a:xfrm>
                   <a:off x="6283125" y="1807132"/>
-                  <a:ext cx="883447" cy="462306"/>
+                  <a:ext cx="1014700" cy="462306"/>
                 </a:xfrm>
                 <a:prstGeom prst="rect">
                   <a:avLst/>
@@ -19866,24 +20224,14 @@
                           <m:rPr>
                             <m:sty m:val="p"/>
                           </m:rPr>
-                          <a:rPr lang="pl-PL" altLang="zh-TW" sz="1600" i="0" smtClean="0">
+                          <a:rPr lang="pl-PL" altLang="zh-TW" sz="1600" b="0" i="0" smtClean="0">
                             <a:effectLst/>
                             <a:latin typeface="Cambria Math" panose="02040503050406030204" pitchFamily="18" charset="0"/>
                           </a:rPr>
                           <m:t>X</m:t>
                         </m:r>
                         <m:r>
-                          <m:rPr>
-                            <m:sty m:val="p"/>
-                          </m:rPr>
-                          <a:rPr lang="pl-PL" altLang="zh-TW" sz="1600" i="0" baseline="-25000">
-                            <a:effectLst/>
-                            <a:latin typeface="Cambria Math" panose="02040503050406030204" pitchFamily="18" charset="0"/>
-                          </a:rPr>
-                          <m:t>W</m:t>
-                        </m:r>
-                        <m:r>
-                          <a:rPr lang="pl-PL" altLang="zh-TW" sz="1600" i="0">
+                          <a:rPr lang="pl-PL" altLang="zh-TW" sz="1600" b="0" i="0" smtClean="0">
                             <a:effectLst/>
                             <a:latin typeface="Cambria Math" panose="02040503050406030204" pitchFamily="18" charset="0"/>
                           </a:rPr>
@@ -19892,7 +20240,7 @@
                         <m:f>
                           <m:fPr>
                             <m:ctrlPr>
-                              <a:rPr lang="pl-PL" altLang="zh-TW" sz="1600">
+                              <a:rPr lang="pl-PL" altLang="zh-TW" sz="1600" i="1">
                                 <a:effectLst/>
                                 <a:latin typeface="Cambria Math" panose="02040503050406030204" pitchFamily="18" charset="0"/>
                               </a:rPr>
@@ -19903,21 +20251,11 @@
                               <m:rPr>
                                 <m:sty m:val="p"/>
                               </m:rPr>
-                              <a:rPr lang="pl-PL" altLang="zh-TW" sz="1600" i="0">
+                              <a:rPr lang="pl-PL" altLang="zh-TW" sz="1600" b="0" i="0" smtClean="0">
                                 <a:effectLst/>
                                 <a:latin typeface="Cambria Math" panose="02040503050406030204" pitchFamily="18" charset="0"/>
                               </a:rPr>
                               <m:t>x</m:t>
-                            </m:r>
-                            <m:r>
-                              <m:rPr>
-                                <m:sty m:val="p"/>
-                              </m:rPr>
-                              <a:rPr lang="pl-PL" altLang="zh-TW" sz="1600" i="0" baseline="-25000">
-                                <a:effectLst/>
-                                <a:latin typeface="Cambria Math" panose="02040503050406030204" pitchFamily="18" charset="0"/>
-                              </a:rPr>
-                              <m:t>W</m:t>
                             </m:r>
                           </m:num>
                           <m:den>
@@ -19925,24 +20263,33 @@
                               <m:rPr>
                                 <m:sty m:val="p"/>
                               </m:rPr>
-                              <a:rPr lang="pl-PL" altLang="zh-TW" sz="1600" i="0">
+                              <a:rPr lang="pl-PL" altLang="zh-TW" sz="1600" b="0" i="0" smtClean="0">
                                 <a:effectLst/>
                                 <a:latin typeface="Cambria Math" panose="02040503050406030204" pitchFamily="18" charset="0"/>
                               </a:rPr>
                               <m:t>y</m:t>
                             </m:r>
-                            <m:r>
-                              <m:rPr>
-                                <m:sty m:val="p"/>
-                              </m:rPr>
-                              <a:rPr lang="pl-PL" altLang="zh-TW" sz="1600" i="0" baseline="-25000">
-                                <a:effectLst/>
-                                <a:latin typeface="Cambria Math" panose="02040503050406030204" pitchFamily="18" charset="0"/>
-                              </a:rPr>
-                              <m:t>W</m:t>
-                            </m:r>
                           </m:den>
                         </m:f>
+                        <m:r>
+                          <a:rPr lang="en-US" altLang="zh-TW" sz="1600" i="1">
+                            <a:latin typeface="Cambria Math" panose="02040503050406030204" pitchFamily="18" charset="0"/>
+                            <a:ea typeface="Cambria Math" panose="02040503050406030204" pitchFamily="18" charset="0"/>
+                            <a:cs typeface="Times New Roman" panose="02020603050405020304" pitchFamily="18" charset="0"/>
+                          </a:rPr>
+                          <m:t>×</m:t>
+                        </m:r>
+                        <m:r>
+                          <m:rPr>
+                            <m:nor/>
+                          </m:rPr>
+                          <a:rPr lang="en-US" altLang="zh-TW" sz="1600">
+                            <a:latin typeface="Times New Roman" panose="02020603050405020304" pitchFamily="18" charset="0"/>
+                            <a:ea typeface="標楷體" panose="03000509000000000000" pitchFamily="65" charset="-120"/>
+                            <a:cs typeface="Times New Roman" panose="02020603050405020304" pitchFamily="18" charset="0"/>
+                          </a:rPr>
+                          <m:t>Y</m:t>
+                        </m:r>
                       </m:oMath>
                     </m:oMathPara>
                   </a14:m>
@@ -19974,7 +20321,7 @@
               <p:spPr>
                 <a:xfrm>
                   <a:off x="6283125" y="1807132"/>
-                  <a:ext cx="883447" cy="462306"/>
+                  <a:ext cx="1014700" cy="462306"/>
                 </a:xfrm>
                 <a:prstGeom prst="rect">
                   <a:avLst/>
@@ -19982,7 +20329,7 @@
                 <a:blipFill>
                   <a:blip r:embed="rId3"/>
                   <a:stretch>
-                    <a:fillRect l="-4828" r="-1379" b="-16000"/>
+                    <a:fillRect l="-3593" r="-4192" b="-14474"/>
                   </a:stretch>
                 </a:blipFill>
               </p:spPr>
@@ -20017,8 +20364,8 @@
               </p:nvSpPr>
               <p:spPr>
                 <a:xfrm>
-                  <a:off x="6474362" y="2380012"/>
-                  <a:ext cx="649216" cy="246221"/>
+                  <a:off x="6538866" y="2375482"/>
+                  <a:ext cx="512961" cy="246221"/>
                 </a:xfrm>
                 <a:prstGeom prst="rect">
                   <a:avLst/>
@@ -20054,25 +20401,24 @@
                           <m:rPr>
                             <m:nor/>
                           </m:rPr>
-                          <a:rPr lang="en-US" altLang="zh-TW" sz="1600" baseline="-25000" smtClean="0">
-                            <a:effectLst/>
-                            <a:latin typeface="Times New Roman" panose="02020603050405020304" pitchFamily="18" charset="0"/>
-                            <a:ea typeface="標楷體" panose="03000509000000000000" pitchFamily="65" charset="-120"/>
-                            <a:cs typeface="Times New Roman" panose="02020603050405020304" pitchFamily="18" charset="0"/>
-                          </a:rPr>
-                          <m:t>W</m:t>
-                        </m:r>
-                        <m:r>
-                          <m:rPr>
-                            <m:nor/>
-                          </m:rPr>
                           <a:rPr lang="en-US" altLang="zh-TW" sz="1600" smtClean="0">
                             <a:effectLst/>
                             <a:latin typeface="Times New Roman" panose="02020603050405020304" pitchFamily="18" charset="0"/>
                             <a:ea typeface="標楷體" panose="03000509000000000000" pitchFamily="65" charset="-120"/>
                             <a:cs typeface="Times New Roman" panose="02020603050405020304" pitchFamily="18" charset="0"/>
                           </a:rPr>
-                          <m:t> = 1</m:t>
+                          <m:t> =</m:t>
+                        </m:r>
+                        <m:r>
+                          <m:rPr>
+                            <m:nor/>
+                          </m:rPr>
+                          <a:rPr lang="en-US" altLang="zh-TW" sz="1600">
+                            <a:latin typeface="Times New Roman" panose="02020603050405020304" pitchFamily="18" charset="0"/>
+                            <a:ea typeface="標楷體" panose="03000509000000000000" pitchFamily="65" charset="-120"/>
+                            <a:cs typeface="Times New Roman" panose="02020603050405020304" pitchFamily="18" charset="0"/>
+                          </a:rPr>
+                          <m:t>Y</m:t>
                         </m:r>
                       </m:oMath>
                     </m:oMathPara>
@@ -20104,8 +20450,8 @@
               </p:nvSpPr>
               <p:spPr>
                 <a:xfrm>
-                  <a:off x="6474362" y="2380012"/>
-                  <a:ext cx="649216" cy="246221"/>
+                  <a:off x="6538866" y="2375482"/>
+                  <a:ext cx="512961" cy="246221"/>
                 </a:xfrm>
                 <a:prstGeom prst="rect">
                   <a:avLst/>
@@ -20113,7 +20459,7 @@
                 <a:blipFill>
                   <a:blip r:embed="rId4"/>
                   <a:stretch>
-                    <a:fillRect l="-5607" r="-6542" b="-17500"/>
+                    <a:fillRect l="-7143" r="-9524" b="-7500"/>
                   </a:stretch>
                 </a:blipFill>
               </p:spPr>
@@ -20148,8 +20494,8 @@
               </p:nvSpPr>
               <p:spPr>
                 <a:xfrm>
-                  <a:off x="5935497" y="2735332"/>
-                  <a:ext cx="1682064" cy="509435"/>
+                  <a:off x="6115380" y="2755933"/>
+                  <a:ext cx="1593834" cy="442493"/>
                 </a:xfrm>
                 <a:prstGeom prst="rect">
                   <a:avLst/>
@@ -20164,149 +20510,184 @@
                 <a:p>
                   <a:pPr/>
                   <a14:m>
-                    <m:oMathPara xmlns:m="http://schemas.openxmlformats.org/officeDocument/2006/math">
-                      <m:oMathParaPr>
-                        <m:jc m:val="centerGroup"/>
-                      </m:oMathParaPr>
-                      <m:oMath xmlns:m="http://schemas.openxmlformats.org/officeDocument/2006/math">
-                        <m:r>
-                          <m:rPr>
-                            <m:nor/>
-                          </m:rPr>
-                          <a:rPr lang="en-US" altLang="zh-TW" sz="1600" smtClean="0">
-                            <a:effectLst/>
-                            <a:latin typeface="Times New Roman" panose="02020603050405020304" pitchFamily="18" charset="0"/>
-                            <a:ea typeface="標楷體" panose="03000509000000000000" pitchFamily="65" charset="-120"/>
-                            <a:cs typeface="Times New Roman" panose="02020603050405020304" pitchFamily="18" charset="0"/>
-                          </a:rPr>
-                          <m:t>Z</m:t>
-                        </m:r>
-                        <m:r>
-                          <m:rPr>
-                            <m:nor/>
-                          </m:rPr>
-                          <a:rPr lang="en-US" altLang="zh-TW" sz="1600" baseline="-25000" smtClean="0">
-                            <a:effectLst/>
-                            <a:latin typeface="Times New Roman" panose="02020603050405020304" pitchFamily="18" charset="0"/>
-                            <a:ea typeface="標楷體" panose="03000509000000000000" pitchFamily="65" charset="-120"/>
-                            <a:cs typeface="Times New Roman" panose="02020603050405020304" pitchFamily="18" charset="0"/>
-                          </a:rPr>
-                          <m:t>W</m:t>
-                        </m:r>
-                        <m:r>
-                          <m:rPr>
-                            <m:nor/>
-                          </m:rPr>
-                          <a:rPr lang="en-US" altLang="zh-TW" sz="1600" smtClean="0">
-                            <a:effectLst/>
-                            <a:latin typeface="Times New Roman" panose="02020603050405020304" pitchFamily="18" charset="0"/>
-                            <a:ea typeface="標楷體" panose="03000509000000000000" pitchFamily="65" charset="-120"/>
-                            <a:cs typeface="Times New Roman" panose="02020603050405020304" pitchFamily="18" charset="0"/>
-                          </a:rPr>
-                          <m:t> = </m:t>
-                        </m:r>
-                        <m:f>
-                          <m:fPr>
-                            <m:ctrlPr>
-                              <a:rPr lang="en-US" altLang="zh-TW" sz="1600">
-                                <a:effectLst/>
-                                <a:latin typeface="Cambria Math" panose="02040503050406030204" pitchFamily="18" charset="0"/>
-                                <a:ea typeface="標楷體" panose="03000509000000000000" pitchFamily="65" charset="-120"/>
-                                <a:cs typeface="Times New Roman" panose="02020603050405020304" pitchFamily="18" charset="0"/>
-                              </a:rPr>
-                            </m:ctrlPr>
-                          </m:fPr>
-                          <m:num>
-                            <m:r>
-                              <m:rPr>
-                                <m:nor/>
-                              </m:rPr>
-                              <a:rPr lang="en-US" altLang="zh-TW" sz="1600">
-                                <a:effectLst/>
-                                <a:latin typeface="Times New Roman" panose="02020603050405020304" pitchFamily="18" charset="0"/>
-                                <a:ea typeface="標楷體" panose="03000509000000000000" pitchFamily="65" charset="-120"/>
-                                <a:cs typeface="Times New Roman" panose="02020603050405020304" pitchFamily="18" charset="0"/>
-                              </a:rPr>
-                              <m:t>(1 − </m:t>
-                            </m:r>
-                            <m:r>
-                              <m:rPr>
-                                <m:nor/>
-                              </m:rPr>
-                              <a:rPr lang="en-US" altLang="zh-TW" sz="1600">
-                                <a:effectLst/>
-                                <a:latin typeface="Times New Roman" panose="02020603050405020304" pitchFamily="18" charset="0"/>
-                                <a:ea typeface="標楷體" panose="03000509000000000000" pitchFamily="65" charset="-120"/>
-                                <a:cs typeface="Times New Roman" panose="02020603050405020304" pitchFamily="18" charset="0"/>
-                              </a:rPr>
-                              <m:t>xW</m:t>
-                            </m:r>
-                            <m:r>
-                              <m:rPr>
-                                <m:nor/>
-                              </m:rPr>
-                              <a:rPr lang="en-US" altLang="zh-TW" sz="1600">
-                                <a:effectLst/>
-                                <a:latin typeface="Times New Roman" panose="02020603050405020304" pitchFamily="18" charset="0"/>
-                                <a:ea typeface="標楷體" panose="03000509000000000000" pitchFamily="65" charset="-120"/>
-                                <a:cs typeface="Times New Roman" panose="02020603050405020304" pitchFamily="18" charset="0"/>
-                              </a:rPr>
-                              <m:t> − </m:t>
-                            </m:r>
-                            <m:r>
-                              <m:rPr>
-                                <m:nor/>
-                              </m:rPr>
-                              <a:rPr lang="en-US" altLang="zh-TW" sz="1600">
-                                <a:effectLst/>
-                                <a:latin typeface="Times New Roman" panose="02020603050405020304" pitchFamily="18" charset="0"/>
-                                <a:ea typeface="標楷體" panose="03000509000000000000" pitchFamily="65" charset="-120"/>
-                                <a:cs typeface="Times New Roman" panose="02020603050405020304" pitchFamily="18" charset="0"/>
-                              </a:rPr>
-                              <m:t>yW</m:t>
-                            </m:r>
-                            <m:r>
-                              <m:rPr>
-                                <m:nor/>
-                              </m:rPr>
-                              <a:rPr lang="en-US" altLang="zh-TW" sz="1600">
-                                <a:effectLst/>
-                                <a:latin typeface="Times New Roman" panose="02020603050405020304" pitchFamily="18" charset="0"/>
-                                <a:ea typeface="標楷體" panose="03000509000000000000" pitchFamily="65" charset="-120"/>
-                                <a:cs typeface="Times New Roman" panose="02020603050405020304" pitchFamily="18" charset="0"/>
-                              </a:rPr>
-                              <m:t>)</m:t>
-                            </m:r>
-                          </m:num>
-                          <m:den>
-                            <m:r>
-                              <m:rPr>
-                                <m:nor/>
-                              </m:rPr>
-                              <a:rPr lang="en-US" altLang="zh-TW" sz="1600">
-                                <a:effectLst/>
-                                <a:latin typeface="Times New Roman" panose="02020603050405020304" pitchFamily="18" charset="0"/>
-                                <a:ea typeface="標楷體" panose="03000509000000000000" pitchFamily="65" charset="-120"/>
-                                <a:cs typeface="Times New Roman" panose="02020603050405020304" pitchFamily="18" charset="0"/>
-                              </a:rPr>
-                              <m:t>y</m:t>
-                            </m:r>
-                            <m:r>
-                              <m:rPr>
-                                <m:nor/>
-                              </m:rPr>
-                              <a:rPr lang="en-US" altLang="zh-TW" sz="1600" baseline="-25000">
-                                <a:effectLst/>
-                                <a:latin typeface="Times New Roman" panose="02020603050405020304" pitchFamily="18" charset="0"/>
-                                <a:ea typeface="標楷體" panose="03000509000000000000" pitchFamily="65" charset="-120"/>
-                                <a:cs typeface="Times New Roman" panose="02020603050405020304" pitchFamily="18" charset="0"/>
-                              </a:rPr>
-                              <m:t>W</m:t>
-                            </m:r>
-                          </m:den>
-                        </m:f>
-                      </m:oMath>
-                    </m:oMathPara>
+                    <m:oMath xmlns:m="http://schemas.openxmlformats.org/officeDocument/2006/math">
+                      <m:r>
+                        <m:rPr>
+                          <m:nor/>
+                        </m:rPr>
+                        <a:rPr lang="en-US" altLang="zh-TW" sz="1600" smtClean="0">
+                          <a:effectLst/>
+                          <a:latin typeface="Times New Roman" panose="02020603050405020304" pitchFamily="18" charset="0"/>
+                          <a:ea typeface="標楷體" panose="03000509000000000000" pitchFamily="65" charset="-120"/>
+                          <a:cs typeface="Times New Roman" panose="02020603050405020304" pitchFamily="18" charset="0"/>
+                        </a:rPr>
+                        <m:t>Z</m:t>
+                      </m:r>
+                      <m:r>
+                        <a:rPr lang="zh-TW" altLang="en-US" sz="1600" b="0" i="0">
+                          <a:effectLst/>
+                          <a:latin typeface="Cambria Math" panose="02040503050406030204" pitchFamily="18" charset="0"/>
+                          <a:ea typeface="標楷體" panose="03000509000000000000" pitchFamily="65" charset="-120"/>
+                          <a:cs typeface="Times New Roman" panose="02020603050405020304" pitchFamily="18" charset="0"/>
+                        </a:rPr>
+                        <m:t> </m:t>
+                      </m:r>
+                      <m:r>
+                        <m:rPr>
+                          <m:nor/>
+                        </m:rPr>
+                        <a:rPr lang="en-US" altLang="zh-TW" sz="1600" smtClean="0">
+                          <a:effectLst/>
+                          <a:latin typeface="Times New Roman" panose="02020603050405020304" pitchFamily="18" charset="0"/>
+                          <a:ea typeface="標楷體" panose="03000509000000000000" pitchFamily="65" charset="-120"/>
+                          <a:cs typeface="Times New Roman" panose="02020603050405020304" pitchFamily="18" charset="0"/>
+                        </a:rPr>
+                        <m:t>= </m:t>
+                      </m:r>
+                      <m:f>
+                        <m:fPr>
+                          <m:ctrlPr>
+                            <a:rPr lang="en-US" altLang="zh-TW" sz="1600">
+                              <a:effectLst/>
+                              <a:latin typeface="Cambria Math" panose="02040503050406030204" pitchFamily="18" charset="0"/>
+                              <a:ea typeface="標楷體" panose="03000509000000000000" pitchFamily="65" charset="-120"/>
+                              <a:cs typeface="Times New Roman" panose="02020603050405020304" pitchFamily="18" charset="0"/>
+                            </a:rPr>
+                          </m:ctrlPr>
+                        </m:fPr>
+                        <m:num>
+                          <m:r>
+                            <m:rPr>
+                              <m:nor/>
+                            </m:rPr>
+                            <a:rPr lang="en-US" altLang="zh-TW" sz="1600">
+                              <a:effectLst/>
+                              <a:latin typeface="Times New Roman" panose="02020603050405020304" pitchFamily="18" charset="0"/>
+                              <a:ea typeface="標楷體" panose="03000509000000000000" pitchFamily="65" charset="-120"/>
+                              <a:cs typeface="Times New Roman" panose="02020603050405020304" pitchFamily="18" charset="0"/>
+                            </a:rPr>
+                            <m:t>(1 −</m:t>
+                          </m:r>
+                          <m:r>
+                            <a:rPr lang="zh-TW" altLang="en-US" sz="1600" b="0" i="0">
+                              <a:effectLst/>
+                              <a:latin typeface="Cambria Math" panose="02040503050406030204" pitchFamily="18" charset="0"/>
+                              <a:ea typeface="標楷體" panose="03000509000000000000" pitchFamily="65" charset="-120"/>
+                              <a:cs typeface="Times New Roman" panose="02020603050405020304" pitchFamily="18" charset="0"/>
+                            </a:rPr>
+                            <m:t> </m:t>
+                          </m:r>
+                          <m:r>
+                            <m:rPr>
+                              <m:sty m:val="p"/>
+                            </m:rPr>
+                            <a:rPr lang="pl-PL" altLang="zh-TW" sz="1600" b="0" i="0">
+                              <a:effectLst/>
+                              <a:latin typeface="Cambria Math" panose="02040503050406030204" pitchFamily="18" charset="0"/>
+                            </a:rPr>
+                            <m:t>x</m:t>
+                          </m:r>
+                          <m:r>
+                            <a:rPr lang="zh-TW" altLang="en-US" sz="1600" b="0" i="0" smtClean="0">
+                              <a:effectLst/>
+                              <a:latin typeface="Cambria Math" panose="02040503050406030204" pitchFamily="18" charset="0"/>
+                            </a:rPr>
+                            <m:t> </m:t>
+                          </m:r>
+                          <m:r>
+                            <m:rPr>
+                              <m:nor/>
+                            </m:rPr>
+                            <a:rPr lang="en-US" altLang="zh-TW" sz="1600">
+                              <a:effectLst/>
+                              <a:latin typeface="Times New Roman" panose="02020603050405020304" pitchFamily="18" charset="0"/>
+                              <a:ea typeface="標楷體" panose="03000509000000000000" pitchFamily="65" charset="-120"/>
+                              <a:cs typeface="Times New Roman" panose="02020603050405020304" pitchFamily="18" charset="0"/>
+                            </a:rPr>
+                            <m:t>−</m:t>
+                          </m:r>
+                          <m:r>
+                            <a:rPr lang="zh-TW" altLang="en-US" sz="1600" b="0" i="0">
+                              <a:effectLst/>
+                              <a:latin typeface="Cambria Math" panose="02040503050406030204" pitchFamily="18" charset="0"/>
+                              <a:ea typeface="標楷體" panose="03000509000000000000" pitchFamily="65" charset="-120"/>
+                              <a:cs typeface="Times New Roman" panose="02020603050405020304" pitchFamily="18" charset="0"/>
+                            </a:rPr>
+                            <m:t> </m:t>
+                          </m:r>
+                          <m:r>
+                            <m:rPr>
+                              <m:sty m:val="p"/>
+                            </m:rPr>
+                            <a:rPr lang="pl-PL" altLang="zh-TW" sz="1600" b="0" i="0">
+                              <a:effectLst/>
+                              <a:latin typeface="Cambria Math" panose="02040503050406030204" pitchFamily="18" charset="0"/>
+                            </a:rPr>
+                            <m:t>y</m:t>
+                          </m:r>
+                          <m:r>
+                            <m:rPr>
+                              <m:nor/>
+                            </m:rPr>
+                            <a:rPr lang="en-US" altLang="zh-TW" sz="1600">
+                              <a:effectLst/>
+                              <a:latin typeface="Times New Roman" panose="02020603050405020304" pitchFamily="18" charset="0"/>
+                              <a:ea typeface="標楷體" panose="03000509000000000000" pitchFamily="65" charset="-120"/>
+                              <a:cs typeface="Times New Roman" panose="02020603050405020304" pitchFamily="18" charset="0"/>
+                            </a:rPr>
+                            <m:t>)</m:t>
+                          </m:r>
+                        </m:num>
+                        <m:den>
+                          <m:r>
+                            <m:rPr>
+                              <m:nor/>
+                            </m:rPr>
+                            <a:rPr lang="en-US" altLang="zh-TW" sz="1600">
+                              <a:effectLst/>
+                              <a:latin typeface="Times New Roman" panose="02020603050405020304" pitchFamily="18" charset="0"/>
+                              <a:ea typeface="標楷體" panose="03000509000000000000" pitchFamily="65" charset="-120"/>
+                              <a:cs typeface="Times New Roman" panose="02020603050405020304" pitchFamily="18" charset="0"/>
+                            </a:rPr>
+                            <m:t>y</m:t>
+                          </m:r>
+                        </m:den>
+                      </m:f>
+                    </m:oMath>
+                  </a14:m>
+                  <a:r>
+                    <a:rPr lang="en-US" altLang="zh-TW" sz="1600" dirty="0">
+                      <a:effectLst/>
+                      <a:latin typeface="Times New Roman" panose="02020603050405020304" pitchFamily="18" charset="0"/>
+                      <a:ea typeface="標楷體" panose="03000509000000000000" pitchFamily="65" charset="-120"/>
+                      <a:cs typeface="Times New Roman" panose="02020603050405020304" pitchFamily="18" charset="0"/>
+                    </a:rPr>
+                    <a:t> </a:t>
+                  </a:r>
+                  <a14:m>
+                    <m:oMath xmlns:m="http://schemas.openxmlformats.org/officeDocument/2006/math">
+                      <m:r>
+                        <a:rPr lang="en-US" altLang="zh-TW" sz="1600" b="0" i="0" smtClean="0">
+                          <a:effectLst/>
+                          <a:latin typeface="Cambria Math" panose="02040503050406030204" pitchFamily="18" charset="0"/>
+                          <a:ea typeface="Cambria Math" panose="02040503050406030204" pitchFamily="18" charset="0"/>
+                          <a:cs typeface="Times New Roman" panose="02020603050405020304" pitchFamily="18" charset="0"/>
+                        </a:rPr>
+                        <m:t>×</m:t>
+                      </m:r>
+                      <m:r>
+                        <m:rPr>
+                          <m:nor/>
+                        </m:rPr>
+                        <a:rPr lang="en-US" altLang="zh-TW" sz="1600">
+                          <a:effectLst/>
+                          <a:latin typeface="Times New Roman" panose="02020603050405020304" pitchFamily="18" charset="0"/>
+                          <a:ea typeface="標楷體" panose="03000509000000000000" pitchFamily="65" charset="-120"/>
+                          <a:cs typeface="Times New Roman" panose="02020603050405020304" pitchFamily="18" charset="0"/>
+                        </a:rPr>
+                        <m:t>Y</m:t>
+                      </m:r>
+                    </m:oMath>
                   </a14:m>
                   <a:endParaRPr lang="zh-TW" altLang="en-US" sz="1600" baseline="-25000" dirty="0">
                     <a:effectLst/>
@@ -20335,8 +20716,8 @@
               </p:nvSpPr>
               <p:spPr>
                 <a:xfrm>
-                  <a:off x="5935497" y="2735332"/>
-                  <a:ext cx="1682064" cy="509435"/>
+                  <a:off x="6115380" y="2755933"/>
+                  <a:ext cx="1593834" cy="442493"/>
                 </a:xfrm>
                 <a:prstGeom prst="rect">
                   <a:avLst/>
@@ -20344,7 +20725,7 @@
                 <a:blipFill>
                   <a:blip r:embed="rId5"/>
                   <a:stretch>
-                    <a:fillRect/>
+                    <a:fillRect l="-4598" r="-766" b="-15068"/>
                   </a:stretch>
                 </a:blipFill>
               </p:spPr>
@@ -20377,8 +20758,8 @@
           </p:nvSpPr>
           <p:spPr>
             <a:xfrm>
-              <a:off x="5683170" y="1369257"/>
-              <a:ext cx="2020105" cy="338554"/>
+              <a:off x="5691987" y="1369257"/>
+              <a:ext cx="2002471" cy="338554"/>
             </a:xfrm>
             <a:prstGeom prst="rect">
               <a:avLst/>
@@ -20406,9 +20787,9 @@
                   <a:ea typeface="標楷體" panose="03000509000000000000" pitchFamily="65" charset="-120"/>
                   <a:cs typeface="Times New Roman" panose="02020603050405020304" pitchFamily="18" charset="0"/>
                 </a:rPr>
-                <a:t>推導公式：</a:t>
+                <a:t>公式推導：</a:t>
               </a:r>
-              <a:endParaRPr lang="zh-TW" altLang="en-US" sz="1600" b="0" cap="none" spc="0" dirty="0">
+              <a:endParaRPr lang="zh-TW" altLang="en-US" sz="1600" cap="none" spc="0" dirty="0">
                 <a:ln w="0"/>
                 <a:solidFill>
                   <a:schemeClr val="tx1"/>
@@ -20745,14 +21126,14 @@
         </p:nvGrpSpPr>
         <p:grpSpPr>
           <a:xfrm>
-            <a:off x="5673267" y="4583479"/>
+            <a:off x="5524383" y="4328743"/>
             <a:ext cx="3275636" cy="1155308"/>
             <a:chOff x="4820412" y="3246174"/>
             <a:chExt cx="3275636" cy="1155308"/>
           </a:xfrm>
         </p:grpSpPr>
-        <mc:AlternateContent xmlns:mc="http://schemas.openxmlformats.org/markup-compatibility/2006" xmlns:a14="http://schemas.microsoft.com/office/drawing/2010/main">
-          <mc:Choice Requires="a14">
+        <mc:AlternateContent xmlns:mc="http://schemas.openxmlformats.org/markup-compatibility/2006">
+          <mc:Choice xmlns:a14="http://schemas.microsoft.com/office/drawing/2010/main" Requires="a14">
             <p:sp>
               <p:nvSpPr>
                 <p:cNvPr id="28" name="文字方塊 27">
@@ -20791,7 +21172,7 @@
                         <m:sSub>
                           <m:sSubPr>
                             <m:ctrlPr>
-                              <a:rPr lang="zh-TW" altLang="en-US" smtClean="0">
+                              <a:rPr lang="zh-TW" altLang="en-US" i="1" smtClean="0">
                                 <a:effectLst/>
                                 <a:latin typeface="Cambria Math" panose="02040503050406030204" pitchFamily="18" charset="0"/>
                               </a:rPr>
@@ -20802,7 +21183,7 @@
                               <m:rPr>
                                 <m:sty m:val="p"/>
                               </m:rPr>
-                              <a:rPr lang="zh-TW" altLang="en-US" i="0">
+                              <a:rPr lang="zh-TW" altLang="en-US" b="0" i="0" smtClean="0">
                                 <a:effectLst/>
                                 <a:latin typeface="Cambria Math" panose="02040503050406030204" pitchFamily="18" charset="0"/>
                               </a:rPr>
@@ -20814,7 +21195,7 @@
                               <m:rPr>
                                 <m:sty m:val="p"/>
                               </m:rPr>
-                              <a:rPr lang="zh-TW" altLang="en-US" i="0">
+                              <a:rPr lang="zh-TW" altLang="en-US" b="0" i="0" smtClean="0">
                                 <a:effectLst/>
                                 <a:latin typeface="Cambria Math" panose="02040503050406030204" pitchFamily="18" charset="0"/>
                               </a:rPr>
@@ -20823,7 +21204,7 @@
                           </m:sub>
                         </m:sSub>
                         <m:r>
-                          <a:rPr lang="zh-TW" altLang="en-US" i="0">
+                          <a:rPr lang="zh-TW" altLang="en-US" b="0" i="0" smtClean="0">
                             <a:effectLst/>
                             <a:latin typeface="Cambria Math" panose="02040503050406030204" pitchFamily="18" charset="0"/>
                           </a:rPr>
@@ -20832,7 +21213,7 @@
                         <m:f>
                           <m:fPr>
                             <m:ctrlPr>
-                              <a:rPr lang="zh-TW" altLang="en-US">
+                              <a:rPr lang="zh-TW" altLang="en-US" i="1">
                                 <a:effectLst/>
                                 <a:latin typeface="Cambria Math" panose="02040503050406030204" pitchFamily="18" charset="0"/>
                               </a:rPr>
@@ -20840,7 +21221,7 @@
                           </m:fPr>
                           <m:num>
                             <m:r>
-                              <a:rPr lang="zh-TW" altLang="en-US" i="0">
+                              <a:rPr lang="zh-TW" altLang="en-US" b="0" i="0" smtClean="0">
                                 <a:effectLst/>
                                 <a:latin typeface="Cambria Math" panose="02040503050406030204" pitchFamily="18" charset="0"/>
                               </a:rPr>
@@ -20849,7 +21230,7 @@
                           </m:num>
                           <m:den>
                             <m:r>
-                              <a:rPr lang="zh-TW" altLang="en-US" i="0">
+                              <a:rPr lang="zh-TW" altLang="en-US" b="0" i="0" smtClean="0">
                                 <a:effectLst/>
                                 <a:latin typeface="Cambria Math" panose="02040503050406030204" pitchFamily="18" charset="0"/>
                               </a:rPr>
@@ -20858,7 +21239,7 @@
                           </m:den>
                         </m:f>
                         <m:r>
-                          <a:rPr lang="zh-TW" altLang="en-US" i="0">
+                          <a:rPr lang="zh-TW" altLang="en-US" b="0" i="0" smtClean="0">
                             <a:effectLst/>
                             <a:latin typeface="Cambria Math" panose="02040503050406030204" pitchFamily="18" charset="0"/>
                           </a:rPr>
@@ -20877,7 +21258,7 @@
               </p:txBody>
             </p:sp>
           </mc:Choice>
-          <mc:Fallback xmlns="">
+          <mc:Fallback>
             <p:sp>
               <p:nvSpPr>
                 <p:cNvPr id="28" name="文字方塊 27">
@@ -20903,7 +21284,7 @@
                 <a:blipFill>
                   <a:blip r:embed="rId6"/>
                   <a:stretch>
-                    <a:fillRect b="-1235"/>
+                    <a:fillRect b="-1220"/>
                   </a:stretch>
                 </a:blipFill>
               </p:spPr>
@@ -20922,8 +21303,8 @@
             </p:sp>
           </mc:Fallback>
         </mc:AlternateContent>
-        <mc:AlternateContent xmlns:mc="http://schemas.openxmlformats.org/markup-compatibility/2006" xmlns:a14="http://schemas.microsoft.com/office/drawing/2010/main">
-          <mc:Choice Requires="a14">
+        <mc:AlternateContent xmlns:mc="http://schemas.openxmlformats.org/markup-compatibility/2006">
+          <mc:Choice xmlns:a14="http://schemas.microsoft.com/office/drawing/2010/main" Requires="a14">
             <p:sp>
               <p:nvSpPr>
                 <p:cNvPr id="30" name="文字方塊 29">
@@ -20962,7 +21343,7 @@
                         <m:sSub>
                           <m:sSubPr>
                             <m:ctrlPr>
-                              <a:rPr lang="zh-TW" altLang="en-US" smtClean="0">
+                              <a:rPr lang="zh-TW" altLang="en-US" i="1" smtClean="0">
                                 <a:effectLst/>
                                 <a:latin typeface="Cambria Math" panose="02040503050406030204" pitchFamily="18" charset="0"/>
                               </a:rPr>
@@ -20973,7 +21354,7 @@
                               <m:rPr>
                                 <m:sty m:val="p"/>
                               </m:rPr>
-                              <a:rPr lang="zh-TW" altLang="en-US" i="0">
+                              <a:rPr lang="zh-TW" altLang="en-US" b="0" i="0" smtClean="0">
                                 <a:effectLst/>
                                 <a:latin typeface="Cambria Math" panose="02040503050406030204" pitchFamily="18" charset="0"/>
                               </a:rPr>
@@ -20985,7 +21366,7 @@
                               <m:rPr>
                                 <m:sty m:val="p"/>
                               </m:rPr>
-                              <a:rPr lang="zh-TW" altLang="en-US" i="0">
+                              <a:rPr lang="zh-TW" altLang="en-US" b="0" i="0" smtClean="0">
                                 <a:effectLst/>
                                 <a:latin typeface="Cambria Math" panose="02040503050406030204" pitchFamily="18" charset="0"/>
                               </a:rPr>
@@ -20994,7 +21375,7 @@
                           </m:sub>
                         </m:sSub>
                         <m:r>
-                          <a:rPr lang="zh-TW" altLang="en-US" i="0">
+                          <a:rPr lang="zh-TW" altLang="en-US" b="0" i="0" smtClean="0">
                             <a:effectLst/>
                             <a:latin typeface="Cambria Math" panose="02040503050406030204" pitchFamily="18" charset="0"/>
                           </a:rPr>
@@ -21003,7 +21384,7 @@
                         <m:f>
                           <m:fPr>
                             <m:ctrlPr>
-                              <a:rPr lang="zh-TW" altLang="en-US">
+                              <a:rPr lang="zh-TW" altLang="en-US" i="1">
                                 <a:effectLst/>
                                 <a:latin typeface="Cambria Math" panose="02040503050406030204" pitchFamily="18" charset="0"/>
                               </a:rPr>
@@ -21011,7 +21392,7 @@
                           </m:fPr>
                           <m:num>
                             <m:r>
-                              <a:rPr lang="zh-TW" altLang="en-US" i="0">
+                              <a:rPr lang="zh-TW" altLang="en-US" b="0" i="0" smtClean="0">
                                 <a:effectLst/>
                                 <a:latin typeface="Cambria Math" panose="02040503050406030204" pitchFamily="18" charset="0"/>
                               </a:rPr>
@@ -21020,7 +21401,7 @@
                           </m:num>
                           <m:den>
                             <m:r>
-                              <a:rPr lang="zh-TW" altLang="en-US" i="0">
+                              <a:rPr lang="zh-TW" altLang="en-US" b="0" i="0" smtClean="0">
                                 <a:effectLst/>
                                 <a:latin typeface="Cambria Math" panose="02040503050406030204" pitchFamily="18" charset="0"/>
                               </a:rPr>
@@ -21029,7 +21410,7 @@
                           </m:den>
                         </m:f>
                         <m:r>
-                          <a:rPr lang="zh-TW" altLang="en-US" i="0">
+                          <a:rPr lang="zh-TW" altLang="en-US" b="0" i="0" smtClean="0">
                             <a:effectLst/>
                             <a:latin typeface="Cambria Math" panose="02040503050406030204" pitchFamily="18" charset="0"/>
                           </a:rPr>
@@ -21048,7 +21429,7 @@
               </p:txBody>
             </p:sp>
           </mc:Choice>
-          <mc:Fallback xmlns="">
+          <mc:Fallback>
             <p:sp>
               <p:nvSpPr>
                 <p:cNvPr id="30" name="文字方塊 29">
@@ -21074,7 +21455,7 @@
                 <a:blipFill>
                   <a:blip r:embed="rId7"/>
                   <a:stretch>
-                    <a:fillRect b="-1235"/>
+                    <a:fillRect b="-1220"/>
                   </a:stretch>
                 </a:blipFill>
               </p:spPr>
@@ -21093,117 +21474,6 @@
             </p:sp>
           </mc:Fallback>
         </mc:AlternateContent>
-      </p:grpSp>
-      <p:grpSp>
-        <p:nvGrpSpPr>
-          <p:cNvPr id="45" name="群組 44">
-            <a:extLst>
-              <a:ext uri="{FF2B5EF4-FFF2-40B4-BE49-F238E27FC236}">
-                <a16:creationId xmlns:a16="http://schemas.microsoft.com/office/drawing/2014/main" id="{88569DE1-553A-DC5D-D6E1-ABA71C776115}"/>
-              </a:ext>
-            </a:extLst>
-          </p:cNvPr>
-          <p:cNvGrpSpPr/>
-          <p:nvPr/>
-        </p:nvGrpSpPr>
-        <p:grpSpPr>
-          <a:xfrm>
-            <a:off x="5495728" y="3581803"/>
-            <a:ext cx="3829233" cy="891617"/>
-            <a:chOff x="5498155" y="3493800"/>
-            <a:chExt cx="3829233" cy="891617"/>
-          </a:xfrm>
-        </p:grpSpPr>
-        <p:pic>
-          <p:nvPicPr>
-            <p:cNvPr id="40" name="圖片 39">
-              <a:extLst>
-                <a:ext uri="{FF2B5EF4-FFF2-40B4-BE49-F238E27FC236}">
-                  <a16:creationId xmlns:a16="http://schemas.microsoft.com/office/drawing/2014/main" id="{3017A3D9-55B3-9FCF-78A7-8CFF7996C238}"/>
-                </a:ext>
-              </a:extLst>
-            </p:cNvPr>
-            <p:cNvPicPr>
-              <a:picLocks noChangeAspect="1"/>
-            </p:cNvPicPr>
-            <p:nvPr/>
-          </p:nvPicPr>
-          <p:blipFill>
-            <a:blip r:embed="rId8"/>
-            <a:stretch>
-              <a:fillRect/>
-            </a:stretch>
-          </p:blipFill>
-          <p:spPr>
-            <a:xfrm>
-              <a:off x="5498155" y="3493800"/>
-              <a:ext cx="1409822" cy="891617"/>
-            </a:xfrm>
-            <a:prstGeom prst="rect">
-              <a:avLst/>
-            </a:prstGeom>
-          </p:spPr>
-        </p:pic>
-        <p:pic>
-          <p:nvPicPr>
-            <p:cNvPr id="42" name="圖片 41">
-              <a:extLst>
-                <a:ext uri="{FF2B5EF4-FFF2-40B4-BE49-F238E27FC236}">
-                  <a16:creationId xmlns:a16="http://schemas.microsoft.com/office/drawing/2014/main" id="{3523FE1B-0057-E640-2C60-7E3D7A1927EA}"/>
-                </a:ext>
-              </a:extLst>
-            </p:cNvPr>
-            <p:cNvPicPr>
-              <a:picLocks noChangeAspect="1"/>
-            </p:cNvPicPr>
-            <p:nvPr/>
-          </p:nvPicPr>
-          <p:blipFill>
-            <a:blip r:embed="rId9"/>
-            <a:stretch>
-              <a:fillRect/>
-            </a:stretch>
-          </p:blipFill>
-          <p:spPr>
-            <a:xfrm>
-              <a:off x="6759225" y="3534888"/>
-              <a:ext cx="1234547" cy="800169"/>
-            </a:xfrm>
-            <a:prstGeom prst="rect">
-              <a:avLst/>
-            </a:prstGeom>
-          </p:spPr>
-        </p:pic>
-        <p:pic>
-          <p:nvPicPr>
-            <p:cNvPr id="44" name="圖片 43">
-              <a:extLst>
-                <a:ext uri="{FF2B5EF4-FFF2-40B4-BE49-F238E27FC236}">
-                  <a16:creationId xmlns:a16="http://schemas.microsoft.com/office/drawing/2014/main" id="{483ACC88-335C-E8C4-BBD8-7A9AC0907168}"/>
-                </a:ext>
-              </a:extLst>
-            </p:cNvPr>
-            <p:cNvPicPr>
-              <a:picLocks noChangeAspect="1"/>
-            </p:cNvPicPr>
-            <p:nvPr/>
-          </p:nvPicPr>
-          <p:blipFill>
-            <a:blip r:embed="rId10"/>
-            <a:stretch>
-              <a:fillRect/>
-            </a:stretch>
-          </p:blipFill>
-          <p:spPr>
-            <a:xfrm>
-              <a:off x="7993772" y="3534888"/>
-              <a:ext cx="1333616" cy="807790"/>
-            </a:xfrm>
-            <a:prstGeom prst="rect">
-              <a:avLst/>
-            </a:prstGeom>
-          </p:spPr>
-        </p:pic>
       </p:grpSp>
       <p:sp>
         <p:nvSpPr>
@@ -21236,39 +21506,58 @@
             <a:r>
               <a:rPr lang="en-US" altLang="zh-TW" sz="1200" dirty="0">
                 <a:latin typeface="Times New Roman" panose="02020603050405020304" pitchFamily="18" charset="0"/>
-                <a:cs typeface="Times New Roman" panose="02020603050405020304" pitchFamily="18" charset="0"/>
-              </a:rPr>
-              <a:t>[] M. Stokes, M. Anderson, S. Chandrasekar, and R. Motta, “A standard default color space for the Internet—sRGB,” </a:t>
-            </a:r>
-            <a:r>
-              <a:rPr lang="en-US" altLang="zh-TW" sz="1200" i="1" dirty="0">
-                <a:latin typeface="Times New Roman" panose="02020603050405020304" pitchFamily="18" charset="0"/>
-                <a:cs typeface="Times New Roman" panose="02020603050405020304" pitchFamily="18" charset="0"/>
-              </a:rPr>
-              <a:t>World Wide Web Consortium (W3C)</a:t>
+                <a:ea typeface="標楷體" panose="03000509000000000000" pitchFamily="65" charset="-120"/>
+                <a:cs typeface="Times New Roman" panose="02020603050405020304" pitchFamily="18" charset="0"/>
+              </a:rPr>
+              <a:t>[3] M. Stokes, M. Anderson, S. Chandrasekar, and R. Motta, “A standard default color space for the Internet—sRGB,” World Wide Web Consortium (W3C), ver. 1.10, Nov. 5, 1996</a:t>
             </a:r>
             <a:r>
               <a:rPr lang="en-US" altLang="zh-TW" sz="1200" dirty="0">
                 <a:latin typeface="Times New Roman" panose="02020603050405020304" pitchFamily="18" charset="0"/>
-                <a:cs typeface="Times New Roman" panose="02020603050405020304" pitchFamily="18" charset="0"/>
-              </a:rPr>
-              <a:t>, ver. 1.10, Nov. 5, 1996. [Online]. Available: </a:t>
-            </a:r>
-            <a:r>
-              <a:rPr lang="en-US" altLang="zh-TW" sz="1200" dirty="0">
-                <a:latin typeface="Times New Roman" panose="02020603050405020304" pitchFamily="18" charset="0"/>
-                <a:cs typeface="Times New Roman" panose="02020603050405020304" pitchFamily="18" charset="0"/>
-                <a:hlinkClick r:id="rId11"/>
+                <a:ea typeface="標楷體" panose="03000509000000000000" pitchFamily="65" charset="-120"/>
+                <a:cs typeface="Times New Roman" panose="02020603050405020304" pitchFamily="18" charset="0"/>
+                <a:hlinkClick r:id="rId8"/>
               </a:rPr>
               <a:t>https://www.w3.org/Graphics/Color/srgb.pdf</a:t>
             </a:r>
             <a:endParaRPr lang="zh-TW" altLang="en-US" sz="1200" dirty="0">
               <a:latin typeface="Times New Roman" panose="02020603050405020304" pitchFamily="18" charset="0"/>
+              <a:ea typeface="標楷體" panose="03000509000000000000" pitchFamily="65" charset="-120"/>
               <a:cs typeface="Times New Roman" panose="02020603050405020304" pitchFamily="18" charset="0"/>
             </a:endParaRPr>
           </a:p>
         </p:txBody>
       </p:sp>
+      <p:pic>
+        <p:nvPicPr>
+          <p:cNvPr id="14" name="圖片 13">
+            <a:extLst>
+              <a:ext uri="{FF2B5EF4-FFF2-40B4-BE49-F238E27FC236}">
+                <a16:creationId xmlns:a16="http://schemas.microsoft.com/office/drawing/2014/main" id="{FC49BB3C-DD0C-9B26-0455-3C6DE84A1032}"/>
+              </a:ext>
+            </a:extLst>
+          </p:cNvPr>
+          <p:cNvPicPr>
+            <a:picLocks noChangeAspect="1"/>
+          </p:cNvPicPr>
+          <p:nvPr/>
+        </p:nvPicPr>
+        <p:blipFill>
+          <a:blip r:embed="rId9"/>
+          <a:stretch>
+            <a:fillRect/>
+          </a:stretch>
+        </p:blipFill>
+        <p:spPr>
+          <a:xfrm>
+            <a:off x="7915602" y="3923347"/>
+            <a:ext cx="1488359" cy="681113"/>
+          </a:xfrm>
+          <a:prstGeom prst="rect">
+            <a:avLst/>
+          </a:prstGeom>
+        </p:spPr>
+      </p:pic>
     </p:spTree>
     <p:extLst>
       <p:ext uri="{BB962C8B-B14F-4D97-AF65-F5344CB8AC3E}">
@@ -21388,38 +21677,8 @@
         </p:blipFill>
         <p:spPr>
           <a:xfrm>
-            <a:off x="609602" y="2961543"/>
+            <a:off x="919416" y="4742617"/>
             <a:ext cx="2720576" cy="899238"/>
-          </a:xfrm>
-          <a:prstGeom prst="rect">
-            <a:avLst/>
-          </a:prstGeom>
-        </p:spPr>
-      </p:pic>
-      <p:pic>
-        <p:nvPicPr>
-          <p:cNvPr id="19" name="圖片 18">
-            <a:extLst>
-              <a:ext uri="{FF2B5EF4-FFF2-40B4-BE49-F238E27FC236}">
-                <a16:creationId xmlns:a16="http://schemas.microsoft.com/office/drawing/2014/main" id="{53457DF2-5D87-EFF2-CAC2-FF570835AACC}"/>
-              </a:ext>
-            </a:extLst>
-          </p:cNvPr>
-          <p:cNvPicPr>
-            <a:picLocks noChangeAspect="1"/>
-          </p:cNvPicPr>
-          <p:nvPr/>
-        </p:nvPicPr>
-        <p:blipFill>
-          <a:blip r:embed="rId4"/>
-          <a:stretch>
-            <a:fillRect/>
-          </a:stretch>
-        </p:blipFill>
-        <p:spPr>
-          <a:xfrm>
-            <a:off x="139807" y="4433734"/>
-            <a:ext cx="3972901" cy="1086606"/>
           </a:xfrm>
           <a:prstGeom prst="rect">
             <a:avLst/>
@@ -21519,7 +21778,7 @@
             <p:nvPr/>
           </p:nvPicPr>
           <p:blipFill>
-            <a:blip r:embed="rId5"/>
+            <a:blip r:embed="rId4"/>
             <a:stretch>
               <a:fillRect/>
             </a:stretch>
@@ -21549,7 +21808,7 @@
             <p:nvPr/>
           </p:nvPicPr>
           <p:blipFill>
-            <a:blip r:embed="rId6"/>
+            <a:blip r:embed="rId5"/>
             <a:stretch>
               <a:fillRect/>
             </a:stretch>
@@ -21594,18 +21853,11 @@
             <a:p>
               <a:pPr algn="ctr"/>
               <a:r>
-                <a:rPr lang="en-US" altLang="zh-TW" b="0" cap="none" spc="0" dirty="0">
+                <a:rPr lang="en-US" altLang="zh-TW" cap="none" spc="0" dirty="0">
                   <a:ln w="0"/>
                   <a:solidFill>
                     <a:schemeClr val="tx1"/>
                   </a:solidFill>
-                  <a:effectLst>
-                    <a:outerShdw blurRad="38100" dist="19050" dir="2700000" algn="tl" rotWithShape="0">
-                      <a:schemeClr val="dk1">
-                        <a:alpha val="40000"/>
-                      </a:schemeClr>
-                    </a:outerShdw>
-                  </a:effectLst>
                   <a:latin typeface="Times New Roman" panose="02020603050405020304" pitchFamily="18" charset="0"/>
                   <a:ea typeface="標楷體" panose="03000509000000000000" pitchFamily="65" charset="-120"/>
                   <a:cs typeface="Times New Roman" panose="02020603050405020304" pitchFamily="18" charset="0"/>
@@ -21620,13 +21872,6 @@
                 <a:solidFill>
                   <a:schemeClr val="tx1"/>
                 </a:solidFill>
-                <a:effectLst>
-                  <a:outerShdw blurRad="38100" dist="19050" dir="2700000" algn="tl" rotWithShape="0">
-                    <a:schemeClr val="dk1">
-                      <a:alpha val="40000"/>
-                    </a:schemeClr>
-                  </a:outerShdw>
-                </a:effectLst>
                 <a:latin typeface="Times New Roman" panose="02020603050405020304" pitchFamily="18" charset="0"/>
                 <a:ea typeface="標楷體" panose="03000509000000000000" pitchFamily="65" charset="-120"/>
                 <a:cs typeface="Times New Roman" panose="02020603050405020304" pitchFamily="18" charset="0"/>
@@ -21639,13 +21884,6 @@
                 <a:solidFill>
                   <a:schemeClr val="tx1"/>
                 </a:solidFill>
-                <a:effectLst>
-                  <a:outerShdw blurRad="38100" dist="19050" dir="2700000" algn="tl" rotWithShape="0">
-                    <a:schemeClr val="dk1">
-                      <a:alpha val="40000"/>
-                    </a:schemeClr>
-                  </a:outerShdw>
-                </a:effectLst>
                 <a:latin typeface="Times New Roman" panose="02020603050405020304" pitchFamily="18" charset="0"/>
                 <a:ea typeface="標楷體" panose="03000509000000000000" pitchFamily="65" charset="-120"/>
                 <a:cs typeface="Times New Roman" panose="02020603050405020304" pitchFamily="18" charset="0"/>
@@ -21658,13 +21896,6 @@
                 <a:solidFill>
                   <a:schemeClr val="tx1"/>
                 </a:solidFill>
-                <a:effectLst>
-                  <a:outerShdw blurRad="38100" dist="19050" dir="2700000" algn="tl" rotWithShape="0">
-                    <a:schemeClr val="dk1">
-                      <a:alpha val="40000"/>
-                    </a:schemeClr>
-                  </a:outerShdw>
-                </a:effectLst>
                 <a:latin typeface="Times New Roman" panose="02020603050405020304" pitchFamily="18" charset="0"/>
                 <a:ea typeface="標楷體" panose="03000509000000000000" pitchFamily="65" charset="-120"/>
                 <a:cs typeface="Times New Roman" panose="02020603050405020304" pitchFamily="18" charset="0"/>
@@ -21677,13 +21908,6 @@
                 <a:solidFill>
                   <a:schemeClr val="tx1"/>
                 </a:solidFill>
-                <a:effectLst>
-                  <a:outerShdw blurRad="38100" dist="19050" dir="2700000" algn="tl" rotWithShape="0">
-                    <a:schemeClr val="dk1">
-                      <a:alpha val="40000"/>
-                    </a:schemeClr>
-                  </a:outerShdw>
-                </a:effectLst>
                 <a:latin typeface="Times New Roman" panose="02020603050405020304" pitchFamily="18" charset="0"/>
                 <a:ea typeface="標楷體" panose="03000509000000000000" pitchFamily="65" charset="-120"/>
                 <a:cs typeface="Times New Roman" panose="02020603050405020304" pitchFamily="18" charset="0"/>
@@ -21697,31 +21921,17 @@
                   <a:solidFill>
                     <a:schemeClr val="tx1"/>
                   </a:solidFill>
-                  <a:effectLst>
-                    <a:outerShdw blurRad="38100" dist="19050" dir="2700000" algn="tl" rotWithShape="0">
-                      <a:schemeClr val="dk1">
-                        <a:alpha val="40000"/>
-                      </a:schemeClr>
-                    </a:outerShdw>
-                  </a:effectLst>
                   <a:latin typeface="Times New Roman" panose="02020603050405020304" pitchFamily="18" charset="0"/>
                   <a:ea typeface="標楷體" panose="03000509000000000000" pitchFamily="65" charset="-120"/>
                   <a:cs typeface="Times New Roman" panose="02020603050405020304" pitchFamily="18" charset="0"/>
                 </a:rPr>
                 <a:t>2.</a:t>
               </a:r>
-              <a:endParaRPr lang="zh-TW" altLang="en-US" b="0" cap="none" spc="0" dirty="0">
+              <a:endParaRPr lang="zh-TW" altLang="en-US" cap="none" spc="0" dirty="0">
                 <a:ln w="0"/>
                 <a:solidFill>
                   <a:schemeClr val="tx1"/>
                 </a:solidFill>
-                <a:effectLst>
-                  <a:outerShdw blurRad="38100" dist="19050" dir="2700000" algn="tl" rotWithShape="0">
-                    <a:schemeClr val="dk1">
-                      <a:alpha val="40000"/>
-                    </a:schemeClr>
-                  </a:outerShdw>
-                </a:effectLst>
                 <a:latin typeface="Times New Roman" panose="02020603050405020304" pitchFamily="18" charset="0"/>
                 <a:ea typeface="標楷體" panose="03000509000000000000" pitchFamily="65" charset="-120"/>
                 <a:cs typeface="Times New Roman" panose="02020603050405020304" pitchFamily="18" charset="0"/>
@@ -21821,7 +22031,7 @@
           <a:p>
             <a:pPr algn="ctr"/>
             <a:r>
-              <a:rPr lang="zh-TW" altLang="en-US" sz="1600" b="0" cap="none" spc="0" dirty="0">
+              <a:rPr lang="zh-TW" altLang="en-US" sz="1600" cap="none" spc="0" dirty="0">
                 <a:ln w="0"/>
                 <a:solidFill>
                   <a:schemeClr val="tx1"/>
@@ -21833,7 +22043,7 @@
               <a:t>在</a:t>
             </a:r>
             <a:r>
-              <a:rPr lang="en-US" altLang="zh-TW" sz="1600" b="0" cap="none" spc="0" dirty="0">
+              <a:rPr lang="en-US" altLang="zh-TW" sz="1600" cap="none" spc="0" dirty="0">
                 <a:ln w="0"/>
                 <a:solidFill>
                   <a:schemeClr val="tx1"/>
@@ -21845,7 +22055,7 @@
               <a:t>(255,255,255)</a:t>
             </a:r>
             <a:r>
-              <a:rPr lang="zh-TW" altLang="en-US" sz="1600" b="0" cap="none" spc="0" dirty="0">
+              <a:rPr lang="zh-TW" altLang="en-US" sz="1600" cap="none" spc="0" dirty="0">
                 <a:ln w="0"/>
                 <a:solidFill>
                   <a:schemeClr val="tx1"/>
@@ -21856,8 +22066,20 @@
               </a:rPr>
               <a:t>中</a:t>
             </a:r>
-            <a:r>
-              <a:rPr lang="en-US" altLang="zh-TW" sz="1600" b="0" cap="none" spc="0" dirty="0">
+            <a:endParaRPr lang="en-US" altLang="zh-TW" sz="1600" cap="none" spc="0" dirty="0">
+              <a:ln w="0"/>
+              <a:solidFill>
+                <a:schemeClr val="tx1"/>
+              </a:solidFill>
+              <a:latin typeface="Times New Roman" panose="02020603050405020304" pitchFamily="18" charset="0"/>
+              <a:ea typeface="標楷體" panose="03000509000000000000" pitchFamily="65" charset="-120"/>
+              <a:cs typeface="Times New Roman" panose="02020603050405020304" pitchFamily="18" charset="0"/>
+            </a:endParaRPr>
+          </a:p>
+          <a:p>
+            <a:pPr algn="ctr"/>
+            <a:r>
+              <a:rPr lang="en-US" altLang="zh-TW" sz="1600" cap="none" spc="0" dirty="0">
                 <a:ln w="0"/>
                 <a:solidFill>
                   <a:schemeClr val="tx1"/>
@@ -21881,7 +22103,7 @@
               <a:t>L</a:t>
             </a:r>
             <a:r>
-              <a:rPr lang="en-US" altLang="zh-TW" sz="1600" b="0" cap="none" spc="0" dirty="0">
+              <a:rPr lang="zh-TW" altLang="en-US" sz="1600" baseline="-25000" dirty="0">
                 <a:ln w="0"/>
                 <a:solidFill>
                   <a:schemeClr val="tx1"/>
@@ -21890,9 +22112,45 @@
                 <a:ea typeface="標楷體" panose="03000509000000000000" pitchFamily="65" charset="-120"/>
                 <a:cs typeface="Times New Roman" panose="02020603050405020304" pitchFamily="18" charset="0"/>
               </a:rPr>
-              <a:t>=(1,1,1)</a:t>
-            </a:r>
-            <a:endParaRPr lang="zh-TW" altLang="en-US" sz="1600" b="0" cap="none" spc="0" baseline="-25000" dirty="0">
+              <a:t> </a:t>
+            </a:r>
+            <a:r>
+              <a:rPr lang="en-US" altLang="zh-TW" sz="1600" cap="none" spc="0" dirty="0">
+                <a:ln w="0"/>
+                <a:solidFill>
+                  <a:schemeClr val="tx1"/>
+                </a:solidFill>
+                <a:latin typeface="Times New Roman" panose="02020603050405020304" pitchFamily="18" charset="0"/>
+                <a:ea typeface="標楷體" panose="03000509000000000000" pitchFamily="65" charset="-120"/>
+                <a:cs typeface="Times New Roman" panose="02020603050405020304" pitchFamily="18" charset="0"/>
+              </a:rPr>
+              <a:t>=</a:t>
+            </a:r>
+            <a:r>
+              <a:rPr lang="zh-TW" altLang="en-US" sz="1600" cap="none" spc="0" dirty="0">
+                <a:ln w="0"/>
+                <a:solidFill>
+                  <a:schemeClr val="tx1"/>
+                </a:solidFill>
+                <a:latin typeface="Times New Roman" panose="02020603050405020304" pitchFamily="18" charset="0"/>
+                <a:ea typeface="標楷體" panose="03000509000000000000" pitchFamily="65" charset="-120"/>
+                <a:cs typeface="Times New Roman" panose="02020603050405020304" pitchFamily="18" charset="0"/>
+              </a:rPr>
+              <a:t> </a:t>
+            </a:r>
+            <a:r>
+              <a:rPr lang="en-US" altLang="zh-TW" sz="1600" cap="none" spc="0" dirty="0">
+                <a:ln w="0"/>
+                <a:solidFill>
+                  <a:schemeClr val="tx1"/>
+                </a:solidFill>
+                <a:latin typeface="Times New Roman" panose="02020603050405020304" pitchFamily="18" charset="0"/>
+                <a:ea typeface="標楷體" panose="03000509000000000000" pitchFamily="65" charset="-120"/>
+                <a:cs typeface="Times New Roman" panose="02020603050405020304" pitchFamily="18" charset="0"/>
+              </a:rPr>
+              <a:t>(1,1,1)</a:t>
+            </a:r>
+            <a:endParaRPr lang="zh-TW" altLang="en-US" sz="1600" cap="none" spc="0" baseline="-25000" dirty="0">
               <a:ln w="0"/>
               <a:solidFill>
                 <a:schemeClr val="tx1"/>
@@ -21919,7 +22177,7 @@
           <p:nvPr/>
         </p:nvPicPr>
         <p:blipFill>
-          <a:blip r:embed="rId7"/>
+          <a:blip r:embed="rId6"/>
           <a:stretch>
             <a:fillRect/>
           </a:stretch>
@@ -21949,7 +22207,7 @@
           <p:nvPr/>
         </p:nvPicPr>
         <p:blipFill>
-          <a:blip r:embed="rId8"/>
+          <a:blip r:embed="rId7"/>
           <a:stretch>
             <a:fillRect/>
           </a:stretch>
@@ -22274,6 +22532,117 @@
           </a:p>
         </p:txBody>
       </p:sp>
+      <p:grpSp>
+        <p:nvGrpSpPr>
+          <p:cNvPr id="45" name="群組 44">
+            <a:extLst>
+              <a:ext uri="{FF2B5EF4-FFF2-40B4-BE49-F238E27FC236}">
+                <a16:creationId xmlns:a16="http://schemas.microsoft.com/office/drawing/2014/main" id="{88569DE1-553A-DC5D-D6E1-ABA71C776115}"/>
+              </a:ext>
+            </a:extLst>
+          </p:cNvPr>
+          <p:cNvGrpSpPr/>
+          <p:nvPr/>
+        </p:nvGrpSpPr>
+        <p:grpSpPr>
+          <a:xfrm>
+            <a:off x="256740" y="3687917"/>
+            <a:ext cx="3829233" cy="891617"/>
+            <a:chOff x="5498155" y="3493800"/>
+            <a:chExt cx="3829233" cy="891617"/>
+          </a:xfrm>
+        </p:grpSpPr>
+        <p:pic>
+          <p:nvPicPr>
+            <p:cNvPr id="7" name="圖片 6">
+              <a:extLst>
+                <a:ext uri="{FF2B5EF4-FFF2-40B4-BE49-F238E27FC236}">
+                  <a16:creationId xmlns:a16="http://schemas.microsoft.com/office/drawing/2014/main" id="{3017A3D9-55B3-9FCF-78A7-8CFF7996C238}"/>
+                </a:ext>
+              </a:extLst>
+            </p:cNvPr>
+            <p:cNvPicPr>
+              <a:picLocks noChangeAspect="1"/>
+            </p:cNvPicPr>
+            <p:nvPr/>
+          </p:nvPicPr>
+          <p:blipFill>
+            <a:blip r:embed="rId8"/>
+            <a:stretch>
+              <a:fillRect/>
+            </a:stretch>
+          </p:blipFill>
+          <p:spPr>
+            <a:xfrm>
+              <a:off x="5498155" y="3493800"/>
+              <a:ext cx="1409822" cy="891617"/>
+            </a:xfrm>
+            <a:prstGeom prst="rect">
+              <a:avLst/>
+            </a:prstGeom>
+          </p:spPr>
+        </p:pic>
+        <p:pic>
+          <p:nvPicPr>
+            <p:cNvPr id="8" name="圖片 7">
+              <a:extLst>
+                <a:ext uri="{FF2B5EF4-FFF2-40B4-BE49-F238E27FC236}">
+                  <a16:creationId xmlns:a16="http://schemas.microsoft.com/office/drawing/2014/main" id="{3523FE1B-0057-E640-2C60-7E3D7A1927EA}"/>
+                </a:ext>
+              </a:extLst>
+            </p:cNvPr>
+            <p:cNvPicPr>
+              <a:picLocks noChangeAspect="1"/>
+            </p:cNvPicPr>
+            <p:nvPr/>
+          </p:nvPicPr>
+          <p:blipFill>
+            <a:blip r:embed="rId9"/>
+            <a:stretch>
+              <a:fillRect/>
+            </a:stretch>
+          </p:blipFill>
+          <p:spPr>
+            <a:xfrm>
+              <a:off x="6759225" y="3534888"/>
+              <a:ext cx="1234547" cy="800169"/>
+            </a:xfrm>
+            <a:prstGeom prst="rect">
+              <a:avLst/>
+            </a:prstGeom>
+          </p:spPr>
+        </p:pic>
+        <p:pic>
+          <p:nvPicPr>
+            <p:cNvPr id="44" name="圖片 43">
+              <a:extLst>
+                <a:ext uri="{FF2B5EF4-FFF2-40B4-BE49-F238E27FC236}">
+                  <a16:creationId xmlns:a16="http://schemas.microsoft.com/office/drawing/2014/main" id="{483ACC88-335C-E8C4-BBD8-7A9AC0907168}"/>
+                </a:ext>
+              </a:extLst>
+            </p:cNvPr>
+            <p:cNvPicPr>
+              <a:picLocks noChangeAspect="1"/>
+            </p:cNvPicPr>
+            <p:nvPr/>
+          </p:nvPicPr>
+          <p:blipFill>
+            <a:blip r:embed="rId10"/>
+            <a:stretch>
+              <a:fillRect/>
+            </a:stretch>
+          </p:blipFill>
+          <p:spPr>
+            <a:xfrm>
+              <a:off x="7993772" y="3534888"/>
+              <a:ext cx="1333616" cy="807790"/>
+            </a:xfrm>
+            <a:prstGeom prst="rect">
+              <a:avLst/>
+            </a:prstGeom>
+          </p:spPr>
+        </p:pic>
+      </p:grpSp>
     </p:spTree>
     <p:extLst>
       <p:ext uri="{BB962C8B-B14F-4D97-AF65-F5344CB8AC3E}">

--- a/ICCPROFILE_0923.pptx
+++ b/ICCPROFILE_0923.pptx
@@ -1324,6 +1324,11 @@
         </p:txBody>
       </p:sp>
     </p:spTree>
+    <p:extLst>
+      <p:ext uri="{BB962C8B-B14F-4D97-AF65-F5344CB8AC3E}">
+        <p14:creationId xmlns:p14="http://schemas.microsoft.com/office/powerpoint/2010/main" val="541020898"/>
+      </p:ext>
+    </p:extLst>
   </p:cSld>
   <p:clrMap bg1="lt1" tx1="dk1" bg2="dk2" tx2="lt2" accent1="accent1" accent2="accent2" accent3="accent3" accent4="accent4" accent5="accent5" accent6="accent6" hlink="hlink" folHlink="folHlink"/>
   <p:notesStyle>
@@ -1630,6 +1635,11 @@
         </p:txBody>
       </p:sp>
     </p:spTree>
+    <p:extLst>
+      <p:ext uri="{BB962C8B-B14F-4D97-AF65-F5344CB8AC3E}">
+        <p14:creationId xmlns:p14="http://schemas.microsoft.com/office/powerpoint/2010/main" val="525277024"/>
+      </p:ext>
+    </p:extLst>
   </p:cSld>
   <p:clrMapOvr>
     <a:masterClrMapping/>
@@ -1645,7 +1655,7 @@
         <p:cNvPr id="1" name="">
           <a:extLst>
             <a:ext uri="{FF2B5EF4-FFF2-40B4-BE49-F238E27FC236}">
-              <a16:creationId xmlns:a16="http://schemas.microsoft.com/office/drawing/2014/main" id="{9AFA681A-88EB-5E43-27F0-EA34E562E0AD}"/>
+              <a16:creationId xmlns:a16="http://schemas.microsoft.com/office/drawing/2014/main" xmlns="" id="{9AFA681A-88EB-5E43-27F0-EA34E562E0AD}"/>
             </a:ext>
           </a:extLst>
         </p:cNvPr>
@@ -1665,7 +1675,7 @@
           <p:cNvPr id="2" name="投影片影像版面配置區 1">
             <a:extLst>
               <a:ext uri="{FF2B5EF4-FFF2-40B4-BE49-F238E27FC236}">
-                <a16:creationId xmlns:a16="http://schemas.microsoft.com/office/drawing/2014/main" id="{26C04ECA-D873-1236-C2C8-8A052C1F5FCB}"/>
+                <a16:creationId xmlns:a16="http://schemas.microsoft.com/office/drawing/2014/main" xmlns="" id="{26C04ECA-D873-1236-C2C8-8A052C1F5FCB}"/>
               </a:ext>
             </a:extLst>
           </p:cNvPr>
@@ -1683,7 +1693,7 @@
           <p:cNvPr id="3" name="備忘稿版面配置區 2">
             <a:extLst>
               <a:ext uri="{FF2B5EF4-FFF2-40B4-BE49-F238E27FC236}">
-                <a16:creationId xmlns:a16="http://schemas.microsoft.com/office/drawing/2014/main" id="{BEBD2639-D696-3DD9-3C32-292A4F25C5F9}"/>
+                <a16:creationId xmlns:a16="http://schemas.microsoft.com/office/drawing/2014/main" xmlns="" id="{BEBD2639-D696-3DD9-3C32-292A4F25C5F9}"/>
               </a:ext>
             </a:extLst>
           </p:cNvPr>
@@ -1700,22 +1710,6 @@
           <a:lstStyle/>
           <a:p>
             <a:pPr marL="0" indent="0"/>
-            <a:r>
-              <a:rPr lang="zh-TW" altLang="en-US" dirty="0"/>
-              <a:t>最終結果</a:t>
-            </a:r>
-            <a:r>
-              <a:rPr lang="en-US" altLang="zh-TW" dirty="0"/>
-              <a:t>0</a:t>
-            </a:r>
-            <a:r>
-              <a:rPr lang="zh-TW" altLang="en-US" dirty="0"/>
-              <a:t>得到縮放比例與</a:t>
-            </a:r>
-            <a:r>
-              <a:rPr lang="en-US" altLang="zh-TW" dirty="0"/>
-              <a:t>M</a:t>
-            </a:r>
             <a:endParaRPr lang="zh-TW" altLang="en-US" dirty="0"/>
           </a:p>
         </p:txBody>
@@ -1725,7 +1719,7 @@
           <p:cNvPr id="4" name="投影片編號版面配置區 3">
             <a:extLst>
               <a:ext uri="{FF2B5EF4-FFF2-40B4-BE49-F238E27FC236}">
-                <a16:creationId xmlns:a16="http://schemas.microsoft.com/office/drawing/2014/main" id="{D2C49B69-3433-A410-E980-5AC38B157779}"/>
+                <a16:creationId xmlns:a16="http://schemas.microsoft.com/office/drawing/2014/main" xmlns="" id="{D2C49B69-3433-A410-E980-5AC38B157779}"/>
               </a:ext>
             </a:extLst>
           </p:cNvPr>
@@ -1795,7 +1789,7 @@
         <p:cNvPr id="1" name="">
           <a:extLst>
             <a:ext uri="{FF2B5EF4-FFF2-40B4-BE49-F238E27FC236}">
-              <a16:creationId xmlns:a16="http://schemas.microsoft.com/office/drawing/2014/main" id="{248C1817-9E04-5A55-E8CC-FD3FF3F825B3}"/>
+              <a16:creationId xmlns:a16="http://schemas.microsoft.com/office/drawing/2014/main" xmlns="" id="{248C1817-9E04-5A55-E8CC-FD3FF3F825B3}"/>
             </a:ext>
           </a:extLst>
         </p:cNvPr>
@@ -1815,7 +1809,7 @@
           <p:cNvPr id="2" name="投影片影像版面配置區 1">
             <a:extLst>
               <a:ext uri="{FF2B5EF4-FFF2-40B4-BE49-F238E27FC236}">
-                <a16:creationId xmlns:a16="http://schemas.microsoft.com/office/drawing/2014/main" id="{7299D6F9-1619-B844-57EE-48AA0121A278}"/>
+                <a16:creationId xmlns:a16="http://schemas.microsoft.com/office/drawing/2014/main" xmlns="" id="{7299D6F9-1619-B844-57EE-48AA0121A278}"/>
               </a:ext>
             </a:extLst>
           </p:cNvPr>
@@ -1833,7 +1827,7 @@
           <p:cNvPr id="3" name="備忘稿版面配置區 2">
             <a:extLst>
               <a:ext uri="{FF2B5EF4-FFF2-40B4-BE49-F238E27FC236}">
-                <a16:creationId xmlns:a16="http://schemas.microsoft.com/office/drawing/2014/main" id="{17B0488B-586D-2F37-7E25-09C139D9BBCE}"/>
+                <a16:creationId xmlns:a16="http://schemas.microsoft.com/office/drawing/2014/main" xmlns="" id="{17B0488B-586D-2F37-7E25-09C139D9BBCE}"/>
               </a:ext>
             </a:extLst>
           </p:cNvPr>
@@ -1859,7 +1853,7 @@
           <p:cNvPr id="4" name="投影片編號版面配置區 3">
             <a:extLst>
               <a:ext uri="{FF2B5EF4-FFF2-40B4-BE49-F238E27FC236}">
-                <a16:creationId xmlns:a16="http://schemas.microsoft.com/office/drawing/2014/main" id="{3341146E-6544-F922-461C-1EB94C558E3D}"/>
+                <a16:creationId xmlns:a16="http://schemas.microsoft.com/office/drawing/2014/main" xmlns="" id="{3341146E-6544-F922-461C-1EB94C558E3D}"/>
               </a:ext>
             </a:extLst>
           </p:cNvPr>
@@ -1929,7 +1923,7 @@
         <p:cNvPr id="1" name="">
           <a:extLst>
             <a:ext uri="{FF2B5EF4-FFF2-40B4-BE49-F238E27FC236}">
-              <a16:creationId xmlns:a16="http://schemas.microsoft.com/office/drawing/2014/main" id="{12EB7DC1-8982-FBBF-D79C-E8A85E11B329}"/>
+              <a16:creationId xmlns:a16="http://schemas.microsoft.com/office/drawing/2014/main" xmlns="" id="{12EB7DC1-8982-FBBF-D79C-E8A85E11B329}"/>
             </a:ext>
           </a:extLst>
         </p:cNvPr>
@@ -1949,7 +1943,7 @@
           <p:cNvPr id="2" name="投影片影像版面配置區 1">
             <a:extLst>
               <a:ext uri="{FF2B5EF4-FFF2-40B4-BE49-F238E27FC236}">
-                <a16:creationId xmlns:a16="http://schemas.microsoft.com/office/drawing/2014/main" id="{747EDAF3-B8EA-0C16-8FC2-00C5C1AACCA4}"/>
+                <a16:creationId xmlns:a16="http://schemas.microsoft.com/office/drawing/2014/main" xmlns="" id="{747EDAF3-B8EA-0C16-8FC2-00C5C1AACCA4}"/>
               </a:ext>
             </a:extLst>
           </p:cNvPr>
@@ -1967,7 +1961,7 @@
           <p:cNvPr id="3" name="備忘稿版面配置區 2">
             <a:extLst>
               <a:ext uri="{FF2B5EF4-FFF2-40B4-BE49-F238E27FC236}">
-                <a16:creationId xmlns:a16="http://schemas.microsoft.com/office/drawing/2014/main" id="{2AFC5512-2ACA-40AC-FE98-A0E260C52EAF}"/>
+                <a16:creationId xmlns:a16="http://schemas.microsoft.com/office/drawing/2014/main" xmlns="" id="{2AFC5512-2ACA-40AC-FE98-A0E260C52EAF}"/>
               </a:ext>
             </a:extLst>
           </p:cNvPr>
@@ -1993,7 +1987,7 @@
           <p:cNvPr id="4" name="投影片編號版面配置區 3">
             <a:extLst>
               <a:ext uri="{FF2B5EF4-FFF2-40B4-BE49-F238E27FC236}">
-                <a16:creationId xmlns:a16="http://schemas.microsoft.com/office/drawing/2014/main" id="{513566B9-8C8D-F476-4186-FD06F269D3E2}"/>
+                <a16:creationId xmlns:a16="http://schemas.microsoft.com/office/drawing/2014/main" xmlns="" id="{513566B9-8C8D-F476-4186-FD06F269D3E2}"/>
               </a:ext>
             </a:extLst>
           </p:cNvPr>
@@ -2063,7 +2057,7 @@
         <p:cNvPr id="1" name="">
           <a:extLst>
             <a:ext uri="{FF2B5EF4-FFF2-40B4-BE49-F238E27FC236}">
-              <a16:creationId xmlns:a16="http://schemas.microsoft.com/office/drawing/2014/main" id="{1A0C75CA-3512-5200-7DBF-85A4A62254FB}"/>
+              <a16:creationId xmlns:a16="http://schemas.microsoft.com/office/drawing/2014/main" xmlns="" id="{1A0C75CA-3512-5200-7DBF-85A4A62254FB}"/>
             </a:ext>
           </a:extLst>
         </p:cNvPr>
@@ -2083,7 +2077,7 @@
           <p:cNvPr id="2" name="投影片影像版面配置區 1">
             <a:extLst>
               <a:ext uri="{FF2B5EF4-FFF2-40B4-BE49-F238E27FC236}">
-                <a16:creationId xmlns:a16="http://schemas.microsoft.com/office/drawing/2014/main" id="{E0701003-F5AB-395E-1F05-C522252BFC20}"/>
+                <a16:creationId xmlns:a16="http://schemas.microsoft.com/office/drawing/2014/main" xmlns="" id="{E0701003-F5AB-395E-1F05-C522252BFC20}"/>
               </a:ext>
             </a:extLst>
           </p:cNvPr>
@@ -2101,7 +2095,7 @@
           <p:cNvPr id="3" name="備忘稿版面配置區 2">
             <a:extLst>
               <a:ext uri="{FF2B5EF4-FFF2-40B4-BE49-F238E27FC236}">
-                <a16:creationId xmlns:a16="http://schemas.microsoft.com/office/drawing/2014/main" id="{1A99BDB9-DB82-178B-856D-AEF12F8D8224}"/>
+                <a16:creationId xmlns:a16="http://schemas.microsoft.com/office/drawing/2014/main" xmlns="" id="{1A99BDB9-DB82-178B-856D-AEF12F8D8224}"/>
               </a:ext>
             </a:extLst>
           </p:cNvPr>
@@ -2267,7 +2261,7 @@
           <p:cNvPr id="4" name="投影片編號版面配置區 3">
             <a:extLst>
               <a:ext uri="{FF2B5EF4-FFF2-40B4-BE49-F238E27FC236}">
-                <a16:creationId xmlns:a16="http://schemas.microsoft.com/office/drawing/2014/main" id="{AC1C5EF3-FCDA-CAE3-2B84-5FAC4A4AEC5E}"/>
+                <a16:creationId xmlns:a16="http://schemas.microsoft.com/office/drawing/2014/main" xmlns="" id="{AC1C5EF3-FCDA-CAE3-2B84-5FAC4A4AEC5E}"/>
               </a:ext>
             </a:extLst>
           </p:cNvPr>
@@ -2337,7 +2331,7 @@
         <p:cNvPr id="1" name="">
           <a:extLst>
             <a:ext uri="{FF2B5EF4-FFF2-40B4-BE49-F238E27FC236}">
-              <a16:creationId xmlns:a16="http://schemas.microsoft.com/office/drawing/2014/main" id="{BEAAB6D5-993E-26F5-9C44-C5D525DA7DDC}"/>
+              <a16:creationId xmlns:a16="http://schemas.microsoft.com/office/drawing/2014/main" xmlns="" id="{BEAAB6D5-993E-26F5-9C44-C5D525DA7DDC}"/>
             </a:ext>
           </a:extLst>
         </p:cNvPr>
@@ -2357,7 +2351,7 @@
           <p:cNvPr id="2" name="投影片影像版面配置區 1">
             <a:extLst>
               <a:ext uri="{FF2B5EF4-FFF2-40B4-BE49-F238E27FC236}">
-                <a16:creationId xmlns:a16="http://schemas.microsoft.com/office/drawing/2014/main" id="{1B5F2A66-F24A-A462-6F12-218184B02EBB}"/>
+                <a16:creationId xmlns:a16="http://schemas.microsoft.com/office/drawing/2014/main" xmlns="" id="{1B5F2A66-F24A-A462-6F12-218184B02EBB}"/>
               </a:ext>
             </a:extLst>
           </p:cNvPr>
@@ -2375,7 +2369,7 @@
           <p:cNvPr id="3" name="備忘稿版面配置區 2">
             <a:extLst>
               <a:ext uri="{FF2B5EF4-FFF2-40B4-BE49-F238E27FC236}">
-                <a16:creationId xmlns:a16="http://schemas.microsoft.com/office/drawing/2014/main" id="{26FDBCF0-B4E1-DC68-FF31-D0F8D4C04ACF}"/>
+                <a16:creationId xmlns:a16="http://schemas.microsoft.com/office/drawing/2014/main" xmlns="" id="{26FDBCF0-B4E1-DC68-FF31-D0F8D4C04ACF}"/>
               </a:ext>
             </a:extLst>
           </p:cNvPr>
@@ -2419,7 +2413,7 @@
           <p:cNvPr id="4" name="投影片編號版面配置區 3">
             <a:extLst>
               <a:ext uri="{FF2B5EF4-FFF2-40B4-BE49-F238E27FC236}">
-                <a16:creationId xmlns:a16="http://schemas.microsoft.com/office/drawing/2014/main" id="{9B8DA5A3-1BB6-F49D-76B7-392A3D01E52A}"/>
+                <a16:creationId xmlns:a16="http://schemas.microsoft.com/office/drawing/2014/main" xmlns="" id="{9B8DA5A3-1BB6-F49D-76B7-392A3D01E52A}"/>
               </a:ext>
             </a:extLst>
           </p:cNvPr>
@@ -2556,6 +2550,11 @@
         </p:txBody>
       </p:sp>
     </p:spTree>
+    <p:extLst>
+      <p:ext uri="{BB962C8B-B14F-4D97-AF65-F5344CB8AC3E}">
+        <p14:creationId xmlns:p14="http://schemas.microsoft.com/office/powerpoint/2010/main" val="1154148578"/>
+      </p:ext>
+    </p:extLst>
   </p:cSld>
   <p:clrMapOvr>
     <a:masterClrMapping/>
@@ -2571,7 +2570,7 @@
         <p:cNvPr id="1" name="">
           <a:extLst>
             <a:ext uri="{FF2B5EF4-FFF2-40B4-BE49-F238E27FC236}">
-              <a16:creationId xmlns:a16="http://schemas.microsoft.com/office/drawing/2014/main" id="{7EE110AC-F4A0-7D78-93B0-AF6E23C1C86B}"/>
+              <a16:creationId xmlns:a16="http://schemas.microsoft.com/office/drawing/2014/main" xmlns="" id="{7EE110AC-F4A0-7D78-93B0-AF6E23C1C86B}"/>
             </a:ext>
           </a:extLst>
         </p:cNvPr>
@@ -2591,7 +2590,7 @@
           <p:cNvPr id="2" name="投影片影像版面配置區 1">
             <a:extLst>
               <a:ext uri="{FF2B5EF4-FFF2-40B4-BE49-F238E27FC236}">
-                <a16:creationId xmlns:a16="http://schemas.microsoft.com/office/drawing/2014/main" id="{AD5172F1-B577-25A9-AA74-C6AF67661642}"/>
+                <a16:creationId xmlns:a16="http://schemas.microsoft.com/office/drawing/2014/main" xmlns="" id="{AD5172F1-B577-25A9-AA74-C6AF67661642}"/>
               </a:ext>
             </a:extLst>
           </p:cNvPr>
@@ -2609,7 +2608,7 @@
           <p:cNvPr id="3" name="備忘稿版面配置區 2">
             <a:extLst>
               <a:ext uri="{FF2B5EF4-FFF2-40B4-BE49-F238E27FC236}">
-                <a16:creationId xmlns:a16="http://schemas.microsoft.com/office/drawing/2014/main" id="{E9BD86B3-8EAB-902A-DCF6-698ADFDE9E8A}"/>
+                <a16:creationId xmlns:a16="http://schemas.microsoft.com/office/drawing/2014/main" xmlns="" id="{E9BD86B3-8EAB-902A-DCF6-698ADFDE9E8A}"/>
               </a:ext>
             </a:extLst>
           </p:cNvPr>
@@ -2727,7 +2726,7 @@
           <p:cNvPr id="4" name="投影片編號版面配置區 3">
             <a:extLst>
               <a:ext uri="{FF2B5EF4-FFF2-40B4-BE49-F238E27FC236}">
-                <a16:creationId xmlns:a16="http://schemas.microsoft.com/office/drawing/2014/main" id="{69A9F744-724B-AE5D-EE31-BDB2E094083C}"/>
+                <a16:creationId xmlns:a16="http://schemas.microsoft.com/office/drawing/2014/main" xmlns="" id="{69A9F744-724B-AE5D-EE31-BDB2E094083C}"/>
               </a:ext>
             </a:extLst>
           </p:cNvPr>
@@ -2797,7 +2796,7 @@
         <p:cNvPr id="1" name="">
           <a:extLst>
             <a:ext uri="{FF2B5EF4-FFF2-40B4-BE49-F238E27FC236}">
-              <a16:creationId xmlns:a16="http://schemas.microsoft.com/office/drawing/2014/main" id="{A1F37CC5-12D8-16D3-9253-45D955F69194}"/>
+              <a16:creationId xmlns:a16="http://schemas.microsoft.com/office/drawing/2014/main" xmlns="" id="{A1F37CC5-12D8-16D3-9253-45D955F69194}"/>
             </a:ext>
           </a:extLst>
         </p:cNvPr>
@@ -2817,7 +2816,7 @@
           <p:cNvPr id="2" name="投影片影像版面配置區 1">
             <a:extLst>
               <a:ext uri="{FF2B5EF4-FFF2-40B4-BE49-F238E27FC236}">
-                <a16:creationId xmlns:a16="http://schemas.microsoft.com/office/drawing/2014/main" id="{34823088-0DD2-55CA-4BEE-63925050B074}"/>
+                <a16:creationId xmlns:a16="http://schemas.microsoft.com/office/drawing/2014/main" xmlns="" id="{34823088-0DD2-55CA-4BEE-63925050B074}"/>
               </a:ext>
             </a:extLst>
           </p:cNvPr>
@@ -2835,7 +2834,7 @@
           <p:cNvPr id="3" name="備忘稿版面配置區 2">
             <a:extLst>
               <a:ext uri="{FF2B5EF4-FFF2-40B4-BE49-F238E27FC236}">
-                <a16:creationId xmlns:a16="http://schemas.microsoft.com/office/drawing/2014/main" id="{ABECB207-5F1A-F34F-8FA9-CF58582A5670}"/>
+                <a16:creationId xmlns:a16="http://schemas.microsoft.com/office/drawing/2014/main" xmlns="" id="{ABECB207-5F1A-F34F-8FA9-CF58582A5670}"/>
               </a:ext>
             </a:extLst>
           </p:cNvPr>
@@ -2893,7 +2892,7 @@
           <p:cNvPr id="4" name="投影片編號版面配置區 3">
             <a:extLst>
               <a:ext uri="{FF2B5EF4-FFF2-40B4-BE49-F238E27FC236}">
-                <a16:creationId xmlns:a16="http://schemas.microsoft.com/office/drawing/2014/main" id="{25F3CA63-2998-B736-F517-4B82A1C74C4E}"/>
+                <a16:creationId xmlns:a16="http://schemas.microsoft.com/office/drawing/2014/main" xmlns="" id="{25F3CA63-2998-B736-F517-4B82A1C74C4E}"/>
               </a:ext>
             </a:extLst>
           </p:cNvPr>
@@ -2963,7 +2962,7 @@
         <p:cNvPr id="1" name="">
           <a:extLst>
             <a:ext uri="{FF2B5EF4-FFF2-40B4-BE49-F238E27FC236}">
-              <a16:creationId xmlns:a16="http://schemas.microsoft.com/office/drawing/2014/main" id="{A1F37CC5-12D8-16D3-9253-45D955F69194}"/>
+              <a16:creationId xmlns:a16="http://schemas.microsoft.com/office/drawing/2014/main" xmlns="" id="{A1F37CC5-12D8-16D3-9253-45D955F69194}"/>
             </a:ext>
           </a:extLst>
         </p:cNvPr>
@@ -2983,7 +2982,7 @@
           <p:cNvPr id="2" name="投影片影像版面配置區 1">
             <a:extLst>
               <a:ext uri="{FF2B5EF4-FFF2-40B4-BE49-F238E27FC236}">
-                <a16:creationId xmlns:a16="http://schemas.microsoft.com/office/drawing/2014/main" id="{34823088-0DD2-55CA-4BEE-63925050B074}"/>
+                <a16:creationId xmlns:a16="http://schemas.microsoft.com/office/drawing/2014/main" xmlns="" id="{34823088-0DD2-55CA-4BEE-63925050B074}"/>
               </a:ext>
             </a:extLst>
           </p:cNvPr>
@@ -3001,7 +3000,7 @@
           <p:cNvPr id="3" name="備忘稿版面配置區 2">
             <a:extLst>
               <a:ext uri="{FF2B5EF4-FFF2-40B4-BE49-F238E27FC236}">
-                <a16:creationId xmlns:a16="http://schemas.microsoft.com/office/drawing/2014/main" id="{ABECB207-5F1A-F34F-8FA9-CF58582A5670}"/>
+                <a16:creationId xmlns:a16="http://schemas.microsoft.com/office/drawing/2014/main" xmlns="" id="{ABECB207-5F1A-F34F-8FA9-CF58582A5670}"/>
               </a:ext>
             </a:extLst>
           </p:cNvPr>
@@ -3051,7 +3050,7 @@
           <p:cNvPr id="4" name="投影片編號版面配置區 3">
             <a:extLst>
               <a:ext uri="{FF2B5EF4-FFF2-40B4-BE49-F238E27FC236}">
-                <a16:creationId xmlns:a16="http://schemas.microsoft.com/office/drawing/2014/main" id="{25F3CA63-2998-B736-F517-4B82A1C74C4E}"/>
+                <a16:creationId xmlns:a16="http://schemas.microsoft.com/office/drawing/2014/main" xmlns="" id="{25F3CA63-2998-B736-F517-4B82A1C74C4E}"/>
               </a:ext>
             </a:extLst>
           </p:cNvPr>
@@ -3121,7 +3120,7 @@
         <p:cNvPr id="1" name="">
           <a:extLst>
             <a:ext uri="{FF2B5EF4-FFF2-40B4-BE49-F238E27FC236}">
-              <a16:creationId xmlns:a16="http://schemas.microsoft.com/office/drawing/2014/main" id="{A1F37CC5-12D8-16D3-9253-45D955F69194}"/>
+              <a16:creationId xmlns:a16="http://schemas.microsoft.com/office/drawing/2014/main" xmlns="" id="{A1F37CC5-12D8-16D3-9253-45D955F69194}"/>
             </a:ext>
           </a:extLst>
         </p:cNvPr>
@@ -3141,7 +3140,7 @@
           <p:cNvPr id="2" name="投影片影像版面配置區 1">
             <a:extLst>
               <a:ext uri="{FF2B5EF4-FFF2-40B4-BE49-F238E27FC236}">
-                <a16:creationId xmlns:a16="http://schemas.microsoft.com/office/drawing/2014/main" id="{34823088-0DD2-55CA-4BEE-63925050B074}"/>
+                <a16:creationId xmlns:a16="http://schemas.microsoft.com/office/drawing/2014/main" xmlns="" id="{34823088-0DD2-55CA-4BEE-63925050B074}"/>
               </a:ext>
             </a:extLst>
           </p:cNvPr>
@@ -3159,7 +3158,7 @@
           <p:cNvPr id="3" name="備忘稿版面配置區 2">
             <a:extLst>
               <a:ext uri="{FF2B5EF4-FFF2-40B4-BE49-F238E27FC236}">
-                <a16:creationId xmlns:a16="http://schemas.microsoft.com/office/drawing/2014/main" id="{ABECB207-5F1A-F34F-8FA9-CF58582A5670}"/>
+                <a16:creationId xmlns:a16="http://schemas.microsoft.com/office/drawing/2014/main" xmlns="" id="{ABECB207-5F1A-F34F-8FA9-CF58582A5670}"/>
               </a:ext>
             </a:extLst>
           </p:cNvPr>
@@ -3292,7 +3291,7 @@
           <p:cNvPr id="4" name="投影片編號版面配置區 3">
             <a:extLst>
               <a:ext uri="{FF2B5EF4-FFF2-40B4-BE49-F238E27FC236}">
-                <a16:creationId xmlns:a16="http://schemas.microsoft.com/office/drawing/2014/main" id="{25F3CA63-2998-B736-F517-4B82A1C74C4E}"/>
+                <a16:creationId xmlns:a16="http://schemas.microsoft.com/office/drawing/2014/main" xmlns="" id="{25F3CA63-2998-B736-F517-4B82A1C74C4E}"/>
               </a:ext>
             </a:extLst>
           </p:cNvPr>
@@ -3362,7 +3361,7 @@
         <p:cNvPr id="1" name="">
           <a:extLst>
             <a:ext uri="{FF2B5EF4-FFF2-40B4-BE49-F238E27FC236}">
-              <a16:creationId xmlns:a16="http://schemas.microsoft.com/office/drawing/2014/main" id="{9A851A70-D7FF-B69E-2F1F-5276D7F44C59}"/>
+              <a16:creationId xmlns:a16="http://schemas.microsoft.com/office/drawing/2014/main" xmlns="" id="{9A851A70-D7FF-B69E-2F1F-5276D7F44C59}"/>
             </a:ext>
           </a:extLst>
         </p:cNvPr>
@@ -3382,7 +3381,7 @@
           <p:cNvPr id="2" name="投影片影像版面配置區 1">
             <a:extLst>
               <a:ext uri="{FF2B5EF4-FFF2-40B4-BE49-F238E27FC236}">
-                <a16:creationId xmlns:a16="http://schemas.microsoft.com/office/drawing/2014/main" id="{4FB2E1DE-40DE-B1BA-7135-64BFFB1631B9}"/>
+                <a16:creationId xmlns:a16="http://schemas.microsoft.com/office/drawing/2014/main" xmlns="" id="{4FB2E1DE-40DE-B1BA-7135-64BFFB1631B9}"/>
               </a:ext>
             </a:extLst>
           </p:cNvPr>
@@ -3400,7 +3399,7 @@
           <p:cNvPr id="3" name="備忘稿版面配置區 2">
             <a:extLst>
               <a:ext uri="{FF2B5EF4-FFF2-40B4-BE49-F238E27FC236}">
-                <a16:creationId xmlns:a16="http://schemas.microsoft.com/office/drawing/2014/main" id="{C4F8DB8E-F5F1-21EB-D41F-2C635FB715D5}"/>
+                <a16:creationId xmlns:a16="http://schemas.microsoft.com/office/drawing/2014/main" xmlns="" id="{C4F8DB8E-F5F1-21EB-D41F-2C635FB715D5}"/>
               </a:ext>
             </a:extLst>
           </p:cNvPr>
@@ -3474,7 +3473,7 @@
           <p:cNvPr id="4" name="投影片編號版面配置區 3">
             <a:extLst>
               <a:ext uri="{FF2B5EF4-FFF2-40B4-BE49-F238E27FC236}">
-                <a16:creationId xmlns:a16="http://schemas.microsoft.com/office/drawing/2014/main" id="{A81AD260-1FA1-46D2-EEFC-6CE390861C06}"/>
+                <a16:creationId xmlns:a16="http://schemas.microsoft.com/office/drawing/2014/main" xmlns="" id="{A81AD260-1FA1-46D2-EEFC-6CE390861C06}"/>
               </a:ext>
             </a:extLst>
           </p:cNvPr>
@@ -3544,7 +3543,7 @@
         <p:cNvPr id="1" name="">
           <a:extLst>
             <a:ext uri="{FF2B5EF4-FFF2-40B4-BE49-F238E27FC236}">
-              <a16:creationId xmlns:a16="http://schemas.microsoft.com/office/drawing/2014/main" id="{19BD7BE6-0C6A-24C7-EDCE-42FCC8CD50FA}"/>
+              <a16:creationId xmlns:a16="http://schemas.microsoft.com/office/drawing/2014/main" xmlns="" id="{19BD7BE6-0C6A-24C7-EDCE-42FCC8CD50FA}"/>
             </a:ext>
           </a:extLst>
         </p:cNvPr>
@@ -3564,7 +3563,7 @@
           <p:cNvPr id="2" name="投影片影像版面配置區 1">
             <a:extLst>
               <a:ext uri="{FF2B5EF4-FFF2-40B4-BE49-F238E27FC236}">
-                <a16:creationId xmlns:a16="http://schemas.microsoft.com/office/drawing/2014/main" id="{963FA2D6-6572-94E0-F6B6-6A5BA5019224}"/>
+                <a16:creationId xmlns:a16="http://schemas.microsoft.com/office/drawing/2014/main" xmlns="" id="{963FA2D6-6572-94E0-F6B6-6A5BA5019224}"/>
               </a:ext>
             </a:extLst>
           </p:cNvPr>
@@ -3582,7 +3581,7 @@
           <p:cNvPr id="3" name="備忘稿版面配置區 2">
             <a:extLst>
               <a:ext uri="{FF2B5EF4-FFF2-40B4-BE49-F238E27FC236}">
-                <a16:creationId xmlns:a16="http://schemas.microsoft.com/office/drawing/2014/main" id="{57639A5D-EDAF-4F81-B67C-950D2048D712}"/>
+                <a16:creationId xmlns:a16="http://schemas.microsoft.com/office/drawing/2014/main" xmlns="" id="{57639A5D-EDAF-4F81-B67C-950D2048D712}"/>
               </a:ext>
             </a:extLst>
           </p:cNvPr>
@@ -3722,7 +3721,7 @@
           <p:cNvPr id="4" name="投影片編號版面配置區 3">
             <a:extLst>
               <a:ext uri="{FF2B5EF4-FFF2-40B4-BE49-F238E27FC236}">
-                <a16:creationId xmlns:a16="http://schemas.microsoft.com/office/drawing/2014/main" id="{F8ED7604-660E-D030-99B4-A4E74D119DFC}"/>
+                <a16:creationId xmlns:a16="http://schemas.microsoft.com/office/drawing/2014/main" xmlns="" id="{F8ED7604-660E-D030-99B4-A4E74D119DFC}"/>
               </a:ext>
             </a:extLst>
           </p:cNvPr>
@@ -3792,7 +3791,7 @@
         <p:cNvPr id="1" name="">
           <a:extLst>
             <a:ext uri="{FF2B5EF4-FFF2-40B4-BE49-F238E27FC236}">
-              <a16:creationId xmlns:a16="http://schemas.microsoft.com/office/drawing/2014/main" id="{D5BDCB87-D510-3E12-0B70-9F66CF2E4F53}"/>
+              <a16:creationId xmlns:a16="http://schemas.microsoft.com/office/drawing/2014/main" xmlns="" id="{D5BDCB87-D510-3E12-0B70-9F66CF2E4F53}"/>
             </a:ext>
           </a:extLst>
         </p:cNvPr>
@@ -3812,7 +3811,7 @@
           <p:cNvPr id="2" name="投影片影像版面配置區 1">
             <a:extLst>
               <a:ext uri="{FF2B5EF4-FFF2-40B4-BE49-F238E27FC236}">
-                <a16:creationId xmlns:a16="http://schemas.microsoft.com/office/drawing/2014/main" id="{9C2220D8-AB85-841B-EEFB-AA26789AEC0A}"/>
+                <a16:creationId xmlns:a16="http://schemas.microsoft.com/office/drawing/2014/main" xmlns="" id="{9C2220D8-AB85-841B-EEFB-AA26789AEC0A}"/>
               </a:ext>
             </a:extLst>
           </p:cNvPr>
@@ -3832,7 +3831,7 @@
               <p:cNvPr id="3" name="備忘稿版面配置區 2">
                 <a:extLst>
                   <a:ext uri="{FF2B5EF4-FFF2-40B4-BE49-F238E27FC236}">
-                    <a16:creationId xmlns:a16="http://schemas.microsoft.com/office/drawing/2014/main" id="{7E014429-932D-C388-46B7-D1B69AE89375}"/>
+                    <a16:creationId xmlns:a16="http://schemas.microsoft.com/office/drawing/2014/main" xmlns="" id="{7E014429-932D-C388-46B7-D1B69AE89375}"/>
                   </a:ext>
                 </a:extLst>
               </p:cNvPr>
@@ -3850,52 +3849,12 @@
               <a:p>
                 <a:pPr marL="0" indent="0"/>
                 <a:r>
-                  <a:rPr lang="zh-TW" altLang="zh-TW" dirty="0"/>
-                  <a:t>此 </a:t>
-                </a:r>
-                <a14:m>
-                  <m:oMath xmlns:m="http://schemas.openxmlformats.org/officeDocument/2006/math">
-                    <m:r>
-                      <a:rPr lang="zh-TW" altLang="en-US" sz="1200" b="0" i="1" u="none" strike="noStrike" cap="none">
-                        <a:solidFill>
-                          <a:schemeClr val="dk1"/>
-                        </a:solidFill>
-                        <a:latin typeface="Cambria Math" panose="02040503050406030204" pitchFamily="18" charset="0"/>
-                        <a:ea typeface="Times New Roman"/>
-                        <a:cs typeface="Times New Roman"/>
-                        <a:sym typeface="Times New Roman"/>
-                      </a:rPr>
-                      <m:t>𝑌</m:t>
-                    </m:r>
-                    <m:r>
-                      <a:rPr lang="en-US" altLang="zh-TW" sz="1200" b="0" i="0" u="none" strike="noStrike" cap="none">
-                        <a:solidFill>
-                          <a:schemeClr val="dk1"/>
-                        </a:solidFill>
-                        <a:latin typeface="Cambria Math" panose="02040503050406030204" pitchFamily="18" charset="0"/>
-                        <a:ea typeface="Times New Roman"/>
-                        <a:cs typeface="Times New Roman"/>
-                        <a:sym typeface="Times New Roman"/>
-                      </a:rPr>
-                      <m:t>=1</m:t>
-                    </m:r>
-                  </m:oMath>
-                </a14:m>
-                <a:r>
-                  <a:rPr lang="zh-TW" altLang="zh-TW" dirty="0"/>
-                  <a:t>為相對正規化值，不代表顯示器實際</a:t>
+                  <a:rPr lang="zh-TW" altLang="en-US" dirty="0" smtClean="0"/>
+                  <a:t>白點</a:t>
                 </a:r>
                 <a:r>
                   <a:rPr lang="zh-TW" altLang="en-US" dirty="0"/>
-                  <a:t>亮度</a:t>
-                </a:r>
-                <a:endParaRPr lang="en-US" altLang="zh-TW" dirty="0"/>
-              </a:p>
-              <a:p>
-                <a:pPr marL="0" indent="0"/>
-                <a:r>
-                  <a:rPr lang="zh-TW" altLang="en-US" dirty="0"/>
-                  <a:t>白點在</a:t>
+                  <a:t>在</a:t>
                 </a:r>
                 <a:r>
                   <a:rPr lang="en-US" altLang="zh-TW" dirty="0"/>
@@ -3928,6 +3887,10 @@
               </a:p>
               <a:p>
                 <a:pPr marL="0" indent="0"/>
+                <a:r>
+                  <a:rPr lang="en-US" altLang="zh-TW" dirty="0" smtClean="0"/>
+                  <a:t>3*1</a:t>
+                </a:r>
                 <a:endParaRPr lang="zh-TW" altLang="en-US" dirty="0"/>
               </a:p>
             </p:txBody>
@@ -4042,7 +4005,7 @@
           <p:cNvPr id="4" name="投影片編號版面配置區 3">
             <a:extLst>
               <a:ext uri="{FF2B5EF4-FFF2-40B4-BE49-F238E27FC236}">
-                <a16:creationId xmlns:a16="http://schemas.microsoft.com/office/drawing/2014/main" id="{ECE301C6-59CB-7CC2-23BD-00E11BDD5D3D}"/>
+                <a16:creationId xmlns:a16="http://schemas.microsoft.com/office/drawing/2014/main" xmlns="" id="{ECE301C6-59CB-7CC2-23BD-00E11BDD5D3D}"/>
               </a:ext>
             </a:extLst>
           </p:cNvPr>
@@ -4112,7 +4075,7 @@
         <p:cNvPr id="1" name="">
           <a:extLst>
             <a:ext uri="{FF2B5EF4-FFF2-40B4-BE49-F238E27FC236}">
-              <a16:creationId xmlns:a16="http://schemas.microsoft.com/office/drawing/2014/main" id="{20A72D9A-17ED-75CA-795D-509CF0D875D8}"/>
+              <a16:creationId xmlns:a16="http://schemas.microsoft.com/office/drawing/2014/main" xmlns="" id="{20A72D9A-17ED-75CA-795D-509CF0D875D8}"/>
             </a:ext>
           </a:extLst>
         </p:cNvPr>
@@ -4132,7 +4095,7 @@
           <p:cNvPr id="2" name="投影片影像版面配置區 1">
             <a:extLst>
               <a:ext uri="{FF2B5EF4-FFF2-40B4-BE49-F238E27FC236}">
-                <a16:creationId xmlns:a16="http://schemas.microsoft.com/office/drawing/2014/main" id="{269CEF18-87E4-2E84-A1BF-D6C3FDCAD952}"/>
+                <a16:creationId xmlns:a16="http://schemas.microsoft.com/office/drawing/2014/main" xmlns="" id="{269CEF18-87E4-2E84-A1BF-D6C3FDCAD952}"/>
               </a:ext>
             </a:extLst>
           </p:cNvPr>
@@ -4150,7 +4113,7 @@
           <p:cNvPr id="3" name="備忘稿版面配置區 2">
             <a:extLst>
               <a:ext uri="{FF2B5EF4-FFF2-40B4-BE49-F238E27FC236}">
-                <a16:creationId xmlns:a16="http://schemas.microsoft.com/office/drawing/2014/main" id="{F6A84E15-D033-5994-8FD9-2EF38E9D985D}"/>
+                <a16:creationId xmlns:a16="http://schemas.microsoft.com/office/drawing/2014/main" xmlns="" id="{F6A84E15-D033-5994-8FD9-2EF38E9D985D}"/>
               </a:ext>
             </a:extLst>
           </p:cNvPr>
@@ -4216,7 +4179,7 @@
           <p:cNvPr id="4" name="投影片編號版面配置區 3">
             <a:extLst>
               <a:ext uri="{FF2B5EF4-FFF2-40B4-BE49-F238E27FC236}">
-                <a16:creationId xmlns:a16="http://schemas.microsoft.com/office/drawing/2014/main" id="{9C3150AD-26DE-59A4-DABA-A8A92E906A36}"/>
+                <a16:creationId xmlns:a16="http://schemas.microsoft.com/office/drawing/2014/main" xmlns="" id="{9C3150AD-26DE-59A4-DABA-A8A92E906A36}"/>
               </a:ext>
             </a:extLst>
           </p:cNvPr>
@@ -9263,7 +9226,7 @@
         <p:cNvPr id="1" name="">
           <a:extLst>
             <a:ext uri="{FF2B5EF4-FFF2-40B4-BE49-F238E27FC236}">
-              <a16:creationId xmlns:a16="http://schemas.microsoft.com/office/drawing/2014/main" id="{818B4C8B-F5C5-5CEC-943D-9D2F2D9B601F}"/>
+              <a16:creationId xmlns:a16="http://schemas.microsoft.com/office/drawing/2014/main" xmlns="" id="{818B4C8B-F5C5-5CEC-943D-9D2F2D9B601F}"/>
             </a:ext>
           </a:extLst>
         </p:cNvPr>
@@ -9283,7 +9246,7 @@
           <p:cNvPr id="5" name="標題 1">
             <a:extLst>
               <a:ext uri="{FF2B5EF4-FFF2-40B4-BE49-F238E27FC236}">
-                <a16:creationId xmlns:a16="http://schemas.microsoft.com/office/drawing/2014/main" id="{AB6A1EF1-530D-13DA-3A32-D805CBBDBE9F}"/>
+                <a16:creationId xmlns:a16="http://schemas.microsoft.com/office/drawing/2014/main" xmlns="" id="{AB6A1EF1-530D-13DA-3A32-D805CBBDBE9F}"/>
               </a:ext>
             </a:extLst>
           </p:cNvPr>
@@ -9344,7 +9307,7 @@
           <p:cNvPr id="4" name="圖片 3">
             <a:extLst>
               <a:ext uri="{FF2B5EF4-FFF2-40B4-BE49-F238E27FC236}">
-                <a16:creationId xmlns:a16="http://schemas.microsoft.com/office/drawing/2014/main" id="{96A9D86D-B0E3-DDB0-9AAB-1EDB677233C3}"/>
+                <a16:creationId xmlns:a16="http://schemas.microsoft.com/office/drawing/2014/main" xmlns="" id="{96A9D86D-B0E3-DDB0-9AAB-1EDB677233C3}"/>
               </a:ext>
             </a:extLst>
           </p:cNvPr>
@@ -9374,7 +9337,7 @@
           <p:cNvPr id="20" name="圖片 19">
             <a:extLst>
               <a:ext uri="{FF2B5EF4-FFF2-40B4-BE49-F238E27FC236}">
-                <a16:creationId xmlns:a16="http://schemas.microsoft.com/office/drawing/2014/main" id="{D9106978-8618-368B-C714-E843DE9BBF2D}"/>
+                <a16:creationId xmlns:a16="http://schemas.microsoft.com/office/drawing/2014/main" xmlns="" id="{D9106978-8618-368B-C714-E843DE9BBF2D}"/>
               </a:ext>
             </a:extLst>
           </p:cNvPr>
@@ -9404,7 +9367,7 @@
           <p:cNvPr id="2" name="文字版面配置區 6">
             <a:extLst>
               <a:ext uri="{FF2B5EF4-FFF2-40B4-BE49-F238E27FC236}">
-                <a16:creationId xmlns:a16="http://schemas.microsoft.com/office/drawing/2014/main" id="{F5F7D37B-17ED-D781-882D-F5A5904761E7}"/>
+                <a16:creationId xmlns:a16="http://schemas.microsoft.com/office/drawing/2014/main" xmlns="" id="{F5F7D37B-17ED-D781-882D-F5A5904761E7}"/>
               </a:ext>
             </a:extLst>
           </p:cNvPr>
@@ -9714,7 +9677,7 @@
           <p:cNvPr id="13" name="圖片 12">
             <a:extLst>
               <a:ext uri="{FF2B5EF4-FFF2-40B4-BE49-F238E27FC236}">
-                <a16:creationId xmlns:a16="http://schemas.microsoft.com/office/drawing/2014/main" id="{BD19C367-BE8F-B4C7-634F-0FC177DCF5AF}"/>
+                <a16:creationId xmlns:a16="http://schemas.microsoft.com/office/drawing/2014/main" xmlns="" id="{BD19C367-BE8F-B4C7-634F-0FC177DCF5AF}"/>
               </a:ext>
             </a:extLst>
           </p:cNvPr>
@@ -9749,6 +9712,13 @@
   <p:clrMapOvr>
     <a:masterClrMapping/>
   </p:clrMapOvr>
+  <p:timing>
+    <p:tnLst>
+      <p:par>
+        <p:cTn id="1" dur="indefinite" restart="never" nodeType="tmRoot"/>
+      </p:par>
+    </p:tnLst>
+  </p:timing>
 </p:sld>
 </file>
 
@@ -9774,7 +9744,7 @@
           <p:cNvPr id="5" name="標題 1">
             <a:extLst>
               <a:ext uri="{FF2B5EF4-FFF2-40B4-BE49-F238E27FC236}">
-                <a16:creationId xmlns:a16="http://schemas.microsoft.com/office/drawing/2014/main" id="{E90C9C8B-5EB4-1217-C440-D175A3726885}"/>
+                <a16:creationId xmlns:a16="http://schemas.microsoft.com/office/drawing/2014/main" xmlns="" id="{E90C9C8B-5EB4-1217-C440-D175A3726885}"/>
               </a:ext>
             </a:extLst>
           </p:cNvPr>
@@ -9835,7 +9805,7 @@
           <p:cNvPr id="29" name="文字方塊 28">
             <a:extLst>
               <a:ext uri="{FF2B5EF4-FFF2-40B4-BE49-F238E27FC236}">
-                <a16:creationId xmlns:a16="http://schemas.microsoft.com/office/drawing/2014/main" id="{760342CA-0DBD-1A82-964B-91EFD4A59366}"/>
+                <a16:creationId xmlns:a16="http://schemas.microsoft.com/office/drawing/2014/main" xmlns="" id="{760342CA-0DBD-1A82-964B-91EFD4A59366}"/>
               </a:ext>
             </a:extLst>
           </p:cNvPr>
@@ -9890,7 +9860,7 @@
                 <a:hlinkClick r:id="rId2">
                   <a:extLst>
                     <a:ext uri="{A12FA001-AC4F-418D-AE19-62706E023703}">
-                      <ahyp:hlinkClr xmlns:ahyp="http://schemas.microsoft.com/office/drawing/2018/hyperlinkcolor" val="tx"/>
+                      <ahyp:hlinkClr xmlns:ahyp="http://schemas.microsoft.com/office/drawing/2018/hyperlinkcolor" xmlns="" val="tx"/>
                     </a:ext>
                   </a:extLst>
                 </a:hlinkClick>
@@ -9905,7 +9875,7 @@
                 <a:hlinkClick r:id="rId2">
                   <a:extLst>
                     <a:ext uri="{A12FA001-AC4F-418D-AE19-62706E023703}">
-                      <ahyp:hlinkClr xmlns:ahyp="http://schemas.microsoft.com/office/drawing/2018/hyperlinkcolor" val="tx"/>
+                      <ahyp:hlinkClr xmlns:ahyp="http://schemas.microsoft.com/office/drawing/2018/hyperlinkcolor" xmlns="" val="tx"/>
                     </a:ext>
                   </a:extLst>
                 </a:hlinkClick>
@@ -9933,7 +9903,7 @@
           <p:cNvPr id="34" name="群組 33">
             <a:extLst>
               <a:ext uri="{FF2B5EF4-FFF2-40B4-BE49-F238E27FC236}">
-                <a16:creationId xmlns:a16="http://schemas.microsoft.com/office/drawing/2014/main" id="{559E75C4-3E10-1036-661A-A9CE73B5024F}"/>
+                <a16:creationId xmlns:a16="http://schemas.microsoft.com/office/drawing/2014/main" xmlns="" id="{559E75C4-3E10-1036-661A-A9CE73B5024F}"/>
               </a:ext>
             </a:extLst>
           </p:cNvPr>
@@ -9953,7 +9923,7 @@
             <p:cNvPr id="28" name="圖片 27">
               <a:extLst>
                 <a:ext uri="{FF2B5EF4-FFF2-40B4-BE49-F238E27FC236}">
-                  <a16:creationId xmlns:a16="http://schemas.microsoft.com/office/drawing/2014/main" id="{634B4B9F-1E2C-7276-D9F5-E79E878BC91B}"/>
+                  <a16:creationId xmlns:a16="http://schemas.microsoft.com/office/drawing/2014/main" xmlns="" id="{634B4B9F-1E2C-7276-D9F5-E79E878BC91B}"/>
                 </a:ext>
               </a:extLst>
             </p:cNvPr>
@@ -9983,7 +9953,7 @@
             <p:cNvPr id="30" name="矩形 29">
               <a:extLst>
                 <a:ext uri="{FF2B5EF4-FFF2-40B4-BE49-F238E27FC236}">
-                  <a16:creationId xmlns:a16="http://schemas.microsoft.com/office/drawing/2014/main" id="{8AFDBE67-1AB0-0B47-9D0E-863589F97A7A}"/>
+                  <a16:creationId xmlns:a16="http://schemas.microsoft.com/office/drawing/2014/main" xmlns="" id="{8AFDBE67-1AB0-0B47-9D0E-863589F97A7A}"/>
                 </a:ext>
               </a:extLst>
             </p:cNvPr>
@@ -10039,7 +10009,7 @@
             <p:cNvPr id="32" name="矩形 31">
               <a:extLst>
                 <a:ext uri="{FF2B5EF4-FFF2-40B4-BE49-F238E27FC236}">
-                  <a16:creationId xmlns:a16="http://schemas.microsoft.com/office/drawing/2014/main" id="{FB12353F-A6C5-3C6E-5EFF-1AE079019357}"/>
+                  <a16:creationId xmlns:a16="http://schemas.microsoft.com/office/drawing/2014/main" xmlns="" id="{FB12353F-A6C5-3C6E-5EFF-1AE079019357}"/>
                 </a:ext>
               </a:extLst>
             </p:cNvPr>
@@ -10096,7 +10066,7 @@
           <p:cNvPr id="47" name="箭號: 向右 46">
             <a:extLst>
               <a:ext uri="{FF2B5EF4-FFF2-40B4-BE49-F238E27FC236}">
-                <a16:creationId xmlns:a16="http://schemas.microsoft.com/office/drawing/2014/main" id="{F6D006A1-E965-510F-8561-BA4CAB0357B9}"/>
+                <a16:creationId xmlns:a16="http://schemas.microsoft.com/office/drawing/2014/main" xmlns="" id="{F6D006A1-E965-510F-8561-BA4CAB0357B9}"/>
               </a:ext>
             </a:extLst>
           </p:cNvPr>
@@ -10157,7 +10127,7 @@
           <p:cNvPr id="48" name="箭號: 向右 47">
             <a:extLst>
               <a:ext uri="{FF2B5EF4-FFF2-40B4-BE49-F238E27FC236}">
-                <a16:creationId xmlns:a16="http://schemas.microsoft.com/office/drawing/2014/main" id="{9C2E09C9-B2FB-4AC2-B678-D22FF41F87FB}"/>
+                <a16:creationId xmlns:a16="http://schemas.microsoft.com/office/drawing/2014/main" xmlns="" id="{9C2E09C9-B2FB-4AC2-B678-D22FF41F87FB}"/>
               </a:ext>
             </a:extLst>
           </p:cNvPr>
@@ -10218,7 +10188,7 @@
           <p:cNvPr id="51" name="圖片 50">
             <a:extLst>
               <a:ext uri="{FF2B5EF4-FFF2-40B4-BE49-F238E27FC236}">
-                <a16:creationId xmlns:a16="http://schemas.microsoft.com/office/drawing/2014/main" id="{768BD875-7650-8E2E-BF05-D2A9055127DD}"/>
+                <a16:creationId xmlns:a16="http://schemas.microsoft.com/office/drawing/2014/main" xmlns="" id="{768BD875-7650-8E2E-BF05-D2A9055127DD}"/>
               </a:ext>
             </a:extLst>
           </p:cNvPr>
@@ -10248,7 +10218,7 @@
           <p:cNvPr id="53" name="圖片 52">
             <a:extLst>
               <a:ext uri="{FF2B5EF4-FFF2-40B4-BE49-F238E27FC236}">
-                <a16:creationId xmlns:a16="http://schemas.microsoft.com/office/drawing/2014/main" id="{803B63B2-9F1A-7D9A-584F-93EE655F51BB}"/>
+                <a16:creationId xmlns:a16="http://schemas.microsoft.com/office/drawing/2014/main" xmlns="" id="{803B63B2-9F1A-7D9A-584F-93EE655F51BB}"/>
               </a:ext>
             </a:extLst>
           </p:cNvPr>
@@ -10278,7 +10248,7 @@
           <p:cNvPr id="55" name="圖片 54">
             <a:extLst>
               <a:ext uri="{FF2B5EF4-FFF2-40B4-BE49-F238E27FC236}">
-                <a16:creationId xmlns:a16="http://schemas.microsoft.com/office/drawing/2014/main" id="{87D1C818-B490-2E90-9A46-3A24ACC931F9}"/>
+                <a16:creationId xmlns:a16="http://schemas.microsoft.com/office/drawing/2014/main" xmlns="" id="{87D1C818-B490-2E90-9A46-3A24ACC931F9}"/>
               </a:ext>
             </a:extLst>
           </p:cNvPr>
@@ -10308,7 +10278,7 @@
           <p:cNvPr id="60" name="群組 59">
             <a:extLst>
               <a:ext uri="{FF2B5EF4-FFF2-40B4-BE49-F238E27FC236}">
-                <a16:creationId xmlns:a16="http://schemas.microsoft.com/office/drawing/2014/main" id="{30231019-5D2A-FC74-902A-0DE0E738F875}"/>
+                <a16:creationId xmlns:a16="http://schemas.microsoft.com/office/drawing/2014/main" xmlns="" id="{30231019-5D2A-FC74-902A-0DE0E738F875}"/>
               </a:ext>
             </a:extLst>
           </p:cNvPr>
@@ -10328,7 +10298,7 @@
             <p:cNvPr id="57" name="圖片 56">
               <a:extLst>
                 <a:ext uri="{FF2B5EF4-FFF2-40B4-BE49-F238E27FC236}">
-                  <a16:creationId xmlns:a16="http://schemas.microsoft.com/office/drawing/2014/main" id="{BF72DFDE-46B5-B563-7643-AEC5DB0C4AE9}"/>
+                  <a16:creationId xmlns:a16="http://schemas.microsoft.com/office/drawing/2014/main" xmlns="" id="{BF72DFDE-46B5-B563-7643-AEC5DB0C4AE9}"/>
                 </a:ext>
               </a:extLst>
             </p:cNvPr>
@@ -10358,7 +10328,7 @@
             <p:cNvPr id="59" name="圖片 58">
               <a:extLst>
                 <a:ext uri="{FF2B5EF4-FFF2-40B4-BE49-F238E27FC236}">
-                  <a16:creationId xmlns:a16="http://schemas.microsoft.com/office/drawing/2014/main" id="{45F464C7-0F63-A907-3149-D3E1C341BB34}"/>
+                  <a16:creationId xmlns:a16="http://schemas.microsoft.com/office/drawing/2014/main" xmlns="" id="{45F464C7-0F63-A907-3149-D3E1C341BB34}"/>
                 </a:ext>
               </a:extLst>
             </p:cNvPr>
@@ -10389,7 +10359,7 @@
           <p:cNvPr id="65" name="群組 64">
             <a:extLst>
               <a:ext uri="{FF2B5EF4-FFF2-40B4-BE49-F238E27FC236}">
-                <a16:creationId xmlns:a16="http://schemas.microsoft.com/office/drawing/2014/main" id="{0019A0D0-D56F-9783-8FFE-E56546FBB97B}"/>
+                <a16:creationId xmlns:a16="http://schemas.microsoft.com/office/drawing/2014/main" xmlns="" id="{0019A0D0-D56F-9783-8FFE-E56546FBB97B}"/>
               </a:ext>
             </a:extLst>
           </p:cNvPr>
@@ -10409,7 +10379,7 @@
             <p:cNvPr id="62" name="圖片 61">
               <a:extLst>
                 <a:ext uri="{FF2B5EF4-FFF2-40B4-BE49-F238E27FC236}">
-                  <a16:creationId xmlns:a16="http://schemas.microsoft.com/office/drawing/2014/main" id="{5DF01417-4A33-EFF6-37DE-839006B72D09}"/>
+                  <a16:creationId xmlns:a16="http://schemas.microsoft.com/office/drawing/2014/main" xmlns="" id="{5DF01417-4A33-EFF6-37DE-839006B72D09}"/>
                 </a:ext>
               </a:extLst>
             </p:cNvPr>
@@ -10439,7 +10409,7 @@
             <p:cNvPr id="64" name="圖片 63">
               <a:extLst>
                 <a:ext uri="{FF2B5EF4-FFF2-40B4-BE49-F238E27FC236}">
-                  <a16:creationId xmlns:a16="http://schemas.microsoft.com/office/drawing/2014/main" id="{7929039C-2FA4-D0DA-3719-08555DD8302C}"/>
+                  <a16:creationId xmlns:a16="http://schemas.microsoft.com/office/drawing/2014/main" xmlns="" id="{7929039C-2FA4-D0DA-3719-08555DD8302C}"/>
                 </a:ext>
               </a:extLst>
             </p:cNvPr>
@@ -10470,7 +10440,7 @@
           <p:cNvPr id="2" name="文字版面配置區 6">
             <a:extLst>
               <a:ext uri="{FF2B5EF4-FFF2-40B4-BE49-F238E27FC236}">
-                <a16:creationId xmlns:a16="http://schemas.microsoft.com/office/drawing/2014/main" id="{FB39A942-B013-D404-F12B-67C00F2970E9}"/>
+                <a16:creationId xmlns:a16="http://schemas.microsoft.com/office/drawing/2014/main" xmlns="" id="{FB39A942-B013-D404-F12B-67C00F2970E9}"/>
               </a:ext>
             </a:extLst>
           </p:cNvPr>
@@ -10796,7 +10766,7 @@
         <p:cNvPr id="1" name="">
           <a:extLst>
             <a:ext uri="{FF2B5EF4-FFF2-40B4-BE49-F238E27FC236}">
-              <a16:creationId xmlns:a16="http://schemas.microsoft.com/office/drawing/2014/main" id="{DB55E878-4E26-12D7-EE94-7C8FB06533CC}"/>
+              <a16:creationId xmlns:a16="http://schemas.microsoft.com/office/drawing/2014/main" xmlns="" id="{DB55E878-4E26-12D7-EE94-7C8FB06533CC}"/>
             </a:ext>
           </a:extLst>
         </p:cNvPr>
@@ -10816,7 +10786,7 @@
           <p:cNvPr id="5" name="標題 1">
             <a:extLst>
               <a:ext uri="{FF2B5EF4-FFF2-40B4-BE49-F238E27FC236}">
-                <a16:creationId xmlns:a16="http://schemas.microsoft.com/office/drawing/2014/main" id="{EDA0264E-FAAC-7F32-85AD-9B494638827F}"/>
+                <a16:creationId xmlns:a16="http://schemas.microsoft.com/office/drawing/2014/main" xmlns="" id="{EDA0264E-FAAC-7F32-85AD-9B494638827F}"/>
               </a:ext>
             </a:extLst>
           </p:cNvPr>
@@ -10877,7 +10847,7 @@
           <p:cNvPr id="8" name="文字版面配置區 6">
             <a:extLst>
               <a:ext uri="{FF2B5EF4-FFF2-40B4-BE49-F238E27FC236}">
-                <a16:creationId xmlns:a16="http://schemas.microsoft.com/office/drawing/2014/main" id="{2DAC1A8A-F13A-5508-510D-5274EB3BC2A2}"/>
+                <a16:creationId xmlns:a16="http://schemas.microsoft.com/office/drawing/2014/main" xmlns="" id="{2DAC1A8A-F13A-5508-510D-5274EB3BC2A2}"/>
               </a:ext>
             </a:extLst>
           </p:cNvPr>
@@ -11484,12 +11454,12 @@
               <a:t>cd/m² </a:t>
             </a:r>
             <a:r>
-              <a:rPr lang="zh-TW" altLang="en-US" sz="1600" dirty="0">
-                <a:latin typeface="Times New Roman" panose="02020603050405020304" pitchFamily="18" charset="0"/>
-                <a:ea typeface="標楷體" panose="03000509000000000000" pitchFamily="65" charset="-120"/>
-                <a:cs typeface="Times New Roman" panose="02020603050405020304" pitchFamily="18" charset="0"/>
-              </a:rPr>
-              <a:t>表示</a:t>
+              <a:rPr lang="zh-TW" altLang="en-US" sz="1600" dirty="0" smtClean="0">
+                <a:latin typeface="Times New Roman" panose="02020603050405020304" pitchFamily="18" charset="0"/>
+                <a:ea typeface="標楷體" panose="03000509000000000000" pitchFamily="65" charset="-120"/>
+                <a:cs typeface="Times New Roman" panose="02020603050405020304" pitchFamily="18" charset="0"/>
+              </a:rPr>
+              <a:t>單位表示</a:t>
             </a:r>
             <a:endParaRPr lang="en-US" altLang="zh-TW" sz="1600" dirty="0">
               <a:latin typeface="Times New Roman" panose="02020603050405020304" pitchFamily="18" charset="0"/>
@@ -11504,7 +11474,7 @@
           <p:cNvPr id="11" name="圖片 10">
             <a:extLst>
               <a:ext uri="{FF2B5EF4-FFF2-40B4-BE49-F238E27FC236}">
-                <a16:creationId xmlns:a16="http://schemas.microsoft.com/office/drawing/2014/main" id="{AC18273A-6EC9-764F-CB84-A81D1E6A5E4B}"/>
+                <a16:creationId xmlns:a16="http://schemas.microsoft.com/office/drawing/2014/main" xmlns="" id="{AC18273A-6EC9-764F-CB84-A81D1E6A5E4B}"/>
               </a:ext>
             </a:extLst>
           </p:cNvPr>
@@ -11550,7 +11520,7 @@
         <p:cNvPr id="1" name="">
           <a:extLst>
             <a:ext uri="{FF2B5EF4-FFF2-40B4-BE49-F238E27FC236}">
-              <a16:creationId xmlns:a16="http://schemas.microsoft.com/office/drawing/2014/main" id="{4C524AA7-A8A7-A341-3AC3-0E3E342460FB}"/>
+              <a16:creationId xmlns:a16="http://schemas.microsoft.com/office/drawing/2014/main" xmlns="" id="{4C524AA7-A8A7-A341-3AC3-0E3E342460FB}"/>
             </a:ext>
           </a:extLst>
         </p:cNvPr>
@@ -11570,7 +11540,7 @@
           <p:cNvPr id="8" name="文字版面配置區 6">
             <a:extLst>
               <a:ext uri="{FF2B5EF4-FFF2-40B4-BE49-F238E27FC236}">
-                <a16:creationId xmlns:a16="http://schemas.microsoft.com/office/drawing/2014/main" id="{70AA535C-35C8-9CAA-5BCE-9D60896E7559}"/>
+                <a16:creationId xmlns:a16="http://schemas.microsoft.com/office/drawing/2014/main" xmlns="" id="{70AA535C-35C8-9CAA-5BCE-9D60896E7559}"/>
               </a:ext>
             </a:extLst>
           </p:cNvPr>
@@ -11869,7 +11839,7 @@
           <p:cNvPr id="12" name="矩形 11">
             <a:extLst>
               <a:ext uri="{FF2B5EF4-FFF2-40B4-BE49-F238E27FC236}">
-                <a16:creationId xmlns:a16="http://schemas.microsoft.com/office/drawing/2014/main" id="{650C616D-3C14-C08D-8569-D9AD85C5DC81}"/>
+                <a16:creationId xmlns:a16="http://schemas.microsoft.com/office/drawing/2014/main" xmlns="" id="{650C616D-3C14-C08D-8569-D9AD85C5DC81}"/>
               </a:ext>
             </a:extLst>
           </p:cNvPr>
@@ -11941,7 +11911,7 @@
           <p:cNvPr id="3" name="矩形 2">
             <a:extLst>
               <a:ext uri="{FF2B5EF4-FFF2-40B4-BE49-F238E27FC236}">
-                <a16:creationId xmlns:a16="http://schemas.microsoft.com/office/drawing/2014/main" id="{ED4440B2-D934-67C7-39A3-FE56C3443B86}"/>
+                <a16:creationId xmlns:a16="http://schemas.microsoft.com/office/drawing/2014/main" xmlns="" id="{ED4440B2-D934-67C7-39A3-FE56C3443B86}"/>
               </a:ext>
             </a:extLst>
           </p:cNvPr>
@@ -12013,7 +11983,7 @@
           <p:cNvPr id="5" name="矩形 4">
             <a:extLst>
               <a:ext uri="{FF2B5EF4-FFF2-40B4-BE49-F238E27FC236}">
-                <a16:creationId xmlns:a16="http://schemas.microsoft.com/office/drawing/2014/main" id="{F9DD2B38-5863-2279-1592-91EB1F252E2D}"/>
+                <a16:creationId xmlns:a16="http://schemas.microsoft.com/office/drawing/2014/main" xmlns="" id="{F9DD2B38-5863-2279-1592-91EB1F252E2D}"/>
               </a:ext>
             </a:extLst>
           </p:cNvPr>
@@ -12085,7 +12055,7 @@
           <p:cNvPr id="9" name="矩形 8">
             <a:extLst>
               <a:ext uri="{FF2B5EF4-FFF2-40B4-BE49-F238E27FC236}">
-                <a16:creationId xmlns:a16="http://schemas.microsoft.com/office/drawing/2014/main" id="{7CE50360-4991-7137-8AAB-9BACBD0D98BF}"/>
+                <a16:creationId xmlns:a16="http://schemas.microsoft.com/office/drawing/2014/main" xmlns="" id="{7CE50360-4991-7137-8AAB-9BACBD0D98BF}"/>
               </a:ext>
             </a:extLst>
           </p:cNvPr>
@@ -12157,7 +12127,7 @@
           <p:cNvPr id="13" name="矩形 12">
             <a:extLst>
               <a:ext uri="{FF2B5EF4-FFF2-40B4-BE49-F238E27FC236}">
-                <a16:creationId xmlns:a16="http://schemas.microsoft.com/office/drawing/2014/main" id="{AE5CC085-F68F-A65E-FCB3-C00C72B7D390}"/>
+                <a16:creationId xmlns:a16="http://schemas.microsoft.com/office/drawing/2014/main" xmlns="" id="{AE5CC085-F68F-A65E-FCB3-C00C72B7D390}"/>
               </a:ext>
             </a:extLst>
           </p:cNvPr>
@@ -12229,7 +12199,7 @@
           <p:cNvPr id="15" name="文字方塊 14">
             <a:extLst>
               <a:ext uri="{FF2B5EF4-FFF2-40B4-BE49-F238E27FC236}">
-                <a16:creationId xmlns:a16="http://schemas.microsoft.com/office/drawing/2014/main" id="{A6668260-2771-F381-C71B-D54F678C8A36}"/>
+                <a16:creationId xmlns:a16="http://schemas.microsoft.com/office/drawing/2014/main" xmlns="" id="{A6668260-2771-F381-C71B-D54F678C8A36}"/>
               </a:ext>
             </a:extLst>
           </p:cNvPr>
@@ -12279,7 +12249,7 @@
           <p:cNvPr id="17" name="文字方塊 16">
             <a:extLst>
               <a:ext uri="{FF2B5EF4-FFF2-40B4-BE49-F238E27FC236}">
-                <a16:creationId xmlns:a16="http://schemas.microsoft.com/office/drawing/2014/main" id="{378ECEDB-098A-A787-87A8-96D722F9D4AF}"/>
+                <a16:creationId xmlns:a16="http://schemas.microsoft.com/office/drawing/2014/main" xmlns="" id="{378ECEDB-098A-A787-87A8-96D722F9D4AF}"/>
               </a:ext>
             </a:extLst>
           </p:cNvPr>
@@ -12351,7 +12321,7 @@
           <p:cNvPr id="19" name="文字方塊 18">
             <a:extLst>
               <a:ext uri="{FF2B5EF4-FFF2-40B4-BE49-F238E27FC236}">
-                <a16:creationId xmlns:a16="http://schemas.microsoft.com/office/drawing/2014/main" id="{20124EDF-B4FC-F6C1-EB1E-C16D8613D5B9}"/>
+                <a16:creationId xmlns:a16="http://schemas.microsoft.com/office/drawing/2014/main" xmlns="" id="{20124EDF-B4FC-F6C1-EB1E-C16D8613D5B9}"/>
               </a:ext>
             </a:extLst>
           </p:cNvPr>
@@ -12404,7 +12374,7 @@
           <p:cNvPr id="22" name="文字方塊 21">
             <a:extLst>
               <a:ext uri="{FF2B5EF4-FFF2-40B4-BE49-F238E27FC236}">
-                <a16:creationId xmlns:a16="http://schemas.microsoft.com/office/drawing/2014/main" id="{004DC6C4-F258-3DB0-B9DD-DEC53EDBA4C2}"/>
+                <a16:creationId xmlns:a16="http://schemas.microsoft.com/office/drawing/2014/main" xmlns="" id="{004DC6C4-F258-3DB0-B9DD-DEC53EDBA4C2}"/>
               </a:ext>
             </a:extLst>
           </p:cNvPr>
@@ -12553,7 +12523,7 @@
           <p:cNvPr id="48" name="標題 1">
             <a:extLst>
               <a:ext uri="{FF2B5EF4-FFF2-40B4-BE49-F238E27FC236}">
-                <a16:creationId xmlns:a16="http://schemas.microsoft.com/office/drawing/2014/main" id="{8D095D36-8CDE-8903-759D-B3DC6978455E}"/>
+                <a16:creationId xmlns:a16="http://schemas.microsoft.com/office/drawing/2014/main" xmlns="" id="{8D095D36-8CDE-8903-759D-B3DC6978455E}"/>
               </a:ext>
             </a:extLst>
           </p:cNvPr>
@@ -12625,7 +12595,7 @@
           <p:cNvPr id="6" name="直線接點 5">
             <a:extLst>
               <a:ext uri="{FF2B5EF4-FFF2-40B4-BE49-F238E27FC236}">
-                <a16:creationId xmlns:a16="http://schemas.microsoft.com/office/drawing/2014/main" id="{6D20DBCA-6384-9E49-44A5-B651C92313FD}"/>
+                <a16:creationId xmlns:a16="http://schemas.microsoft.com/office/drawing/2014/main" xmlns="" id="{6D20DBCA-6384-9E49-44A5-B651C92313FD}"/>
               </a:ext>
             </a:extLst>
           </p:cNvPr>
@@ -12665,7 +12635,7 @@
           <p:cNvPr id="7" name="直線接點 6">
             <a:extLst>
               <a:ext uri="{FF2B5EF4-FFF2-40B4-BE49-F238E27FC236}">
-                <a16:creationId xmlns:a16="http://schemas.microsoft.com/office/drawing/2014/main" id="{07A16EC5-F29F-9583-72F5-FFE82D567074}"/>
+                <a16:creationId xmlns:a16="http://schemas.microsoft.com/office/drawing/2014/main" xmlns="" id="{07A16EC5-F29F-9583-72F5-FFE82D567074}"/>
               </a:ext>
             </a:extLst>
           </p:cNvPr>
@@ -12705,7 +12675,7 @@
           <p:cNvPr id="16" name="接點: 肘形 15">
             <a:extLst>
               <a:ext uri="{FF2B5EF4-FFF2-40B4-BE49-F238E27FC236}">
-                <a16:creationId xmlns:a16="http://schemas.microsoft.com/office/drawing/2014/main" id="{CD68CE2B-EDE8-D826-AB19-B6FAE4FE733F}"/>
+                <a16:creationId xmlns:a16="http://schemas.microsoft.com/office/drawing/2014/main" xmlns="" id="{CD68CE2B-EDE8-D826-AB19-B6FAE4FE733F}"/>
               </a:ext>
             </a:extLst>
           </p:cNvPr>
@@ -12745,7 +12715,7 @@
           <p:cNvPr id="18" name="接點: 肘形 17">
             <a:extLst>
               <a:ext uri="{FF2B5EF4-FFF2-40B4-BE49-F238E27FC236}">
-                <a16:creationId xmlns:a16="http://schemas.microsoft.com/office/drawing/2014/main" id="{834256DB-2ECB-B600-2909-4DADCB795645}"/>
+                <a16:creationId xmlns:a16="http://schemas.microsoft.com/office/drawing/2014/main" xmlns="" id="{834256DB-2ECB-B600-2909-4DADCB795645}"/>
               </a:ext>
             </a:extLst>
           </p:cNvPr>
@@ -12801,7 +12771,7 @@
         <p:cNvPr id="1" name="">
           <a:extLst>
             <a:ext uri="{FF2B5EF4-FFF2-40B4-BE49-F238E27FC236}">
-              <a16:creationId xmlns:a16="http://schemas.microsoft.com/office/drawing/2014/main" id="{9E2E81EF-0373-3A33-6C0E-EC125ABA4754}"/>
+              <a16:creationId xmlns:a16="http://schemas.microsoft.com/office/drawing/2014/main" xmlns="" id="{9E2E81EF-0373-3A33-6C0E-EC125ABA4754}"/>
             </a:ext>
           </a:extLst>
         </p:cNvPr>
@@ -12821,7 +12791,7 @@
           <p:cNvPr id="5" name="標題 1">
             <a:extLst>
               <a:ext uri="{FF2B5EF4-FFF2-40B4-BE49-F238E27FC236}">
-                <a16:creationId xmlns:a16="http://schemas.microsoft.com/office/drawing/2014/main" id="{A53491AC-D58D-DD71-6BC3-A952ED839EAE}"/>
+                <a16:creationId xmlns:a16="http://schemas.microsoft.com/office/drawing/2014/main" xmlns="" id="{A53491AC-D58D-DD71-6BC3-A952ED839EAE}"/>
               </a:ext>
             </a:extLst>
           </p:cNvPr>
@@ -12895,7 +12865,7 @@
           <p:cNvPr id="8" name="文字版面配置區 6">
             <a:extLst>
               <a:ext uri="{FF2B5EF4-FFF2-40B4-BE49-F238E27FC236}">
-                <a16:creationId xmlns:a16="http://schemas.microsoft.com/office/drawing/2014/main" id="{4B7FB8E3-5FB9-BA2C-1030-64042180558B}"/>
+                <a16:creationId xmlns:a16="http://schemas.microsoft.com/office/drawing/2014/main" xmlns="" id="{4B7FB8E3-5FB9-BA2C-1030-64042180558B}"/>
               </a:ext>
             </a:extLst>
           </p:cNvPr>
@@ -13497,7 +13467,7 @@
           <p:cNvPr id="37" name="文字方塊 36">
             <a:extLst>
               <a:ext uri="{FF2B5EF4-FFF2-40B4-BE49-F238E27FC236}">
-                <a16:creationId xmlns:a16="http://schemas.microsoft.com/office/drawing/2014/main" id="{DDC6F0BF-9EA8-E6B2-A137-CCF611DB7467}"/>
+                <a16:creationId xmlns:a16="http://schemas.microsoft.com/office/drawing/2014/main" xmlns="" id="{DDC6F0BF-9EA8-E6B2-A137-CCF611DB7467}"/>
               </a:ext>
             </a:extLst>
           </p:cNvPr>
@@ -13567,16 +13537,7 @@
                 <a:cs typeface="Times New Roman" panose="02020603050405020304" pitchFamily="18" charset="0"/>
                 <a:hlinkClick r:id="rId3"/>
               </a:rPr>
-              <a:t>https</a:t>
-            </a:r>
-            <a:r>
-              <a:rPr lang="zh-TW" altLang="zh-TW" sz="1200" dirty="0">
-                <a:latin typeface="Times New Roman" panose="02020603050405020304" pitchFamily="18" charset="0"/>
-                <a:ea typeface="標楷體" panose="03000509000000000000" pitchFamily="65" charset="-120"/>
-                <a:cs typeface="Times New Roman" panose="02020603050405020304" pitchFamily="18" charset="0"/>
-                <a:hlinkClick r:id="rId3"/>
-              </a:rPr>
-              <a:t>://learn.microsoft.com/en-us/windows/win32/wcs/display-calibration-mhc</a:t>
+              <a:t>https://learn.microsoft.com/en-us/windows/win32/wcs/display-calibration-mhc</a:t>
             </a:r>
             <a:r>
               <a:rPr lang="zh-TW" altLang="zh-TW" sz="1200" dirty="0">
@@ -13599,7 +13560,7 @@
           <p:cNvPr id="2" name="群組 1">
             <a:extLst>
               <a:ext uri="{FF2B5EF4-FFF2-40B4-BE49-F238E27FC236}">
-                <a16:creationId xmlns:a16="http://schemas.microsoft.com/office/drawing/2014/main" id="{CBE629BB-FCD4-6D57-6E16-842F0D9A490C}"/>
+                <a16:creationId xmlns:a16="http://schemas.microsoft.com/office/drawing/2014/main" xmlns="" id="{CBE629BB-FCD4-6D57-6E16-842F0D9A490C}"/>
               </a:ext>
             </a:extLst>
           </p:cNvPr>
@@ -13619,7 +13580,7 @@
             <p:cNvPr id="3" name="矩形 2">
               <a:extLst>
                 <a:ext uri="{FF2B5EF4-FFF2-40B4-BE49-F238E27FC236}">
-                  <a16:creationId xmlns:a16="http://schemas.microsoft.com/office/drawing/2014/main" id="{BE4674CE-908A-A27A-1191-F85802A1820F}"/>
+                  <a16:creationId xmlns:a16="http://schemas.microsoft.com/office/drawing/2014/main" xmlns="" id="{BE4674CE-908A-A27A-1191-F85802A1820F}"/>
                 </a:ext>
               </a:extLst>
             </p:cNvPr>
@@ -13707,7 +13668,7 @@
             <p:cNvPr id="4" name="矩形 3">
               <a:extLst>
                 <a:ext uri="{FF2B5EF4-FFF2-40B4-BE49-F238E27FC236}">
-                  <a16:creationId xmlns:a16="http://schemas.microsoft.com/office/drawing/2014/main" id="{7B79B8B2-24C1-7821-00C2-7247BC446D33}"/>
+                  <a16:creationId xmlns:a16="http://schemas.microsoft.com/office/drawing/2014/main" xmlns="" id="{7B79B8B2-24C1-7821-00C2-7247BC446D33}"/>
                 </a:ext>
               </a:extLst>
             </p:cNvPr>
@@ -13779,7 +13740,7 @@
             <p:cNvPr id="6" name="矩形 5">
               <a:extLst>
                 <a:ext uri="{FF2B5EF4-FFF2-40B4-BE49-F238E27FC236}">
-                  <a16:creationId xmlns:a16="http://schemas.microsoft.com/office/drawing/2014/main" id="{F6A5DF9E-07F0-35C8-2A0C-380AC25ADCF4}"/>
+                  <a16:creationId xmlns:a16="http://schemas.microsoft.com/office/drawing/2014/main" xmlns="" id="{F6A5DF9E-07F0-35C8-2A0C-380AC25ADCF4}"/>
                 </a:ext>
               </a:extLst>
             </p:cNvPr>
@@ -13851,7 +13812,7 @@
             <p:cNvPr id="7" name="矩形 6">
               <a:extLst>
                 <a:ext uri="{FF2B5EF4-FFF2-40B4-BE49-F238E27FC236}">
-                  <a16:creationId xmlns:a16="http://schemas.microsoft.com/office/drawing/2014/main" id="{C10CBAF7-08D8-D205-EB14-FFB6EB019E80}"/>
+                  <a16:creationId xmlns:a16="http://schemas.microsoft.com/office/drawing/2014/main" xmlns="" id="{C10CBAF7-08D8-D205-EB14-FFB6EB019E80}"/>
                 </a:ext>
               </a:extLst>
             </p:cNvPr>
@@ -13934,7 +13895,7 @@
             <p:cNvPr id="9" name="直線單箭頭接點 8">
               <a:extLst>
                 <a:ext uri="{FF2B5EF4-FFF2-40B4-BE49-F238E27FC236}">
-                  <a16:creationId xmlns:a16="http://schemas.microsoft.com/office/drawing/2014/main" id="{9C846300-679D-F3FB-700C-5C6E297463B8}"/>
+                  <a16:creationId xmlns:a16="http://schemas.microsoft.com/office/drawing/2014/main" xmlns="" id="{9C846300-679D-F3FB-700C-5C6E297463B8}"/>
                 </a:ext>
               </a:extLst>
             </p:cNvPr>
@@ -13982,7 +13943,7 @@
             <p:cNvPr id="10" name="直線單箭頭接點 9">
               <a:extLst>
                 <a:ext uri="{FF2B5EF4-FFF2-40B4-BE49-F238E27FC236}">
-                  <a16:creationId xmlns:a16="http://schemas.microsoft.com/office/drawing/2014/main" id="{8BA2B716-E7CB-879D-CB4E-107EA3BBFB26}"/>
+                  <a16:creationId xmlns:a16="http://schemas.microsoft.com/office/drawing/2014/main" xmlns="" id="{8BA2B716-E7CB-879D-CB4E-107EA3BBFB26}"/>
                 </a:ext>
               </a:extLst>
             </p:cNvPr>
@@ -14031,7 +13992,7 @@
             <p:cNvPr id="11" name="直線單箭頭接點 10">
               <a:extLst>
                 <a:ext uri="{FF2B5EF4-FFF2-40B4-BE49-F238E27FC236}">
-                  <a16:creationId xmlns:a16="http://schemas.microsoft.com/office/drawing/2014/main" id="{51E0C1C6-107D-2431-F5FE-37635E29DC01}"/>
+                  <a16:creationId xmlns:a16="http://schemas.microsoft.com/office/drawing/2014/main" xmlns="" id="{51E0C1C6-107D-2431-F5FE-37635E29DC01}"/>
                 </a:ext>
               </a:extLst>
             </p:cNvPr>
@@ -14097,7 +14058,7 @@
         <p:cNvPr id="1" name="">
           <a:extLst>
             <a:ext uri="{FF2B5EF4-FFF2-40B4-BE49-F238E27FC236}">
-              <a16:creationId xmlns:a16="http://schemas.microsoft.com/office/drawing/2014/main" id="{66960790-B8EB-5C9C-6F3D-DB91C8FE7261}"/>
+              <a16:creationId xmlns:a16="http://schemas.microsoft.com/office/drawing/2014/main" xmlns="" id="{66960790-B8EB-5C9C-6F3D-DB91C8FE7261}"/>
             </a:ext>
           </a:extLst>
         </p:cNvPr>
@@ -14117,7 +14078,7 @@
           <p:cNvPr id="5" name="標題 1">
             <a:extLst>
               <a:ext uri="{FF2B5EF4-FFF2-40B4-BE49-F238E27FC236}">
-                <a16:creationId xmlns:a16="http://schemas.microsoft.com/office/drawing/2014/main" id="{469D4A17-091F-B9B9-0E15-4C16A04E17C4}"/>
+                <a16:creationId xmlns:a16="http://schemas.microsoft.com/office/drawing/2014/main" xmlns="" id="{469D4A17-091F-B9B9-0E15-4C16A04E17C4}"/>
               </a:ext>
             </a:extLst>
           </p:cNvPr>
@@ -14154,7 +14115,7 @@
           <p:cNvPr id="8" name="文字版面配置區 6">
             <a:extLst>
               <a:ext uri="{FF2B5EF4-FFF2-40B4-BE49-F238E27FC236}">
-                <a16:creationId xmlns:a16="http://schemas.microsoft.com/office/drawing/2014/main" id="{B362863B-770E-5FA2-25CC-948566047750}"/>
+                <a16:creationId xmlns:a16="http://schemas.microsoft.com/office/drawing/2014/main" xmlns="" id="{B362863B-770E-5FA2-25CC-948566047750}"/>
               </a:ext>
             </a:extLst>
           </p:cNvPr>
@@ -14524,7 +14485,15 @@
                 <a:ea typeface="標楷體" panose="03000509000000000000" pitchFamily="65" charset="-120"/>
                 <a:cs typeface="Times New Roman" panose="02020603050405020304" pitchFamily="18" charset="0"/>
               </a:rPr>
-              <a:t>螢幕並產生 </a:t>
+              <a:t>螢幕並</a:t>
+            </a:r>
+            <a:r>
+              <a:rPr lang="zh-TW" altLang="en-US" sz="1600" dirty="0" smtClean="0">
+                <a:latin typeface="Times New Roman" panose="02020603050405020304" pitchFamily="18" charset="0"/>
+                <a:ea typeface="標楷體" panose="03000509000000000000" pitchFamily="65" charset="-120"/>
+                <a:cs typeface="Times New Roman" panose="02020603050405020304" pitchFamily="18" charset="0"/>
+              </a:rPr>
+              <a:t>產生 </a:t>
             </a:r>
             <a:r>
               <a:rPr lang="en-US" altLang="zh-TW" sz="1600" dirty="0">
@@ -14755,7 +14724,7 @@
           <p:cNvPr id="37" name="文字方塊 36">
             <a:extLst>
               <a:ext uri="{FF2B5EF4-FFF2-40B4-BE49-F238E27FC236}">
-                <a16:creationId xmlns:a16="http://schemas.microsoft.com/office/drawing/2014/main" id="{95268582-08DF-7D9E-8ED6-18BC73EECF65}"/>
+                <a16:creationId xmlns:a16="http://schemas.microsoft.com/office/drawing/2014/main" xmlns="" id="{95268582-08DF-7D9E-8ED6-18BC73EECF65}"/>
               </a:ext>
             </a:extLst>
           </p:cNvPr>
@@ -14840,7 +14809,7 @@
           <p:cNvPr id="4" name="群組 3">
             <a:extLst>
               <a:ext uri="{FF2B5EF4-FFF2-40B4-BE49-F238E27FC236}">
-                <a16:creationId xmlns:a16="http://schemas.microsoft.com/office/drawing/2014/main" id="{E3098E80-3E93-5F92-3D39-A2E369A16F44}"/>
+                <a16:creationId xmlns:a16="http://schemas.microsoft.com/office/drawing/2014/main" xmlns="" id="{E3098E80-3E93-5F92-3D39-A2E369A16F44}"/>
               </a:ext>
             </a:extLst>
           </p:cNvPr>
@@ -14860,7 +14829,7 @@
             <p:cNvPr id="2" name="圖片 1">
               <a:extLst>
                 <a:ext uri="{FF2B5EF4-FFF2-40B4-BE49-F238E27FC236}">
-                  <a16:creationId xmlns:a16="http://schemas.microsoft.com/office/drawing/2014/main" id="{3894B2E3-3478-B7B9-3C2D-EBC37E245116}"/>
+                  <a16:creationId xmlns:a16="http://schemas.microsoft.com/office/drawing/2014/main" xmlns="" id="{3894B2E3-3478-B7B9-3C2D-EBC37E245116}"/>
                 </a:ext>
               </a:extLst>
             </p:cNvPr>
@@ -14890,7 +14859,7 @@
             <p:cNvPr id="3" name="文字方塊 2">
               <a:extLst>
                 <a:ext uri="{FF2B5EF4-FFF2-40B4-BE49-F238E27FC236}">
-                  <a16:creationId xmlns:a16="http://schemas.microsoft.com/office/drawing/2014/main" id="{4D6ADC0D-B06D-8D18-E21A-00B9010014EB}"/>
+                  <a16:creationId xmlns:a16="http://schemas.microsoft.com/office/drawing/2014/main" xmlns="" id="{4D6ADC0D-B06D-8D18-E21A-00B9010014EB}"/>
                 </a:ext>
               </a:extLst>
             </p:cNvPr>
@@ -15068,7 +15037,7 @@
         <p:cNvPr id="1" name="">
           <a:extLst>
             <a:ext uri="{FF2B5EF4-FFF2-40B4-BE49-F238E27FC236}">
-              <a16:creationId xmlns:a16="http://schemas.microsoft.com/office/drawing/2014/main" id="{9F0396C1-EA64-DABF-AB1E-DAC8812CEAFA}"/>
+              <a16:creationId xmlns:a16="http://schemas.microsoft.com/office/drawing/2014/main" xmlns="" id="{9F0396C1-EA64-DABF-AB1E-DAC8812CEAFA}"/>
             </a:ext>
           </a:extLst>
         </p:cNvPr>
@@ -15088,7 +15057,7 @@
           <p:cNvPr id="7" name="文字版面配置區 6">
             <a:extLst>
               <a:ext uri="{FF2B5EF4-FFF2-40B4-BE49-F238E27FC236}">
-                <a16:creationId xmlns:a16="http://schemas.microsoft.com/office/drawing/2014/main" id="{CA232325-2F30-826A-0F33-B3038ABB7C4A}"/>
+                <a16:creationId xmlns:a16="http://schemas.microsoft.com/office/drawing/2014/main" xmlns="" id="{CA232325-2F30-826A-0F33-B3038ABB7C4A}"/>
               </a:ext>
             </a:extLst>
           </p:cNvPr>
@@ -15553,7 +15522,71 @@
                 <a:ea typeface="標楷體" panose="03000509000000000000" pitchFamily="65" charset="-120"/>
                 <a:cs typeface="Times New Roman" panose="02020603050405020304" pitchFamily="18" charset="0"/>
               </a:rPr>
-              <a:t>是建立開放、廠商中立、跨平台的色彩管理系統架構與元件標準，是提供跨平台的 Device Profile 格式，使不同裝置之間的色彩資料可以進行轉換</a:t>
+              <a:t>是建立開放、廠商中立、跨平台的色彩管理系統架構與元件標準</a:t>
+            </a:r>
+            <a:r>
+              <a:rPr lang="zh-TW" altLang="zh-TW" sz="1600" dirty="0" smtClean="0">
+                <a:latin typeface="Times New Roman" panose="02020603050405020304" pitchFamily="18" charset="0"/>
+                <a:ea typeface="標楷體" panose="03000509000000000000" pitchFamily="65" charset="-120"/>
+                <a:cs typeface="Times New Roman" panose="02020603050405020304" pitchFamily="18" charset="0"/>
+              </a:rPr>
+              <a:t>，</a:t>
+            </a:r>
+            <a:r>
+              <a:rPr lang="zh-TW" altLang="en-US" sz="1600" dirty="0">
+                <a:latin typeface="Times New Roman" panose="02020603050405020304" pitchFamily="18" charset="0"/>
+                <a:ea typeface="標楷體" panose="03000509000000000000" pitchFamily="65" charset="-120"/>
+                <a:cs typeface="Times New Roman" panose="02020603050405020304" pitchFamily="18" charset="0"/>
+              </a:rPr>
+              <a:t>能</a:t>
+            </a:r>
+            <a:r>
+              <a:rPr lang="zh-TW" altLang="zh-TW" sz="1600" dirty="0" smtClean="0">
+                <a:latin typeface="Times New Roman" panose="02020603050405020304" pitchFamily="18" charset="0"/>
+                <a:ea typeface="標楷體" panose="03000509000000000000" pitchFamily="65" charset="-120"/>
+                <a:cs typeface="Times New Roman" panose="02020603050405020304" pitchFamily="18" charset="0"/>
+              </a:rPr>
+              <a:t>提供</a:t>
+            </a:r>
+            <a:r>
+              <a:rPr lang="zh-TW" altLang="zh-TW" sz="1600" dirty="0">
+                <a:latin typeface="Times New Roman" panose="02020603050405020304" pitchFamily="18" charset="0"/>
+                <a:ea typeface="標楷體" panose="03000509000000000000" pitchFamily="65" charset="-120"/>
+                <a:cs typeface="Times New Roman" panose="02020603050405020304" pitchFamily="18" charset="0"/>
+              </a:rPr>
+              <a:t>跨平台的 Device Profile </a:t>
+            </a:r>
+            <a:r>
+              <a:rPr lang="zh-TW" altLang="zh-TW" sz="1600" dirty="0" smtClean="0">
+                <a:latin typeface="Times New Roman" panose="02020603050405020304" pitchFamily="18" charset="0"/>
+                <a:ea typeface="標楷體" panose="03000509000000000000" pitchFamily="65" charset="-120"/>
+                <a:cs typeface="Times New Roman" panose="02020603050405020304" pitchFamily="18" charset="0"/>
+              </a:rPr>
+              <a:t>格式</a:t>
+            </a:r>
+            <a:r>
+              <a:rPr lang="zh-TW" altLang="en-US" sz="1600" dirty="0" smtClean="0">
+                <a:latin typeface="Times New Roman" panose="02020603050405020304" pitchFamily="18" charset="0"/>
+                <a:ea typeface="標楷體" panose="03000509000000000000" pitchFamily="65" charset="-120"/>
+                <a:cs typeface="Times New Roman" panose="02020603050405020304" pitchFamily="18" charset="0"/>
+              </a:rPr>
+              <a:t>的色彩描述檔案</a:t>
+            </a:r>
+            <a:r>
+              <a:rPr lang="zh-TW" altLang="zh-TW" sz="1600" dirty="0" smtClean="0">
+                <a:latin typeface="Times New Roman" panose="02020603050405020304" pitchFamily="18" charset="0"/>
+                <a:ea typeface="標楷體" panose="03000509000000000000" pitchFamily="65" charset="-120"/>
+                <a:cs typeface="Times New Roman" panose="02020603050405020304" pitchFamily="18" charset="0"/>
+              </a:rPr>
+              <a:t>，</a:t>
+            </a:r>
+            <a:r>
+              <a:rPr lang="zh-TW" altLang="zh-TW" sz="1600" dirty="0">
+                <a:latin typeface="Times New Roman" panose="02020603050405020304" pitchFamily="18" charset="0"/>
+                <a:ea typeface="標楷體" panose="03000509000000000000" pitchFamily="65" charset="-120"/>
+                <a:cs typeface="Times New Roman" panose="02020603050405020304" pitchFamily="18" charset="0"/>
+              </a:rPr>
+              <a:t>使不同裝置之間的色彩資料可以進行轉換</a:t>
             </a:r>
             <a:r>
               <a:rPr lang="en-US" altLang="zh-TW" sz="1600" baseline="-25000" dirty="0">
@@ -15588,7 +15621,7 @@
           <p:cNvPr id="5" name="文字方塊 4">
             <a:extLst>
               <a:ext uri="{FF2B5EF4-FFF2-40B4-BE49-F238E27FC236}">
-                <a16:creationId xmlns:a16="http://schemas.microsoft.com/office/drawing/2014/main" id="{DB74C124-A957-366F-6E34-2775A49BE3DE}"/>
+                <a16:creationId xmlns:a16="http://schemas.microsoft.com/office/drawing/2014/main" xmlns="" id="{DB74C124-A957-366F-6E34-2775A49BE3DE}"/>
               </a:ext>
             </a:extLst>
           </p:cNvPr>
@@ -15665,7 +15698,7 @@
           <p:cNvPr id="8" name="標題 7">
             <a:extLst>
               <a:ext uri="{FF2B5EF4-FFF2-40B4-BE49-F238E27FC236}">
-                <a16:creationId xmlns:a16="http://schemas.microsoft.com/office/drawing/2014/main" id="{2ECA5CFA-64BC-E5E3-8FED-52AADBD2AC01}"/>
+                <a16:creationId xmlns:a16="http://schemas.microsoft.com/office/drawing/2014/main" xmlns="" id="{2ECA5CFA-64BC-E5E3-8FED-52AADBD2AC01}"/>
               </a:ext>
             </a:extLst>
           </p:cNvPr>
@@ -15758,7 +15791,7 @@
         <p:cNvPr id="1" name="">
           <a:extLst>
             <a:ext uri="{FF2B5EF4-FFF2-40B4-BE49-F238E27FC236}">
-              <a16:creationId xmlns:a16="http://schemas.microsoft.com/office/drawing/2014/main" id="{DD8453AC-EB70-4A67-F417-8BC6D8250DCE}"/>
+              <a16:creationId xmlns:a16="http://schemas.microsoft.com/office/drawing/2014/main" xmlns="" id="{DD8453AC-EB70-4A67-F417-8BC6D8250DCE}"/>
             </a:ext>
           </a:extLst>
         </p:cNvPr>
@@ -15778,7 +15811,7 @@
           <p:cNvPr id="2" name="標題 1">
             <a:extLst>
               <a:ext uri="{FF2B5EF4-FFF2-40B4-BE49-F238E27FC236}">
-                <a16:creationId xmlns:a16="http://schemas.microsoft.com/office/drawing/2014/main" id="{79BD5A1B-DBE5-5CC6-2DE0-BBB353DB67DB}"/>
+                <a16:creationId xmlns:a16="http://schemas.microsoft.com/office/drawing/2014/main" xmlns="" id="{79BD5A1B-DBE5-5CC6-2DE0-BBB353DB67DB}"/>
               </a:ext>
             </a:extLst>
           </p:cNvPr>
@@ -15855,7 +15888,7 @@
           <p:cNvPr id="4" name="圖片 3">
             <a:extLst>
               <a:ext uri="{FF2B5EF4-FFF2-40B4-BE49-F238E27FC236}">
-                <a16:creationId xmlns:a16="http://schemas.microsoft.com/office/drawing/2014/main" id="{E6234153-2243-3AE6-50F0-5BF73B34C545}"/>
+                <a16:creationId xmlns:a16="http://schemas.microsoft.com/office/drawing/2014/main" xmlns="" id="{E6234153-2243-3AE6-50F0-5BF73B34C545}"/>
               </a:ext>
             </a:extLst>
           </p:cNvPr>
@@ -15978,7 +16011,7 @@
         <p:cNvPr id="1" name="">
           <a:extLst>
             <a:ext uri="{FF2B5EF4-FFF2-40B4-BE49-F238E27FC236}">
-              <a16:creationId xmlns:a16="http://schemas.microsoft.com/office/drawing/2014/main" id="{DD8453AC-EB70-4A67-F417-8BC6D8250DCE}"/>
+              <a16:creationId xmlns:a16="http://schemas.microsoft.com/office/drawing/2014/main" xmlns="" id="{DD8453AC-EB70-4A67-F417-8BC6D8250DCE}"/>
             </a:ext>
           </a:extLst>
         </p:cNvPr>
@@ -15998,7 +16031,7 @@
           <p:cNvPr id="5" name="圖片 4">
             <a:extLst>
               <a:ext uri="{FF2B5EF4-FFF2-40B4-BE49-F238E27FC236}">
-                <a16:creationId xmlns:a16="http://schemas.microsoft.com/office/drawing/2014/main" id="{022D6573-B360-5362-29E4-19065BAD6A7B}"/>
+                <a16:creationId xmlns:a16="http://schemas.microsoft.com/office/drawing/2014/main" xmlns="" id="{022D6573-B360-5362-29E4-19065BAD6A7B}"/>
               </a:ext>
             </a:extLst>
           </p:cNvPr>
@@ -16105,7 +16138,7 @@
           <p:cNvPr id="8" name="標題 1">
             <a:extLst>
               <a:ext uri="{FF2B5EF4-FFF2-40B4-BE49-F238E27FC236}">
-                <a16:creationId xmlns:a16="http://schemas.microsoft.com/office/drawing/2014/main" id="{A46802AE-6441-4C36-D719-6F0C7C8257B9}"/>
+                <a16:creationId xmlns:a16="http://schemas.microsoft.com/office/drawing/2014/main" xmlns="" id="{A46802AE-6441-4C36-D719-6F0C7C8257B9}"/>
               </a:ext>
             </a:extLst>
           </p:cNvPr>
@@ -16203,7 +16236,7 @@
         <p:cNvPr id="1" name="">
           <a:extLst>
             <a:ext uri="{FF2B5EF4-FFF2-40B4-BE49-F238E27FC236}">
-              <a16:creationId xmlns:a16="http://schemas.microsoft.com/office/drawing/2014/main" id="{DD8453AC-EB70-4A67-F417-8BC6D8250DCE}"/>
+              <a16:creationId xmlns:a16="http://schemas.microsoft.com/office/drawing/2014/main" xmlns="" id="{DD8453AC-EB70-4A67-F417-8BC6D8250DCE}"/>
             </a:ext>
           </a:extLst>
         </p:cNvPr>
@@ -16223,7 +16256,7 @@
           <p:cNvPr id="8" name="標題 1">
             <a:extLst>
               <a:ext uri="{FF2B5EF4-FFF2-40B4-BE49-F238E27FC236}">
-                <a16:creationId xmlns:a16="http://schemas.microsoft.com/office/drawing/2014/main" id="{A46802AE-6441-4C36-D719-6F0C7C8257B9}"/>
+                <a16:creationId xmlns:a16="http://schemas.microsoft.com/office/drawing/2014/main" xmlns="" id="{A46802AE-6441-4C36-D719-6F0C7C8257B9}"/>
               </a:ext>
             </a:extLst>
           </p:cNvPr>
@@ -16305,7 +16338,7 @@
           <p:cNvPr id="3" name="矩形 2">
             <a:extLst>
               <a:ext uri="{FF2B5EF4-FFF2-40B4-BE49-F238E27FC236}">
-                <a16:creationId xmlns:a16="http://schemas.microsoft.com/office/drawing/2014/main" id="{8996691D-0E63-96A8-06C3-40BD92D16B49}"/>
+                <a16:creationId xmlns:a16="http://schemas.microsoft.com/office/drawing/2014/main" xmlns="" id="{8996691D-0E63-96A8-06C3-40BD92D16B49}"/>
               </a:ext>
             </a:extLst>
           </p:cNvPr>
@@ -16379,7 +16412,7 @@
           <p:cNvPr id="6" name="矩形 5">
             <a:extLst>
               <a:ext uri="{FF2B5EF4-FFF2-40B4-BE49-F238E27FC236}">
-                <a16:creationId xmlns:a16="http://schemas.microsoft.com/office/drawing/2014/main" id="{4799A24E-5028-5D4A-D223-7433C160BC28}"/>
+                <a16:creationId xmlns:a16="http://schemas.microsoft.com/office/drawing/2014/main" xmlns="" id="{4799A24E-5028-5D4A-D223-7433C160BC28}"/>
               </a:ext>
             </a:extLst>
           </p:cNvPr>
@@ -16473,7 +16506,7 @@
           <p:cNvPr id="9" name="矩形 8">
             <a:extLst>
               <a:ext uri="{FF2B5EF4-FFF2-40B4-BE49-F238E27FC236}">
-                <a16:creationId xmlns:a16="http://schemas.microsoft.com/office/drawing/2014/main" id="{0C7FD048-9844-D5F5-79C1-78326AF84161}"/>
+                <a16:creationId xmlns:a16="http://schemas.microsoft.com/office/drawing/2014/main" xmlns="" id="{0C7FD048-9844-D5F5-79C1-78326AF84161}"/>
               </a:ext>
             </a:extLst>
           </p:cNvPr>
@@ -16537,7 +16570,7 @@
           <p:cNvPr id="11" name="矩形 10">
             <a:extLst>
               <a:ext uri="{FF2B5EF4-FFF2-40B4-BE49-F238E27FC236}">
-                <a16:creationId xmlns:a16="http://schemas.microsoft.com/office/drawing/2014/main" id="{CBAE6D19-C5AE-76A5-69B0-0B748849B999}"/>
+                <a16:creationId xmlns:a16="http://schemas.microsoft.com/office/drawing/2014/main" xmlns="" id="{CBAE6D19-C5AE-76A5-69B0-0B748849B999}"/>
               </a:ext>
             </a:extLst>
           </p:cNvPr>
@@ -16631,7 +16664,7 @@
           <p:cNvPr id="13" name="矩形 12">
             <a:extLst>
               <a:ext uri="{FF2B5EF4-FFF2-40B4-BE49-F238E27FC236}">
-                <a16:creationId xmlns:a16="http://schemas.microsoft.com/office/drawing/2014/main" id="{2502BAEE-F1D2-BEA9-82BD-3CC9D2FBDA07}"/>
+                <a16:creationId xmlns:a16="http://schemas.microsoft.com/office/drawing/2014/main" xmlns="" id="{2502BAEE-F1D2-BEA9-82BD-3CC9D2FBDA07}"/>
               </a:ext>
             </a:extLst>
           </p:cNvPr>
@@ -16769,7 +16802,7 @@
           <p:cNvPr id="15" name="直線單箭頭接點 14">
             <a:extLst>
               <a:ext uri="{FF2B5EF4-FFF2-40B4-BE49-F238E27FC236}">
-                <a16:creationId xmlns:a16="http://schemas.microsoft.com/office/drawing/2014/main" id="{2BD354F0-AC29-3F7F-21BC-649A5C656B58}"/>
+                <a16:creationId xmlns:a16="http://schemas.microsoft.com/office/drawing/2014/main" xmlns="" id="{2BD354F0-AC29-3F7F-21BC-649A5C656B58}"/>
               </a:ext>
             </a:extLst>
           </p:cNvPr>
@@ -16818,7 +16851,7 @@
           <p:cNvPr id="17" name="直線單箭頭接點 16">
             <a:extLst>
               <a:ext uri="{FF2B5EF4-FFF2-40B4-BE49-F238E27FC236}">
-                <a16:creationId xmlns:a16="http://schemas.microsoft.com/office/drawing/2014/main" id="{91C66148-B7CE-F63D-A1CA-8F52D14070C9}"/>
+                <a16:creationId xmlns:a16="http://schemas.microsoft.com/office/drawing/2014/main" xmlns="" id="{91C66148-B7CE-F63D-A1CA-8F52D14070C9}"/>
               </a:ext>
             </a:extLst>
           </p:cNvPr>
@@ -16867,7 +16900,7 @@
           <p:cNvPr id="25" name="接點: 肘形 24">
             <a:extLst>
               <a:ext uri="{FF2B5EF4-FFF2-40B4-BE49-F238E27FC236}">
-                <a16:creationId xmlns:a16="http://schemas.microsoft.com/office/drawing/2014/main" id="{A078D20F-E1A1-89E1-B06C-8361B263C03A}"/>
+                <a16:creationId xmlns:a16="http://schemas.microsoft.com/office/drawing/2014/main" xmlns="" id="{A078D20F-E1A1-89E1-B06C-8361B263C03A}"/>
               </a:ext>
             </a:extLst>
           </p:cNvPr>
@@ -16912,7 +16945,7 @@
           <p:cNvPr id="27" name="接點: 肘形 26">
             <a:extLst>
               <a:ext uri="{FF2B5EF4-FFF2-40B4-BE49-F238E27FC236}">
-                <a16:creationId xmlns:a16="http://schemas.microsoft.com/office/drawing/2014/main" id="{84FB698F-C81D-C384-B862-92390427F862}"/>
+                <a16:creationId xmlns:a16="http://schemas.microsoft.com/office/drawing/2014/main" xmlns="" id="{84FB698F-C81D-C384-B862-92390427F862}"/>
               </a:ext>
             </a:extLst>
           </p:cNvPr>
@@ -16957,7 +16990,7 @@
           <p:cNvPr id="2" name="矩形 1">
             <a:extLst>
               <a:ext uri="{FF2B5EF4-FFF2-40B4-BE49-F238E27FC236}">
-                <a16:creationId xmlns:a16="http://schemas.microsoft.com/office/drawing/2014/main" id="{040CC765-0ACB-3526-012D-9BE339051FC6}"/>
+                <a16:creationId xmlns:a16="http://schemas.microsoft.com/office/drawing/2014/main" xmlns="" id="{040CC765-0ACB-3526-012D-9BE339051FC6}"/>
               </a:ext>
             </a:extLst>
           </p:cNvPr>
@@ -17058,7 +17091,7 @@
           <p:cNvPr id="4" name="矩形 3">
             <a:extLst>
               <a:ext uri="{FF2B5EF4-FFF2-40B4-BE49-F238E27FC236}">
-                <a16:creationId xmlns:a16="http://schemas.microsoft.com/office/drawing/2014/main" id="{5F9AF93F-DB5D-01F9-5B21-8E5AB3B7689B}"/>
+                <a16:creationId xmlns:a16="http://schemas.microsoft.com/office/drawing/2014/main" xmlns="" id="{5F9AF93F-DB5D-01F9-5B21-8E5AB3B7689B}"/>
               </a:ext>
             </a:extLst>
           </p:cNvPr>
@@ -17159,7 +17192,7 @@
           <p:cNvPr id="7" name="直線單箭頭接點 6">
             <a:extLst>
               <a:ext uri="{FF2B5EF4-FFF2-40B4-BE49-F238E27FC236}">
-                <a16:creationId xmlns:a16="http://schemas.microsoft.com/office/drawing/2014/main" id="{B5327E90-1DBD-C854-9C91-B358AEF2228B}"/>
+                <a16:creationId xmlns:a16="http://schemas.microsoft.com/office/drawing/2014/main" xmlns="" id="{B5327E90-1DBD-C854-9C91-B358AEF2228B}"/>
               </a:ext>
             </a:extLst>
           </p:cNvPr>
@@ -17208,7 +17241,7 @@
           <p:cNvPr id="12" name="直線單箭頭接點 11">
             <a:extLst>
               <a:ext uri="{FF2B5EF4-FFF2-40B4-BE49-F238E27FC236}">
-                <a16:creationId xmlns:a16="http://schemas.microsoft.com/office/drawing/2014/main" id="{5E215614-39B3-08CA-860A-53F71A1C84ED}"/>
+                <a16:creationId xmlns:a16="http://schemas.microsoft.com/office/drawing/2014/main" xmlns="" id="{5E215614-39B3-08CA-860A-53F71A1C84ED}"/>
               </a:ext>
             </a:extLst>
           </p:cNvPr>
@@ -17273,7 +17306,7 @@
         <p:cNvPr id="1" name="">
           <a:extLst>
             <a:ext uri="{FF2B5EF4-FFF2-40B4-BE49-F238E27FC236}">
-              <a16:creationId xmlns:a16="http://schemas.microsoft.com/office/drawing/2014/main" id="{C25E9AAA-7E36-1E17-83F9-FD3A18A28BE9}"/>
+              <a16:creationId xmlns:a16="http://schemas.microsoft.com/office/drawing/2014/main" xmlns="" id="{C25E9AAA-7E36-1E17-83F9-FD3A18A28BE9}"/>
             </a:ext>
           </a:extLst>
         </p:cNvPr>
@@ -17293,7 +17326,7 @@
           <p:cNvPr id="8" name="標題 1">
             <a:extLst>
               <a:ext uri="{FF2B5EF4-FFF2-40B4-BE49-F238E27FC236}">
-                <a16:creationId xmlns:a16="http://schemas.microsoft.com/office/drawing/2014/main" id="{912256C4-A35A-439C-D194-BE22EDF76531}"/>
+                <a16:creationId xmlns:a16="http://schemas.microsoft.com/office/drawing/2014/main" xmlns="" id="{912256C4-A35A-439C-D194-BE22EDF76531}"/>
               </a:ext>
             </a:extLst>
           </p:cNvPr>
@@ -17362,7 +17395,7 @@
           <p:cNvPr id="3" name="圖片 2">
             <a:extLst>
               <a:ext uri="{FF2B5EF4-FFF2-40B4-BE49-F238E27FC236}">
-                <a16:creationId xmlns:a16="http://schemas.microsoft.com/office/drawing/2014/main" id="{2639EB24-C1BB-C0D1-86B0-82E9D709404B}"/>
+                <a16:creationId xmlns:a16="http://schemas.microsoft.com/office/drawing/2014/main" xmlns="" id="{2639EB24-C1BB-C0D1-86B0-82E9D709404B}"/>
               </a:ext>
             </a:extLst>
           </p:cNvPr>
@@ -17392,7 +17425,7 @@
           <p:cNvPr id="5" name="表格 4">
             <a:extLst>
               <a:ext uri="{FF2B5EF4-FFF2-40B4-BE49-F238E27FC236}">
-                <a16:creationId xmlns:a16="http://schemas.microsoft.com/office/drawing/2014/main" id="{309845EE-BEFD-0830-6F6A-014C6C37200E}"/>
+                <a16:creationId xmlns:a16="http://schemas.microsoft.com/office/drawing/2014/main" xmlns="" id="{309845EE-BEFD-0830-6F6A-014C6C37200E}"/>
               </a:ext>
             </a:extLst>
           </p:cNvPr>
@@ -17421,7 +17454,7 @@
                 <a:gridCol w="2338794">
                   <a:extLst>
                     <a:ext uri="{9D8B030D-6E8A-4147-A177-3AD203B41FA5}">
-                      <a16:colId xmlns:a16="http://schemas.microsoft.com/office/drawing/2014/main" val="3358617967"/>
+                      <a16:colId xmlns:a16="http://schemas.microsoft.com/office/drawing/2014/main" xmlns="" val="3358617967"/>
                     </a:ext>
                   </a:extLst>
                 </a:gridCol>
@@ -17468,7 +17501,7 @@
                 </a:tc>
                 <a:extLst>
                   <a:ext uri="{0D108BD9-81ED-4DB2-BD59-A6C34878D82A}">
-                    <a16:rowId xmlns:a16="http://schemas.microsoft.com/office/drawing/2014/main" val="1724688990"/>
+                    <a16:rowId xmlns:a16="http://schemas.microsoft.com/office/drawing/2014/main" xmlns="" val="1724688990"/>
                   </a:ext>
                 </a:extLst>
               </a:tr>
@@ -17575,7 +17608,7 @@
                 </a:tc>
                 <a:extLst>
                   <a:ext uri="{0D108BD9-81ED-4DB2-BD59-A6C34878D82A}">
-                    <a16:rowId xmlns:a16="http://schemas.microsoft.com/office/drawing/2014/main" val="3735960893"/>
+                    <a16:rowId xmlns:a16="http://schemas.microsoft.com/office/drawing/2014/main" xmlns="" val="3735960893"/>
                   </a:ext>
                 </a:extLst>
               </a:tr>
@@ -17616,7 +17649,7 @@
                 </a:tc>
                 <a:extLst>
                   <a:ext uri="{0D108BD9-81ED-4DB2-BD59-A6C34878D82A}">
-                    <a16:rowId xmlns:a16="http://schemas.microsoft.com/office/drawing/2014/main" val="29441199"/>
+                    <a16:rowId xmlns:a16="http://schemas.microsoft.com/office/drawing/2014/main" xmlns="" val="29441199"/>
                   </a:ext>
                 </a:extLst>
               </a:tr>
@@ -17629,7 +17662,7 @@
           <p:cNvPr id="7" name="文字方塊 6">
             <a:extLst>
               <a:ext uri="{FF2B5EF4-FFF2-40B4-BE49-F238E27FC236}">
-                <a16:creationId xmlns:a16="http://schemas.microsoft.com/office/drawing/2014/main" id="{7B3BC9D9-DB6E-B366-7FB4-7B64CF0727F4}"/>
+                <a16:creationId xmlns:a16="http://schemas.microsoft.com/office/drawing/2014/main" xmlns="" id="{7B3BC9D9-DB6E-B366-7FB4-7B64CF0727F4}"/>
               </a:ext>
             </a:extLst>
           </p:cNvPr>
@@ -17714,7 +17747,7 @@
           <p:cNvPr id="2" name="矩形 1">
             <a:extLst>
               <a:ext uri="{FF2B5EF4-FFF2-40B4-BE49-F238E27FC236}">
-                <a16:creationId xmlns:a16="http://schemas.microsoft.com/office/drawing/2014/main" id="{A829EB0E-AACB-4717-2AF1-1A80075824B3}"/>
+                <a16:creationId xmlns:a16="http://schemas.microsoft.com/office/drawing/2014/main" xmlns="" id="{A829EB0E-AACB-4717-2AF1-1A80075824B3}"/>
               </a:ext>
             </a:extLst>
           </p:cNvPr>
@@ -17766,7 +17799,7 @@
           <p:cNvPr id="6" name="矩形 5">
             <a:extLst>
               <a:ext uri="{FF2B5EF4-FFF2-40B4-BE49-F238E27FC236}">
-                <a16:creationId xmlns:a16="http://schemas.microsoft.com/office/drawing/2014/main" id="{DBA4A946-AB83-D442-73C2-419DF0200B4A}"/>
+                <a16:creationId xmlns:a16="http://schemas.microsoft.com/office/drawing/2014/main" xmlns="" id="{DBA4A946-AB83-D442-73C2-419DF0200B4A}"/>
               </a:ext>
             </a:extLst>
           </p:cNvPr>
@@ -17818,7 +17851,7 @@
           <p:cNvPr id="9" name="矩形 8">
             <a:extLst>
               <a:ext uri="{FF2B5EF4-FFF2-40B4-BE49-F238E27FC236}">
-                <a16:creationId xmlns:a16="http://schemas.microsoft.com/office/drawing/2014/main" id="{D557AD61-57FE-CB79-79F2-D22419EF9C7B}"/>
+                <a16:creationId xmlns:a16="http://schemas.microsoft.com/office/drawing/2014/main" xmlns="" id="{D557AD61-57FE-CB79-79F2-D22419EF9C7B}"/>
               </a:ext>
             </a:extLst>
           </p:cNvPr>
@@ -17870,7 +17903,7 @@
           <p:cNvPr id="10" name="矩形 9">
             <a:extLst>
               <a:ext uri="{FF2B5EF4-FFF2-40B4-BE49-F238E27FC236}">
-                <a16:creationId xmlns:a16="http://schemas.microsoft.com/office/drawing/2014/main" id="{98949FE3-DF1E-452A-732C-5B0AB66B81F0}"/>
+                <a16:creationId xmlns:a16="http://schemas.microsoft.com/office/drawing/2014/main" xmlns="" id="{98949FE3-DF1E-452A-732C-5B0AB66B81F0}"/>
               </a:ext>
             </a:extLst>
           </p:cNvPr>
@@ -17938,7 +17971,7 @@
         <p:cNvPr id="1" name="">
           <a:extLst>
             <a:ext uri="{FF2B5EF4-FFF2-40B4-BE49-F238E27FC236}">
-              <a16:creationId xmlns:a16="http://schemas.microsoft.com/office/drawing/2014/main" id="{C07BEAB9-4E35-7AB7-EE54-74E82B9599A8}"/>
+              <a16:creationId xmlns:a16="http://schemas.microsoft.com/office/drawing/2014/main" xmlns="" id="{C07BEAB9-4E35-7AB7-EE54-74E82B9599A8}"/>
             </a:ext>
           </a:extLst>
         </p:cNvPr>
@@ -17958,7 +17991,7 @@
           <p:cNvPr id="10" name="文字版面配置區 6">
             <a:extLst>
               <a:ext uri="{FF2B5EF4-FFF2-40B4-BE49-F238E27FC236}">
-                <a16:creationId xmlns:a16="http://schemas.microsoft.com/office/drawing/2014/main" id="{8CC25041-484B-028D-E365-35F32AD88DA6}"/>
+                <a16:creationId xmlns:a16="http://schemas.microsoft.com/office/drawing/2014/main" xmlns="" id="{8CC25041-484B-028D-E365-35F32AD88DA6}"/>
               </a:ext>
             </a:extLst>
           </p:cNvPr>
@@ -18475,7 +18508,7 @@
           <p:cNvPr id="34" name="群組 33">
             <a:extLst>
               <a:ext uri="{FF2B5EF4-FFF2-40B4-BE49-F238E27FC236}">
-                <a16:creationId xmlns:a16="http://schemas.microsoft.com/office/drawing/2014/main" id="{C0E10B67-4895-DEEA-0A4E-8D187E08F60B}"/>
+                <a16:creationId xmlns:a16="http://schemas.microsoft.com/office/drawing/2014/main" xmlns="" id="{C0E10B67-4895-DEEA-0A4E-8D187E08F60B}"/>
               </a:ext>
             </a:extLst>
           </p:cNvPr>
@@ -18495,7 +18528,7 @@
             <p:cNvPr id="4" name="矩形 3">
               <a:extLst>
                 <a:ext uri="{FF2B5EF4-FFF2-40B4-BE49-F238E27FC236}">
-                  <a16:creationId xmlns:a16="http://schemas.microsoft.com/office/drawing/2014/main" id="{3EAD8FDE-BAC0-876F-4587-8CBAB5D895F9}"/>
+                  <a16:creationId xmlns:a16="http://schemas.microsoft.com/office/drawing/2014/main" xmlns="" id="{3EAD8FDE-BAC0-876F-4587-8CBAB5D895F9}"/>
                 </a:ext>
               </a:extLst>
             </p:cNvPr>
@@ -18589,7 +18622,7 @@
             <p:cNvPr id="6" name="矩形 5">
               <a:extLst>
                 <a:ext uri="{FF2B5EF4-FFF2-40B4-BE49-F238E27FC236}">
-                  <a16:creationId xmlns:a16="http://schemas.microsoft.com/office/drawing/2014/main" id="{F211FECE-805D-4DE7-5329-317233CD1CB4}"/>
+                  <a16:creationId xmlns:a16="http://schemas.microsoft.com/office/drawing/2014/main" xmlns="" id="{F211FECE-805D-4DE7-5329-317233CD1CB4}"/>
                 </a:ext>
               </a:extLst>
             </p:cNvPr>
@@ -18719,7 +18752,7 @@
             <p:cNvPr id="7" name="矩形 6">
               <a:extLst>
                 <a:ext uri="{FF2B5EF4-FFF2-40B4-BE49-F238E27FC236}">
-                  <a16:creationId xmlns:a16="http://schemas.microsoft.com/office/drawing/2014/main" id="{0DFB61CE-E671-9B90-DDBA-64DE2605725B}"/>
+                  <a16:creationId xmlns:a16="http://schemas.microsoft.com/office/drawing/2014/main" xmlns="" id="{0DFB61CE-E671-9B90-DDBA-64DE2605725B}"/>
                 </a:ext>
               </a:extLst>
             </p:cNvPr>
@@ -18824,7 +18857,7 @@
             <p:cNvPr id="13" name="直線單箭頭接點 12">
               <a:extLst>
                 <a:ext uri="{FF2B5EF4-FFF2-40B4-BE49-F238E27FC236}">
-                  <a16:creationId xmlns:a16="http://schemas.microsoft.com/office/drawing/2014/main" id="{8755CBCD-89A6-A4CF-B535-C3D84BCDE39D}"/>
+                  <a16:creationId xmlns:a16="http://schemas.microsoft.com/office/drawing/2014/main" xmlns="" id="{8755CBCD-89A6-A4CF-B535-C3D84BCDE39D}"/>
                 </a:ext>
               </a:extLst>
             </p:cNvPr>
@@ -18872,7 +18905,7 @@
             <p:cNvPr id="14" name="直線單箭頭接點 13">
               <a:extLst>
                 <a:ext uri="{FF2B5EF4-FFF2-40B4-BE49-F238E27FC236}">
-                  <a16:creationId xmlns:a16="http://schemas.microsoft.com/office/drawing/2014/main" id="{43C321DC-EFCF-71ED-6AA0-C27F2B92914D}"/>
+                  <a16:creationId xmlns:a16="http://schemas.microsoft.com/office/drawing/2014/main" xmlns="" id="{43C321DC-EFCF-71ED-6AA0-C27F2B92914D}"/>
                 </a:ext>
               </a:extLst>
             </p:cNvPr>
@@ -18921,7 +18954,7 @@
             <p:cNvPr id="22" name="矩形 21">
               <a:extLst>
                 <a:ext uri="{FF2B5EF4-FFF2-40B4-BE49-F238E27FC236}">
-                  <a16:creationId xmlns:a16="http://schemas.microsoft.com/office/drawing/2014/main" id="{9A9DF41D-9E06-E236-CA43-60889F6EE310}"/>
+                  <a16:creationId xmlns:a16="http://schemas.microsoft.com/office/drawing/2014/main" xmlns="" id="{9A9DF41D-9E06-E236-CA43-60889F6EE310}"/>
                 </a:ext>
               </a:extLst>
             </p:cNvPr>
@@ -18930,7 +18963,7 @@
           </p:nvSpPr>
           <p:spPr>
             <a:xfrm>
-              <a:off x="2847686" y="3847139"/>
+              <a:off x="2847685" y="3838713"/>
               <a:ext cx="1378549" cy="355407"/>
             </a:xfrm>
             <a:prstGeom prst="rect">
@@ -18978,7 +19011,7 @@
           <p:cNvPr id="33" name="標題 1">
             <a:extLst>
               <a:ext uri="{FF2B5EF4-FFF2-40B4-BE49-F238E27FC236}">
-                <a16:creationId xmlns:a16="http://schemas.microsoft.com/office/drawing/2014/main" id="{FE6A0969-18CA-A43C-E3E0-A72CA997A88D}"/>
+                <a16:creationId xmlns:a16="http://schemas.microsoft.com/office/drawing/2014/main" xmlns="" id="{FE6A0969-18CA-A43C-E3E0-A72CA997A88D}"/>
               </a:ext>
             </a:extLst>
           </p:cNvPr>
@@ -19039,7 +19072,7 @@
           <p:cNvPr id="3" name="圖片 2">
             <a:extLst>
               <a:ext uri="{FF2B5EF4-FFF2-40B4-BE49-F238E27FC236}">
-                <a16:creationId xmlns:a16="http://schemas.microsoft.com/office/drawing/2014/main" id="{D006D859-0957-02BC-0A72-AE413C4596E3}"/>
+                <a16:creationId xmlns:a16="http://schemas.microsoft.com/office/drawing/2014/main" xmlns="" id="{D006D859-0957-02BC-0A72-AE413C4596E3}"/>
               </a:ext>
             </a:extLst>
           </p:cNvPr>
@@ -19071,7 +19104,7 @@
               <p:cNvPr id="5" name="文字方塊 4">
                 <a:extLst>
                   <a:ext uri="{FF2B5EF4-FFF2-40B4-BE49-F238E27FC236}">
-                    <a16:creationId xmlns:a16="http://schemas.microsoft.com/office/drawing/2014/main" id="{FAEA6F4D-5E5A-9C8D-AC25-FD4659BC3AF6}"/>
+                    <a16:creationId xmlns:a16="http://schemas.microsoft.com/office/drawing/2014/main" xmlns="" id="{FAEA6F4D-5E5A-9C8D-AC25-FD4659BC3AF6}"/>
                   </a:ext>
                 </a:extLst>
               </p:cNvPr>
@@ -19235,6 +19268,13 @@
   <p:clrMapOvr>
     <a:masterClrMapping/>
   </p:clrMapOvr>
+  <p:timing>
+    <p:tnLst>
+      <p:par>
+        <p:cTn id="1" dur="indefinite" restart="never" nodeType="tmRoot"/>
+      </p:par>
+    </p:tnLst>
+  </p:timing>
 </p:sld>
 </file>
 
@@ -19246,7 +19286,7 @@
         <p:cNvPr id="1" name="">
           <a:extLst>
             <a:ext uri="{FF2B5EF4-FFF2-40B4-BE49-F238E27FC236}">
-              <a16:creationId xmlns:a16="http://schemas.microsoft.com/office/drawing/2014/main" id="{D91FE357-957A-3182-12E7-90F219E152EF}"/>
+              <a16:creationId xmlns:a16="http://schemas.microsoft.com/office/drawing/2014/main" xmlns="" id="{D91FE357-957A-3182-12E7-90F219E152EF}"/>
             </a:ext>
           </a:extLst>
         </p:cNvPr>
@@ -19266,7 +19306,7 @@
           <p:cNvPr id="5" name="標題 1">
             <a:extLst>
               <a:ext uri="{FF2B5EF4-FFF2-40B4-BE49-F238E27FC236}">
-                <a16:creationId xmlns:a16="http://schemas.microsoft.com/office/drawing/2014/main" id="{61298DEC-0097-A431-0637-9C6765567C9F}"/>
+                <a16:creationId xmlns:a16="http://schemas.microsoft.com/office/drawing/2014/main" xmlns="" id="{61298DEC-0097-A431-0637-9C6765567C9F}"/>
               </a:ext>
             </a:extLst>
           </p:cNvPr>
@@ -19327,7 +19367,7 @@
           <p:cNvPr id="2" name="表格 1">
             <a:extLst>
               <a:ext uri="{FF2B5EF4-FFF2-40B4-BE49-F238E27FC236}">
-                <a16:creationId xmlns:a16="http://schemas.microsoft.com/office/drawing/2014/main" id="{CE5B8F78-8A22-D5AF-CA79-EE55EA23B193}"/>
+                <a16:creationId xmlns:a16="http://schemas.microsoft.com/office/drawing/2014/main" xmlns="" id="{CE5B8F78-8A22-D5AF-CA79-EE55EA23B193}"/>
               </a:ext>
             </a:extLst>
           </p:cNvPr>
@@ -19356,21 +19396,21 @@
                 <a:gridCol w="1047396">
                   <a:extLst>
                     <a:ext uri="{9D8B030D-6E8A-4147-A177-3AD203B41FA5}">
-                      <a16:colId xmlns:a16="http://schemas.microsoft.com/office/drawing/2014/main" val="3590102437"/>
+                      <a16:colId xmlns:a16="http://schemas.microsoft.com/office/drawing/2014/main" xmlns="" val="3590102437"/>
                     </a:ext>
                   </a:extLst>
                 </a:gridCol>
                 <a:gridCol w="1047396">
                   <a:extLst>
                     <a:ext uri="{9D8B030D-6E8A-4147-A177-3AD203B41FA5}">
-                      <a16:colId xmlns:a16="http://schemas.microsoft.com/office/drawing/2014/main" val="3666544339"/>
+                      <a16:colId xmlns:a16="http://schemas.microsoft.com/office/drawing/2014/main" xmlns="" val="3666544339"/>
                     </a:ext>
                   </a:extLst>
                 </a:gridCol>
                 <a:gridCol w="1047396">
                   <a:extLst>
                     <a:ext uri="{9D8B030D-6E8A-4147-A177-3AD203B41FA5}">
-                      <a16:colId xmlns:a16="http://schemas.microsoft.com/office/drawing/2014/main" val="455476819"/>
+                      <a16:colId xmlns:a16="http://schemas.microsoft.com/office/drawing/2014/main" xmlns="" val="455476819"/>
                     </a:ext>
                   </a:extLst>
                 </a:gridCol>
@@ -19385,7 +19425,7 @@
                         <a:buNone/>
                       </a:pPr>
                       <a:r>
-                        <a:rPr lang="zh-TW"/>
+                        <a:rPr lang="zh-TW" dirty="0"/>
                         <a:t>原色</a:t>
                       </a:r>
                     </a:p>
@@ -19426,7 +19466,7 @@
                 </a:tc>
                 <a:extLst>
                   <a:ext uri="{0D108BD9-81ED-4DB2-BD59-A6C34878D82A}">
-                    <a16:rowId xmlns:a16="http://schemas.microsoft.com/office/drawing/2014/main" val="4117724251"/>
+                    <a16:rowId xmlns:a16="http://schemas.microsoft.com/office/drawing/2014/main" xmlns="" val="4117724251"/>
                   </a:ext>
                 </a:extLst>
               </a:tr>
@@ -19490,7 +19530,7 @@
                 </a:tc>
                 <a:extLst>
                   <a:ext uri="{0D108BD9-81ED-4DB2-BD59-A6C34878D82A}">
-                    <a16:rowId xmlns:a16="http://schemas.microsoft.com/office/drawing/2014/main" val="2141619666"/>
+                    <a16:rowId xmlns:a16="http://schemas.microsoft.com/office/drawing/2014/main" xmlns="" val="2141619666"/>
                   </a:ext>
                 </a:extLst>
               </a:tr>
@@ -19550,7 +19590,7 @@
                 </a:tc>
                 <a:extLst>
                   <a:ext uri="{0D108BD9-81ED-4DB2-BD59-A6C34878D82A}">
-                    <a16:rowId xmlns:a16="http://schemas.microsoft.com/office/drawing/2014/main" val="3809134920"/>
+                    <a16:rowId xmlns:a16="http://schemas.microsoft.com/office/drawing/2014/main" xmlns="" val="3809134920"/>
                   </a:ext>
                 </a:extLst>
               </a:tr>
@@ -19610,7 +19650,7 @@
                 </a:tc>
                 <a:extLst>
                   <a:ext uri="{0D108BD9-81ED-4DB2-BD59-A6C34878D82A}">
-                    <a16:rowId xmlns:a16="http://schemas.microsoft.com/office/drawing/2014/main" val="1932515259"/>
+                    <a16:rowId xmlns:a16="http://schemas.microsoft.com/office/drawing/2014/main" xmlns="" val="1932515259"/>
                   </a:ext>
                 </a:extLst>
               </a:tr>
@@ -19623,7 +19663,7 @@
           <p:cNvPr id="9" name="矩形 8">
             <a:extLst>
               <a:ext uri="{FF2B5EF4-FFF2-40B4-BE49-F238E27FC236}">
-                <a16:creationId xmlns:a16="http://schemas.microsoft.com/office/drawing/2014/main" id="{8BDB7050-E618-11BA-974C-7035CB7FA24D}"/>
+                <a16:creationId xmlns:a16="http://schemas.microsoft.com/office/drawing/2014/main" xmlns="" id="{8BDB7050-E618-11BA-974C-7035CB7FA24D}"/>
               </a:ext>
             </a:extLst>
           </p:cNvPr>
@@ -19667,7 +19707,7 @@
           <p:cNvPr id="15" name="群組 14">
             <a:extLst>
               <a:ext uri="{FF2B5EF4-FFF2-40B4-BE49-F238E27FC236}">
-                <a16:creationId xmlns:a16="http://schemas.microsoft.com/office/drawing/2014/main" id="{9BD8A25A-99B7-8869-62AF-2D36C98876FA}"/>
+                <a16:creationId xmlns:a16="http://schemas.microsoft.com/office/drawing/2014/main" xmlns="" id="{9BD8A25A-99B7-8869-62AF-2D36C98876FA}"/>
               </a:ext>
             </a:extLst>
           </p:cNvPr>
@@ -19687,7 +19727,7 @@
             <p:cNvPr id="8" name="群組 7">
               <a:extLst>
                 <a:ext uri="{FF2B5EF4-FFF2-40B4-BE49-F238E27FC236}">
-                  <a16:creationId xmlns:a16="http://schemas.microsoft.com/office/drawing/2014/main" id="{786F443D-0782-D5C7-CFA3-08A5D4B6BFEC}"/>
+                  <a16:creationId xmlns:a16="http://schemas.microsoft.com/office/drawing/2014/main" xmlns="" id="{786F443D-0782-D5C7-CFA3-08A5D4B6BFEC}"/>
                 </a:ext>
               </a:extLst>
             </p:cNvPr>
@@ -19707,7 +19747,7 @@
               <p:cNvPr id="7" name="矩形 6">
                 <a:extLst>
                   <a:ext uri="{FF2B5EF4-FFF2-40B4-BE49-F238E27FC236}">
-                    <a16:creationId xmlns:a16="http://schemas.microsoft.com/office/drawing/2014/main" id="{BB4D6CD5-7B46-9599-FFCA-74970E1E73B5}"/>
+                    <a16:creationId xmlns:a16="http://schemas.microsoft.com/office/drawing/2014/main" xmlns="" id="{BB4D6CD5-7B46-9599-FFCA-74970E1E73B5}"/>
                   </a:ext>
                 </a:extLst>
               </p:cNvPr>
@@ -19765,7 +19805,7 @@
               <p:cNvPr id="6" name="文字方塊 5">
                 <a:extLst>
                   <a:ext uri="{FF2B5EF4-FFF2-40B4-BE49-F238E27FC236}">
-                    <a16:creationId xmlns:a16="http://schemas.microsoft.com/office/drawing/2014/main" id="{0DA94BC5-0762-F6E2-2F57-D278DFAB1094}"/>
+                    <a16:creationId xmlns:a16="http://schemas.microsoft.com/office/drawing/2014/main" xmlns="" id="{0DA94BC5-0762-F6E2-2F57-D278DFAB1094}"/>
                   </a:ext>
                 </a:extLst>
               </p:cNvPr>
@@ -19921,7 +19961,7 @@
             <p:cNvPr id="12" name="矩形 11">
               <a:extLst>
                 <a:ext uri="{FF2B5EF4-FFF2-40B4-BE49-F238E27FC236}">
-                  <a16:creationId xmlns:a16="http://schemas.microsoft.com/office/drawing/2014/main" id="{2552E5AB-ED3F-D175-A499-49FB40687585}"/>
+                  <a16:creationId xmlns:a16="http://schemas.microsoft.com/office/drawing/2014/main" xmlns="" id="{2552E5AB-ED3F-D175-A499-49FB40687585}"/>
                 </a:ext>
               </a:extLst>
             </p:cNvPr>
@@ -20027,7 +20067,7 @@
           <p:cNvPr id="16" name="箭號: 向右 15">
             <a:extLst>
               <a:ext uri="{FF2B5EF4-FFF2-40B4-BE49-F238E27FC236}">
-                <a16:creationId xmlns:a16="http://schemas.microsoft.com/office/drawing/2014/main" id="{C61E94B3-B7AA-6859-F38D-5DC8E5BB42A3}"/>
+                <a16:creationId xmlns:a16="http://schemas.microsoft.com/office/drawing/2014/main" xmlns="" id="{C61E94B3-B7AA-6859-F38D-5DC8E5BB42A3}"/>
               </a:ext>
             </a:extLst>
           </p:cNvPr>
@@ -20110,7 +20150,7 @@
           <p:cNvPr id="26" name="群組 25">
             <a:extLst>
               <a:ext uri="{FF2B5EF4-FFF2-40B4-BE49-F238E27FC236}">
-                <a16:creationId xmlns:a16="http://schemas.microsoft.com/office/drawing/2014/main" id="{5C1D1929-1040-C36F-1520-FF917811D29B}"/>
+                <a16:creationId xmlns:a16="http://schemas.microsoft.com/office/drawing/2014/main" xmlns="" id="{5C1D1929-1040-C36F-1520-FF917811D29B}"/>
               </a:ext>
             </a:extLst>
           </p:cNvPr>
@@ -20130,7 +20170,7 @@
             <p:cNvPr id="24" name="矩形 23">
               <a:extLst>
                 <a:ext uri="{FF2B5EF4-FFF2-40B4-BE49-F238E27FC236}">
-                  <a16:creationId xmlns:a16="http://schemas.microsoft.com/office/drawing/2014/main" id="{C08775EE-8632-2A77-9314-B11558B9FB1E}"/>
+                  <a16:creationId xmlns:a16="http://schemas.microsoft.com/office/drawing/2014/main" xmlns="" id="{C08775EE-8632-2A77-9314-B11558B9FB1E}"/>
                 </a:ext>
               </a:extLst>
             </p:cNvPr>
@@ -20183,14 +20223,14 @@
             </a:p>
           </p:txBody>
         </p:sp>
-        <mc:AlternateContent xmlns:mc="http://schemas.openxmlformats.org/markup-compatibility/2006">
-          <mc:Choice xmlns:a14="http://schemas.microsoft.com/office/drawing/2010/main" Requires="a14">
+        <mc:AlternateContent xmlns:mc="http://schemas.openxmlformats.org/markup-compatibility/2006" xmlns:a14="http://schemas.microsoft.com/office/drawing/2010/main">
+          <mc:Choice Requires="a14">
             <p:sp>
               <p:nvSpPr>
                 <p:cNvPr id="21" name="文字方塊 20">
                   <a:extLst>
                     <a:ext uri="{FF2B5EF4-FFF2-40B4-BE49-F238E27FC236}">
-                      <a16:creationId xmlns:a16="http://schemas.microsoft.com/office/drawing/2014/main" id="{1DFAE7D7-31E8-E25C-5F8F-6DF2B5D3F32A}"/>
+                      <a16:creationId xmlns:a16="http://schemas.microsoft.com/office/drawing/2014/main" xmlns="" id="{1DFAE7D7-31E8-E25C-5F8F-6DF2B5D3F32A}"/>
                     </a:ext>
                   </a:extLst>
                 </p:cNvPr>
@@ -20303,7 +20343,7 @@
               </p:txBody>
             </p:sp>
           </mc:Choice>
-          <mc:Fallback>
+          <mc:Fallback xmlns="">
             <p:sp>
               <p:nvSpPr>
                 <p:cNvPr id="21" name="文字方塊 20">
@@ -20355,7 +20395,7 @@
                 <p:cNvPr id="22" name="文字方塊 21">
                   <a:extLst>
                     <a:ext uri="{FF2B5EF4-FFF2-40B4-BE49-F238E27FC236}">
-                      <a16:creationId xmlns:a16="http://schemas.microsoft.com/office/drawing/2014/main" id="{5B679D5F-03A6-7B84-437A-23900E5537E0}"/>
+                      <a16:creationId xmlns:a16="http://schemas.microsoft.com/office/drawing/2014/main" xmlns="" id="{5B679D5F-03A6-7B84-437A-23900E5537E0}"/>
                     </a:ext>
                   </a:extLst>
                 </p:cNvPr>
@@ -20365,7 +20405,7 @@
               <p:spPr>
                 <a:xfrm>
                   <a:off x="6538866" y="2375482"/>
-                  <a:ext cx="512961" cy="246221"/>
+                  <a:ext cx="564257" cy="246221"/>
                 </a:xfrm>
                 <a:prstGeom prst="rect">
                   <a:avLst/>
@@ -20407,7 +20447,7 @@
                             <a:ea typeface="標楷體" panose="03000509000000000000" pitchFamily="65" charset="-120"/>
                             <a:cs typeface="Times New Roman" panose="02020603050405020304" pitchFamily="18" charset="0"/>
                           </a:rPr>
-                          <m:t> =</m:t>
+                          <m:t> = </m:t>
                         </m:r>
                         <m:r>
                           <m:rPr>
@@ -20439,7 +20479,7 @@
                 <p:cNvPr id="22" name="文字方塊 21">
                   <a:extLst>
                     <a:ext uri="{FF2B5EF4-FFF2-40B4-BE49-F238E27FC236}">
-                      <a16:creationId xmlns:a16="http://schemas.microsoft.com/office/drawing/2014/main" id="{5B679D5F-03A6-7B84-437A-23900E5537E0}"/>
+                      <a16:creationId xmlns:a16="http://schemas.microsoft.com/office/drawing/2014/main" xmlns:a14="http://schemas.microsoft.com/office/drawing/2010/main" xmlns="" id="{5B679D5F-03A6-7B84-437A-23900E5537E0}"/>
                     </a:ext>
                   </a:extLst>
                 </p:cNvPr>
@@ -20451,15 +20491,15 @@
               <p:spPr>
                 <a:xfrm>
                   <a:off x="6538866" y="2375482"/>
-                  <a:ext cx="512961" cy="246221"/>
+                  <a:ext cx="564257" cy="246221"/>
                 </a:xfrm>
                 <a:prstGeom prst="rect">
                   <a:avLst/>
                 </a:prstGeom>
-                <a:blipFill>
+                <a:blipFill rotWithShape="0">
                   <a:blip r:embed="rId4"/>
                   <a:stretch>
-                    <a:fillRect l="-7143" r="-9524" b="-7500"/>
+                    <a:fillRect l="-6452" r="-7527" b="-7500"/>
                   </a:stretch>
                 </a:blipFill>
               </p:spPr>
@@ -20478,14 +20518,14 @@
             </p:sp>
           </mc:Fallback>
         </mc:AlternateContent>
-        <mc:AlternateContent xmlns:mc="http://schemas.openxmlformats.org/markup-compatibility/2006">
-          <mc:Choice xmlns:a14="http://schemas.microsoft.com/office/drawing/2010/main" Requires="a14">
+        <mc:AlternateContent xmlns:mc="http://schemas.openxmlformats.org/markup-compatibility/2006" xmlns:a14="http://schemas.microsoft.com/office/drawing/2010/main">
+          <mc:Choice Requires="a14">
             <p:sp>
               <p:nvSpPr>
                 <p:cNvPr id="23" name="文字方塊 22">
                   <a:extLst>
                     <a:ext uri="{FF2B5EF4-FFF2-40B4-BE49-F238E27FC236}">
-                      <a16:creationId xmlns:a16="http://schemas.microsoft.com/office/drawing/2014/main" id="{052D775A-A41D-88E5-3A9F-7B55914AD3A4}"/>
+                      <a16:creationId xmlns:a16="http://schemas.microsoft.com/office/drawing/2014/main" xmlns="" id="{052D775A-A41D-88E5-3A9F-7B55914AD3A4}"/>
                     </a:ext>
                   </a:extLst>
                 </p:cNvPr>
@@ -20508,7 +20548,6 @@
                 </a:bodyPr>
                 <a:lstStyle/>
                 <a:p>
-                  <a:pPr/>
                   <a14:m>
                     <m:oMath xmlns:m="http://schemas.openxmlformats.org/officeDocument/2006/math">
                       <m:r>
@@ -20547,7 +20586,7 @@
                       <m:f>
                         <m:fPr>
                           <m:ctrlPr>
-                            <a:rPr lang="en-US" altLang="zh-TW" sz="1600">
+                            <a:rPr lang="en-US" altLang="zh-TW" sz="1600" i="1">
                               <a:effectLst/>
                               <a:latin typeface="Cambria Math" panose="02040503050406030204" pitchFamily="18" charset="0"/>
                               <a:ea typeface="標楷體" panose="03000509000000000000" pitchFamily="65" charset="-120"/>
@@ -20699,7 +20738,7 @@
               </p:txBody>
             </p:sp>
           </mc:Choice>
-          <mc:Fallback>
+          <mc:Fallback xmlns="">
             <p:sp>
               <p:nvSpPr>
                 <p:cNvPr id="23" name="文字方塊 22">
@@ -20749,7 +20788,7 @@
             <p:cNvPr id="25" name="矩形 24">
               <a:extLst>
                 <a:ext uri="{FF2B5EF4-FFF2-40B4-BE49-F238E27FC236}">
-                  <a16:creationId xmlns:a16="http://schemas.microsoft.com/office/drawing/2014/main" id="{6BF5A0DF-A9B2-BC29-3795-95D86E8094B0}"/>
+                  <a16:creationId xmlns:a16="http://schemas.microsoft.com/office/drawing/2014/main" xmlns="" id="{6BF5A0DF-A9B2-BC29-3795-95D86E8094B0}"/>
                 </a:ext>
               </a:extLst>
             </p:cNvPr>
@@ -20807,7 +20846,7 @@
           <p:cNvPr id="10" name="文字版面配置區 6">
             <a:extLst>
               <a:ext uri="{FF2B5EF4-FFF2-40B4-BE49-F238E27FC236}">
-                <a16:creationId xmlns:a16="http://schemas.microsoft.com/office/drawing/2014/main" id="{EFA1BA7D-6739-0930-E66B-C7B72485673A}"/>
+                <a16:creationId xmlns:a16="http://schemas.microsoft.com/office/drawing/2014/main" xmlns="" id="{EFA1BA7D-6739-0930-E66B-C7B72485673A}"/>
               </a:ext>
             </a:extLst>
           </p:cNvPr>
@@ -21117,7 +21156,7 @@
           <p:cNvPr id="33" name="群組 32">
             <a:extLst>
               <a:ext uri="{FF2B5EF4-FFF2-40B4-BE49-F238E27FC236}">
-                <a16:creationId xmlns:a16="http://schemas.microsoft.com/office/drawing/2014/main" id="{4B4C5EF7-A217-7D9B-9BE7-58FAFE1E147F}"/>
+                <a16:creationId xmlns:a16="http://schemas.microsoft.com/office/drawing/2014/main" xmlns="" id="{4B4C5EF7-A217-7D9B-9BE7-58FAFE1E147F}"/>
               </a:ext>
             </a:extLst>
           </p:cNvPr>
@@ -21126,20 +21165,20 @@
         </p:nvGrpSpPr>
         <p:grpSpPr>
           <a:xfrm>
-            <a:off x="5524383" y="4328743"/>
+            <a:off x="6023147" y="3599726"/>
             <a:ext cx="3275636" cy="1155308"/>
             <a:chOff x="4820412" y="3246174"/>
             <a:chExt cx="3275636" cy="1155308"/>
           </a:xfrm>
         </p:grpSpPr>
-        <mc:AlternateContent xmlns:mc="http://schemas.openxmlformats.org/markup-compatibility/2006">
-          <mc:Choice xmlns:a14="http://schemas.microsoft.com/office/drawing/2010/main" Requires="a14">
+        <mc:AlternateContent xmlns:mc="http://schemas.openxmlformats.org/markup-compatibility/2006" xmlns:a14="http://schemas.microsoft.com/office/drawing/2010/main">
+          <mc:Choice Requires="a14">
             <p:sp>
               <p:nvSpPr>
                 <p:cNvPr id="28" name="文字方塊 27">
                   <a:extLst>
                     <a:ext uri="{FF2B5EF4-FFF2-40B4-BE49-F238E27FC236}">
-                      <a16:creationId xmlns:a16="http://schemas.microsoft.com/office/drawing/2014/main" id="{94A8FAC7-8705-ABAD-F89E-DC9FE4497308}"/>
+                      <a16:creationId xmlns:a16="http://schemas.microsoft.com/office/drawing/2014/main" xmlns="" id="{94A8FAC7-8705-ABAD-F89E-DC9FE4497308}"/>
                     </a:ext>
                   </a:extLst>
                 </p:cNvPr>
@@ -21258,7 +21297,7 @@
               </p:txBody>
             </p:sp>
           </mc:Choice>
-          <mc:Fallback>
+          <mc:Fallback xmlns="">
             <p:sp>
               <p:nvSpPr>
                 <p:cNvPr id="28" name="文字方塊 27">
@@ -21303,14 +21342,14 @@
             </p:sp>
           </mc:Fallback>
         </mc:AlternateContent>
-        <mc:AlternateContent xmlns:mc="http://schemas.openxmlformats.org/markup-compatibility/2006">
-          <mc:Choice xmlns:a14="http://schemas.microsoft.com/office/drawing/2010/main" Requires="a14">
+        <mc:AlternateContent xmlns:mc="http://schemas.openxmlformats.org/markup-compatibility/2006" xmlns:a14="http://schemas.microsoft.com/office/drawing/2010/main">
+          <mc:Choice Requires="a14">
             <p:sp>
               <p:nvSpPr>
                 <p:cNvPr id="30" name="文字方塊 29">
                   <a:extLst>
                     <a:ext uri="{FF2B5EF4-FFF2-40B4-BE49-F238E27FC236}">
-                      <a16:creationId xmlns:a16="http://schemas.microsoft.com/office/drawing/2014/main" id="{8E214F1A-6A78-67B8-1B7D-9F1E3A4DE70D}"/>
+                      <a16:creationId xmlns:a16="http://schemas.microsoft.com/office/drawing/2014/main" xmlns="" id="{8E214F1A-6A78-67B8-1B7D-9F1E3A4DE70D}"/>
                     </a:ext>
                   </a:extLst>
                 </p:cNvPr>
@@ -21429,7 +21468,7 @@
               </p:txBody>
             </p:sp>
           </mc:Choice>
-          <mc:Fallback>
+          <mc:Fallback xmlns="">
             <p:sp>
               <p:nvSpPr>
                 <p:cNvPr id="30" name="文字方塊 29">
@@ -21480,7 +21519,7 @@
           <p:cNvPr id="4" name="文字方塊 3">
             <a:extLst>
               <a:ext uri="{FF2B5EF4-FFF2-40B4-BE49-F238E27FC236}">
-                <a16:creationId xmlns:a16="http://schemas.microsoft.com/office/drawing/2014/main" id="{F1E5835A-681C-C8A0-38AA-CD00A25D4B7C}"/>
+                <a16:creationId xmlns:a16="http://schemas.microsoft.com/office/drawing/2014/main" xmlns="" id="{F1E5835A-681C-C8A0-38AA-CD00A25D4B7C}"/>
               </a:ext>
             </a:extLst>
           </p:cNvPr>
@@ -21530,13 +21569,7 @@
       </p:sp>
       <p:pic>
         <p:nvPicPr>
-          <p:cNvPr id="14" name="圖片 13">
-            <a:extLst>
-              <a:ext uri="{FF2B5EF4-FFF2-40B4-BE49-F238E27FC236}">
-                <a16:creationId xmlns:a16="http://schemas.microsoft.com/office/drawing/2014/main" id="{FC49BB3C-DD0C-9B26-0455-3C6DE84A1032}"/>
-              </a:ext>
-            </a:extLst>
-          </p:cNvPr>
+          <p:cNvPr id="27" name="圖片 26"/>
           <p:cNvPicPr>
             <a:picLocks noChangeAspect="1"/>
           </p:cNvPicPr>
@@ -21550,8 +21583,8 @@
         </p:blipFill>
         <p:spPr>
           <a:xfrm>
-            <a:off x="7915602" y="3923347"/>
-            <a:ext cx="1488359" cy="681113"/>
+            <a:off x="6226517" y="5038840"/>
+            <a:ext cx="1375700" cy="800780"/>
           </a:xfrm>
           <a:prstGeom prst="rect">
             <a:avLst/>
@@ -21568,6 +21601,13 @@
   <p:clrMapOvr>
     <a:masterClrMapping/>
   </p:clrMapOvr>
+  <p:timing>
+    <p:tnLst>
+      <p:par>
+        <p:cTn id="1" dur="indefinite" restart="never" nodeType="tmRoot"/>
+      </p:par>
+    </p:tnLst>
+  </p:timing>
 </p:sld>
 </file>
 
@@ -21579,7 +21619,7 @@
         <p:cNvPr id="1" name="">
           <a:extLst>
             <a:ext uri="{FF2B5EF4-FFF2-40B4-BE49-F238E27FC236}">
-              <a16:creationId xmlns:a16="http://schemas.microsoft.com/office/drawing/2014/main" id="{AD04A77E-DAFB-2807-84F7-D70F0859EFFD}"/>
+              <a16:creationId xmlns:a16="http://schemas.microsoft.com/office/drawing/2014/main" xmlns="" id="{AD04A77E-DAFB-2807-84F7-D70F0859EFFD}"/>
             </a:ext>
           </a:extLst>
         </p:cNvPr>
@@ -21599,7 +21639,7 @@
           <p:cNvPr id="5" name="標題 1">
             <a:extLst>
               <a:ext uri="{FF2B5EF4-FFF2-40B4-BE49-F238E27FC236}">
-                <a16:creationId xmlns:a16="http://schemas.microsoft.com/office/drawing/2014/main" id="{C4EA0848-8E74-3D45-9380-8E7A88853D27}"/>
+                <a16:creationId xmlns:a16="http://schemas.microsoft.com/office/drawing/2014/main" xmlns="" id="{C4EA0848-8E74-3D45-9380-8E7A88853D27}"/>
               </a:ext>
             </a:extLst>
           </p:cNvPr>
@@ -21660,7 +21700,7 @@
           <p:cNvPr id="4" name="圖片 3">
             <a:extLst>
               <a:ext uri="{FF2B5EF4-FFF2-40B4-BE49-F238E27FC236}">
-                <a16:creationId xmlns:a16="http://schemas.microsoft.com/office/drawing/2014/main" id="{2426532A-89CE-A93C-23F1-069160B45F6E}"/>
+                <a16:creationId xmlns:a16="http://schemas.microsoft.com/office/drawing/2014/main" xmlns="" id="{2426532A-89CE-A93C-23F1-069160B45F6E}"/>
               </a:ext>
             </a:extLst>
           </p:cNvPr>
@@ -21685,267 +21725,12 @@
           </a:prstGeom>
         </p:spPr>
       </p:pic>
-      <p:grpSp>
-        <p:nvGrpSpPr>
-          <p:cNvPr id="32" name="群組 31">
-            <a:extLst>
-              <a:ext uri="{FF2B5EF4-FFF2-40B4-BE49-F238E27FC236}">
-                <a16:creationId xmlns:a16="http://schemas.microsoft.com/office/drawing/2014/main" id="{F927EF4A-6F4D-F3E8-5B09-F22CB7E5C27B}"/>
-              </a:ext>
-            </a:extLst>
-          </p:cNvPr>
-          <p:cNvGrpSpPr/>
-          <p:nvPr/>
-        </p:nvGrpSpPr>
-        <p:grpSpPr>
-          <a:xfrm>
-            <a:off x="6792573" y="876300"/>
-            <a:ext cx="2615878" cy="2013090"/>
-            <a:chOff x="6481823" y="1030147"/>
-            <a:chExt cx="2615878" cy="2013090"/>
-          </a:xfrm>
-        </p:grpSpPr>
-        <p:sp>
-          <p:nvSpPr>
-            <p:cNvPr id="31" name="矩形 30">
-              <a:extLst>
-                <a:ext uri="{FF2B5EF4-FFF2-40B4-BE49-F238E27FC236}">
-                  <a16:creationId xmlns:a16="http://schemas.microsoft.com/office/drawing/2014/main" id="{842E2599-7117-6097-3D20-FAF97CB0624D}"/>
-                </a:ext>
-              </a:extLst>
-            </p:cNvPr>
-            <p:cNvSpPr/>
-            <p:nvPr/>
-          </p:nvSpPr>
-          <p:spPr>
-            <a:xfrm>
-              <a:off x="6481823" y="1030147"/>
-              <a:ext cx="2615878" cy="2013090"/>
-            </a:xfrm>
-            <a:prstGeom prst="rect">
-              <a:avLst/>
-            </a:prstGeom>
-            <a:solidFill>
-              <a:schemeClr val="bg1"/>
-            </a:solidFill>
-            <a:ln>
-              <a:solidFill>
-                <a:schemeClr val="tx1"/>
-              </a:solidFill>
-            </a:ln>
-          </p:spPr>
-          <p:style>
-            <a:lnRef idx="2">
-              <a:schemeClr val="accent1">
-                <a:shade val="15000"/>
-              </a:schemeClr>
-            </a:lnRef>
-            <a:fillRef idx="1">
-              <a:schemeClr val="accent1"/>
-            </a:fillRef>
-            <a:effectRef idx="0">
-              <a:schemeClr val="accent1"/>
-            </a:effectRef>
-            <a:fontRef idx="minor">
-              <a:schemeClr val="lt1"/>
-            </a:fontRef>
-          </p:style>
-          <p:txBody>
-            <a:bodyPr rtlCol="0" anchor="ctr"/>
-            <a:lstStyle/>
-            <a:p>
-              <a:pPr algn="ctr"/>
-              <a:endParaRPr lang="zh-TW" altLang="en-US">
-                <a:latin typeface="Times New Roman" panose="02020603050405020304" pitchFamily="18" charset="0"/>
-                <a:ea typeface="標楷體" panose="03000509000000000000" pitchFamily="65" charset="-120"/>
-                <a:cs typeface="Times New Roman" panose="02020603050405020304" pitchFamily="18" charset="0"/>
-              </a:endParaRPr>
-            </a:p>
-          </p:txBody>
-        </p:sp>
-        <p:pic>
-          <p:nvPicPr>
-            <p:cNvPr id="17" name="圖片 16">
-              <a:extLst>
-                <a:ext uri="{FF2B5EF4-FFF2-40B4-BE49-F238E27FC236}">
-                  <a16:creationId xmlns:a16="http://schemas.microsoft.com/office/drawing/2014/main" id="{761FC988-00F4-E730-3BAA-BD8AB2AF8736}"/>
-                </a:ext>
-              </a:extLst>
-            </p:cNvPr>
-            <p:cNvPicPr>
-              <a:picLocks noChangeAspect="1"/>
-            </p:cNvPicPr>
-            <p:nvPr/>
-          </p:nvPicPr>
-          <p:blipFill>
-            <a:blip r:embed="rId4"/>
-            <a:stretch>
-              <a:fillRect/>
-            </a:stretch>
-          </p:blipFill>
-          <p:spPr>
-            <a:xfrm>
-              <a:off x="6755758" y="1143000"/>
-              <a:ext cx="2214621" cy="907910"/>
-            </a:xfrm>
-            <a:prstGeom prst="rect">
-              <a:avLst/>
-            </a:prstGeom>
-          </p:spPr>
-        </p:pic>
-        <p:pic>
-          <p:nvPicPr>
-            <p:cNvPr id="27" name="圖片 26">
-              <a:extLst>
-                <a:ext uri="{FF2B5EF4-FFF2-40B4-BE49-F238E27FC236}">
-                  <a16:creationId xmlns:a16="http://schemas.microsoft.com/office/drawing/2014/main" id="{3EDD9625-B064-7565-0FCA-7776D5E05438}"/>
-                </a:ext>
-              </a:extLst>
-            </p:cNvPr>
-            <p:cNvPicPr>
-              <a:picLocks noChangeAspect="1"/>
-            </p:cNvPicPr>
-            <p:nvPr/>
-          </p:nvPicPr>
-          <p:blipFill>
-            <a:blip r:embed="rId5"/>
-            <a:stretch>
-              <a:fillRect/>
-            </a:stretch>
-          </p:blipFill>
-          <p:spPr>
-            <a:xfrm>
-              <a:off x="6871182" y="2050909"/>
-              <a:ext cx="1470787" cy="891617"/>
-            </a:xfrm>
-            <a:prstGeom prst="rect">
-              <a:avLst/>
-            </a:prstGeom>
-          </p:spPr>
-        </p:pic>
-        <p:sp>
-          <p:nvSpPr>
-            <p:cNvPr id="29" name="矩形 28">
-              <a:extLst>
-                <a:ext uri="{FF2B5EF4-FFF2-40B4-BE49-F238E27FC236}">
-                  <a16:creationId xmlns:a16="http://schemas.microsoft.com/office/drawing/2014/main" id="{8BD80D6C-1FF3-8AFD-5D78-6B1FDB097256}"/>
-                </a:ext>
-              </a:extLst>
-            </p:cNvPr>
-            <p:cNvSpPr/>
-            <p:nvPr/>
-          </p:nvSpPr>
-          <p:spPr>
-            <a:xfrm>
-              <a:off x="6615185" y="1111723"/>
-              <a:ext cx="319318" cy="1384995"/>
-            </a:xfrm>
-            <a:prstGeom prst="rect">
-              <a:avLst/>
-            </a:prstGeom>
-            <a:noFill/>
-          </p:spPr>
-          <p:txBody>
-            <a:bodyPr wrap="none" lIns="91440" tIns="45720" rIns="91440" bIns="45720">
-              <a:spAutoFit/>
-            </a:bodyPr>
-            <a:lstStyle/>
-            <a:p>
-              <a:pPr algn="ctr"/>
-              <a:r>
-                <a:rPr lang="en-US" altLang="zh-TW" cap="none" spc="0" dirty="0">
-                  <a:ln w="0"/>
-                  <a:solidFill>
-                    <a:schemeClr val="tx1"/>
-                  </a:solidFill>
-                  <a:latin typeface="Times New Roman" panose="02020603050405020304" pitchFamily="18" charset="0"/>
-                  <a:ea typeface="標楷體" panose="03000509000000000000" pitchFamily="65" charset="-120"/>
-                  <a:cs typeface="Times New Roman" panose="02020603050405020304" pitchFamily="18" charset="0"/>
-                </a:rPr>
-                <a:t>1.</a:t>
-              </a:r>
-            </a:p>
-            <a:p>
-              <a:pPr algn="ctr"/>
-              <a:endParaRPr lang="en-US" altLang="zh-TW" dirty="0">
-                <a:ln w="0"/>
-                <a:solidFill>
-                  <a:schemeClr val="tx1"/>
-                </a:solidFill>
-                <a:latin typeface="Times New Roman" panose="02020603050405020304" pitchFamily="18" charset="0"/>
-                <a:ea typeface="標楷體" panose="03000509000000000000" pitchFamily="65" charset="-120"/>
-                <a:cs typeface="Times New Roman" panose="02020603050405020304" pitchFamily="18" charset="0"/>
-              </a:endParaRPr>
-            </a:p>
-            <a:p>
-              <a:pPr algn="ctr"/>
-              <a:endParaRPr lang="en-US" altLang="zh-TW" dirty="0">
-                <a:ln w="0"/>
-                <a:solidFill>
-                  <a:schemeClr val="tx1"/>
-                </a:solidFill>
-                <a:latin typeface="Times New Roman" panose="02020603050405020304" pitchFamily="18" charset="0"/>
-                <a:ea typeface="標楷體" panose="03000509000000000000" pitchFamily="65" charset="-120"/>
-                <a:cs typeface="Times New Roman" panose="02020603050405020304" pitchFamily="18" charset="0"/>
-              </a:endParaRPr>
-            </a:p>
-            <a:p>
-              <a:pPr algn="ctr"/>
-              <a:endParaRPr lang="en-US" altLang="zh-TW" dirty="0">
-                <a:ln w="0"/>
-                <a:solidFill>
-                  <a:schemeClr val="tx1"/>
-                </a:solidFill>
-                <a:latin typeface="Times New Roman" panose="02020603050405020304" pitchFamily="18" charset="0"/>
-                <a:ea typeface="標楷體" panose="03000509000000000000" pitchFamily="65" charset="-120"/>
-                <a:cs typeface="Times New Roman" panose="02020603050405020304" pitchFamily="18" charset="0"/>
-              </a:endParaRPr>
-            </a:p>
-            <a:p>
-              <a:pPr algn="ctr"/>
-              <a:endParaRPr lang="en-US" altLang="zh-TW" dirty="0">
-                <a:ln w="0"/>
-                <a:solidFill>
-                  <a:schemeClr val="tx1"/>
-                </a:solidFill>
-                <a:latin typeface="Times New Roman" panose="02020603050405020304" pitchFamily="18" charset="0"/>
-                <a:ea typeface="標楷體" panose="03000509000000000000" pitchFamily="65" charset="-120"/>
-                <a:cs typeface="Times New Roman" panose="02020603050405020304" pitchFamily="18" charset="0"/>
-              </a:endParaRPr>
-            </a:p>
-            <a:p>
-              <a:pPr algn="ctr"/>
-              <a:r>
-                <a:rPr lang="en-US" altLang="zh-TW" dirty="0">
-                  <a:ln w="0"/>
-                  <a:solidFill>
-                    <a:schemeClr val="tx1"/>
-                  </a:solidFill>
-                  <a:latin typeface="Times New Roman" panose="02020603050405020304" pitchFamily="18" charset="0"/>
-                  <a:ea typeface="標楷體" panose="03000509000000000000" pitchFamily="65" charset="-120"/>
-                  <a:cs typeface="Times New Roman" panose="02020603050405020304" pitchFamily="18" charset="0"/>
-                </a:rPr>
-                <a:t>2.</a:t>
-              </a:r>
-              <a:endParaRPr lang="zh-TW" altLang="en-US" cap="none" spc="0" dirty="0">
-                <a:ln w="0"/>
-                <a:solidFill>
-                  <a:schemeClr val="tx1"/>
-                </a:solidFill>
-                <a:latin typeface="Times New Roman" panose="02020603050405020304" pitchFamily="18" charset="0"/>
-                <a:ea typeface="標楷體" panose="03000509000000000000" pitchFamily="65" charset="-120"/>
-                <a:cs typeface="Times New Roman" panose="02020603050405020304" pitchFamily="18" charset="0"/>
-              </a:endParaRPr>
-            </a:p>
-          </p:txBody>
-        </p:sp>
-      </p:grpSp>
       <p:sp>
         <p:nvSpPr>
           <p:cNvPr id="37" name="箭號: 向右 36">
             <a:extLst>
               <a:ext uri="{FF2B5EF4-FFF2-40B4-BE49-F238E27FC236}">
-                <a16:creationId xmlns:a16="http://schemas.microsoft.com/office/drawing/2014/main" id="{FBFAB6F3-B4CD-9EFE-0CF6-B1B75CD89E10}"/>
+                <a16:creationId xmlns:a16="http://schemas.microsoft.com/office/drawing/2014/main" xmlns="" id="{FBFAB6F3-B4CD-9EFE-0CF6-B1B75CD89E10}"/>
               </a:ext>
             </a:extLst>
           </p:cNvPr>
@@ -22006,7 +21791,7 @@
           <p:cNvPr id="38" name="矩形 37">
             <a:extLst>
               <a:ext uri="{FF2B5EF4-FFF2-40B4-BE49-F238E27FC236}">
-                <a16:creationId xmlns:a16="http://schemas.microsoft.com/office/drawing/2014/main" id="{4D96EEAC-BDC2-1338-2C43-7781683DD0B3}"/>
+                <a16:creationId xmlns:a16="http://schemas.microsoft.com/office/drawing/2014/main" xmlns="" id="{4D96EEAC-BDC2-1338-2C43-7781683DD0B3}"/>
               </a:ext>
             </a:extLst>
           </p:cNvPr>
@@ -22164,10 +21949,10 @@
       </p:sp>
       <p:pic>
         <p:nvPicPr>
-          <p:cNvPr id="40" name="圖片 39">
+          <p:cNvPr id="42" name="圖片 41">
             <a:extLst>
               <a:ext uri="{FF2B5EF4-FFF2-40B4-BE49-F238E27FC236}">
-                <a16:creationId xmlns:a16="http://schemas.microsoft.com/office/drawing/2014/main" id="{C5EA7A6F-A098-9803-7296-8B08DDAF0328}"/>
+                <a16:creationId xmlns:a16="http://schemas.microsoft.com/office/drawing/2014/main" xmlns="" id="{F43B0717-E53C-A39B-A94E-7E1581B1010F}"/>
               </a:ext>
             </a:extLst>
           </p:cNvPr>
@@ -22177,44 +21962,14 @@
           <p:nvPr/>
         </p:nvPicPr>
         <p:blipFill>
-          <a:blip r:embed="rId6"/>
+          <a:blip r:embed="rId4"/>
           <a:stretch>
             <a:fillRect/>
           </a:stretch>
         </p:blipFill>
         <p:spPr>
           <a:xfrm>
-            <a:off x="6393022" y="3525961"/>
-            <a:ext cx="1994507" cy="1015385"/>
-          </a:xfrm>
-          <a:prstGeom prst="rect">
-            <a:avLst/>
-          </a:prstGeom>
-        </p:spPr>
-      </p:pic>
-      <p:pic>
-        <p:nvPicPr>
-          <p:cNvPr id="42" name="圖片 41">
-            <a:extLst>
-              <a:ext uri="{FF2B5EF4-FFF2-40B4-BE49-F238E27FC236}">
-                <a16:creationId xmlns:a16="http://schemas.microsoft.com/office/drawing/2014/main" id="{F43B0717-E53C-A39B-A94E-7E1581B1010F}"/>
-              </a:ext>
-            </a:extLst>
-          </p:cNvPr>
-          <p:cNvPicPr>
-            <a:picLocks noChangeAspect="1"/>
-          </p:cNvPicPr>
-          <p:nvPr/>
-        </p:nvPicPr>
-        <p:blipFill>
-          <a:blip r:embed="rId7"/>
-          <a:stretch>
-            <a:fillRect/>
-          </a:stretch>
-        </p:blipFill>
-        <p:spPr>
-          <a:xfrm>
-            <a:off x="5277620" y="4840844"/>
+            <a:off x="5400678" y="4129089"/>
             <a:ext cx="4488573" cy="1115503"/>
           </a:xfrm>
           <a:prstGeom prst="rect">
@@ -22227,7 +21982,7 @@
           <p:cNvPr id="2" name="文字版面配置區 6">
             <a:extLst>
               <a:ext uri="{FF2B5EF4-FFF2-40B4-BE49-F238E27FC236}">
-                <a16:creationId xmlns:a16="http://schemas.microsoft.com/office/drawing/2014/main" id="{6BC9469D-6E3E-1F0F-1445-28C4BA19CEBC}"/>
+                <a16:creationId xmlns:a16="http://schemas.microsoft.com/office/drawing/2014/main" xmlns="" id="{6BC9469D-6E3E-1F0F-1445-28C4BA19CEBC}"/>
               </a:ext>
             </a:extLst>
           </p:cNvPr>
@@ -22537,7 +22292,7 @@
           <p:cNvPr id="45" name="群組 44">
             <a:extLst>
               <a:ext uri="{FF2B5EF4-FFF2-40B4-BE49-F238E27FC236}">
-                <a16:creationId xmlns:a16="http://schemas.microsoft.com/office/drawing/2014/main" id="{88569DE1-553A-DC5D-D6E1-ABA71C776115}"/>
+                <a16:creationId xmlns:a16="http://schemas.microsoft.com/office/drawing/2014/main" xmlns="" id="{88569DE1-553A-DC5D-D6E1-ABA71C776115}"/>
               </a:ext>
             </a:extLst>
           </p:cNvPr>
@@ -22557,7 +22312,7 @@
             <p:cNvPr id="7" name="圖片 6">
               <a:extLst>
                 <a:ext uri="{FF2B5EF4-FFF2-40B4-BE49-F238E27FC236}">
-                  <a16:creationId xmlns:a16="http://schemas.microsoft.com/office/drawing/2014/main" id="{3017A3D9-55B3-9FCF-78A7-8CFF7996C238}"/>
+                  <a16:creationId xmlns:a16="http://schemas.microsoft.com/office/drawing/2014/main" xmlns="" id="{3017A3D9-55B3-9FCF-78A7-8CFF7996C238}"/>
                 </a:ext>
               </a:extLst>
             </p:cNvPr>
@@ -22567,7 +22322,7 @@
             <p:nvPr/>
           </p:nvPicPr>
           <p:blipFill>
-            <a:blip r:embed="rId8"/>
+            <a:blip r:embed="rId5"/>
             <a:stretch>
               <a:fillRect/>
             </a:stretch>
@@ -22587,7 +22342,7 @@
             <p:cNvPr id="8" name="圖片 7">
               <a:extLst>
                 <a:ext uri="{FF2B5EF4-FFF2-40B4-BE49-F238E27FC236}">
-                  <a16:creationId xmlns:a16="http://schemas.microsoft.com/office/drawing/2014/main" id="{3523FE1B-0057-E640-2C60-7E3D7A1927EA}"/>
+                  <a16:creationId xmlns:a16="http://schemas.microsoft.com/office/drawing/2014/main" xmlns="" id="{3523FE1B-0057-E640-2C60-7E3D7A1927EA}"/>
                 </a:ext>
               </a:extLst>
             </p:cNvPr>
@@ -22597,7 +22352,7 @@
             <p:nvPr/>
           </p:nvPicPr>
           <p:blipFill>
-            <a:blip r:embed="rId9"/>
+            <a:blip r:embed="rId6"/>
             <a:stretch>
               <a:fillRect/>
             </a:stretch>
@@ -22617,7 +22372,7 @@
             <p:cNvPr id="44" name="圖片 43">
               <a:extLst>
                 <a:ext uri="{FF2B5EF4-FFF2-40B4-BE49-F238E27FC236}">
-                  <a16:creationId xmlns:a16="http://schemas.microsoft.com/office/drawing/2014/main" id="{483ACC88-335C-E8C4-BBD8-7A9AC0907168}"/>
+                  <a16:creationId xmlns:a16="http://schemas.microsoft.com/office/drawing/2014/main" xmlns="" id="{483ACC88-335C-E8C4-BBD8-7A9AC0907168}"/>
                 </a:ext>
               </a:extLst>
             </p:cNvPr>
@@ -22627,7 +22382,7 @@
             <p:nvPr/>
           </p:nvPicPr>
           <p:blipFill>
-            <a:blip r:embed="rId10"/>
+            <a:blip r:embed="rId7"/>
             <a:stretch>
               <a:fillRect/>
             </a:stretch>
@@ -22643,6 +22398,240 @@
           </p:spPr>
         </p:pic>
       </p:grpSp>
+      <p:sp>
+        <p:nvSpPr>
+          <p:cNvPr id="28" name="矩形 27">
+            <a:extLst>
+              <a:ext uri="{FF2B5EF4-FFF2-40B4-BE49-F238E27FC236}">
+                <a16:creationId xmlns="" xmlns:a16="http://schemas.microsoft.com/office/drawing/2014/main" id="{842E2599-7117-6097-3D20-FAF97CB0624D}"/>
+              </a:ext>
+            </a:extLst>
+          </p:cNvPr>
+          <p:cNvSpPr/>
+          <p:nvPr/>
+        </p:nvSpPr>
+        <p:spPr>
+          <a:xfrm>
+            <a:off x="6792573" y="876300"/>
+            <a:ext cx="2615878" cy="2013090"/>
+          </a:xfrm>
+          <a:prstGeom prst="rect">
+            <a:avLst/>
+          </a:prstGeom>
+          <a:solidFill>
+            <a:schemeClr val="bg1"/>
+          </a:solidFill>
+          <a:ln>
+            <a:solidFill>
+              <a:schemeClr val="tx1"/>
+            </a:solidFill>
+          </a:ln>
+        </p:spPr>
+        <p:style>
+          <a:lnRef idx="2">
+            <a:schemeClr val="accent1">
+              <a:shade val="15000"/>
+            </a:schemeClr>
+          </a:lnRef>
+          <a:fillRef idx="1">
+            <a:schemeClr val="accent1"/>
+          </a:fillRef>
+          <a:effectRef idx="0">
+            <a:schemeClr val="accent1"/>
+          </a:effectRef>
+          <a:fontRef idx="minor">
+            <a:schemeClr val="lt1"/>
+          </a:fontRef>
+        </p:style>
+        <p:txBody>
+          <a:bodyPr rtlCol="0" anchor="ctr"/>
+          <a:lstStyle/>
+          <a:p>
+            <a:pPr algn="ctr"/>
+            <a:endParaRPr lang="zh-TW" altLang="en-US">
+              <a:latin typeface="Times New Roman" panose="02020603050405020304" pitchFamily="18" charset="0"/>
+              <a:ea typeface="標楷體" panose="03000509000000000000" pitchFamily="65" charset="-120"/>
+              <a:cs typeface="Times New Roman" panose="02020603050405020304" pitchFamily="18" charset="0"/>
+            </a:endParaRPr>
+          </a:p>
+        </p:txBody>
+      </p:sp>
+      <p:pic>
+        <p:nvPicPr>
+          <p:cNvPr id="30" name="圖片 29">
+            <a:extLst>
+              <a:ext uri="{FF2B5EF4-FFF2-40B4-BE49-F238E27FC236}">
+                <a16:creationId xmlns="" xmlns:a16="http://schemas.microsoft.com/office/drawing/2014/main" id="{761FC988-00F4-E730-3BAA-BD8AB2AF8736}"/>
+              </a:ext>
+            </a:extLst>
+          </p:cNvPr>
+          <p:cNvPicPr>
+            <a:picLocks noChangeAspect="1"/>
+          </p:cNvPicPr>
+          <p:nvPr/>
+        </p:nvPicPr>
+        <p:blipFill>
+          <a:blip r:embed="rId8"/>
+          <a:stretch>
+            <a:fillRect/>
+          </a:stretch>
+        </p:blipFill>
+        <p:spPr>
+          <a:xfrm>
+            <a:off x="7066508" y="989153"/>
+            <a:ext cx="2214621" cy="907910"/>
+          </a:xfrm>
+          <a:prstGeom prst="rect">
+            <a:avLst/>
+          </a:prstGeom>
+        </p:spPr>
+      </p:pic>
+      <p:sp>
+        <p:nvSpPr>
+          <p:cNvPr id="33" name="矩形 32">
+            <a:extLst>
+              <a:ext uri="{FF2B5EF4-FFF2-40B4-BE49-F238E27FC236}">
+                <a16:creationId xmlns="" xmlns:a16="http://schemas.microsoft.com/office/drawing/2014/main" id="{8BD80D6C-1FF3-8AFD-5D78-6B1FDB097256}"/>
+              </a:ext>
+            </a:extLst>
+          </p:cNvPr>
+          <p:cNvSpPr/>
+          <p:nvPr/>
+        </p:nvSpPr>
+        <p:spPr>
+          <a:xfrm>
+            <a:off x="6925935" y="957876"/>
+            <a:ext cx="319318" cy="1384995"/>
+          </a:xfrm>
+          <a:prstGeom prst="rect">
+            <a:avLst/>
+          </a:prstGeom>
+          <a:noFill/>
+        </p:spPr>
+        <p:txBody>
+          <a:bodyPr wrap="none" lIns="91440" tIns="45720" rIns="91440" bIns="45720">
+            <a:spAutoFit/>
+          </a:bodyPr>
+          <a:lstStyle/>
+          <a:p>
+            <a:pPr algn="ctr"/>
+            <a:r>
+              <a:rPr lang="en-US" altLang="zh-TW" cap="none" spc="0" dirty="0">
+                <a:ln w="0"/>
+                <a:solidFill>
+                  <a:schemeClr val="tx1"/>
+                </a:solidFill>
+                <a:latin typeface="Times New Roman" panose="02020603050405020304" pitchFamily="18" charset="0"/>
+                <a:ea typeface="標楷體" panose="03000509000000000000" pitchFamily="65" charset="-120"/>
+                <a:cs typeface="Times New Roman" panose="02020603050405020304" pitchFamily="18" charset="0"/>
+              </a:rPr>
+              <a:t>1.</a:t>
+            </a:r>
+          </a:p>
+          <a:p>
+            <a:pPr algn="ctr"/>
+            <a:endParaRPr lang="en-US" altLang="zh-TW" dirty="0">
+              <a:ln w="0"/>
+              <a:solidFill>
+                <a:schemeClr val="tx1"/>
+              </a:solidFill>
+              <a:latin typeface="Times New Roman" panose="02020603050405020304" pitchFamily="18" charset="0"/>
+              <a:ea typeface="標楷體" panose="03000509000000000000" pitchFamily="65" charset="-120"/>
+              <a:cs typeface="Times New Roman" panose="02020603050405020304" pitchFamily="18" charset="0"/>
+            </a:endParaRPr>
+          </a:p>
+          <a:p>
+            <a:pPr algn="ctr"/>
+            <a:endParaRPr lang="en-US" altLang="zh-TW" dirty="0">
+              <a:ln w="0"/>
+              <a:solidFill>
+                <a:schemeClr val="tx1"/>
+              </a:solidFill>
+              <a:latin typeface="Times New Roman" panose="02020603050405020304" pitchFamily="18" charset="0"/>
+              <a:ea typeface="標楷體" panose="03000509000000000000" pitchFamily="65" charset="-120"/>
+              <a:cs typeface="Times New Roman" panose="02020603050405020304" pitchFamily="18" charset="0"/>
+            </a:endParaRPr>
+          </a:p>
+          <a:p>
+            <a:pPr algn="ctr"/>
+            <a:endParaRPr lang="en-US" altLang="zh-TW" dirty="0">
+              <a:ln w="0"/>
+              <a:solidFill>
+                <a:schemeClr val="tx1"/>
+              </a:solidFill>
+              <a:latin typeface="Times New Roman" panose="02020603050405020304" pitchFamily="18" charset="0"/>
+              <a:ea typeface="標楷體" panose="03000509000000000000" pitchFamily="65" charset="-120"/>
+              <a:cs typeface="Times New Roman" panose="02020603050405020304" pitchFamily="18" charset="0"/>
+            </a:endParaRPr>
+          </a:p>
+          <a:p>
+            <a:pPr algn="ctr"/>
+            <a:endParaRPr lang="en-US" altLang="zh-TW" dirty="0">
+              <a:ln w="0"/>
+              <a:solidFill>
+                <a:schemeClr val="tx1"/>
+              </a:solidFill>
+              <a:latin typeface="Times New Roman" panose="02020603050405020304" pitchFamily="18" charset="0"/>
+              <a:ea typeface="標楷體" panose="03000509000000000000" pitchFamily="65" charset="-120"/>
+              <a:cs typeface="Times New Roman" panose="02020603050405020304" pitchFamily="18" charset="0"/>
+            </a:endParaRPr>
+          </a:p>
+          <a:p>
+            <a:pPr algn="ctr"/>
+            <a:r>
+              <a:rPr lang="en-US" altLang="zh-TW" dirty="0">
+                <a:ln w="0"/>
+                <a:solidFill>
+                  <a:schemeClr val="tx1"/>
+                </a:solidFill>
+                <a:latin typeface="Times New Roman" panose="02020603050405020304" pitchFamily="18" charset="0"/>
+                <a:ea typeface="標楷體" panose="03000509000000000000" pitchFamily="65" charset="-120"/>
+                <a:cs typeface="Times New Roman" panose="02020603050405020304" pitchFamily="18" charset="0"/>
+              </a:rPr>
+              <a:t>2.</a:t>
+            </a:r>
+            <a:endParaRPr lang="zh-TW" altLang="en-US" cap="none" spc="0" dirty="0">
+              <a:ln w="0"/>
+              <a:solidFill>
+                <a:schemeClr val="tx1"/>
+              </a:solidFill>
+              <a:latin typeface="Times New Roman" panose="02020603050405020304" pitchFamily="18" charset="0"/>
+              <a:ea typeface="標楷體" panose="03000509000000000000" pitchFamily="65" charset="-120"/>
+              <a:cs typeface="Times New Roman" panose="02020603050405020304" pitchFamily="18" charset="0"/>
+            </a:endParaRPr>
+          </a:p>
+        </p:txBody>
+      </p:sp>
+      <p:pic>
+        <p:nvPicPr>
+          <p:cNvPr id="9" name="圖片 8"/>
+          <p:cNvPicPr>
+            <a:picLocks noChangeAspect="1"/>
+          </p:cNvPicPr>
+          <p:nvPr/>
+        </p:nvPicPr>
+        <p:blipFill>
+          <a:blip r:embed="rId9">
+            <a:extLst>
+              <a:ext uri="{28A0092B-C50C-407E-A947-70E740481C1C}">
+                <a14:useLocalDpi xmlns:a14="http://schemas.microsoft.com/office/drawing/2010/main" val="0"/>
+              </a:ext>
+            </a:extLst>
+          </a:blip>
+          <a:stretch>
+            <a:fillRect/>
+          </a:stretch>
+        </p:blipFill>
+        <p:spPr>
+          <a:xfrm>
+            <a:off x="7432865" y="1897063"/>
+            <a:ext cx="1751480" cy="941972"/>
+          </a:xfrm>
+          <a:prstGeom prst="rect">
+            <a:avLst/>
+          </a:prstGeom>
+        </p:spPr>
+      </p:pic>
     </p:spTree>
     <p:extLst>
       <p:ext uri="{BB962C8B-B14F-4D97-AF65-F5344CB8AC3E}">
@@ -22653,6 +22642,13 @@
   <p:clrMapOvr>
     <a:masterClrMapping/>
   </p:clrMapOvr>
+  <p:timing>
+    <p:tnLst>
+      <p:par>
+        <p:cTn id="1" dur="indefinite" restart="never" nodeType="tmRoot"/>
+      </p:par>
+    </p:tnLst>
+  </p:timing>
 </p:sld>
 </file>
 

--- a/ICCPROFILE_0923.pptx
+++ b/ICCPROFILE_0923.pptx
@@ -1655,7 +1655,7 @@
         <p:cNvPr id="1" name="">
           <a:extLst>
             <a:ext uri="{FF2B5EF4-FFF2-40B4-BE49-F238E27FC236}">
-              <a16:creationId xmlns:a16="http://schemas.microsoft.com/office/drawing/2014/main" xmlns="" id="{9AFA681A-88EB-5E43-27F0-EA34E562E0AD}"/>
+              <a16:creationId xmlns="" xmlns:a16="http://schemas.microsoft.com/office/drawing/2014/main" id="{9AFA681A-88EB-5E43-27F0-EA34E562E0AD}"/>
             </a:ext>
           </a:extLst>
         </p:cNvPr>
@@ -1675,7 +1675,7 @@
           <p:cNvPr id="2" name="投影片影像版面配置區 1">
             <a:extLst>
               <a:ext uri="{FF2B5EF4-FFF2-40B4-BE49-F238E27FC236}">
-                <a16:creationId xmlns:a16="http://schemas.microsoft.com/office/drawing/2014/main" xmlns="" id="{26C04ECA-D873-1236-C2C8-8A052C1F5FCB}"/>
+                <a16:creationId xmlns="" xmlns:a16="http://schemas.microsoft.com/office/drawing/2014/main" id="{26C04ECA-D873-1236-C2C8-8A052C1F5FCB}"/>
               </a:ext>
             </a:extLst>
           </p:cNvPr>
@@ -1693,7 +1693,7 @@
           <p:cNvPr id="3" name="備忘稿版面配置區 2">
             <a:extLst>
               <a:ext uri="{FF2B5EF4-FFF2-40B4-BE49-F238E27FC236}">
-                <a16:creationId xmlns:a16="http://schemas.microsoft.com/office/drawing/2014/main" xmlns="" id="{BEBD2639-D696-3DD9-3C32-292A4F25C5F9}"/>
+                <a16:creationId xmlns="" xmlns:a16="http://schemas.microsoft.com/office/drawing/2014/main" id="{BEBD2639-D696-3DD9-3C32-292A4F25C5F9}"/>
               </a:ext>
             </a:extLst>
           </p:cNvPr>
@@ -1719,7 +1719,7 @@
           <p:cNvPr id="4" name="投影片編號版面配置區 3">
             <a:extLst>
               <a:ext uri="{FF2B5EF4-FFF2-40B4-BE49-F238E27FC236}">
-                <a16:creationId xmlns:a16="http://schemas.microsoft.com/office/drawing/2014/main" xmlns="" id="{D2C49B69-3433-A410-E980-5AC38B157779}"/>
+                <a16:creationId xmlns="" xmlns:a16="http://schemas.microsoft.com/office/drawing/2014/main" id="{D2C49B69-3433-A410-E980-5AC38B157779}"/>
               </a:ext>
             </a:extLst>
           </p:cNvPr>
@@ -1789,7 +1789,7 @@
         <p:cNvPr id="1" name="">
           <a:extLst>
             <a:ext uri="{FF2B5EF4-FFF2-40B4-BE49-F238E27FC236}">
-              <a16:creationId xmlns:a16="http://schemas.microsoft.com/office/drawing/2014/main" xmlns="" id="{248C1817-9E04-5A55-E8CC-FD3FF3F825B3}"/>
+              <a16:creationId xmlns="" xmlns:a16="http://schemas.microsoft.com/office/drawing/2014/main" id="{248C1817-9E04-5A55-E8CC-FD3FF3F825B3}"/>
             </a:ext>
           </a:extLst>
         </p:cNvPr>
@@ -1809,7 +1809,7 @@
           <p:cNvPr id="2" name="投影片影像版面配置區 1">
             <a:extLst>
               <a:ext uri="{FF2B5EF4-FFF2-40B4-BE49-F238E27FC236}">
-                <a16:creationId xmlns:a16="http://schemas.microsoft.com/office/drawing/2014/main" xmlns="" id="{7299D6F9-1619-B844-57EE-48AA0121A278}"/>
+                <a16:creationId xmlns="" xmlns:a16="http://schemas.microsoft.com/office/drawing/2014/main" id="{7299D6F9-1619-B844-57EE-48AA0121A278}"/>
               </a:ext>
             </a:extLst>
           </p:cNvPr>
@@ -1827,7 +1827,7 @@
           <p:cNvPr id="3" name="備忘稿版面配置區 2">
             <a:extLst>
               <a:ext uri="{FF2B5EF4-FFF2-40B4-BE49-F238E27FC236}">
-                <a16:creationId xmlns:a16="http://schemas.microsoft.com/office/drawing/2014/main" xmlns="" id="{17B0488B-586D-2F37-7E25-09C139D9BBCE}"/>
+                <a16:creationId xmlns="" xmlns:a16="http://schemas.microsoft.com/office/drawing/2014/main" id="{17B0488B-586D-2F37-7E25-09C139D9BBCE}"/>
               </a:ext>
             </a:extLst>
           </p:cNvPr>
@@ -1853,7 +1853,7 @@
           <p:cNvPr id="4" name="投影片編號版面配置區 3">
             <a:extLst>
               <a:ext uri="{FF2B5EF4-FFF2-40B4-BE49-F238E27FC236}">
-                <a16:creationId xmlns:a16="http://schemas.microsoft.com/office/drawing/2014/main" xmlns="" id="{3341146E-6544-F922-461C-1EB94C558E3D}"/>
+                <a16:creationId xmlns="" xmlns:a16="http://schemas.microsoft.com/office/drawing/2014/main" id="{3341146E-6544-F922-461C-1EB94C558E3D}"/>
               </a:ext>
             </a:extLst>
           </p:cNvPr>
@@ -1923,7 +1923,7 @@
         <p:cNvPr id="1" name="">
           <a:extLst>
             <a:ext uri="{FF2B5EF4-FFF2-40B4-BE49-F238E27FC236}">
-              <a16:creationId xmlns:a16="http://schemas.microsoft.com/office/drawing/2014/main" xmlns="" id="{12EB7DC1-8982-FBBF-D79C-E8A85E11B329}"/>
+              <a16:creationId xmlns="" xmlns:a16="http://schemas.microsoft.com/office/drawing/2014/main" id="{12EB7DC1-8982-FBBF-D79C-E8A85E11B329}"/>
             </a:ext>
           </a:extLst>
         </p:cNvPr>
@@ -1943,7 +1943,7 @@
           <p:cNvPr id="2" name="投影片影像版面配置區 1">
             <a:extLst>
               <a:ext uri="{FF2B5EF4-FFF2-40B4-BE49-F238E27FC236}">
-                <a16:creationId xmlns:a16="http://schemas.microsoft.com/office/drawing/2014/main" xmlns="" id="{747EDAF3-B8EA-0C16-8FC2-00C5C1AACCA4}"/>
+                <a16:creationId xmlns="" xmlns:a16="http://schemas.microsoft.com/office/drawing/2014/main" id="{747EDAF3-B8EA-0C16-8FC2-00C5C1AACCA4}"/>
               </a:ext>
             </a:extLst>
           </p:cNvPr>
@@ -1961,7 +1961,7 @@
           <p:cNvPr id="3" name="備忘稿版面配置區 2">
             <a:extLst>
               <a:ext uri="{FF2B5EF4-FFF2-40B4-BE49-F238E27FC236}">
-                <a16:creationId xmlns:a16="http://schemas.microsoft.com/office/drawing/2014/main" xmlns="" id="{2AFC5512-2ACA-40AC-FE98-A0E260C52EAF}"/>
+                <a16:creationId xmlns="" xmlns:a16="http://schemas.microsoft.com/office/drawing/2014/main" id="{2AFC5512-2ACA-40AC-FE98-A0E260C52EAF}"/>
               </a:ext>
             </a:extLst>
           </p:cNvPr>
@@ -1987,7 +1987,7 @@
           <p:cNvPr id="4" name="投影片編號版面配置區 3">
             <a:extLst>
               <a:ext uri="{FF2B5EF4-FFF2-40B4-BE49-F238E27FC236}">
-                <a16:creationId xmlns:a16="http://schemas.microsoft.com/office/drawing/2014/main" xmlns="" id="{513566B9-8C8D-F476-4186-FD06F269D3E2}"/>
+                <a16:creationId xmlns="" xmlns:a16="http://schemas.microsoft.com/office/drawing/2014/main" id="{513566B9-8C8D-F476-4186-FD06F269D3E2}"/>
               </a:ext>
             </a:extLst>
           </p:cNvPr>
@@ -2057,7 +2057,7 @@
         <p:cNvPr id="1" name="">
           <a:extLst>
             <a:ext uri="{FF2B5EF4-FFF2-40B4-BE49-F238E27FC236}">
-              <a16:creationId xmlns:a16="http://schemas.microsoft.com/office/drawing/2014/main" xmlns="" id="{1A0C75CA-3512-5200-7DBF-85A4A62254FB}"/>
+              <a16:creationId xmlns="" xmlns:a16="http://schemas.microsoft.com/office/drawing/2014/main" id="{1A0C75CA-3512-5200-7DBF-85A4A62254FB}"/>
             </a:ext>
           </a:extLst>
         </p:cNvPr>
@@ -2077,7 +2077,7 @@
           <p:cNvPr id="2" name="投影片影像版面配置區 1">
             <a:extLst>
               <a:ext uri="{FF2B5EF4-FFF2-40B4-BE49-F238E27FC236}">
-                <a16:creationId xmlns:a16="http://schemas.microsoft.com/office/drawing/2014/main" xmlns="" id="{E0701003-F5AB-395E-1F05-C522252BFC20}"/>
+                <a16:creationId xmlns="" xmlns:a16="http://schemas.microsoft.com/office/drawing/2014/main" id="{E0701003-F5AB-395E-1F05-C522252BFC20}"/>
               </a:ext>
             </a:extLst>
           </p:cNvPr>
@@ -2095,7 +2095,7 @@
           <p:cNvPr id="3" name="備忘稿版面配置區 2">
             <a:extLst>
               <a:ext uri="{FF2B5EF4-FFF2-40B4-BE49-F238E27FC236}">
-                <a16:creationId xmlns:a16="http://schemas.microsoft.com/office/drawing/2014/main" xmlns="" id="{1A99BDB9-DB82-178B-856D-AEF12F8D8224}"/>
+                <a16:creationId xmlns="" xmlns:a16="http://schemas.microsoft.com/office/drawing/2014/main" id="{1A99BDB9-DB82-178B-856D-AEF12F8D8224}"/>
               </a:ext>
             </a:extLst>
           </p:cNvPr>
@@ -2261,7 +2261,7 @@
           <p:cNvPr id="4" name="投影片編號版面配置區 3">
             <a:extLst>
               <a:ext uri="{FF2B5EF4-FFF2-40B4-BE49-F238E27FC236}">
-                <a16:creationId xmlns:a16="http://schemas.microsoft.com/office/drawing/2014/main" xmlns="" id="{AC1C5EF3-FCDA-CAE3-2B84-5FAC4A4AEC5E}"/>
+                <a16:creationId xmlns="" xmlns:a16="http://schemas.microsoft.com/office/drawing/2014/main" id="{AC1C5EF3-FCDA-CAE3-2B84-5FAC4A4AEC5E}"/>
               </a:ext>
             </a:extLst>
           </p:cNvPr>
@@ -2331,7 +2331,7 @@
         <p:cNvPr id="1" name="">
           <a:extLst>
             <a:ext uri="{FF2B5EF4-FFF2-40B4-BE49-F238E27FC236}">
-              <a16:creationId xmlns:a16="http://schemas.microsoft.com/office/drawing/2014/main" xmlns="" id="{BEAAB6D5-993E-26F5-9C44-C5D525DA7DDC}"/>
+              <a16:creationId xmlns="" xmlns:a16="http://schemas.microsoft.com/office/drawing/2014/main" id="{BEAAB6D5-993E-26F5-9C44-C5D525DA7DDC}"/>
             </a:ext>
           </a:extLst>
         </p:cNvPr>
@@ -2351,7 +2351,7 @@
           <p:cNvPr id="2" name="投影片影像版面配置區 1">
             <a:extLst>
               <a:ext uri="{FF2B5EF4-FFF2-40B4-BE49-F238E27FC236}">
-                <a16:creationId xmlns:a16="http://schemas.microsoft.com/office/drawing/2014/main" xmlns="" id="{1B5F2A66-F24A-A462-6F12-218184B02EBB}"/>
+                <a16:creationId xmlns="" xmlns:a16="http://schemas.microsoft.com/office/drawing/2014/main" id="{1B5F2A66-F24A-A462-6F12-218184B02EBB}"/>
               </a:ext>
             </a:extLst>
           </p:cNvPr>
@@ -2369,7 +2369,7 @@
           <p:cNvPr id="3" name="備忘稿版面配置區 2">
             <a:extLst>
               <a:ext uri="{FF2B5EF4-FFF2-40B4-BE49-F238E27FC236}">
-                <a16:creationId xmlns:a16="http://schemas.microsoft.com/office/drawing/2014/main" xmlns="" id="{26FDBCF0-B4E1-DC68-FF31-D0F8D4C04ACF}"/>
+                <a16:creationId xmlns="" xmlns:a16="http://schemas.microsoft.com/office/drawing/2014/main" id="{26FDBCF0-B4E1-DC68-FF31-D0F8D4C04ACF}"/>
               </a:ext>
             </a:extLst>
           </p:cNvPr>
@@ -2413,7 +2413,7 @@
           <p:cNvPr id="4" name="投影片編號版面配置區 3">
             <a:extLst>
               <a:ext uri="{FF2B5EF4-FFF2-40B4-BE49-F238E27FC236}">
-                <a16:creationId xmlns:a16="http://schemas.microsoft.com/office/drawing/2014/main" xmlns="" id="{9B8DA5A3-1BB6-F49D-76B7-392A3D01E52A}"/>
+                <a16:creationId xmlns="" xmlns:a16="http://schemas.microsoft.com/office/drawing/2014/main" id="{9B8DA5A3-1BB6-F49D-76B7-392A3D01E52A}"/>
               </a:ext>
             </a:extLst>
           </p:cNvPr>
@@ -2570,7 +2570,7 @@
         <p:cNvPr id="1" name="">
           <a:extLst>
             <a:ext uri="{FF2B5EF4-FFF2-40B4-BE49-F238E27FC236}">
-              <a16:creationId xmlns:a16="http://schemas.microsoft.com/office/drawing/2014/main" xmlns="" id="{7EE110AC-F4A0-7D78-93B0-AF6E23C1C86B}"/>
+              <a16:creationId xmlns="" xmlns:a16="http://schemas.microsoft.com/office/drawing/2014/main" id="{7EE110AC-F4A0-7D78-93B0-AF6E23C1C86B}"/>
             </a:ext>
           </a:extLst>
         </p:cNvPr>
@@ -2590,7 +2590,7 @@
           <p:cNvPr id="2" name="投影片影像版面配置區 1">
             <a:extLst>
               <a:ext uri="{FF2B5EF4-FFF2-40B4-BE49-F238E27FC236}">
-                <a16:creationId xmlns:a16="http://schemas.microsoft.com/office/drawing/2014/main" xmlns="" id="{AD5172F1-B577-25A9-AA74-C6AF67661642}"/>
+                <a16:creationId xmlns="" xmlns:a16="http://schemas.microsoft.com/office/drawing/2014/main" id="{AD5172F1-B577-25A9-AA74-C6AF67661642}"/>
               </a:ext>
             </a:extLst>
           </p:cNvPr>
@@ -2608,7 +2608,7 @@
           <p:cNvPr id="3" name="備忘稿版面配置區 2">
             <a:extLst>
               <a:ext uri="{FF2B5EF4-FFF2-40B4-BE49-F238E27FC236}">
-                <a16:creationId xmlns:a16="http://schemas.microsoft.com/office/drawing/2014/main" xmlns="" id="{E9BD86B3-8EAB-902A-DCF6-698ADFDE9E8A}"/>
+                <a16:creationId xmlns="" xmlns:a16="http://schemas.microsoft.com/office/drawing/2014/main" id="{E9BD86B3-8EAB-902A-DCF6-698ADFDE9E8A}"/>
               </a:ext>
             </a:extLst>
           </p:cNvPr>
@@ -2726,7 +2726,7 @@
           <p:cNvPr id="4" name="投影片編號版面配置區 3">
             <a:extLst>
               <a:ext uri="{FF2B5EF4-FFF2-40B4-BE49-F238E27FC236}">
-                <a16:creationId xmlns:a16="http://schemas.microsoft.com/office/drawing/2014/main" xmlns="" id="{69A9F744-724B-AE5D-EE31-BDB2E094083C}"/>
+                <a16:creationId xmlns="" xmlns:a16="http://schemas.microsoft.com/office/drawing/2014/main" id="{69A9F744-724B-AE5D-EE31-BDB2E094083C}"/>
               </a:ext>
             </a:extLst>
           </p:cNvPr>
@@ -2796,7 +2796,7 @@
         <p:cNvPr id="1" name="">
           <a:extLst>
             <a:ext uri="{FF2B5EF4-FFF2-40B4-BE49-F238E27FC236}">
-              <a16:creationId xmlns:a16="http://schemas.microsoft.com/office/drawing/2014/main" xmlns="" id="{A1F37CC5-12D8-16D3-9253-45D955F69194}"/>
+              <a16:creationId xmlns="" xmlns:a16="http://schemas.microsoft.com/office/drawing/2014/main" id="{A1F37CC5-12D8-16D3-9253-45D955F69194}"/>
             </a:ext>
           </a:extLst>
         </p:cNvPr>
@@ -2816,7 +2816,7 @@
           <p:cNvPr id="2" name="投影片影像版面配置區 1">
             <a:extLst>
               <a:ext uri="{FF2B5EF4-FFF2-40B4-BE49-F238E27FC236}">
-                <a16:creationId xmlns:a16="http://schemas.microsoft.com/office/drawing/2014/main" xmlns="" id="{34823088-0DD2-55CA-4BEE-63925050B074}"/>
+                <a16:creationId xmlns="" xmlns:a16="http://schemas.microsoft.com/office/drawing/2014/main" id="{34823088-0DD2-55CA-4BEE-63925050B074}"/>
               </a:ext>
             </a:extLst>
           </p:cNvPr>
@@ -2834,7 +2834,7 @@
           <p:cNvPr id="3" name="備忘稿版面配置區 2">
             <a:extLst>
               <a:ext uri="{FF2B5EF4-FFF2-40B4-BE49-F238E27FC236}">
-                <a16:creationId xmlns:a16="http://schemas.microsoft.com/office/drawing/2014/main" xmlns="" id="{ABECB207-5F1A-F34F-8FA9-CF58582A5670}"/>
+                <a16:creationId xmlns="" xmlns:a16="http://schemas.microsoft.com/office/drawing/2014/main" id="{ABECB207-5F1A-F34F-8FA9-CF58582A5670}"/>
               </a:ext>
             </a:extLst>
           </p:cNvPr>
@@ -2892,7 +2892,7 @@
           <p:cNvPr id="4" name="投影片編號版面配置區 3">
             <a:extLst>
               <a:ext uri="{FF2B5EF4-FFF2-40B4-BE49-F238E27FC236}">
-                <a16:creationId xmlns:a16="http://schemas.microsoft.com/office/drawing/2014/main" xmlns="" id="{25F3CA63-2998-B736-F517-4B82A1C74C4E}"/>
+                <a16:creationId xmlns="" xmlns:a16="http://schemas.microsoft.com/office/drawing/2014/main" id="{25F3CA63-2998-B736-F517-4B82A1C74C4E}"/>
               </a:ext>
             </a:extLst>
           </p:cNvPr>
@@ -2962,7 +2962,7 @@
         <p:cNvPr id="1" name="">
           <a:extLst>
             <a:ext uri="{FF2B5EF4-FFF2-40B4-BE49-F238E27FC236}">
-              <a16:creationId xmlns:a16="http://schemas.microsoft.com/office/drawing/2014/main" xmlns="" id="{A1F37CC5-12D8-16D3-9253-45D955F69194}"/>
+              <a16:creationId xmlns="" xmlns:a16="http://schemas.microsoft.com/office/drawing/2014/main" id="{A1F37CC5-12D8-16D3-9253-45D955F69194}"/>
             </a:ext>
           </a:extLst>
         </p:cNvPr>
@@ -2982,7 +2982,7 @@
           <p:cNvPr id="2" name="投影片影像版面配置區 1">
             <a:extLst>
               <a:ext uri="{FF2B5EF4-FFF2-40B4-BE49-F238E27FC236}">
-                <a16:creationId xmlns:a16="http://schemas.microsoft.com/office/drawing/2014/main" xmlns="" id="{34823088-0DD2-55CA-4BEE-63925050B074}"/>
+                <a16:creationId xmlns="" xmlns:a16="http://schemas.microsoft.com/office/drawing/2014/main" id="{34823088-0DD2-55CA-4BEE-63925050B074}"/>
               </a:ext>
             </a:extLst>
           </p:cNvPr>
@@ -3000,7 +3000,7 @@
           <p:cNvPr id="3" name="備忘稿版面配置區 2">
             <a:extLst>
               <a:ext uri="{FF2B5EF4-FFF2-40B4-BE49-F238E27FC236}">
-                <a16:creationId xmlns:a16="http://schemas.microsoft.com/office/drawing/2014/main" xmlns="" id="{ABECB207-5F1A-F34F-8FA9-CF58582A5670}"/>
+                <a16:creationId xmlns="" xmlns:a16="http://schemas.microsoft.com/office/drawing/2014/main" id="{ABECB207-5F1A-F34F-8FA9-CF58582A5670}"/>
               </a:ext>
             </a:extLst>
           </p:cNvPr>
@@ -3050,7 +3050,7 @@
           <p:cNvPr id="4" name="投影片編號版面配置區 3">
             <a:extLst>
               <a:ext uri="{FF2B5EF4-FFF2-40B4-BE49-F238E27FC236}">
-                <a16:creationId xmlns:a16="http://schemas.microsoft.com/office/drawing/2014/main" xmlns="" id="{25F3CA63-2998-B736-F517-4B82A1C74C4E}"/>
+                <a16:creationId xmlns="" xmlns:a16="http://schemas.microsoft.com/office/drawing/2014/main" id="{25F3CA63-2998-B736-F517-4B82A1C74C4E}"/>
               </a:ext>
             </a:extLst>
           </p:cNvPr>
@@ -3120,7 +3120,7 @@
         <p:cNvPr id="1" name="">
           <a:extLst>
             <a:ext uri="{FF2B5EF4-FFF2-40B4-BE49-F238E27FC236}">
-              <a16:creationId xmlns:a16="http://schemas.microsoft.com/office/drawing/2014/main" xmlns="" id="{A1F37CC5-12D8-16D3-9253-45D955F69194}"/>
+              <a16:creationId xmlns="" xmlns:a16="http://schemas.microsoft.com/office/drawing/2014/main" id="{A1F37CC5-12D8-16D3-9253-45D955F69194}"/>
             </a:ext>
           </a:extLst>
         </p:cNvPr>
@@ -3140,7 +3140,7 @@
           <p:cNvPr id="2" name="投影片影像版面配置區 1">
             <a:extLst>
               <a:ext uri="{FF2B5EF4-FFF2-40B4-BE49-F238E27FC236}">
-                <a16:creationId xmlns:a16="http://schemas.microsoft.com/office/drawing/2014/main" xmlns="" id="{34823088-0DD2-55CA-4BEE-63925050B074}"/>
+                <a16:creationId xmlns="" xmlns:a16="http://schemas.microsoft.com/office/drawing/2014/main" id="{34823088-0DD2-55CA-4BEE-63925050B074}"/>
               </a:ext>
             </a:extLst>
           </p:cNvPr>
@@ -3158,7 +3158,7 @@
           <p:cNvPr id="3" name="備忘稿版面配置區 2">
             <a:extLst>
               <a:ext uri="{FF2B5EF4-FFF2-40B4-BE49-F238E27FC236}">
-                <a16:creationId xmlns:a16="http://schemas.microsoft.com/office/drawing/2014/main" xmlns="" id="{ABECB207-5F1A-F34F-8FA9-CF58582A5670}"/>
+                <a16:creationId xmlns="" xmlns:a16="http://schemas.microsoft.com/office/drawing/2014/main" id="{ABECB207-5F1A-F34F-8FA9-CF58582A5670}"/>
               </a:ext>
             </a:extLst>
           </p:cNvPr>
@@ -3291,7 +3291,7 @@
           <p:cNvPr id="4" name="投影片編號版面配置區 3">
             <a:extLst>
               <a:ext uri="{FF2B5EF4-FFF2-40B4-BE49-F238E27FC236}">
-                <a16:creationId xmlns:a16="http://schemas.microsoft.com/office/drawing/2014/main" xmlns="" id="{25F3CA63-2998-B736-F517-4B82A1C74C4E}"/>
+                <a16:creationId xmlns="" xmlns:a16="http://schemas.microsoft.com/office/drawing/2014/main" id="{25F3CA63-2998-B736-F517-4B82A1C74C4E}"/>
               </a:ext>
             </a:extLst>
           </p:cNvPr>
@@ -3361,7 +3361,7 @@
         <p:cNvPr id="1" name="">
           <a:extLst>
             <a:ext uri="{FF2B5EF4-FFF2-40B4-BE49-F238E27FC236}">
-              <a16:creationId xmlns:a16="http://schemas.microsoft.com/office/drawing/2014/main" xmlns="" id="{9A851A70-D7FF-B69E-2F1F-5276D7F44C59}"/>
+              <a16:creationId xmlns="" xmlns:a16="http://schemas.microsoft.com/office/drawing/2014/main" id="{9A851A70-D7FF-B69E-2F1F-5276D7F44C59}"/>
             </a:ext>
           </a:extLst>
         </p:cNvPr>
@@ -3381,7 +3381,7 @@
           <p:cNvPr id="2" name="投影片影像版面配置區 1">
             <a:extLst>
               <a:ext uri="{FF2B5EF4-FFF2-40B4-BE49-F238E27FC236}">
-                <a16:creationId xmlns:a16="http://schemas.microsoft.com/office/drawing/2014/main" xmlns="" id="{4FB2E1DE-40DE-B1BA-7135-64BFFB1631B9}"/>
+                <a16:creationId xmlns="" xmlns:a16="http://schemas.microsoft.com/office/drawing/2014/main" id="{4FB2E1DE-40DE-B1BA-7135-64BFFB1631B9}"/>
               </a:ext>
             </a:extLst>
           </p:cNvPr>
@@ -3399,7 +3399,7 @@
           <p:cNvPr id="3" name="備忘稿版面配置區 2">
             <a:extLst>
               <a:ext uri="{FF2B5EF4-FFF2-40B4-BE49-F238E27FC236}">
-                <a16:creationId xmlns:a16="http://schemas.microsoft.com/office/drawing/2014/main" xmlns="" id="{C4F8DB8E-F5F1-21EB-D41F-2C635FB715D5}"/>
+                <a16:creationId xmlns="" xmlns:a16="http://schemas.microsoft.com/office/drawing/2014/main" id="{C4F8DB8E-F5F1-21EB-D41F-2C635FB715D5}"/>
               </a:ext>
             </a:extLst>
           </p:cNvPr>
@@ -3473,7 +3473,7 @@
           <p:cNvPr id="4" name="投影片編號版面配置區 3">
             <a:extLst>
               <a:ext uri="{FF2B5EF4-FFF2-40B4-BE49-F238E27FC236}">
-                <a16:creationId xmlns:a16="http://schemas.microsoft.com/office/drawing/2014/main" xmlns="" id="{A81AD260-1FA1-46D2-EEFC-6CE390861C06}"/>
+                <a16:creationId xmlns="" xmlns:a16="http://schemas.microsoft.com/office/drawing/2014/main" id="{A81AD260-1FA1-46D2-EEFC-6CE390861C06}"/>
               </a:ext>
             </a:extLst>
           </p:cNvPr>
@@ -3543,7 +3543,7 @@
         <p:cNvPr id="1" name="">
           <a:extLst>
             <a:ext uri="{FF2B5EF4-FFF2-40B4-BE49-F238E27FC236}">
-              <a16:creationId xmlns:a16="http://schemas.microsoft.com/office/drawing/2014/main" xmlns="" id="{19BD7BE6-0C6A-24C7-EDCE-42FCC8CD50FA}"/>
+              <a16:creationId xmlns="" xmlns:a16="http://schemas.microsoft.com/office/drawing/2014/main" id="{19BD7BE6-0C6A-24C7-EDCE-42FCC8CD50FA}"/>
             </a:ext>
           </a:extLst>
         </p:cNvPr>
@@ -3563,7 +3563,7 @@
           <p:cNvPr id="2" name="投影片影像版面配置區 1">
             <a:extLst>
               <a:ext uri="{FF2B5EF4-FFF2-40B4-BE49-F238E27FC236}">
-                <a16:creationId xmlns:a16="http://schemas.microsoft.com/office/drawing/2014/main" xmlns="" id="{963FA2D6-6572-94E0-F6B6-6A5BA5019224}"/>
+                <a16:creationId xmlns="" xmlns:a16="http://schemas.microsoft.com/office/drawing/2014/main" id="{963FA2D6-6572-94E0-F6B6-6A5BA5019224}"/>
               </a:ext>
             </a:extLst>
           </p:cNvPr>
@@ -3581,7 +3581,7 @@
           <p:cNvPr id="3" name="備忘稿版面配置區 2">
             <a:extLst>
               <a:ext uri="{FF2B5EF4-FFF2-40B4-BE49-F238E27FC236}">
-                <a16:creationId xmlns:a16="http://schemas.microsoft.com/office/drawing/2014/main" xmlns="" id="{57639A5D-EDAF-4F81-B67C-950D2048D712}"/>
+                <a16:creationId xmlns="" xmlns:a16="http://schemas.microsoft.com/office/drawing/2014/main" id="{57639A5D-EDAF-4F81-B67C-950D2048D712}"/>
               </a:ext>
             </a:extLst>
           </p:cNvPr>
@@ -3721,7 +3721,7 @@
           <p:cNvPr id="4" name="投影片編號版面配置區 3">
             <a:extLst>
               <a:ext uri="{FF2B5EF4-FFF2-40B4-BE49-F238E27FC236}">
-                <a16:creationId xmlns:a16="http://schemas.microsoft.com/office/drawing/2014/main" xmlns="" id="{F8ED7604-660E-D030-99B4-A4E74D119DFC}"/>
+                <a16:creationId xmlns="" xmlns:a16="http://schemas.microsoft.com/office/drawing/2014/main" id="{F8ED7604-660E-D030-99B4-A4E74D119DFC}"/>
               </a:ext>
             </a:extLst>
           </p:cNvPr>
@@ -3791,7 +3791,7 @@
         <p:cNvPr id="1" name="">
           <a:extLst>
             <a:ext uri="{FF2B5EF4-FFF2-40B4-BE49-F238E27FC236}">
-              <a16:creationId xmlns:a16="http://schemas.microsoft.com/office/drawing/2014/main" xmlns="" id="{D5BDCB87-D510-3E12-0B70-9F66CF2E4F53}"/>
+              <a16:creationId xmlns="" xmlns:a16="http://schemas.microsoft.com/office/drawing/2014/main" id="{D5BDCB87-D510-3E12-0B70-9F66CF2E4F53}"/>
             </a:ext>
           </a:extLst>
         </p:cNvPr>
@@ -3811,7 +3811,7 @@
           <p:cNvPr id="2" name="投影片影像版面配置區 1">
             <a:extLst>
               <a:ext uri="{FF2B5EF4-FFF2-40B4-BE49-F238E27FC236}">
-                <a16:creationId xmlns:a16="http://schemas.microsoft.com/office/drawing/2014/main" xmlns="" id="{9C2220D8-AB85-841B-EEFB-AA26789AEC0A}"/>
+                <a16:creationId xmlns="" xmlns:a16="http://schemas.microsoft.com/office/drawing/2014/main" id="{9C2220D8-AB85-841B-EEFB-AA26789AEC0A}"/>
               </a:ext>
             </a:extLst>
           </p:cNvPr>
@@ -3831,7 +3831,7 @@
               <p:cNvPr id="3" name="備忘稿版面配置區 2">
                 <a:extLst>
                   <a:ext uri="{FF2B5EF4-FFF2-40B4-BE49-F238E27FC236}">
-                    <a16:creationId xmlns:a16="http://schemas.microsoft.com/office/drawing/2014/main" xmlns="" id="{7E014429-932D-C388-46B7-D1B69AE89375}"/>
+                    <a16:creationId xmlns="" xmlns:a16="http://schemas.microsoft.com/office/drawing/2014/main" id="{7E014429-932D-C388-46B7-D1B69AE89375}"/>
                   </a:ext>
                 </a:extLst>
               </p:cNvPr>
@@ -4005,7 +4005,7 @@
           <p:cNvPr id="4" name="投影片編號版面配置區 3">
             <a:extLst>
               <a:ext uri="{FF2B5EF4-FFF2-40B4-BE49-F238E27FC236}">
-                <a16:creationId xmlns:a16="http://schemas.microsoft.com/office/drawing/2014/main" xmlns="" id="{ECE301C6-59CB-7CC2-23BD-00E11BDD5D3D}"/>
+                <a16:creationId xmlns="" xmlns:a16="http://schemas.microsoft.com/office/drawing/2014/main" id="{ECE301C6-59CB-7CC2-23BD-00E11BDD5D3D}"/>
               </a:ext>
             </a:extLst>
           </p:cNvPr>
@@ -4075,7 +4075,7 @@
         <p:cNvPr id="1" name="">
           <a:extLst>
             <a:ext uri="{FF2B5EF4-FFF2-40B4-BE49-F238E27FC236}">
-              <a16:creationId xmlns:a16="http://schemas.microsoft.com/office/drawing/2014/main" xmlns="" id="{20A72D9A-17ED-75CA-795D-509CF0D875D8}"/>
+              <a16:creationId xmlns="" xmlns:a16="http://schemas.microsoft.com/office/drawing/2014/main" id="{20A72D9A-17ED-75CA-795D-509CF0D875D8}"/>
             </a:ext>
           </a:extLst>
         </p:cNvPr>
@@ -4095,7 +4095,7 @@
           <p:cNvPr id="2" name="投影片影像版面配置區 1">
             <a:extLst>
               <a:ext uri="{FF2B5EF4-FFF2-40B4-BE49-F238E27FC236}">
-                <a16:creationId xmlns:a16="http://schemas.microsoft.com/office/drawing/2014/main" xmlns="" id="{269CEF18-87E4-2E84-A1BF-D6C3FDCAD952}"/>
+                <a16:creationId xmlns="" xmlns:a16="http://schemas.microsoft.com/office/drawing/2014/main" id="{269CEF18-87E4-2E84-A1BF-D6C3FDCAD952}"/>
               </a:ext>
             </a:extLst>
           </p:cNvPr>
@@ -4113,7 +4113,7 @@
           <p:cNvPr id="3" name="備忘稿版面配置區 2">
             <a:extLst>
               <a:ext uri="{FF2B5EF4-FFF2-40B4-BE49-F238E27FC236}">
-                <a16:creationId xmlns:a16="http://schemas.microsoft.com/office/drawing/2014/main" xmlns="" id="{F6A84E15-D033-5994-8FD9-2EF38E9D985D}"/>
+                <a16:creationId xmlns="" xmlns:a16="http://schemas.microsoft.com/office/drawing/2014/main" id="{F6A84E15-D033-5994-8FD9-2EF38E9D985D}"/>
               </a:ext>
             </a:extLst>
           </p:cNvPr>
@@ -4179,7 +4179,7 @@
           <p:cNvPr id="4" name="投影片編號版面配置區 3">
             <a:extLst>
               <a:ext uri="{FF2B5EF4-FFF2-40B4-BE49-F238E27FC236}">
-                <a16:creationId xmlns:a16="http://schemas.microsoft.com/office/drawing/2014/main" xmlns="" id="{9C3150AD-26DE-59A4-DABA-A8A92E906A36}"/>
+                <a16:creationId xmlns="" xmlns:a16="http://schemas.microsoft.com/office/drawing/2014/main" id="{9C3150AD-26DE-59A4-DABA-A8A92E906A36}"/>
               </a:ext>
             </a:extLst>
           </p:cNvPr>
@@ -9226,7 +9226,7 @@
         <p:cNvPr id="1" name="">
           <a:extLst>
             <a:ext uri="{FF2B5EF4-FFF2-40B4-BE49-F238E27FC236}">
-              <a16:creationId xmlns:a16="http://schemas.microsoft.com/office/drawing/2014/main" xmlns="" id="{818B4C8B-F5C5-5CEC-943D-9D2F2D9B601F}"/>
+              <a16:creationId xmlns="" xmlns:a16="http://schemas.microsoft.com/office/drawing/2014/main" id="{818B4C8B-F5C5-5CEC-943D-9D2F2D9B601F}"/>
             </a:ext>
           </a:extLst>
         </p:cNvPr>
@@ -9246,7 +9246,7 @@
           <p:cNvPr id="5" name="標題 1">
             <a:extLst>
               <a:ext uri="{FF2B5EF4-FFF2-40B4-BE49-F238E27FC236}">
-                <a16:creationId xmlns:a16="http://schemas.microsoft.com/office/drawing/2014/main" xmlns="" id="{AB6A1EF1-530D-13DA-3A32-D805CBBDBE9F}"/>
+                <a16:creationId xmlns="" xmlns:a16="http://schemas.microsoft.com/office/drawing/2014/main" id="{AB6A1EF1-530D-13DA-3A32-D805CBBDBE9F}"/>
               </a:ext>
             </a:extLst>
           </p:cNvPr>
@@ -9307,7 +9307,7 @@
           <p:cNvPr id="4" name="圖片 3">
             <a:extLst>
               <a:ext uri="{FF2B5EF4-FFF2-40B4-BE49-F238E27FC236}">
-                <a16:creationId xmlns:a16="http://schemas.microsoft.com/office/drawing/2014/main" xmlns="" id="{96A9D86D-B0E3-DDB0-9AAB-1EDB677233C3}"/>
+                <a16:creationId xmlns="" xmlns:a16="http://schemas.microsoft.com/office/drawing/2014/main" id="{96A9D86D-B0E3-DDB0-9AAB-1EDB677233C3}"/>
               </a:ext>
             </a:extLst>
           </p:cNvPr>
@@ -9337,7 +9337,7 @@
           <p:cNvPr id="20" name="圖片 19">
             <a:extLst>
               <a:ext uri="{FF2B5EF4-FFF2-40B4-BE49-F238E27FC236}">
-                <a16:creationId xmlns:a16="http://schemas.microsoft.com/office/drawing/2014/main" xmlns="" id="{D9106978-8618-368B-C714-E843DE9BBF2D}"/>
+                <a16:creationId xmlns="" xmlns:a16="http://schemas.microsoft.com/office/drawing/2014/main" id="{D9106978-8618-368B-C714-E843DE9BBF2D}"/>
               </a:ext>
             </a:extLst>
           </p:cNvPr>
@@ -9367,7 +9367,7 @@
           <p:cNvPr id="2" name="文字版面配置區 6">
             <a:extLst>
               <a:ext uri="{FF2B5EF4-FFF2-40B4-BE49-F238E27FC236}">
-                <a16:creationId xmlns:a16="http://schemas.microsoft.com/office/drawing/2014/main" xmlns="" id="{F5F7D37B-17ED-D781-882D-F5A5904761E7}"/>
+                <a16:creationId xmlns="" xmlns:a16="http://schemas.microsoft.com/office/drawing/2014/main" id="{F5F7D37B-17ED-D781-882D-F5A5904761E7}"/>
               </a:ext>
             </a:extLst>
           </p:cNvPr>
@@ -9677,7 +9677,7 @@
           <p:cNvPr id="13" name="圖片 12">
             <a:extLst>
               <a:ext uri="{FF2B5EF4-FFF2-40B4-BE49-F238E27FC236}">
-                <a16:creationId xmlns:a16="http://schemas.microsoft.com/office/drawing/2014/main" xmlns="" id="{BD19C367-BE8F-B4C7-634F-0FC177DCF5AF}"/>
+                <a16:creationId xmlns="" xmlns:a16="http://schemas.microsoft.com/office/drawing/2014/main" id="{BD19C367-BE8F-B4C7-634F-0FC177DCF5AF}"/>
               </a:ext>
             </a:extLst>
           </p:cNvPr>
@@ -9744,7 +9744,7 @@
           <p:cNvPr id="5" name="標題 1">
             <a:extLst>
               <a:ext uri="{FF2B5EF4-FFF2-40B4-BE49-F238E27FC236}">
-                <a16:creationId xmlns:a16="http://schemas.microsoft.com/office/drawing/2014/main" xmlns="" id="{E90C9C8B-5EB4-1217-C440-D175A3726885}"/>
+                <a16:creationId xmlns="" xmlns:a16="http://schemas.microsoft.com/office/drawing/2014/main" id="{E90C9C8B-5EB4-1217-C440-D175A3726885}"/>
               </a:ext>
             </a:extLst>
           </p:cNvPr>
@@ -9805,7 +9805,7 @@
           <p:cNvPr id="29" name="文字方塊 28">
             <a:extLst>
               <a:ext uri="{FF2B5EF4-FFF2-40B4-BE49-F238E27FC236}">
-                <a16:creationId xmlns:a16="http://schemas.microsoft.com/office/drawing/2014/main" xmlns="" id="{760342CA-0DBD-1A82-964B-91EFD4A59366}"/>
+                <a16:creationId xmlns="" xmlns:a16="http://schemas.microsoft.com/office/drawing/2014/main" id="{760342CA-0DBD-1A82-964B-91EFD4A59366}"/>
               </a:ext>
             </a:extLst>
           </p:cNvPr>
@@ -9860,7 +9860,7 @@
                 <a:hlinkClick r:id="rId2">
                   <a:extLst>
                     <a:ext uri="{A12FA001-AC4F-418D-AE19-62706E023703}">
-                      <ahyp:hlinkClr xmlns:ahyp="http://schemas.microsoft.com/office/drawing/2018/hyperlinkcolor" xmlns="" val="tx"/>
+                      <ahyp:hlinkClr xmlns="" xmlns:ahyp="http://schemas.microsoft.com/office/drawing/2018/hyperlinkcolor" val="tx"/>
                     </a:ext>
                   </a:extLst>
                 </a:hlinkClick>
@@ -9875,7 +9875,7 @@
                 <a:hlinkClick r:id="rId2">
                   <a:extLst>
                     <a:ext uri="{A12FA001-AC4F-418D-AE19-62706E023703}">
-                      <ahyp:hlinkClr xmlns:ahyp="http://schemas.microsoft.com/office/drawing/2018/hyperlinkcolor" xmlns="" val="tx"/>
+                      <ahyp:hlinkClr xmlns="" xmlns:ahyp="http://schemas.microsoft.com/office/drawing/2018/hyperlinkcolor" val="tx"/>
                     </a:ext>
                   </a:extLst>
                 </a:hlinkClick>
@@ -9903,7 +9903,7 @@
           <p:cNvPr id="34" name="群組 33">
             <a:extLst>
               <a:ext uri="{FF2B5EF4-FFF2-40B4-BE49-F238E27FC236}">
-                <a16:creationId xmlns:a16="http://schemas.microsoft.com/office/drawing/2014/main" xmlns="" id="{559E75C4-3E10-1036-661A-A9CE73B5024F}"/>
+                <a16:creationId xmlns="" xmlns:a16="http://schemas.microsoft.com/office/drawing/2014/main" id="{559E75C4-3E10-1036-661A-A9CE73B5024F}"/>
               </a:ext>
             </a:extLst>
           </p:cNvPr>
@@ -9923,7 +9923,7 @@
             <p:cNvPr id="28" name="圖片 27">
               <a:extLst>
                 <a:ext uri="{FF2B5EF4-FFF2-40B4-BE49-F238E27FC236}">
-                  <a16:creationId xmlns:a16="http://schemas.microsoft.com/office/drawing/2014/main" xmlns="" id="{634B4B9F-1E2C-7276-D9F5-E79E878BC91B}"/>
+                  <a16:creationId xmlns="" xmlns:a16="http://schemas.microsoft.com/office/drawing/2014/main" id="{634B4B9F-1E2C-7276-D9F5-E79E878BC91B}"/>
                 </a:ext>
               </a:extLst>
             </p:cNvPr>
@@ -9953,7 +9953,7 @@
             <p:cNvPr id="30" name="矩形 29">
               <a:extLst>
                 <a:ext uri="{FF2B5EF4-FFF2-40B4-BE49-F238E27FC236}">
-                  <a16:creationId xmlns:a16="http://schemas.microsoft.com/office/drawing/2014/main" xmlns="" id="{8AFDBE67-1AB0-0B47-9D0E-863589F97A7A}"/>
+                  <a16:creationId xmlns="" xmlns:a16="http://schemas.microsoft.com/office/drawing/2014/main" id="{8AFDBE67-1AB0-0B47-9D0E-863589F97A7A}"/>
                 </a:ext>
               </a:extLst>
             </p:cNvPr>
@@ -10009,7 +10009,7 @@
             <p:cNvPr id="32" name="矩形 31">
               <a:extLst>
                 <a:ext uri="{FF2B5EF4-FFF2-40B4-BE49-F238E27FC236}">
-                  <a16:creationId xmlns:a16="http://schemas.microsoft.com/office/drawing/2014/main" xmlns="" id="{FB12353F-A6C5-3C6E-5EFF-1AE079019357}"/>
+                  <a16:creationId xmlns="" xmlns:a16="http://schemas.microsoft.com/office/drawing/2014/main" id="{FB12353F-A6C5-3C6E-5EFF-1AE079019357}"/>
                 </a:ext>
               </a:extLst>
             </p:cNvPr>
@@ -10066,7 +10066,7 @@
           <p:cNvPr id="47" name="箭號: 向右 46">
             <a:extLst>
               <a:ext uri="{FF2B5EF4-FFF2-40B4-BE49-F238E27FC236}">
-                <a16:creationId xmlns:a16="http://schemas.microsoft.com/office/drawing/2014/main" xmlns="" id="{F6D006A1-E965-510F-8561-BA4CAB0357B9}"/>
+                <a16:creationId xmlns="" xmlns:a16="http://schemas.microsoft.com/office/drawing/2014/main" id="{F6D006A1-E965-510F-8561-BA4CAB0357B9}"/>
               </a:ext>
             </a:extLst>
           </p:cNvPr>
@@ -10127,7 +10127,7 @@
           <p:cNvPr id="48" name="箭號: 向右 47">
             <a:extLst>
               <a:ext uri="{FF2B5EF4-FFF2-40B4-BE49-F238E27FC236}">
-                <a16:creationId xmlns:a16="http://schemas.microsoft.com/office/drawing/2014/main" xmlns="" id="{9C2E09C9-B2FB-4AC2-B678-D22FF41F87FB}"/>
+                <a16:creationId xmlns="" xmlns:a16="http://schemas.microsoft.com/office/drawing/2014/main" id="{9C2E09C9-B2FB-4AC2-B678-D22FF41F87FB}"/>
               </a:ext>
             </a:extLst>
           </p:cNvPr>
@@ -10188,7 +10188,7 @@
           <p:cNvPr id="51" name="圖片 50">
             <a:extLst>
               <a:ext uri="{FF2B5EF4-FFF2-40B4-BE49-F238E27FC236}">
-                <a16:creationId xmlns:a16="http://schemas.microsoft.com/office/drawing/2014/main" xmlns="" id="{768BD875-7650-8E2E-BF05-D2A9055127DD}"/>
+                <a16:creationId xmlns="" xmlns:a16="http://schemas.microsoft.com/office/drawing/2014/main" id="{768BD875-7650-8E2E-BF05-D2A9055127DD}"/>
               </a:ext>
             </a:extLst>
           </p:cNvPr>
@@ -10218,7 +10218,7 @@
           <p:cNvPr id="53" name="圖片 52">
             <a:extLst>
               <a:ext uri="{FF2B5EF4-FFF2-40B4-BE49-F238E27FC236}">
-                <a16:creationId xmlns:a16="http://schemas.microsoft.com/office/drawing/2014/main" xmlns="" id="{803B63B2-9F1A-7D9A-584F-93EE655F51BB}"/>
+                <a16:creationId xmlns="" xmlns:a16="http://schemas.microsoft.com/office/drawing/2014/main" id="{803B63B2-9F1A-7D9A-584F-93EE655F51BB}"/>
               </a:ext>
             </a:extLst>
           </p:cNvPr>
@@ -10248,7 +10248,7 @@
           <p:cNvPr id="55" name="圖片 54">
             <a:extLst>
               <a:ext uri="{FF2B5EF4-FFF2-40B4-BE49-F238E27FC236}">
-                <a16:creationId xmlns:a16="http://schemas.microsoft.com/office/drawing/2014/main" xmlns="" id="{87D1C818-B490-2E90-9A46-3A24ACC931F9}"/>
+                <a16:creationId xmlns="" xmlns:a16="http://schemas.microsoft.com/office/drawing/2014/main" id="{87D1C818-B490-2E90-9A46-3A24ACC931F9}"/>
               </a:ext>
             </a:extLst>
           </p:cNvPr>
@@ -10278,7 +10278,7 @@
           <p:cNvPr id="60" name="群組 59">
             <a:extLst>
               <a:ext uri="{FF2B5EF4-FFF2-40B4-BE49-F238E27FC236}">
-                <a16:creationId xmlns:a16="http://schemas.microsoft.com/office/drawing/2014/main" xmlns="" id="{30231019-5D2A-FC74-902A-0DE0E738F875}"/>
+                <a16:creationId xmlns="" xmlns:a16="http://schemas.microsoft.com/office/drawing/2014/main" id="{30231019-5D2A-FC74-902A-0DE0E738F875}"/>
               </a:ext>
             </a:extLst>
           </p:cNvPr>
@@ -10298,7 +10298,7 @@
             <p:cNvPr id="57" name="圖片 56">
               <a:extLst>
                 <a:ext uri="{FF2B5EF4-FFF2-40B4-BE49-F238E27FC236}">
-                  <a16:creationId xmlns:a16="http://schemas.microsoft.com/office/drawing/2014/main" xmlns="" id="{BF72DFDE-46B5-B563-7643-AEC5DB0C4AE9}"/>
+                  <a16:creationId xmlns="" xmlns:a16="http://schemas.microsoft.com/office/drawing/2014/main" id="{BF72DFDE-46B5-B563-7643-AEC5DB0C4AE9}"/>
                 </a:ext>
               </a:extLst>
             </p:cNvPr>
@@ -10328,7 +10328,7 @@
             <p:cNvPr id="59" name="圖片 58">
               <a:extLst>
                 <a:ext uri="{FF2B5EF4-FFF2-40B4-BE49-F238E27FC236}">
-                  <a16:creationId xmlns:a16="http://schemas.microsoft.com/office/drawing/2014/main" xmlns="" id="{45F464C7-0F63-A907-3149-D3E1C341BB34}"/>
+                  <a16:creationId xmlns="" xmlns:a16="http://schemas.microsoft.com/office/drawing/2014/main" id="{45F464C7-0F63-A907-3149-D3E1C341BB34}"/>
                 </a:ext>
               </a:extLst>
             </p:cNvPr>
@@ -10359,7 +10359,7 @@
           <p:cNvPr id="65" name="群組 64">
             <a:extLst>
               <a:ext uri="{FF2B5EF4-FFF2-40B4-BE49-F238E27FC236}">
-                <a16:creationId xmlns:a16="http://schemas.microsoft.com/office/drawing/2014/main" xmlns="" id="{0019A0D0-D56F-9783-8FFE-E56546FBB97B}"/>
+                <a16:creationId xmlns="" xmlns:a16="http://schemas.microsoft.com/office/drawing/2014/main" id="{0019A0D0-D56F-9783-8FFE-E56546FBB97B}"/>
               </a:ext>
             </a:extLst>
           </p:cNvPr>
@@ -10379,7 +10379,7 @@
             <p:cNvPr id="62" name="圖片 61">
               <a:extLst>
                 <a:ext uri="{FF2B5EF4-FFF2-40B4-BE49-F238E27FC236}">
-                  <a16:creationId xmlns:a16="http://schemas.microsoft.com/office/drawing/2014/main" xmlns="" id="{5DF01417-4A33-EFF6-37DE-839006B72D09}"/>
+                  <a16:creationId xmlns="" xmlns:a16="http://schemas.microsoft.com/office/drawing/2014/main" id="{5DF01417-4A33-EFF6-37DE-839006B72D09}"/>
                 </a:ext>
               </a:extLst>
             </p:cNvPr>
@@ -10409,7 +10409,7 @@
             <p:cNvPr id="64" name="圖片 63">
               <a:extLst>
                 <a:ext uri="{FF2B5EF4-FFF2-40B4-BE49-F238E27FC236}">
-                  <a16:creationId xmlns:a16="http://schemas.microsoft.com/office/drawing/2014/main" xmlns="" id="{7929039C-2FA4-D0DA-3719-08555DD8302C}"/>
+                  <a16:creationId xmlns="" xmlns:a16="http://schemas.microsoft.com/office/drawing/2014/main" id="{7929039C-2FA4-D0DA-3719-08555DD8302C}"/>
                 </a:ext>
               </a:extLst>
             </p:cNvPr>
@@ -10440,7 +10440,7 @@
           <p:cNvPr id="2" name="文字版面配置區 6">
             <a:extLst>
               <a:ext uri="{FF2B5EF4-FFF2-40B4-BE49-F238E27FC236}">
-                <a16:creationId xmlns:a16="http://schemas.microsoft.com/office/drawing/2014/main" xmlns="" id="{FB39A942-B013-D404-F12B-67C00F2970E9}"/>
+                <a16:creationId xmlns="" xmlns:a16="http://schemas.microsoft.com/office/drawing/2014/main" id="{FB39A942-B013-D404-F12B-67C00F2970E9}"/>
               </a:ext>
             </a:extLst>
           </p:cNvPr>
@@ -10766,7 +10766,7 @@
         <p:cNvPr id="1" name="">
           <a:extLst>
             <a:ext uri="{FF2B5EF4-FFF2-40B4-BE49-F238E27FC236}">
-              <a16:creationId xmlns:a16="http://schemas.microsoft.com/office/drawing/2014/main" xmlns="" id="{DB55E878-4E26-12D7-EE94-7C8FB06533CC}"/>
+              <a16:creationId xmlns="" xmlns:a16="http://schemas.microsoft.com/office/drawing/2014/main" id="{DB55E878-4E26-12D7-EE94-7C8FB06533CC}"/>
             </a:ext>
           </a:extLst>
         </p:cNvPr>
@@ -10786,7 +10786,7 @@
           <p:cNvPr id="5" name="標題 1">
             <a:extLst>
               <a:ext uri="{FF2B5EF4-FFF2-40B4-BE49-F238E27FC236}">
-                <a16:creationId xmlns:a16="http://schemas.microsoft.com/office/drawing/2014/main" xmlns="" id="{EDA0264E-FAAC-7F32-85AD-9B494638827F}"/>
+                <a16:creationId xmlns="" xmlns:a16="http://schemas.microsoft.com/office/drawing/2014/main" id="{EDA0264E-FAAC-7F32-85AD-9B494638827F}"/>
               </a:ext>
             </a:extLst>
           </p:cNvPr>
@@ -10847,7 +10847,7 @@
           <p:cNvPr id="8" name="文字版面配置區 6">
             <a:extLst>
               <a:ext uri="{FF2B5EF4-FFF2-40B4-BE49-F238E27FC236}">
-                <a16:creationId xmlns:a16="http://schemas.microsoft.com/office/drawing/2014/main" xmlns="" id="{2DAC1A8A-F13A-5508-510D-5274EB3BC2A2}"/>
+                <a16:creationId xmlns="" xmlns:a16="http://schemas.microsoft.com/office/drawing/2014/main" id="{2DAC1A8A-F13A-5508-510D-5274EB3BC2A2}"/>
               </a:ext>
             </a:extLst>
           </p:cNvPr>
@@ -11365,7 +11365,7 @@
             <a:r>
               <a:rPr lang="en-US" altLang="zh-TW" sz="2000" dirty="0" err="1">
                 <a:solidFill>
-                  <a:srgbClr val="333333"/>
+                  <a:schemeClr val="tx1"/>
                 </a:solidFill>
                 <a:latin typeface="Times New Roman" panose="02020603050405020304" pitchFamily="18" charset="0"/>
                 <a:ea typeface="標楷體" panose="03000509000000000000" pitchFamily="65" charset="-120"/>
@@ -11474,7 +11474,7 @@
           <p:cNvPr id="11" name="圖片 10">
             <a:extLst>
               <a:ext uri="{FF2B5EF4-FFF2-40B4-BE49-F238E27FC236}">
-                <a16:creationId xmlns:a16="http://schemas.microsoft.com/office/drawing/2014/main" xmlns="" id="{AC18273A-6EC9-764F-CB84-A81D1E6A5E4B}"/>
+                <a16:creationId xmlns="" xmlns:a16="http://schemas.microsoft.com/office/drawing/2014/main" id="{AC18273A-6EC9-764F-CB84-A81D1E6A5E4B}"/>
               </a:ext>
             </a:extLst>
           </p:cNvPr>
@@ -11520,7 +11520,7 @@
         <p:cNvPr id="1" name="">
           <a:extLst>
             <a:ext uri="{FF2B5EF4-FFF2-40B4-BE49-F238E27FC236}">
-              <a16:creationId xmlns:a16="http://schemas.microsoft.com/office/drawing/2014/main" xmlns="" id="{4C524AA7-A8A7-A341-3AC3-0E3E342460FB}"/>
+              <a16:creationId xmlns="" xmlns:a16="http://schemas.microsoft.com/office/drawing/2014/main" id="{4C524AA7-A8A7-A341-3AC3-0E3E342460FB}"/>
             </a:ext>
           </a:extLst>
         </p:cNvPr>
@@ -11540,7 +11540,7 @@
           <p:cNvPr id="8" name="文字版面配置區 6">
             <a:extLst>
               <a:ext uri="{FF2B5EF4-FFF2-40B4-BE49-F238E27FC236}">
-                <a16:creationId xmlns:a16="http://schemas.microsoft.com/office/drawing/2014/main" xmlns="" id="{70AA535C-35C8-9CAA-5BCE-9D60896E7559}"/>
+                <a16:creationId xmlns="" xmlns:a16="http://schemas.microsoft.com/office/drawing/2014/main" id="{70AA535C-35C8-9CAA-5BCE-9D60896E7559}"/>
               </a:ext>
             </a:extLst>
           </p:cNvPr>
@@ -11839,7 +11839,7 @@
           <p:cNvPr id="12" name="矩形 11">
             <a:extLst>
               <a:ext uri="{FF2B5EF4-FFF2-40B4-BE49-F238E27FC236}">
-                <a16:creationId xmlns:a16="http://schemas.microsoft.com/office/drawing/2014/main" xmlns="" id="{650C616D-3C14-C08D-8569-D9AD85C5DC81}"/>
+                <a16:creationId xmlns="" xmlns:a16="http://schemas.microsoft.com/office/drawing/2014/main" id="{650C616D-3C14-C08D-8569-D9AD85C5DC81}"/>
               </a:ext>
             </a:extLst>
           </p:cNvPr>
@@ -11911,7 +11911,7 @@
           <p:cNvPr id="3" name="矩形 2">
             <a:extLst>
               <a:ext uri="{FF2B5EF4-FFF2-40B4-BE49-F238E27FC236}">
-                <a16:creationId xmlns:a16="http://schemas.microsoft.com/office/drawing/2014/main" xmlns="" id="{ED4440B2-D934-67C7-39A3-FE56C3443B86}"/>
+                <a16:creationId xmlns="" xmlns:a16="http://schemas.microsoft.com/office/drawing/2014/main" id="{ED4440B2-D934-67C7-39A3-FE56C3443B86}"/>
               </a:ext>
             </a:extLst>
           </p:cNvPr>
@@ -11983,7 +11983,7 @@
           <p:cNvPr id="5" name="矩形 4">
             <a:extLst>
               <a:ext uri="{FF2B5EF4-FFF2-40B4-BE49-F238E27FC236}">
-                <a16:creationId xmlns:a16="http://schemas.microsoft.com/office/drawing/2014/main" xmlns="" id="{F9DD2B38-5863-2279-1592-91EB1F252E2D}"/>
+                <a16:creationId xmlns="" xmlns:a16="http://schemas.microsoft.com/office/drawing/2014/main" id="{F9DD2B38-5863-2279-1592-91EB1F252E2D}"/>
               </a:ext>
             </a:extLst>
           </p:cNvPr>
@@ -12055,7 +12055,7 @@
           <p:cNvPr id="9" name="矩形 8">
             <a:extLst>
               <a:ext uri="{FF2B5EF4-FFF2-40B4-BE49-F238E27FC236}">
-                <a16:creationId xmlns:a16="http://schemas.microsoft.com/office/drawing/2014/main" xmlns="" id="{7CE50360-4991-7137-8AAB-9BACBD0D98BF}"/>
+                <a16:creationId xmlns="" xmlns:a16="http://schemas.microsoft.com/office/drawing/2014/main" id="{7CE50360-4991-7137-8AAB-9BACBD0D98BF}"/>
               </a:ext>
             </a:extLst>
           </p:cNvPr>
@@ -12127,7 +12127,7 @@
           <p:cNvPr id="13" name="矩形 12">
             <a:extLst>
               <a:ext uri="{FF2B5EF4-FFF2-40B4-BE49-F238E27FC236}">
-                <a16:creationId xmlns:a16="http://schemas.microsoft.com/office/drawing/2014/main" xmlns="" id="{AE5CC085-F68F-A65E-FCB3-C00C72B7D390}"/>
+                <a16:creationId xmlns="" xmlns:a16="http://schemas.microsoft.com/office/drawing/2014/main" id="{AE5CC085-F68F-A65E-FCB3-C00C72B7D390}"/>
               </a:ext>
             </a:extLst>
           </p:cNvPr>
@@ -12199,7 +12199,7 @@
           <p:cNvPr id="15" name="文字方塊 14">
             <a:extLst>
               <a:ext uri="{FF2B5EF4-FFF2-40B4-BE49-F238E27FC236}">
-                <a16:creationId xmlns:a16="http://schemas.microsoft.com/office/drawing/2014/main" xmlns="" id="{A6668260-2771-F381-C71B-D54F678C8A36}"/>
+                <a16:creationId xmlns="" xmlns:a16="http://schemas.microsoft.com/office/drawing/2014/main" id="{A6668260-2771-F381-C71B-D54F678C8A36}"/>
               </a:ext>
             </a:extLst>
           </p:cNvPr>
@@ -12249,7 +12249,7 @@
           <p:cNvPr id="17" name="文字方塊 16">
             <a:extLst>
               <a:ext uri="{FF2B5EF4-FFF2-40B4-BE49-F238E27FC236}">
-                <a16:creationId xmlns:a16="http://schemas.microsoft.com/office/drawing/2014/main" xmlns="" id="{378ECEDB-098A-A787-87A8-96D722F9D4AF}"/>
+                <a16:creationId xmlns="" xmlns:a16="http://schemas.microsoft.com/office/drawing/2014/main" id="{378ECEDB-098A-A787-87A8-96D722F9D4AF}"/>
               </a:ext>
             </a:extLst>
           </p:cNvPr>
@@ -12321,7 +12321,7 @@
           <p:cNvPr id="19" name="文字方塊 18">
             <a:extLst>
               <a:ext uri="{FF2B5EF4-FFF2-40B4-BE49-F238E27FC236}">
-                <a16:creationId xmlns:a16="http://schemas.microsoft.com/office/drawing/2014/main" xmlns="" id="{20124EDF-B4FC-F6C1-EB1E-C16D8613D5B9}"/>
+                <a16:creationId xmlns="" xmlns:a16="http://schemas.microsoft.com/office/drawing/2014/main" id="{20124EDF-B4FC-F6C1-EB1E-C16D8613D5B9}"/>
               </a:ext>
             </a:extLst>
           </p:cNvPr>
@@ -12374,7 +12374,7 @@
           <p:cNvPr id="22" name="文字方塊 21">
             <a:extLst>
               <a:ext uri="{FF2B5EF4-FFF2-40B4-BE49-F238E27FC236}">
-                <a16:creationId xmlns:a16="http://schemas.microsoft.com/office/drawing/2014/main" xmlns="" id="{004DC6C4-F258-3DB0-B9DD-DEC53EDBA4C2}"/>
+                <a16:creationId xmlns="" xmlns:a16="http://schemas.microsoft.com/office/drawing/2014/main" id="{004DC6C4-F258-3DB0-B9DD-DEC53EDBA4C2}"/>
               </a:ext>
             </a:extLst>
           </p:cNvPr>
@@ -12523,7 +12523,7 @@
           <p:cNvPr id="48" name="標題 1">
             <a:extLst>
               <a:ext uri="{FF2B5EF4-FFF2-40B4-BE49-F238E27FC236}">
-                <a16:creationId xmlns:a16="http://schemas.microsoft.com/office/drawing/2014/main" xmlns="" id="{8D095D36-8CDE-8903-759D-B3DC6978455E}"/>
+                <a16:creationId xmlns="" xmlns:a16="http://schemas.microsoft.com/office/drawing/2014/main" id="{8D095D36-8CDE-8903-759D-B3DC6978455E}"/>
               </a:ext>
             </a:extLst>
           </p:cNvPr>
@@ -12595,7 +12595,7 @@
           <p:cNvPr id="6" name="直線接點 5">
             <a:extLst>
               <a:ext uri="{FF2B5EF4-FFF2-40B4-BE49-F238E27FC236}">
-                <a16:creationId xmlns:a16="http://schemas.microsoft.com/office/drawing/2014/main" xmlns="" id="{6D20DBCA-6384-9E49-44A5-B651C92313FD}"/>
+                <a16:creationId xmlns="" xmlns:a16="http://schemas.microsoft.com/office/drawing/2014/main" id="{6D20DBCA-6384-9E49-44A5-B651C92313FD}"/>
               </a:ext>
             </a:extLst>
           </p:cNvPr>
@@ -12635,7 +12635,7 @@
           <p:cNvPr id="7" name="直線接點 6">
             <a:extLst>
               <a:ext uri="{FF2B5EF4-FFF2-40B4-BE49-F238E27FC236}">
-                <a16:creationId xmlns:a16="http://schemas.microsoft.com/office/drawing/2014/main" xmlns="" id="{07A16EC5-F29F-9583-72F5-FFE82D567074}"/>
+                <a16:creationId xmlns="" xmlns:a16="http://schemas.microsoft.com/office/drawing/2014/main" id="{07A16EC5-F29F-9583-72F5-FFE82D567074}"/>
               </a:ext>
             </a:extLst>
           </p:cNvPr>
@@ -12675,7 +12675,7 @@
           <p:cNvPr id="16" name="接點: 肘形 15">
             <a:extLst>
               <a:ext uri="{FF2B5EF4-FFF2-40B4-BE49-F238E27FC236}">
-                <a16:creationId xmlns:a16="http://schemas.microsoft.com/office/drawing/2014/main" xmlns="" id="{CD68CE2B-EDE8-D826-AB19-B6FAE4FE733F}"/>
+                <a16:creationId xmlns="" xmlns:a16="http://schemas.microsoft.com/office/drawing/2014/main" id="{CD68CE2B-EDE8-D826-AB19-B6FAE4FE733F}"/>
               </a:ext>
             </a:extLst>
           </p:cNvPr>
@@ -12715,7 +12715,7 @@
           <p:cNvPr id="18" name="接點: 肘形 17">
             <a:extLst>
               <a:ext uri="{FF2B5EF4-FFF2-40B4-BE49-F238E27FC236}">
-                <a16:creationId xmlns:a16="http://schemas.microsoft.com/office/drawing/2014/main" xmlns="" id="{834256DB-2ECB-B600-2909-4DADCB795645}"/>
+                <a16:creationId xmlns="" xmlns:a16="http://schemas.microsoft.com/office/drawing/2014/main" id="{834256DB-2ECB-B600-2909-4DADCB795645}"/>
               </a:ext>
             </a:extLst>
           </p:cNvPr>
@@ -12771,7 +12771,7 @@
         <p:cNvPr id="1" name="">
           <a:extLst>
             <a:ext uri="{FF2B5EF4-FFF2-40B4-BE49-F238E27FC236}">
-              <a16:creationId xmlns:a16="http://schemas.microsoft.com/office/drawing/2014/main" xmlns="" id="{9E2E81EF-0373-3A33-6C0E-EC125ABA4754}"/>
+              <a16:creationId xmlns="" xmlns:a16="http://schemas.microsoft.com/office/drawing/2014/main" id="{9E2E81EF-0373-3A33-6C0E-EC125ABA4754}"/>
             </a:ext>
           </a:extLst>
         </p:cNvPr>
@@ -12791,7 +12791,7 @@
           <p:cNvPr id="5" name="標題 1">
             <a:extLst>
               <a:ext uri="{FF2B5EF4-FFF2-40B4-BE49-F238E27FC236}">
-                <a16:creationId xmlns:a16="http://schemas.microsoft.com/office/drawing/2014/main" xmlns="" id="{A53491AC-D58D-DD71-6BC3-A952ED839EAE}"/>
+                <a16:creationId xmlns="" xmlns:a16="http://schemas.microsoft.com/office/drawing/2014/main" id="{A53491AC-D58D-DD71-6BC3-A952ED839EAE}"/>
               </a:ext>
             </a:extLst>
           </p:cNvPr>
@@ -12865,7 +12865,7 @@
           <p:cNvPr id="8" name="文字版面配置區 6">
             <a:extLst>
               <a:ext uri="{FF2B5EF4-FFF2-40B4-BE49-F238E27FC236}">
-                <a16:creationId xmlns:a16="http://schemas.microsoft.com/office/drawing/2014/main" xmlns="" id="{4B7FB8E3-5FB9-BA2C-1030-64042180558B}"/>
+                <a16:creationId xmlns="" xmlns:a16="http://schemas.microsoft.com/office/drawing/2014/main" id="{4B7FB8E3-5FB9-BA2C-1030-64042180558B}"/>
               </a:ext>
             </a:extLst>
           </p:cNvPr>
@@ -13467,7 +13467,7 @@
           <p:cNvPr id="37" name="文字方塊 36">
             <a:extLst>
               <a:ext uri="{FF2B5EF4-FFF2-40B4-BE49-F238E27FC236}">
-                <a16:creationId xmlns:a16="http://schemas.microsoft.com/office/drawing/2014/main" xmlns="" id="{DDC6F0BF-9EA8-E6B2-A137-CCF611DB7467}"/>
+                <a16:creationId xmlns="" xmlns:a16="http://schemas.microsoft.com/office/drawing/2014/main" id="{DDC6F0BF-9EA8-E6B2-A137-CCF611DB7467}"/>
               </a:ext>
             </a:extLst>
           </p:cNvPr>
@@ -13560,7 +13560,7 @@
           <p:cNvPr id="2" name="群組 1">
             <a:extLst>
               <a:ext uri="{FF2B5EF4-FFF2-40B4-BE49-F238E27FC236}">
-                <a16:creationId xmlns:a16="http://schemas.microsoft.com/office/drawing/2014/main" xmlns="" id="{CBE629BB-FCD4-6D57-6E16-842F0D9A490C}"/>
+                <a16:creationId xmlns="" xmlns:a16="http://schemas.microsoft.com/office/drawing/2014/main" id="{CBE629BB-FCD4-6D57-6E16-842F0D9A490C}"/>
               </a:ext>
             </a:extLst>
           </p:cNvPr>
@@ -13580,7 +13580,7 @@
             <p:cNvPr id="3" name="矩形 2">
               <a:extLst>
                 <a:ext uri="{FF2B5EF4-FFF2-40B4-BE49-F238E27FC236}">
-                  <a16:creationId xmlns:a16="http://schemas.microsoft.com/office/drawing/2014/main" xmlns="" id="{BE4674CE-908A-A27A-1191-F85802A1820F}"/>
+                  <a16:creationId xmlns="" xmlns:a16="http://schemas.microsoft.com/office/drawing/2014/main" id="{BE4674CE-908A-A27A-1191-F85802A1820F}"/>
                 </a:ext>
               </a:extLst>
             </p:cNvPr>
@@ -13668,7 +13668,7 @@
             <p:cNvPr id="4" name="矩形 3">
               <a:extLst>
                 <a:ext uri="{FF2B5EF4-FFF2-40B4-BE49-F238E27FC236}">
-                  <a16:creationId xmlns:a16="http://schemas.microsoft.com/office/drawing/2014/main" xmlns="" id="{7B79B8B2-24C1-7821-00C2-7247BC446D33}"/>
+                  <a16:creationId xmlns="" xmlns:a16="http://schemas.microsoft.com/office/drawing/2014/main" id="{7B79B8B2-24C1-7821-00C2-7247BC446D33}"/>
                 </a:ext>
               </a:extLst>
             </p:cNvPr>
@@ -13740,7 +13740,7 @@
             <p:cNvPr id="6" name="矩形 5">
               <a:extLst>
                 <a:ext uri="{FF2B5EF4-FFF2-40B4-BE49-F238E27FC236}">
-                  <a16:creationId xmlns:a16="http://schemas.microsoft.com/office/drawing/2014/main" xmlns="" id="{F6A5DF9E-07F0-35C8-2A0C-380AC25ADCF4}"/>
+                  <a16:creationId xmlns="" xmlns:a16="http://schemas.microsoft.com/office/drawing/2014/main" id="{F6A5DF9E-07F0-35C8-2A0C-380AC25ADCF4}"/>
                 </a:ext>
               </a:extLst>
             </p:cNvPr>
@@ -13812,7 +13812,7 @@
             <p:cNvPr id="7" name="矩形 6">
               <a:extLst>
                 <a:ext uri="{FF2B5EF4-FFF2-40B4-BE49-F238E27FC236}">
-                  <a16:creationId xmlns:a16="http://schemas.microsoft.com/office/drawing/2014/main" xmlns="" id="{C10CBAF7-08D8-D205-EB14-FFB6EB019E80}"/>
+                  <a16:creationId xmlns="" xmlns:a16="http://schemas.microsoft.com/office/drawing/2014/main" id="{C10CBAF7-08D8-D205-EB14-FFB6EB019E80}"/>
                 </a:ext>
               </a:extLst>
             </p:cNvPr>
@@ -13895,7 +13895,7 @@
             <p:cNvPr id="9" name="直線單箭頭接點 8">
               <a:extLst>
                 <a:ext uri="{FF2B5EF4-FFF2-40B4-BE49-F238E27FC236}">
-                  <a16:creationId xmlns:a16="http://schemas.microsoft.com/office/drawing/2014/main" xmlns="" id="{9C846300-679D-F3FB-700C-5C6E297463B8}"/>
+                  <a16:creationId xmlns="" xmlns:a16="http://schemas.microsoft.com/office/drawing/2014/main" id="{9C846300-679D-F3FB-700C-5C6E297463B8}"/>
                 </a:ext>
               </a:extLst>
             </p:cNvPr>
@@ -13943,7 +13943,7 @@
             <p:cNvPr id="10" name="直線單箭頭接點 9">
               <a:extLst>
                 <a:ext uri="{FF2B5EF4-FFF2-40B4-BE49-F238E27FC236}">
-                  <a16:creationId xmlns:a16="http://schemas.microsoft.com/office/drawing/2014/main" xmlns="" id="{8BA2B716-E7CB-879D-CB4E-107EA3BBFB26}"/>
+                  <a16:creationId xmlns="" xmlns:a16="http://schemas.microsoft.com/office/drawing/2014/main" id="{8BA2B716-E7CB-879D-CB4E-107EA3BBFB26}"/>
                 </a:ext>
               </a:extLst>
             </p:cNvPr>
@@ -13992,7 +13992,7 @@
             <p:cNvPr id="11" name="直線單箭頭接點 10">
               <a:extLst>
                 <a:ext uri="{FF2B5EF4-FFF2-40B4-BE49-F238E27FC236}">
-                  <a16:creationId xmlns:a16="http://schemas.microsoft.com/office/drawing/2014/main" xmlns="" id="{51E0C1C6-107D-2431-F5FE-37635E29DC01}"/>
+                  <a16:creationId xmlns="" xmlns:a16="http://schemas.microsoft.com/office/drawing/2014/main" id="{51E0C1C6-107D-2431-F5FE-37635E29DC01}"/>
                 </a:ext>
               </a:extLst>
             </p:cNvPr>
@@ -14058,7 +14058,7 @@
         <p:cNvPr id="1" name="">
           <a:extLst>
             <a:ext uri="{FF2B5EF4-FFF2-40B4-BE49-F238E27FC236}">
-              <a16:creationId xmlns:a16="http://schemas.microsoft.com/office/drawing/2014/main" xmlns="" id="{66960790-B8EB-5C9C-6F3D-DB91C8FE7261}"/>
+              <a16:creationId xmlns="" xmlns:a16="http://schemas.microsoft.com/office/drawing/2014/main" id="{66960790-B8EB-5C9C-6F3D-DB91C8FE7261}"/>
             </a:ext>
           </a:extLst>
         </p:cNvPr>
@@ -14078,7 +14078,7 @@
           <p:cNvPr id="5" name="標題 1">
             <a:extLst>
               <a:ext uri="{FF2B5EF4-FFF2-40B4-BE49-F238E27FC236}">
-                <a16:creationId xmlns:a16="http://schemas.microsoft.com/office/drawing/2014/main" xmlns="" id="{469D4A17-091F-B9B9-0E15-4C16A04E17C4}"/>
+                <a16:creationId xmlns="" xmlns:a16="http://schemas.microsoft.com/office/drawing/2014/main" id="{469D4A17-091F-B9B9-0E15-4C16A04E17C4}"/>
               </a:ext>
             </a:extLst>
           </p:cNvPr>
@@ -14115,7 +14115,7 @@
           <p:cNvPr id="8" name="文字版面配置區 6">
             <a:extLst>
               <a:ext uri="{FF2B5EF4-FFF2-40B4-BE49-F238E27FC236}">
-                <a16:creationId xmlns:a16="http://schemas.microsoft.com/office/drawing/2014/main" xmlns="" id="{B362863B-770E-5FA2-25CC-948566047750}"/>
+                <a16:creationId xmlns="" xmlns:a16="http://schemas.microsoft.com/office/drawing/2014/main" id="{B362863B-770E-5FA2-25CC-948566047750}"/>
               </a:ext>
             </a:extLst>
           </p:cNvPr>
@@ -14724,7 +14724,7 @@
           <p:cNvPr id="37" name="文字方塊 36">
             <a:extLst>
               <a:ext uri="{FF2B5EF4-FFF2-40B4-BE49-F238E27FC236}">
-                <a16:creationId xmlns:a16="http://schemas.microsoft.com/office/drawing/2014/main" xmlns="" id="{95268582-08DF-7D9E-8ED6-18BC73EECF65}"/>
+                <a16:creationId xmlns="" xmlns:a16="http://schemas.microsoft.com/office/drawing/2014/main" id="{95268582-08DF-7D9E-8ED6-18BC73EECF65}"/>
               </a:ext>
             </a:extLst>
           </p:cNvPr>
@@ -14809,7 +14809,7 @@
           <p:cNvPr id="4" name="群組 3">
             <a:extLst>
               <a:ext uri="{FF2B5EF4-FFF2-40B4-BE49-F238E27FC236}">
-                <a16:creationId xmlns:a16="http://schemas.microsoft.com/office/drawing/2014/main" xmlns="" id="{E3098E80-3E93-5F92-3D39-A2E369A16F44}"/>
+                <a16:creationId xmlns="" xmlns:a16="http://schemas.microsoft.com/office/drawing/2014/main" id="{E3098E80-3E93-5F92-3D39-A2E369A16F44}"/>
               </a:ext>
             </a:extLst>
           </p:cNvPr>
@@ -14829,7 +14829,7 @@
             <p:cNvPr id="2" name="圖片 1">
               <a:extLst>
                 <a:ext uri="{FF2B5EF4-FFF2-40B4-BE49-F238E27FC236}">
-                  <a16:creationId xmlns:a16="http://schemas.microsoft.com/office/drawing/2014/main" xmlns="" id="{3894B2E3-3478-B7B9-3C2D-EBC37E245116}"/>
+                  <a16:creationId xmlns="" xmlns:a16="http://schemas.microsoft.com/office/drawing/2014/main" id="{3894B2E3-3478-B7B9-3C2D-EBC37E245116}"/>
                 </a:ext>
               </a:extLst>
             </p:cNvPr>
@@ -14859,7 +14859,7 @@
             <p:cNvPr id="3" name="文字方塊 2">
               <a:extLst>
                 <a:ext uri="{FF2B5EF4-FFF2-40B4-BE49-F238E27FC236}">
-                  <a16:creationId xmlns:a16="http://schemas.microsoft.com/office/drawing/2014/main" xmlns="" id="{4D6ADC0D-B06D-8D18-E21A-00B9010014EB}"/>
+                  <a16:creationId xmlns="" xmlns:a16="http://schemas.microsoft.com/office/drawing/2014/main" id="{4D6ADC0D-B06D-8D18-E21A-00B9010014EB}"/>
                 </a:ext>
               </a:extLst>
             </p:cNvPr>
@@ -15037,7 +15037,7 @@
         <p:cNvPr id="1" name="">
           <a:extLst>
             <a:ext uri="{FF2B5EF4-FFF2-40B4-BE49-F238E27FC236}">
-              <a16:creationId xmlns:a16="http://schemas.microsoft.com/office/drawing/2014/main" xmlns="" id="{9F0396C1-EA64-DABF-AB1E-DAC8812CEAFA}"/>
+              <a16:creationId xmlns="" xmlns:a16="http://schemas.microsoft.com/office/drawing/2014/main" id="{9F0396C1-EA64-DABF-AB1E-DAC8812CEAFA}"/>
             </a:ext>
           </a:extLst>
         </p:cNvPr>
@@ -15057,7 +15057,7 @@
           <p:cNvPr id="7" name="文字版面配置區 6">
             <a:extLst>
               <a:ext uri="{FF2B5EF4-FFF2-40B4-BE49-F238E27FC236}">
-                <a16:creationId xmlns:a16="http://schemas.microsoft.com/office/drawing/2014/main" xmlns="" id="{CA232325-2F30-826A-0F33-B3038ABB7C4A}"/>
+                <a16:creationId xmlns="" xmlns:a16="http://schemas.microsoft.com/office/drawing/2014/main" id="{CA232325-2F30-826A-0F33-B3038ABB7C4A}"/>
               </a:ext>
             </a:extLst>
           </p:cNvPr>
@@ -15469,7 +15469,42 @@
                 <a:ea typeface="標楷體" panose="03000509000000000000" pitchFamily="65" charset="-120"/>
                 <a:cs typeface="Times New Roman" panose="02020603050405020304" pitchFamily="18" charset="0"/>
               </a:rPr>
-              <a:t>校正檔案，並與</a:t>
+              <a:t>校正檔案</a:t>
+            </a:r>
+            <a:r>
+              <a:rPr lang="zh-TW" altLang="zh-TW" sz="1800" kern="0" dirty="0" smtClean="0">
+                <a:effectLst/>
+                <a:latin typeface="Times New Roman" panose="02020603050405020304" pitchFamily="18" charset="0"/>
+                <a:ea typeface="標楷體" panose="03000509000000000000" pitchFamily="65" charset="-120"/>
+                <a:cs typeface="Times New Roman" panose="02020603050405020304" pitchFamily="18" charset="0"/>
+              </a:rPr>
+              <a:t>，</a:t>
+            </a:r>
+            <a:r>
+              <a:rPr lang="zh-TW" altLang="en-US" sz="1800" dirty="0">
+                <a:latin typeface="Times New Roman" panose="02020603050405020304" pitchFamily="18" charset="0"/>
+                <a:ea typeface="標楷體" panose="03000509000000000000" pitchFamily="65" charset="-120"/>
+                <a:cs typeface="Times New Roman" panose="02020603050405020304" pitchFamily="18" charset="0"/>
+              </a:rPr>
+              <a:t>最終</a:t>
+            </a:r>
+            <a:r>
+              <a:rPr lang="zh-TW" altLang="zh-TW" sz="1800" kern="0" dirty="0" smtClean="0">
+                <a:effectLst/>
+                <a:latin typeface="Times New Roman" panose="02020603050405020304" pitchFamily="18" charset="0"/>
+                <a:ea typeface="標楷體" panose="03000509000000000000" pitchFamily="65" charset="-120"/>
+                <a:cs typeface="Times New Roman" panose="02020603050405020304" pitchFamily="18" charset="0"/>
+              </a:rPr>
+              <a:t>與</a:t>
+            </a:r>
+            <a:r>
+              <a:rPr lang="en-US" altLang="zh-TW" sz="1800" kern="0" dirty="0" smtClean="0">
+                <a:effectLst/>
+                <a:latin typeface="Times New Roman" panose="02020603050405020304" pitchFamily="18" charset="0"/>
+                <a:ea typeface="標楷體" panose="03000509000000000000" pitchFamily="65" charset="-120"/>
+                <a:cs typeface="Times New Roman" panose="02020603050405020304" pitchFamily="18" charset="0"/>
+              </a:rPr>
+              <a:t> </a:t>
             </a:r>
             <a:r>
               <a:rPr lang="en-US" altLang="zh-TW" sz="1800" kern="0" dirty="0">
@@ -15478,7 +15513,7 @@
                 <a:ea typeface="標楷體" panose="03000509000000000000" pitchFamily="65" charset="-120"/>
                 <a:cs typeface="Times New Roman" panose="02020603050405020304" pitchFamily="18" charset="0"/>
               </a:rPr>
-              <a:t> AD board </a:t>
+              <a:t>AD board </a:t>
             </a:r>
             <a:r>
               <a:rPr lang="zh-TW" altLang="zh-TW" sz="1800" kern="0" dirty="0">
@@ -15621,7 +15656,7 @@
           <p:cNvPr id="5" name="文字方塊 4">
             <a:extLst>
               <a:ext uri="{FF2B5EF4-FFF2-40B4-BE49-F238E27FC236}">
-                <a16:creationId xmlns:a16="http://schemas.microsoft.com/office/drawing/2014/main" xmlns="" id="{DB74C124-A957-366F-6E34-2775A49BE3DE}"/>
+                <a16:creationId xmlns="" xmlns:a16="http://schemas.microsoft.com/office/drawing/2014/main" id="{DB74C124-A957-366F-6E34-2775A49BE3DE}"/>
               </a:ext>
             </a:extLst>
           </p:cNvPr>
@@ -15698,7 +15733,7 @@
           <p:cNvPr id="8" name="標題 7">
             <a:extLst>
               <a:ext uri="{FF2B5EF4-FFF2-40B4-BE49-F238E27FC236}">
-                <a16:creationId xmlns:a16="http://schemas.microsoft.com/office/drawing/2014/main" xmlns="" id="{2ECA5CFA-64BC-E5E3-8FED-52AADBD2AC01}"/>
+                <a16:creationId xmlns="" xmlns:a16="http://schemas.microsoft.com/office/drawing/2014/main" id="{2ECA5CFA-64BC-E5E3-8FED-52AADBD2AC01}"/>
               </a:ext>
             </a:extLst>
           </p:cNvPr>
@@ -15791,7 +15826,7 @@
         <p:cNvPr id="1" name="">
           <a:extLst>
             <a:ext uri="{FF2B5EF4-FFF2-40B4-BE49-F238E27FC236}">
-              <a16:creationId xmlns:a16="http://schemas.microsoft.com/office/drawing/2014/main" xmlns="" id="{DD8453AC-EB70-4A67-F417-8BC6D8250DCE}"/>
+              <a16:creationId xmlns="" xmlns:a16="http://schemas.microsoft.com/office/drawing/2014/main" id="{DD8453AC-EB70-4A67-F417-8BC6D8250DCE}"/>
             </a:ext>
           </a:extLst>
         </p:cNvPr>
@@ -15811,7 +15846,7 @@
           <p:cNvPr id="2" name="標題 1">
             <a:extLst>
               <a:ext uri="{FF2B5EF4-FFF2-40B4-BE49-F238E27FC236}">
-                <a16:creationId xmlns:a16="http://schemas.microsoft.com/office/drawing/2014/main" xmlns="" id="{79BD5A1B-DBE5-5CC6-2DE0-BBB353DB67DB}"/>
+                <a16:creationId xmlns="" xmlns:a16="http://schemas.microsoft.com/office/drawing/2014/main" id="{79BD5A1B-DBE5-5CC6-2DE0-BBB353DB67DB}"/>
               </a:ext>
             </a:extLst>
           </p:cNvPr>
@@ -15888,7 +15923,7 @@
           <p:cNvPr id="4" name="圖片 3">
             <a:extLst>
               <a:ext uri="{FF2B5EF4-FFF2-40B4-BE49-F238E27FC236}">
-                <a16:creationId xmlns:a16="http://schemas.microsoft.com/office/drawing/2014/main" xmlns="" id="{E6234153-2243-3AE6-50F0-5BF73B34C545}"/>
+                <a16:creationId xmlns="" xmlns:a16="http://schemas.microsoft.com/office/drawing/2014/main" id="{E6234153-2243-3AE6-50F0-5BF73B34C545}"/>
               </a:ext>
             </a:extLst>
           </p:cNvPr>
@@ -16011,7 +16046,7 @@
         <p:cNvPr id="1" name="">
           <a:extLst>
             <a:ext uri="{FF2B5EF4-FFF2-40B4-BE49-F238E27FC236}">
-              <a16:creationId xmlns:a16="http://schemas.microsoft.com/office/drawing/2014/main" xmlns="" id="{DD8453AC-EB70-4A67-F417-8BC6D8250DCE}"/>
+              <a16:creationId xmlns="" xmlns:a16="http://schemas.microsoft.com/office/drawing/2014/main" id="{DD8453AC-EB70-4A67-F417-8BC6D8250DCE}"/>
             </a:ext>
           </a:extLst>
         </p:cNvPr>
@@ -16031,7 +16066,7 @@
           <p:cNvPr id="5" name="圖片 4">
             <a:extLst>
               <a:ext uri="{FF2B5EF4-FFF2-40B4-BE49-F238E27FC236}">
-                <a16:creationId xmlns:a16="http://schemas.microsoft.com/office/drawing/2014/main" xmlns="" id="{022D6573-B360-5362-29E4-19065BAD6A7B}"/>
+                <a16:creationId xmlns="" xmlns:a16="http://schemas.microsoft.com/office/drawing/2014/main" id="{022D6573-B360-5362-29E4-19065BAD6A7B}"/>
               </a:ext>
             </a:extLst>
           </p:cNvPr>
@@ -16138,7 +16173,7 @@
           <p:cNvPr id="8" name="標題 1">
             <a:extLst>
               <a:ext uri="{FF2B5EF4-FFF2-40B4-BE49-F238E27FC236}">
-                <a16:creationId xmlns:a16="http://schemas.microsoft.com/office/drawing/2014/main" xmlns="" id="{A46802AE-6441-4C36-D719-6F0C7C8257B9}"/>
+                <a16:creationId xmlns="" xmlns:a16="http://schemas.microsoft.com/office/drawing/2014/main" id="{A46802AE-6441-4C36-D719-6F0C7C8257B9}"/>
               </a:ext>
             </a:extLst>
           </p:cNvPr>
@@ -16236,7 +16271,7 @@
         <p:cNvPr id="1" name="">
           <a:extLst>
             <a:ext uri="{FF2B5EF4-FFF2-40B4-BE49-F238E27FC236}">
-              <a16:creationId xmlns:a16="http://schemas.microsoft.com/office/drawing/2014/main" xmlns="" id="{DD8453AC-EB70-4A67-F417-8BC6D8250DCE}"/>
+              <a16:creationId xmlns="" xmlns:a16="http://schemas.microsoft.com/office/drawing/2014/main" id="{DD8453AC-EB70-4A67-F417-8BC6D8250DCE}"/>
             </a:ext>
           </a:extLst>
         </p:cNvPr>
@@ -16256,7 +16291,7 @@
           <p:cNvPr id="8" name="標題 1">
             <a:extLst>
               <a:ext uri="{FF2B5EF4-FFF2-40B4-BE49-F238E27FC236}">
-                <a16:creationId xmlns:a16="http://schemas.microsoft.com/office/drawing/2014/main" xmlns="" id="{A46802AE-6441-4C36-D719-6F0C7C8257B9}"/>
+                <a16:creationId xmlns="" xmlns:a16="http://schemas.microsoft.com/office/drawing/2014/main" id="{A46802AE-6441-4C36-D719-6F0C7C8257B9}"/>
               </a:ext>
             </a:extLst>
           </p:cNvPr>
@@ -16338,7 +16373,7 @@
           <p:cNvPr id="3" name="矩形 2">
             <a:extLst>
               <a:ext uri="{FF2B5EF4-FFF2-40B4-BE49-F238E27FC236}">
-                <a16:creationId xmlns:a16="http://schemas.microsoft.com/office/drawing/2014/main" xmlns="" id="{8996691D-0E63-96A8-06C3-40BD92D16B49}"/>
+                <a16:creationId xmlns="" xmlns:a16="http://schemas.microsoft.com/office/drawing/2014/main" id="{8996691D-0E63-96A8-06C3-40BD92D16B49}"/>
               </a:ext>
             </a:extLst>
           </p:cNvPr>
@@ -16412,7 +16447,7 @@
           <p:cNvPr id="6" name="矩形 5">
             <a:extLst>
               <a:ext uri="{FF2B5EF4-FFF2-40B4-BE49-F238E27FC236}">
-                <a16:creationId xmlns:a16="http://schemas.microsoft.com/office/drawing/2014/main" xmlns="" id="{4799A24E-5028-5D4A-D223-7433C160BC28}"/>
+                <a16:creationId xmlns="" xmlns:a16="http://schemas.microsoft.com/office/drawing/2014/main" id="{4799A24E-5028-5D4A-D223-7433C160BC28}"/>
               </a:ext>
             </a:extLst>
           </p:cNvPr>
@@ -16506,7 +16541,7 @@
           <p:cNvPr id="9" name="矩形 8">
             <a:extLst>
               <a:ext uri="{FF2B5EF4-FFF2-40B4-BE49-F238E27FC236}">
-                <a16:creationId xmlns:a16="http://schemas.microsoft.com/office/drawing/2014/main" xmlns="" id="{0C7FD048-9844-D5F5-79C1-78326AF84161}"/>
+                <a16:creationId xmlns="" xmlns:a16="http://schemas.microsoft.com/office/drawing/2014/main" id="{0C7FD048-9844-D5F5-79C1-78326AF84161}"/>
               </a:ext>
             </a:extLst>
           </p:cNvPr>
@@ -16570,7 +16605,7 @@
           <p:cNvPr id="11" name="矩形 10">
             <a:extLst>
               <a:ext uri="{FF2B5EF4-FFF2-40B4-BE49-F238E27FC236}">
-                <a16:creationId xmlns:a16="http://schemas.microsoft.com/office/drawing/2014/main" xmlns="" id="{CBAE6D19-C5AE-76A5-69B0-0B748849B999}"/>
+                <a16:creationId xmlns="" xmlns:a16="http://schemas.microsoft.com/office/drawing/2014/main" id="{CBAE6D19-C5AE-76A5-69B0-0B748849B999}"/>
               </a:ext>
             </a:extLst>
           </p:cNvPr>
@@ -16664,7 +16699,7 @@
           <p:cNvPr id="13" name="矩形 12">
             <a:extLst>
               <a:ext uri="{FF2B5EF4-FFF2-40B4-BE49-F238E27FC236}">
-                <a16:creationId xmlns:a16="http://schemas.microsoft.com/office/drawing/2014/main" xmlns="" id="{2502BAEE-F1D2-BEA9-82BD-3CC9D2FBDA07}"/>
+                <a16:creationId xmlns="" xmlns:a16="http://schemas.microsoft.com/office/drawing/2014/main" id="{2502BAEE-F1D2-BEA9-82BD-3CC9D2FBDA07}"/>
               </a:ext>
             </a:extLst>
           </p:cNvPr>
@@ -16802,7 +16837,7 @@
           <p:cNvPr id="15" name="直線單箭頭接點 14">
             <a:extLst>
               <a:ext uri="{FF2B5EF4-FFF2-40B4-BE49-F238E27FC236}">
-                <a16:creationId xmlns:a16="http://schemas.microsoft.com/office/drawing/2014/main" xmlns="" id="{2BD354F0-AC29-3F7F-21BC-649A5C656B58}"/>
+                <a16:creationId xmlns="" xmlns:a16="http://schemas.microsoft.com/office/drawing/2014/main" id="{2BD354F0-AC29-3F7F-21BC-649A5C656B58}"/>
               </a:ext>
             </a:extLst>
           </p:cNvPr>
@@ -16851,7 +16886,7 @@
           <p:cNvPr id="17" name="直線單箭頭接點 16">
             <a:extLst>
               <a:ext uri="{FF2B5EF4-FFF2-40B4-BE49-F238E27FC236}">
-                <a16:creationId xmlns:a16="http://schemas.microsoft.com/office/drawing/2014/main" xmlns="" id="{91C66148-B7CE-F63D-A1CA-8F52D14070C9}"/>
+                <a16:creationId xmlns="" xmlns:a16="http://schemas.microsoft.com/office/drawing/2014/main" id="{91C66148-B7CE-F63D-A1CA-8F52D14070C9}"/>
               </a:ext>
             </a:extLst>
           </p:cNvPr>
@@ -16900,7 +16935,7 @@
           <p:cNvPr id="25" name="接點: 肘形 24">
             <a:extLst>
               <a:ext uri="{FF2B5EF4-FFF2-40B4-BE49-F238E27FC236}">
-                <a16:creationId xmlns:a16="http://schemas.microsoft.com/office/drawing/2014/main" xmlns="" id="{A078D20F-E1A1-89E1-B06C-8361B263C03A}"/>
+                <a16:creationId xmlns="" xmlns:a16="http://schemas.microsoft.com/office/drawing/2014/main" id="{A078D20F-E1A1-89E1-B06C-8361B263C03A}"/>
               </a:ext>
             </a:extLst>
           </p:cNvPr>
@@ -16945,7 +16980,7 @@
           <p:cNvPr id="27" name="接點: 肘形 26">
             <a:extLst>
               <a:ext uri="{FF2B5EF4-FFF2-40B4-BE49-F238E27FC236}">
-                <a16:creationId xmlns:a16="http://schemas.microsoft.com/office/drawing/2014/main" xmlns="" id="{84FB698F-C81D-C384-B862-92390427F862}"/>
+                <a16:creationId xmlns="" xmlns:a16="http://schemas.microsoft.com/office/drawing/2014/main" id="{84FB698F-C81D-C384-B862-92390427F862}"/>
               </a:ext>
             </a:extLst>
           </p:cNvPr>
@@ -16990,7 +17025,7 @@
           <p:cNvPr id="2" name="矩形 1">
             <a:extLst>
               <a:ext uri="{FF2B5EF4-FFF2-40B4-BE49-F238E27FC236}">
-                <a16:creationId xmlns:a16="http://schemas.microsoft.com/office/drawing/2014/main" xmlns="" id="{040CC765-0ACB-3526-012D-9BE339051FC6}"/>
+                <a16:creationId xmlns="" xmlns:a16="http://schemas.microsoft.com/office/drawing/2014/main" id="{040CC765-0ACB-3526-012D-9BE339051FC6}"/>
               </a:ext>
             </a:extLst>
           </p:cNvPr>
@@ -17091,7 +17126,7 @@
           <p:cNvPr id="4" name="矩形 3">
             <a:extLst>
               <a:ext uri="{FF2B5EF4-FFF2-40B4-BE49-F238E27FC236}">
-                <a16:creationId xmlns:a16="http://schemas.microsoft.com/office/drawing/2014/main" xmlns="" id="{5F9AF93F-DB5D-01F9-5B21-8E5AB3B7689B}"/>
+                <a16:creationId xmlns="" xmlns:a16="http://schemas.microsoft.com/office/drawing/2014/main" id="{5F9AF93F-DB5D-01F9-5B21-8E5AB3B7689B}"/>
               </a:ext>
             </a:extLst>
           </p:cNvPr>
@@ -17192,7 +17227,7 @@
           <p:cNvPr id="7" name="直線單箭頭接點 6">
             <a:extLst>
               <a:ext uri="{FF2B5EF4-FFF2-40B4-BE49-F238E27FC236}">
-                <a16:creationId xmlns:a16="http://schemas.microsoft.com/office/drawing/2014/main" xmlns="" id="{B5327E90-1DBD-C854-9C91-B358AEF2228B}"/>
+                <a16:creationId xmlns="" xmlns:a16="http://schemas.microsoft.com/office/drawing/2014/main" id="{B5327E90-1DBD-C854-9C91-B358AEF2228B}"/>
               </a:ext>
             </a:extLst>
           </p:cNvPr>
@@ -17241,7 +17276,7 @@
           <p:cNvPr id="12" name="直線單箭頭接點 11">
             <a:extLst>
               <a:ext uri="{FF2B5EF4-FFF2-40B4-BE49-F238E27FC236}">
-                <a16:creationId xmlns:a16="http://schemas.microsoft.com/office/drawing/2014/main" xmlns="" id="{5E215614-39B3-08CA-860A-53F71A1C84ED}"/>
+                <a16:creationId xmlns="" xmlns:a16="http://schemas.microsoft.com/office/drawing/2014/main" id="{5E215614-39B3-08CA-860A-53F71A1C84ED}"/>
               </a:ext>
             </a:extLst>
           </p:cNvPr>
@@ -17306,7 +17341,7 @@
         <p:cNvPr id="1" name="">
           <a:extLst>
             <a:ext uri="{FF2B5EF4-FFF2-40B4-BE49-F238E27FC236}">
-              <a16:creationId xmlns:a16="http://schemas.microsoft.com/office/drawing/2014/main" xmlns="" id="{C25E9AAA-7E36-1E17-83F9-FD3A18A28BE9}"/>
+              <a16:creationId xmlns="" xmlns:a16="http://schemas.microsoft.com/office/drawing/2014/main" id="{C25E9AAA-7E36-1E17-83F9-FD3A18A28BE9}"/>
             </a:ext>
           </a:extLst>
         </p:cNvPr>
@@ -17326,7 +17361,7 @@
           <p:cNvPr id="8" name="標題 1">
             <a:extLst>
               <a:ext uri="{FF2B5EF4-FFF2-40B4-BE49-F238E27FC236}">
-                <a16:creationId xmlns:a16="http://schemas.microsoft.com/office/drawing/2014/main" xmlns="" id="{912256C4-A35A-439C-D194-BE22EDF76531}"/>
+                <a16:creationId xmlns="" xmlns:a16="http://schemas.microsoft.com/office/drawing/2014/main" id="{912256C4-A35A-439C-D194-BE22EDF76531}"/>
               </a:ext>
             </a:extLst>
           </p:cNvPr>
@@ -17395,7 +17430,7 @@
           <p:cNvPr id="3" name="圖片 2">
             <a:extLst>
               <a:ext uri="{FF2B5EF4-FFF2-40B4-BE49-F238E27FC236}">
-                <a16:creationId xmlns:a16="http://schemas.microsoft.com/office/drawing/2014/main" xmlns="" id="{2639EB24-C1BB-C0D1-86B0-82E9D709404B}"/>
+                <a16:creationId xmlns="" xmlns:a16="http://schemas.microsoft.com/office/drawing/2014/main" id="{2639EB24-C1BB-C0D1-86B0-82E9D709404B}"/>
               </a:ext>
             </a:extLst>
           </p:cNvPr>
@@ -17425,7 +17460,7 @@
           <p:cNvPr id="5" name="表格 4">
             <a:extLst>
               <a:ext uri="{FF2B5EF4-FFF2-40B4-BE49-F238E27FC236}">
-                <a16:creationId xmlns:a16="http://schemas.microsoft.com/office/drawing/2014/main" xmlns="" id="{309845EE-BEFD-0830-6F6A-014C6C37200E}"/>
+                <a16:creationId xmlns="" xmlns:a16="http://schemas.microsoft.com/office/drawing/2014/main" id="{309845EE-BEFD-0830-6F6A-014C6C37200E}"/>
               </a:ext>
             </a:extLst>
           </p:cNvPr>
@@ -17454,7 +17489,7 @@
                 <a:gridCol w="2338794">
                   <a:extLst>
                     <a:ext uri="{9D8B030D-6E8A-4147-A177-3AD203B41FA5}">
-                      <a16:colId xmlns:a16="http://schemas.microsoft.com/office/drawing/2014/main" xmlns="" val="3358617967"/>
+                      <a16:colId xmlns="" xmlns:a16="http://schemas.microsoft.com/office/drawing/2014/main" val="3358617967"/>
                     </a:ext>
                   </a:extLst>
                 </a:gridCol>
@@ -17501,7 +17536,7 @@
                 </a:tc>
                 <a:extLst>
                   <a:ext uri="{0D108BD9-81ED-4DB2-BD59-A6C34878D82A}">
-                    <a16:rowId xmlns:a16="http://schemas.microsoft.com/office/drawing/2014/main" xmlns="" val="1724688990"/>
+                    <a16:rowId xmlns="" xmlns:a16="http://schemas.microsoft.com/office/drawing/2014/main" val="1724688990"/>
                   </a:ext>
                 </a:extLst>
               </a:tr>
@@ -17608,7 +17643,7 @@
                 </a:tc>
                 <a:extLst>
                   <a:ext uri="{0D108BD9-81ED-4DB2-BD59-A6C34878D82A}">
-                    <a16:rowId xmlns:a16="http://schemas.microsoft.com/office/drawing/2014/main" xmlns="" val="3735960893"/>
+                    <a16:rowId xmlns="" xmlns:a16="http://schemas.microsoft.com/office/drawing/2014/main" val="3735960893"/>
                   </a:ext>
                 </a:extLst>
               </a:tr>
@@ -17649,7 +17684,7 @@
                 </a:tc>
                 <a:extLst>
                   <a:ext uri="{0D108BD9-81ED-4DB2-BD59-A6C34878D82A}">
-                    <a16:rowId xmlns:a16="http://schemas.microsoft.com/office/drawing/2014/main" xmlns="" val="29441199"/>
+                    <a16:rowId xmlns="" xmlns:a16="http://schemas.microsoft.com/office/drawing/2014/main" val="29441199"/>
                   </a:ext>
                 </a:extLst>
               </a:tr>
@@ -17662,7 +17697,7 @@
           <p:cNvPr id="7" name="文字方塊 6">
             <a:extLst>
               <a:ext uri="{FF2B5EF4-FFF2-40B4-BE49-F238E27FC236}">
-                <a16:creationId xmlns:a16="http://schemas.microsoft.com/office/drawing/2014/main" xmlns="" id="{7B3BC9D9-DB6E-B366-7FB4-7B64CF0727F4}"/>
+                <a16:creationId xmlns="" xmlns:a16="http://schemas.microsoft.com/office/drawing/2014/main" id="{7B3BC9D9-DB6E-B366-7FB4-7B64CF0727F4}"/>
               </a:ext>
             </a:extLst>
           </p:cNvPr>
@@ -17747,7 +17782,7 @@
           <p:cNvPr id="2" name="矩形 1">
             <a:extLst>
               <a:ext uri="{FF2B5EF4-FFF2-40B4-BE49-F238E27FC236}">
-                <a16:creationId xmlns:a16="http://schemas.microsoft.com/office/drawing/2014/main" xmlns="" id="{A829EB0E-AACB-4717-2AF1-1A80075824B3}"/>
+                <a16:creationId xmlns="" xmlns:a16="http://schemas.microsoft.com/office/drawing/2014/main" id="{A829EB0E-AACB-4717-2AF1-1A80075824B3}"/>
               </a:ext>
             </a:extLst>
           </p:cNvPr>
@@ -17799,7 +17834,7 @@
           <p:cNvPr id="6" name="矩形 5">
             <a:extLst>
               <a:ext uri="{FF2B5EF4-FFF2-40B4-BE49-F238E27FC236}">
-                <a16:creationId xmlns:a16="http://schemas.microsoft.com/office/drawing/2014/main" xmlns="" id="{DBA4A946-AB83-D442-73C2-419DF0200B4A}"/>
+                <a16:creationId xmlns="" xmlns:a16="http://schemas.microsoft.com/office/drawing/2014/main" id="{DBA4A946-AB83-D442-73C2-419DF0200B4A}"/>
               </a:ext>
             </a:extLst>
           </p:cNvPr>
@@ -17851,7 +17886,7 @@
           <p:cNvPr id="9" name="矩形 8">
             <a:extLst>
               <a:ext uri="{FF2B5EF4-FFF2-40B4-BE49-F238E27FC236}">
-                <a16:creationId xmlns:a16="http://schemas.microsoft.com/office/drawing/2014/main" xmlns="" id="{D557AD61-57FE-CB79-79F2-D22419EF9C7B}"/>
+                <a16:creationId xmlns="" xmlns:a16="http://schemas.microsoft.com/office/drawing/2014/main" id="{D557AD61-57FE-CB79-79F2-D22419EF9C7B}"/>
               </a:ext>
             </a:extLst>
           </p:cNvPr>
@@ -17903,7 +17938,7 @@
           <p:cNvPr id="10" name="矩形 9">
             <a:extLst>
               <a:ext uri="{FF2B5EF4-FFF2-40B4-BE49-F238E27FC236}">
-                <a16:creationId xmlns:a16="http://schemas.microsoft.com/office/drawing/2014/main" xmlns="" id="{98949FE3-DF1E-452A-732C-5B0AB66B81F0}"/>
+                <a16:creationId xmlns="" xmlns:a16="http://schemas.microsoft.com/office/drawing/2014/main" id="{98949FE3-DF1E-452A-732C-5B0AB66B81F0}"/>
               </a:ext>
             </a:extLst>
           </p:cNvPr>
@@ -17971,7 +18006,7 @@
         <p:cNvPr id="1" name="">
           <a:extLst>
             <a:ext uri="{FF2B5EF4-FFF2-40B4-BE49-F238E27FC236}">
-              <a16:creationId xmlns:a16="http://schemas.microsoft.com/office/drawing/2014/main" xmlns="" id="{C07BEAB9-4E35-7AB7-EE54-74E82B9599A8}"/>
+              <a16:creationId xmlns="" xmlns:a16="http://schemas.microsoft.com/office/drawing/2014/main" id="{C07BEAB9-4E35-7AB7-EE54-74E82B9599A8}"/>
             </a:ext>
           </a:extLst>
         </p:cNvPr>
@@ -17991,7 +18026,7 @@
           <p:cNvPr id="10" name="文字版面配置區 6">
             <a:extLst>
               <a:ext uri="{FF2B5EF4-FFF2-40B4-BE49-F238E27FC236}">
-                <a16:creationId xmlns:a16="http://schemas.microsoft.com/office/drawing/2014/main" xmlns="" id="{8CC25041-484B-028D-E365-35F32AD88DA6}"/>
+                <a16:creationId xmlns="" xmlns:a16="http://schemas.microsoft.com/office/drawing/2014/main" id="{8CC25041-484B-028D-E365-35F32AD88DA6}"/>
               </a:ext>
             </a:extLst>
           </p:cNvPr>
@@ -18508,7 +18543,7 @@
           <p:cNvPr id="34" name="群組 33">
             <a:extLst>
               <a:ext uri="{FF2B5EF4-FFF2-40B4-BE49-F238E27FC236}">
-                <a16:creationId xmlns:a16="http://schemas.microsoft.com/office/drawing/2014/main" xmlns="" id="{C0E10B67-4895-DEEA-0A4E-8D187E08F60B}"/>
+                <a16:creationId xmlns="" xmlns:a16="http://schemas.microsoft.com/office/drawing/2014/main" id="{C0E10B67-4895-DEEA-0A4E-8D187E08F60B}"/>
               </a:ext>
             </a:extLst>
           </p:cNvPr>
@@ -18528,7 +18563,7 @@
             <p:cNvPr id="4" name="矩形 3">
               <a:extLst>
                 <a:ext uri="{FF2B5EF4-FFF2-40B4-BE49-F238E27FC236}">
-                  <a16:creationId xmlns:a16="http://schemas.microsoft.com/office/drawing/2014/main" xmlns="" id="{3EAD8FDE-BAC0-876F-4587-8CBAB5D895F9}"/>
+                  <a16:creationId xmlns="" xmlns:a16="http://schemas.microsoft.com/office/drawing/2014/main" id="{3EAD8FDE-BAC0-876F-4587-8CBAB5D895F9}"/>
                 </a:ext>
               </a:extLst>
             </p:cNvPr>
@@ -18622,7 +18657,7 @@
             <p:cNvPr id="6" name="矩形 5">
               <a:extLst>
                 <a:ext uri="{FF2B5EF4-FFF2-40B4-BE49-F238E27FC236}">
-                  <a16:creationId xmlns:a16="http://schemas.microsoft.com/office/drawing/2014/main" xmlns="" id="{F211FECE-805D-4DE7-5329-317233CD1CB4}"/>
+                  <a16:creationId xmlns="" xmlns:a16="http://schemas.microsoft.com/office/drawing/2014/main" id="{F211FECE-805D-4DE7-5329-317233CD1CB4}"/>
                 </a:ext>
               </a:extLst>
             </p:cNvPr>
@@ -18752,7 +18787,7 @@
             <p:cNvPr id="7" name="矩形 6">
               <a:extLst>
                 <a:ext uri="{FF2B5EF4-FFF2-40B4-BE49-F238E27FC236}">
-                  <a16:creationId xmlns:a16="http://schemas.microsoft.com/office/drawing/2014/main" xmlns="" id="{0DFB61CE-E671-9B90-DDBA-64DE2605725B}"/>
+                  <a16:creationId xmlns="" xmlns:a16="http://schemas.microsoft.com/office/drawing/2014/main" id="{0DFB61CE-E671-9B90-DDBA-64DE2605725B}"/>
                 </a:ext>
               </a:extLst>
             </p:cNvPr>
@@ -18857,7 +18892,7 @@
             <p:cNvPr id="13" name="直線單箭頭接點 12">
               <a:extLst>
                 <a:ext uri="{FF2B5EF4-FFF2-40B4-BE49-F238E27FC236}">
-                  <a16:creationId xmlns:a16="http://schemas.microsoft.com/office/drawing/2014/main" xmlns="" id="{8755CBCD-89A6-A4CF-B535-C3D84BCDE39D}"/>
+                  <a16:creationId xmlns="" xmlns:a16="http://schemas.microsoft.com/office/drawing/2014/main" id="{8755CBCD-89A6-A4CF-B535-C3D84BCDE39D}"/>
                 </a:ext>
               </a:extLst>
             </p:cNvPr>
@@ -18905,7 +18940,7 @@
             <p:cNvPr id="14" name="直線單箭頭接點 13">
               <a:extLst>
                 <a:ext uri="{FF2B5EF4-FFF2-40B4-BE49-F238E27FC236}">
-                  <a16:creationId xmlns:a16="http://schemas.microsoft.com/office/drawing/2014/main" xmlns="" id="{43C321DC-EFCF-71ED-6AA0-C27F2B92914D}"/>
+                  <a16:creationId xmlns="" xmlns:a16="http://schemas.microsoft.com/office/drawing/2014/main" id="{43C321DC-EFCF-71ED-6AA0-C27F2B92914D}"/>
                 </a:ext>
               </a:extLst>
             </p:cNvPr>
@@ -18954,7 +18989,7 @@
             <p:cNvPr id="22" name="矩形 21">
               <a:extLst>
                 <a:ext uri="{FF2B5EF4-FFF2-40B4-BE49-F238E27FC236}">
-                  <a16:creationId xmlns:a16="http://schemas.microsoft.com/office/drawing/2014/main" xmlns="" id="{9A9DF41D-9E06-E236-CA43-60889F6EE310}"/>
+                  <a16:creationId xmlns="" xmlns:a16="http://schemas.microsoft.com/office/drawing/2014/main" id="{9A9DF41D-9E06-E236-CA43-60889F6EE310}"/>
                 </a:ext>
               </a:extLst>
             </p:cNvPr>
@@ -19011,7 +19046,7 @@
           <p:cNvPr id="33" name="標題 1">
             <a:extLst>
               <a:ext uri="{FF2B5EF4-FFF2-40B4-BE49-F238E27FC236}">
-                <a16:creationId xmlns:a16="http://schemas.microsoft.com/office/drawing/2014/main" xmlns="" id="{FE6A0969-18CA-A43C-E3E0-A72CA997A88D}"/>
+                <a16:creationId xmlns="" xmlns:a16="http://schemas.microsoft.com/office/drawing/2014/main" id="{FE6A0969-18CA-A43C-E3E0-A72CA997A88D}"/>
               </a:ext>
             </a:extLst>
           </p:cNvPr>
@@ -19072,7 +19107,7 @@
           <p:cNvPr id="3" name="圖片 2">
             <a:extLst>
               <a:ext uri="{FF2B5EF4-FFF2-40B4-BE49-F238E27FC236}">
-                <a16:creationId xmlns:a16="http://schemas.microsoft.com/office/drawing/2014/main" xmlns="" id="{D006D859-0957-02BC-0A72-AE413C4596E3}"/>
+                <a16:creationId xmlns="" xmlns:a16="http://schemas.microsoft.com/office/drawing/2014/main" id="{D006D859-0957-02BC-0A72-AE413C4596E3}"/>
               </a:ext>
             </a:extLst>
           </p:cNvPr>
@@ -19104,7 +19139,7 @@
               <p:cNvPr id="5" name="文字方塊 4">
                 <a:extLst>
                   <a:ext uri="{FF2B5EF4-FFF2-40B4-BE49-F238E27FC236}">
-                    <a16:creationId xmlns:a16="http://schemas.microsoft.com/office/drawing/2014/main" xmlns="" id="{FAEA6F4D-5E5A-9C8D-AC25-FD4659BC3AF6}"/>
+                    <a16:creationId xmlns="" xmlns:a16="http://schemas.microsoft.com/office/drawing/2014/main" id="{FAEA6F4D-5E5A-9C8D-AC25-FD4659BC3AF6}"/>
                   </a:ext>
                 </a:extLst>
               </p:cNvPr>
@@ -19286,7 +19321,7 @@
         <p:cNvPr id="1" name="">
           <a:extLst>
             <a:ext uri="{FF2B5EF4-FFF2-40B4-BE49-F238E27FC236}">
-              <a16:creationId xmlns:a16="http://schemas.microsoft.com/office/drawing/2014/main" xmlns="" id="{D91FE357-957A-3182-12E7-90F219E152EF}"/>
+              <a16:creationId xmlns="" xmlns:a16="http://schemas.microsoft.com/office/drawing/2014/main" id="{D91FE357-957A-3182-12E7-90F219E152EF}"/>
             </a:ext>
           </a:extLst>
         </p:cNvPr>
@@ -19306,7 +19341,7 @@
           <p:cNvPr id="5" name="標題 1">
             <a:extLst>
               <a:ext uri="{FF2B5EF4-FFF2-40B4-BE49-F238E27FC236}">
-                <a16:creationId xmlns:a16="http://schemas.microsoft.com/office/drawing/2014/main" xmlns="" id="{61298DEC-0097-A431-0637-9C6765567C9F}"/>
+                <a16:creationId xmlns="" xmlns:a16="http://schemas.microsoft.com/office/drawing/2014/main" id="{61298DEC-0097-A431-0637-9C6765567C9F}"/>
               </a:ext>
             </a:extLst>
           </p:cNvPr>
@@ -19367,7 +19402,7 @@
           <p:cNvPr id="2" name="表格 1">
             <a:extLst>
               <a:ext uri="{FF2B5EF4-FFF2-40B4-BE49-F238E27FC236}">
-                <a16:creationId xmlns:a16="http://schemas.microsoft.com/office/drawing/2014/main" xmlns="" id="{CE5B8F78-8A22-D5AF-CA79-EE55EA23B193}"/>
+                <a16:creationId xmlns="" xmlns:a16="http://schemas.microsoft.com/office/drawing/2014/main" id="{CE5B8F78-8A22-D5AF-CA79-EE55EA23B193}"/>
               </a:ext>
             </a:extLst>
           </p:cNvPr>
@@ -19396,21 +19431,21 @@
                 <a:gridCol w="1047396">
                   <a:extLst>
                     <a:ext uri="{9D8B030D-6E8A-4147-A177-3AD203B41FA5}">
-                      <a16:colId xmlns:a16="http://schemas.microsoft.com/office/drawing/2014/main" xmlns="" val="3590102437"/>
+                      <a16:colId xmlns="" xmlns:a16="http://schemas.microsoft.com/office/drawing/2014/main" val="3590102437"/>
                     </a:ext>
                   </a:extLst>
                 </a:gridCol>
                 <a:gridCol w="1047396">
                   <a:extLst>
                     <a:ext uri="{9D8B030D-6E8A-4147-A177-3AD203B41FA5}">
-                      <a16:colId xmlns:a16="http://schemas.microsoft.com/office/drawing/2014/main" xmlns="" val="3666544339"/>
+                      <a16:colId xmlns="" xmlns:a16="http://schemas.microsoft.com/office/drawing/2014/main" val="3666544339"/>
                     </a:ext>
                   </a:extLst>
                 </a:gridCol>
                 <a:gridCol w="1047396">
                   <a:extLst>
                     <a:ext uri="{9D8B030D-6E8A-4147-A177-3AD203B41FA5}">
-                      <a16:colId xmlns:a16="http://schemas.microsoft.com/office/drawing/2014/main" xmlns="" val="455476819"/>
+                      <a16:colId xmlns="" xmlns:a16="http://schemas.microsoft.com/office/drawing/2014/main" val="455476819"/>
                     </a:ext>
                   </a:extLst>
                 </a:gridCol>
@@ -19466,7 +19501,7 @@
                 </a:tc>
                 <a:extLst>
                   <a:ext uri="{0D108BD9-81ED-4DB2-BD59-A6C34878D82A}">
-                    <a16:rowId xmlns:a16="http://schemas.microsoft.com/office/drawing/2014/main" xmlns="" val="4117724251"/>
+                    <a16:rowId xmlns="" xmlns:a16="http://schemas.microsoft.com/office/drawing/2014/main" val="4117724251"/>
                   </a:ext>
                 </a:extLst>
               </a:tr>
@@ -19530,7 +19565,7 @@
                 </a:tc>
                 <a:extLst>
                   <a:ext uri="{0D108BD9-81ED-4DB2-BD59-A6C34878D82A}">
-                    <a16:rowId xmlns:a16="http://schemas.microsoft.com/office/drawing/2014/main" xmlns="" val="2141619666"/>
+                    <a16:rowId xmlns="" xmlns:a16="http://schemas.microsoft.com/office/drawing/2014/main" val="2141619666"/>
                   </a:ext>
                 </a:extLst>
               </a:tr>
@@ -19590,7 +19625,7 @@
                 </a:tc>
                 <a:extLst>
                   <a:ext uri="{0D108BD9-81ED-4DB2-BD59-A6C34878D82A}">
-                    <a16:rowId xmlns:a16="http://schemas.microsoft.com/office/drawing/2014/main" xmlns="" val="3809134920"/>
+                    <a16:rowId xmlns="" xmlns:a16="http://schemas.microsoft.com/office/drawing/2014/main" val="3809134920"/>
                   </a:ext>
                 </a:extLst>
               </a:tr>
@@ -19650,7 +19685,7 @@
                 </a:tc>
                 <a:extLst>
                   <a:ext uri="{0D108BD9-81ED-4DB2-BD59-A6C34878D82A}">
-                    <a16:rowId xmlns:a16="http://schemas.microsoft.com/office/drawing/2014/main" xmlns="" val="1932515259"/>
+                    <a16:rowId xmlns="" xmlns:a16="http://schemas.microsoft.com/office/drawing/2014/main" val="1932515259"/>
                   </a:ext>
                 </a:extLst>
               </a:tr>
@@ -19663,7 +19698,7 @@
           <p:cNvPr id="9" name="矩形 8">
             <a:extLst>
               <a:ext uri="{FF2B5EF4-FFF2-40B4-BE49-F238E27FC236}">
-                <a16:creationId xmlns:a16="http://schemas.microsoft.com/office/drawing/2014/main" xmlns="" id="{8BDB7050-E618-11BA-974C-7035CB7FA24D}"/>
+                <a16:creationId xmlns="" xmlns:a16="http://schemas.microsoft.com/office/drawing/2014/main" id="{8BDB7050-E618-11BA-974C-7035CB7FA24D}"/>
               </a:ext>
             </a:extLst>
           </p:cNvPr>
@@ -19707,7 +19742,7 @@
           <p:cNvPr id="15" name="群組 14">
             <a:extLst>
               <a:ext uri="{FF2B5EF4-FFF2-40B4-BE49-F238E27FC236}">
-                <a16:creationId xmlns:a16="http://schemas.microsoft.com/office/drawing/2014/main" xmlns="" id="{9BD8A25A-99B7-8869-62AF-2D36C98876FA}"/>
+                <a16:creationId xmlns="" xmlns:a16="http://schemas.microsoft.com/office/drawing/2014/main" id="{9BD8A25A-99B7-8869-62AF-2D36C98876FA}"/>
               </a:ext>
             </a:extLst>
           </p:cNvPr>
@@ -19727,7 +19762,7 @@
             <p:cNvPr id="8" name="群組 7">
               <a:extLst>
                 <a:ext uri="{FF2B5EF4-FFF2-40B4-BE49-F238E27FC236}">
-                  <a16:creationId xmlns:a16="http://schemas.microsoft.com/office/drawing/2014/main" xmlns="" id="{786F443D-0782-D5C7-CFA3-08A5D4B6BFEC}"/>
+                  <a16:creationId xmlns="" xmlns:a16="http://schemas.microsoft.com/office/drawing/2014/main" id="{786F443D-0782-D5C7-CFA3-08A5D4B6BFEC}"/>
                 </a:ext>
               </a:extLst>
             </p:cNvPr>
@@ -19747,7 +19782,7 @@
               <p:cNvPr id="7" name="矩形 6">
                 <a:extLst>
                   <a:ext uri="{FF2B5EF4-FFF2-40B4-BE49-F238E27FC236}">
-                    <a16:creationId xmlns:a16="http://schemas.microsoft.com/office/drawing/2014/main" xmlns="" id="{BB4D6CD5-7B46-9599-FFCA-74970E1E73B5}"/>
+                    <a16:creationId xmlns="" xmlns:a16="http://schemas.microsoft.com/office/drawing/2014/main" id="{BB4D6CD5-7B46-9599-FFCA-74970E1E73B5}"/>
                   </a:ext>
                 </a:extLst>
               </p:cNvPr>
@@ -19805,7 +19840,7 @@
               <p:cNvPr id="6" name="文字方塊 5">
                 <a:extLst>
                   <a:ext uri="{FF2B5EF4-FFF2-40B4-BE49-F238E27FC236}">
-                    <a16:creationId xmlns:a16="http://schemas.microsoft.com/office/drawing/2014/main" xmlns="" id="{0DA94BC5-0762-F6E2-2F57-D278DFAB1094}"/>
+                    <a16:creationId xmlns="" xmlns:a16="http://schemas.microsoft.com/office/drawing/2014/main" id="{0DA94BC5-0762-F6E2-2F57-D278DFAB1094}"/>
                   </a:ext>
                 </a:extLst>
               </p:cNvPr>
@@ -19961,7 +19996,7 @@
             <p:cNvPr id="12" name="矩形 11">
               <a:extLst>
                 <a:ext uri="{FF2B5EF4-FFF2-40B4-BE49-F238E27FC236}">
-                  <a16:creationId xmlns:a16="http://schemas.microsoft.com/office/drawing/2014/main" xmlns="" id="{2552E5AB-ED3F-D175-A499-49FB40687585}"/>
+                  <a16:creationId xmlns="" xmlns:a16="http://schemas.microsoft.com/office/drawing/2014/main" id="{2552E5AB-ED3F-D175-A499-49FB40687585}"/>
                 </a:ext>
               </a:extLst>
             </p:cNvPr>
@@ -20067,7 +20102,7 @@
           <p:cNvPr id="16" name="箭號: 向右 15">
             <a:extLst>
               <a:ext uri="{FF2B5EF4-FFF2-40B4-BE49-F238E27FC236}">
-                <a16:creationId xmlns:a16="http://schemas.microsoft.com/office/drawing/2014/main" xmlns="" id="{C61E94B3-B7AA-6859-F38D-5DC8E5BB42A3}"/>
+                <a16:creationId xmlns="" xmlns:a16="http://schemas.microsoft.com/office/drawing/2014/main" id="{C61E94B3-B7AA-6859-F38D-5DC8E5BB42A3}"/>
               </a:ext>
             </a:extLst>
           </p:cNvPr>
@@ -20150,7 +20185,7 @@
           <p:cNvPr id="26" name="群組 25">
             <a:extLst>
               <a:ext uri="{FF2B5EF4-FFF2-40B4-BE49-F238E27FC236}">
-                <a16:creationId xmlns:a16="http://schemas.microsoft.com/office/drawing/2014/main" xmlns="" id="{5C1D1929-1040-C36F-1520-FF917811D29B}"/>
+                <a16:creationId xmlns="" xmlns:a16="http://schemas.microsoft.com/office/drawing/2014/main" id="{5C1D1929-1040-C36F-1520-FF917811D29B}"/>
               </a:ext>
             </a:extLst>
           </p:cNvPr>
@@ -20170,7 +20205,7 @@
             <p:cNvPr id="24" name="矩形 23">
               <a:extLst>
                 <a:ext uri="{FF2B5EF4-FFF2-40B4-BE49-F238E27FC236}">
-                  <a16:creationId xmlns:a16="http://schemas.microsoft.com/office/drawing/2014/main" xmlns="" id="{C08775EE-8632-2A77-9314-B11558B9FB1E}"/>
+                  <a16:creationId xmlns="" xmlns:a16="http://schemas.microsoft.com/office/drawing/2014/main" id="{C08775EE-8632-2A77-9314-B11558B9FB1E}"/>
                 </a:ext>
               </a:extLst>
             </p:cNvPr>
@@ -20230,7 +20265,7 @@
                 <p:cNvPr id="21" name="文字方塊 20">
                   <a:extLst>
                     <a:ext uri="{FF2B5EF4-FFF2-40B4-BE49-F238E27FC236}">
-                      <a16:creationId xmlns:a16="http://schemas.microsoft.com/office/drawing/2014/main" xmlns="" id="{1DFAE7D7-31E8-E25C-5F8F-6DF2B5D3F32A}"/>
+                      <a16:creationId xmlns="" xmlns:a16="http://schemas.microsoft.com/office/drawing/2014/main" id="{1DFAE7D7-31E8-E25C-5F8F-6DF2B5D3F32A}"/>
                     </a:ext>
                   </a:extLst>
                 </p:cNvPr>
@@ -20388,14 +20423,14 @@
             </p:sp>
           </mc:Fallback>
         </mc:AlternateContent>
-        <mc:AlternateContent xmlns:mc="http://schemas.openxmlformats.org/markup-compatibility/2006">
-          <mc:Choice xmlns:a14="http://schemas.microsoft.com/office/drawing/2010/main" Requires="a14">
+        <mc:AlternateContent xmlns:mc="http://schemas.openxmlformats.org/markup-compatibility/2006" xmlns:a14="http://schemas.microsoft.com/office/drawing/2010/main">
+          <mc:Choice Requires="a14">
             <p:sp>
               <p:nvSpPr>
                 <p:cNvPr id="22" name="文字方塊 21">
                   <a:extLst>
                     <a:ext uri="{FF2B5EF4-FFF2-40B4-BE49-F238E27FC236}">
-                      <a16:creationId xmlns:a16="http://schemas.microsoft.com/office/drawing/2014/main" xmlns="" id="{5B679D5F-03A6-7B84-437A-23900E5537E0}"/>
+                      <a16:creationId xmlns="" xmlns:a16="http://schemas.microsoft.com/office/drawing/2014/main" id="{5B679D5F-03A6-7B84-437A-23900E5537E0}"/>
                     </a:ext>
                   </a:extLst>
                 </p:cNvPr>
@@ -20473,7 +20508,7 @@
               </p:txBody>
             </p:sp>
           </mc:Choice>
-          <mc:Fallback>
+          <mc:Fallback xmlns="">
             <p:sp>
               <p:nvSpPr>
                 <p:cNvPr id="22" name="文字方塊 21">
@@ -20525,7 +20560,7 @@
                 <p:cNvPr id="23" name="文字方塊 22">
                   <a:extLst>
                     <a:ext uri="{FF2B5EF4-FFF2-40B4-BE49-F238E27FC236}">
-                      <a16:creationId xmlns:a16="http://schemas.microsoft.com/office/drawing/2014/main" xmlns="" id="{052D775A-A41D-88E5-3A9F-7B55914AD3A4}"/>
+                      <a16:creationId xmlns="" xmlns:a16="http://schemas.microsoft.com/office/drawing/2014/main" id="{052D775A-A41D-88E5-3A9F-7B55914AD3A4}"/>
                     </a:ext>
                   </a:extLst>
                 </p:cNvPr>
@@ -20788,7 +20823,7 @@
             <p:cNvPr id="25" name="矩形 24">
               <a:extLst>
                 <a:ext uri="{FF2B5EF4-FFF2-40B4-BE49-F238E27FC236}">
-                  <a16:creationId xmlns:a16="http://schemas.microsoft.com/office/drawing/2014/main" xmlns="" id="{6BF5A0DF-A9B2-BC29-3795-95D86E8094B0}"/>
+                  <a16:creationId xmlns="" xmlns:a16="http://schemas.microsoft.com/office/drawing/2014/main" id="{6BF5A0DF-A9B2-BC29-3795-95D86E8094B0}"/>
                 </a:ext>
               </a:extLst>
             </p:cNvPr>
@@ -20846,7 +20881,7 @@
           <p:cNvPr id="10" name="文字版面配置區 6">
             <a:extLst>
               <a:ext uri="{FF2B5EF4-FFF2-40B4-BE49-F238E27FC236}">
-                <a16:creationId xmlns:a16="http://schemas.microsoft.com/office/drawing/2014/main" xmlns="" id="{EFA1BA7D-6739-0930-E66B-C7B72485673A}"/>
+                <a16:creationId xmlns="" xmlns:a16="http://schemas.microsoft.com/office/drawing/2014/main" id="{EFA1BA7D-6739-0930-E66B-C7B72485673A}"/>
               </a:ext>
             </a:extLst>
           </p:cNvPr>
@@ -21156,7 +21191,7 @@
           <p:cNvPr id="33" name="群組 32">
             <a:extLst>
               <a:ext uri="{FF2B5EF4-FFF2-40B4-BE49-F238E27FC236}">
-                <a16:creationId xmlns:a16="http://schemas.microsoft.com/office/drawing/2014/main" xmlns="" id="{4B4C5EF7-A217-7D9B-9BE7-58FAFE1E147F}"/>
+                <a16:creationId xmlns="" xmlns:a16="http://schemas.microsoft.com/office/drawing/2014/main" id="{4B4C5EF7-A217-7D9B-9BE7-58FAFE1E147F}"/>
               </a:ext>
             </a:extLst>
           </p:cNvPr>
@@ -21178,7 +21213,7 @@
                 <p:cNvPr id="28" name="文字方塊 27">
                   <a:extLst>
                     <a:ext uri="{FF2B5EF4-FFF2-40B4-BE49-F238E27FC236}">
-                      <a16:creationId xmlns:a16="http://schemas.microsoft.com/office/drawing/2014/main" xmlns="" id="{94A8FAC7-8705-ABAD-F89E-DC9FE4497308}"/>
+                      <a16:creationId xmlns="" xmlns:a16="http://schemas.microsoft.com/office/drawing/2014/main" id="{94A8FAC7-8705-ABAD-F89E-DC9FE4497308}"/>
                     </a:ext>
                   </a:extLst>
                 </p:cNvPr>
@@ -21349,7 +21384,7 @@
                 <p:cNvPr id="30" name="文字方塊 29">
                   <a:extLst>
                     <a:ext uri="{FF2B5EF4-FFF2-40B4-BE49-F238E27FC236}">
-                      <a16:creationId xmlns:a16="http://schemas.microsoft.com/office/drawing/2014/main" xmlns="" id="{8E214F1A-6A78-67B8-1B7D-9F1E3A4DE70D}"/>
+                      <a16:creationId xmlns="" xmlns:a16="http://schemas.microsoft.com/office/drawing/2014/main" id="{8E214F1A-6A78-67B8-1B7D-9F1E3A4DE70D}"/>
                     </a:ext>
                   </a:extLst>
                 </p:cNvPr>
@@ -21519,7 +21554,7 @@
           <p:cNvPr id="4" name="文字方塊 3">
             <a:extLst>
               <a:ext uri="{FF2B5EF4-FFF2-40B4-BE49-F238E27FC236}">
-                <a16:creationId xmlns:a16="http://schemas.microsoft.com/office/drawing/2014/main" xmlns="" id="{F1E5835A-681C-C8A0-38AA-CD00A25D4B7C}"/>
+                <a16:creationId xmlns="" xmlns:a16="http://schemas.microsoft.com/office/drawing/2014/main" id="{F1E5835A-681C-C8A0-38AA-CD00A25D4B7C}"/>
               </a:ext>
             </a:extLst>
           </p:cNvPr>
@@ -21619,7 +21654,7 @@
         <p:cNvPr id="1" name="">
           <a:extLst>
             <a:ext uri="{FF2B5EF4-FFF2-40B4-BE49-F238E27FC236}">
-              <a16:creationId xmlns:a16="http://schemas.microsoft.com/office/drawing/2014/main" xmlns="" id="{AD04A77E-DAFB-2807-84F7-D70F0859EFFD}"/>
+              <a16:creationId xmlns="" xmlns:a16="http://schemas.microsoft.com/office/drawing/2014/main" id="{AD04A77E-DAFB-2807-84F7-D70F0859EFFD}"/>
             </a:ext>
           </a:extLst>
         </p:cNvPr>
@@ -21639,7 +21674,7 @@
           <p:cNvPr id="5" name="標題 1">
             <a:extLst>
               <a:ext uri="{FF2B5EF4-FFF2-40B4-BE49-F238E27FC236}">
-                <a16:creationId xmlns:a16="http://schemas.microsoft.com/office/drawing/2014/main" xmlns="" id="{C4EA0848-8E74-3D45-9380-8E7A88853D27}"/>
+                <a16:creationId xmlns="" xmlns:a16="http://schemas.microsoft.com/office/drawing/2014/main" id="{C4EA0848-8E74-3D45-9380-8E7A88853D27}"/>
               </a:ext>
             </a:extLst>
           </p:cNvPr>
@@ -21700,7 +21735,7 @@
           <p:cNvPr id="4" name="圖片 3">
             <a:extLst>
               <a:ext uri="{FF2B5EF4-FFF2-40B4-BE49-F238E27FC236}">
-                <a16:creationId xmlns:a16="http://schemas.microsoft.com/office/drawing/2014/main" xmlns="" id="{2426532A-89CE-A93C-23F1-069160B45F6E}"/>
+                <a16:creationId xmlns="" xmlns:a16="http://schemas.microsoft.com/office/drawing/2014/main" id="{2426532A-89CE-A93C-23F1-069160B45F6E}"/>
               </a:ext>
             </a:extLst>
           </p:cNvPr>
@@ -21730,7 +21765,7 @@
           <p:cNvPr id="37" name="箭號: 向右 36">
             <a:extLst>
               <a:ext uri="{FF2B5EF4-FFF2-40B4-BE49-F238E27FC236}">
-                <a16:creationId xmlns:a16="http://schemas.microsoft.com/office/drawing/2014/main" xmlns="" id="{FBFAB6F3-B4CD-9EFE-0CF6-B1B75CD89E10}"/>
+                <a16:creationId xmlns="" xmlns:a16="http://schemas.microsoft.com/office/drawing/2014/main" id="{FBFAB6F3-B4CD-9EFE-0CF6-B1B75CD89E10}"/>
               </a:ext>
             </a:extLst>
           </p:cNvPr>
@@ -21791,7 +21826,7 @@
           <p:cNvPr id="38" name="矩形 37">
             <a:extLst>
               <a:ext uri="{FF2B5EF4-FFF2-40B4-BE49-F238E27FC236}">
-                <a16:creationId xmlns:a16="http://schemas.microsoft.com/office/drawing/2014/main" xmlns="" id="{4D96EEAC-BDC2-1338-2C43-7781683DD0B3}"/>
+                <a16:creationId xmlns="" xmlns:a16="http://schemas.microsoft.com/office/drawing/2014/main" id="{4D96EEAC-BDC2-1338-2C43-7781683DD0B3}"/>
               </a:ext>
             </a:extLst>
           </p:cNvPr>
@@ -21952,7 +21987,7 @@
           <p:cNvPr id="42" name="圖片 41">
             <a:extLst>
               <a:ext uri="{FF2B5EF4-FFF2-40B4-BE49-F238E27FC236}">
-                <a16:creationId xmlns:a16="http://schemas.microsoft.com/office/drawing/2014/main" xmlns="" id="{F43B0717-E53C-A39B-A94E-7E1581B1010F}"/>
+                <a16:creationId xmlns="" xmlns:a16="http://schemas.microsoft.com/office/drawing/2014/main" id="{F43B0717-E53C-A39B-A94E-7E1581B1010F}"/>
               </a:ext>
             </a:extLst>
           </p:cNvPr>
@@ -21982,7 +22017,7 @@
           <p:cNvPr id="2" name="文字版面配置區 6">
             <a:extLst>
               <a:ext uri="{FF2B5EF4-FFF2-40B4-BE49-F238E27FC236}">
-                <a16:creationId xmlns:a16="http://schemas.microsoft.com/office/drawing/2014/main" xmlns="" id="{6BC9469D-6E3E-1F0F-1445-28C4BA19CEBC}"/>
+                <a16:creationId xmlns="" xmlns:a16="http://schemas.microsoft.com/office/drawing/2014/main" id="{6BC9469D-6E3E-1F0F-1445-28C4BA19CEBC}"/>
               </a:ext>
             </a:extLst>
           </p:cNvPr>
@@ -22292,7 +22327,7 @@
           <p:cNvPr id="45" name="群組 44">
             <a:extLst>
               <a:ext uri="{FF2B5EF4-FFF2-40B4-BE49-F238E27FC236}">
-                <a16:creationId xmlns:a16="http://schemas.microsoft.com/office/drawing/2014/main" xmlns="" id="{88569DE1-553A-DC5D-D6E1-ABA71C776115}"/>
+                <a16:creationId xmlns="" xmlns:a16="http://schemas.microsoft.com/office/drawing/2014/main" id="{88569DE1-553A-DC5D-D6E1-ABA71C776115}"/>
               </a:ext>
             </a:extLst>
           </p:cNvPr>
@@ -22312,7 +22347,7 @@
             <p:cNvPr id="7" name="圖片 6">
               <a:extLst>
                 <a:ext uri="{FF2B5EF4-FFF2-40B4-BE49-F238E27FC236}">
-                  <a16:creationId xmlns:a16="http://schemas.microsoft.com/office/drawing/2014/main" xmlns="" id="{3017A3D9-55B3-9FCF-78A7-8CFF7996C238}"/>
+                  <a16:creationId xmlns="" xmlns:a16="http://schemas.microsoft.com/office/drawing/2014/main" id="{3017A3D9-55B3-9FCF-78A7-8CFF7996C238}"/>
                 </a:ext>
               </a:extLst>
             </p:cNvPr>
@@ -22342,7 +22377,7 @@
             <p:cNvPr id="8" name="圖片 7">
               <a:extLst>
                 <a:ext uri="{FF2B5EF4-FFF2-40B4-BE49-F238E27FC236}">
-                  <a16:creationId xmlns:a16="http://schemas.microsoft.com/office/drawing/2014/main" xmlns="" id="{3523FE1B-0057-E640-2C60-7E3D7A1927EA}"/>
+                  <a16:creationId xmlns="" xmlns:a16="http://schemas.microsoft.com/office/drawing/2014/main" id="{3523FE1B-0057-E640-2C60-7E3D7A1927EA}"/>
                 </a:ext>
               </a:extLst>
             </p:cNvPr>
@@ -22372,7 +22407,7 @@
             <p:cNvPr id="44" name="圖片 43">
               <a:extLst>
                 <a:ext uri="{FF2B5EF4-FFF2-40B4-BE49-F238E27FC236}">
-                  <a16:creationId xmlns:a16="http://schemas.microsoft.com/office/drawing/2014/main" xmlns="" id="{483ACC88-335C-E8C4-BBD8-7A9AC0907168}"/>
+                  <a16:creationId xmlns="" xmlns:a16="http://schemas.microsoft.com/office/drawing/2014/main" id="{483ACC88-335C-E8C4-BBD8-7A9AC0907168}"/>
                 </a:ext>
               </a:extLst>
             </p:cNvPr>
@@ -22403,7 +22438,7 @@
           <p:cNvPr id="28" name="矩形 27">
             <a:extLst>
               <a:ext uri="{FF2B5EF4-FFF2-40B4-BE49-F238E27FC236}">
-                <a16:creationId xmlns="" xmlns:a16="http://schemas.microsoft.com/office/drawing/2014/main" id="{842E2599-7117-6097-3D20-FAF97CB0624D}"/>
+                <a16:creationId xmlns:a16="http://schemas.microsoft.com/office/drawing/2014/main" xmlns="" id="{842E2599-7117-6097-3D20-FAF97CB0624D}"/>
               </a:ext>
             </a:extLst>
           </p:cNvPr>
@@ -22461,7 +22496,7 @@
           <p:cNvPr id="30" name="圖片 29">
             <a:extLst>
               <a:ext uri="{FF2B5EF4-FFF2-40B4-BE49-F238E27FC236}">
-                <a16:creationId xmlns="" xmlns:a16="http://schemas.microsoft.com/office/drawing/2014/main" id="{761FC988-00F4-E730-3BAA-BD8AB2AF8736}"/>
+                <a16:creationId xmlns:a16="http://schemas.microsoft.com/office/drawing/2014/main" xmlns="" id="{761FC988-00F4-E730-3BAA-BD8AB2AF8736}"/>
               </a:ext>
             </a:extLst>
           </p:cNvPr>
@@ -22491,7 +22526,7 @@
           <p:cNvPr id="33" name="矩形 32">
             <a:extLst>
               <a:ext uri="{FF2B5EF4-FFF2-40B4-BE49-F238E27FC236}">
-                <a16:creationId xmlns="" xmlns:a16="http://schemas.microsoft.com/office/drawing/2014/main" id="{8BD80D6C-1FF3-8AFD-5D78-6B1FDB097256}"/>
+                <a16:creationId xmlns:a16="http://schemas.microsoft.com/office/drawing/2014/main" xmlns="" id="{8BD80D6C-1FF3-8AFD-5D78-6B1FDB097256}"/>
               </a:ext>
             </a:extLst>
           </p:cNvPr>
